--- a/docs/presentation-slides.pptx
+++ b/docs/presentation-slides.pptx
@@ -3107,14 +3107,146 @@
       <p:grpSpPr/>
       <p:sp>
         <p:nvSpPr>
-          <p:cNvPr id="2" name="Rectangle 1"/>
+          <p:cNvPr id="2" name="Oval 1"/>
           <p:cNvSpPr/>
           <p:nvPr/>
         </p:nvSpPr>
         <p:spPr>
           <a:xfrm>
-            <a:off x="0" y="3246120"/>
-            <a:ext cx="12191695" cy="36576"/>
+            <a:off x="9692640" y="-2194560"/>
+            <a:ext cx="5943600" cy="5943600"/>
+          </a:xfrm>
+          <a:prstGeom prst="ellipse">
+            <a:avLst/>
+          </a:prstGeom>
+          <a:solidFill>
+            <a:srgbClr val="243047"/>
+          </a:solidFill>
+          <a:ln>
+            <a:noFill/>
+          </a:ln>
+          <a:effectLst/>
+        </p:spPr>
+        <p:style>
+          <a:lnRef idx="1">
+            <a:schemeClr val="accent1"/>
+          </a:lnRef>
+          <a:fillRef idx="3">
+            <a:schemeClr val="accent1"/>
+          </a:fillRef>
+          <a:effectRef idx="2">
+            <a:schemeClr val="accent1"/>
+          </a:effectRef>
+          <a:fontRef idx="minor">
+            <a:schemeClr val="lt1"/>
+          </a:fontRef>
+        </p:style>
+        <p:txBody>
+          <a:bodyPr rtlCol="0" anchor="ctr"/>
+          <a:lstStyle/>
+          <a:p>
+            <a:pPr algn="ctr"/>
+          </a:p>
+        </p:txBody>
+      </p:sp>
+      <p:sp>
+        <p:nvSpPr>
+          <p:cNvPr id="3" name="Oval 2"/>
+          <p:cNvSpPr/>
+          <p:nvPr/>
+        </p:nvSpPr>
+        <p:spPr>
+          <a:xfrm>
+            <a:off x="-2560320" y="4206240"/>
+            <a:ext cx="5029200" cy="5029200"/>
+          </a:xfrm>
+          <a:prstGeom prst="ellipse">
+            <a:avLst/>
+          </a:prstGeom>
+          <a:solidFill>
+            <a:srgbClr val="243047"/>
+          </a:solidFill>
+          <a:ln>
+            <a:noFill/>
+          </a:ln>
+          <a:effectLst/>
+        </p:spPr>
+        <p:style>
+          <a:lnRef idx="1">
+            <a:schemeClr val="accent1"/>
+          </a:lnRef>
+          <a:fillRef idx="3">
+            <a:schemeClr val="accent1"/>
+          </a:fillRef>
+          <a:effectRef idx="2">
+            <a:schemeClr val="accent1"/>
+          </a:effectRef>
+          <a:fontRef idx="minor">
+            <a:schemeClr val="lt1"/>
+          </a:fontRef>
+        </p:style>
+        <p:txBody>
+          <a:bodyPr rtlCol="0" anchor="ctr"/>
+          <a:lstStyle/>
+          <a:p>
+            <a:pPr algn="ctr"/>
+          </a:p>
+        </p:txBody>
+      </p:sp>
+      <p:sp>
+        <p:nvSpPr>
+          <p:cNvPr id="4" name="Oval 3"/>
+          <p:cNvSpPr/>
+          <p:nvPr/>
+        </p:nvSpPr>
+        <p:spPr>
+          <a:xfrm>
+            <a:off x="10607040" y="-914400"/>
+            <a:ext cx="2926080" cy="2926080"/>
+          </a:xfrm>
+          <a:prstGeom prst="ellipse">
+            <a:avLst/>
+          </a:prstGeom>
+          <a:noFill/>
+          <a:ln w="19050">
+            <a:solidFill>
+              <a:srgbClr val="4F46E5"/>
+            </a:solidFill>
+          </a:ln>
+          <a:effectLst/>
+        </p:spPr>
+        <p:style>
+          <a:lnRef idx="1">
+            <a:schemeClr val="accent1"/>
+          </a:lnRef>
+          <a:fillRef idx="3">
+            <a:schemeClr val="accent1"/>
+          </a:fillRef>
+          <a:effectRef idx="2">
+            <a:schemeClr val="accent1"/>
+          </a:effectRef>
+          <a:fontRef idx="minor">
+            <a:schemeClr val="lt1"/>
+          </a:fontRef>
+        </p:style>
+        <p:txBody>
+          <a:bodyPr rtlCol="0" anchor="ctr"/>
+          <a:lstStyle/>
+          <a:p>
+            <a:pPr algn="ctr"/>
+          </a:p>
+        </p:txBody>
+      </p:sp>
+      <p:sp>
+        <p:nvSpPr>
+          <p:cNvPr id="5" name="Rectangle 4"/>
+          <p:cNvSpPr/>
+          <p:nvPr/>
+        </p:nvSpPr>
+        <p:spPr>
+          <a:xfrm>
+            <a:off x="0" y="3310128"/>
+            <a:ext cx="12191695" cy="41148"/>
           </a:xfrm>
           <a:prstGeom prst="rect">
             <a:avLst/>
@@ -3125,6 +3257,7 @@
           <a:ln>
             <a:noFill/>
           </a:ln>
+          <a:effectLst/>
         </p:spPr>
         <p:style>
           <a:lnRef idx="1">
@@ -3150,14 +3283,14 @@
       </p:sp>
       <p:sp>
         <p:nvSpPr>
-          <p:cNvPr id="3" name="TextBox 2"/>
+          <p:cNvPr id="6" name="TextBox 5"/>
           <p:cNvSpPr txBox="1"/>
           <p:nvPr/>
         </p:nvSpPr>
         <p:spPr>
           <a:xfrm>
-            <a:off x="914400" y="2286000"/>
-            <a:ext cx="10332720" cy="1005840"/>
+            <a:off x="914400" y="2331720"/>
+            <a:ext cx="10332720" cy="960120"/>
           </a:xfrm>
           <a:prstGeom prst="rect">
             <a:avLst/>
@@ -3170,14 +3303,14 @@
           </a:bodyPr>
           <a:lstStyle/>
           <a:p>
-            <a:pPr algn="ctr">
-              <a:defRPr sz="4800" b="1">
+            <a:pPr algn="ctr"/>
+            <a:r>
+              <a:rPr sz="5000" b="1">
                 <a:solidFill>
                   <a:srgbClr val="FFFFFF"/>
                 </a:solidFill>
-              </a:defRPr>
-            </a:pPr>
-            <a:r>
+                <a:latin typeface="Segoe UI"/>
+              </a:rPr>
               <a:t>Education AI Analyst</a:t>
             </a:r>
           </a:p>
@@ -3185,14 +3318,14 @@
       </p:sp>
       <p:sp>
         <p:nvSpPr>
-          <p:cNvPr id="4" name="TextBox 3"/>
+          <p:cNvPr id="7" name="TextBox 6"/>
           <p:cNvSpPr txBox="1"/>
           <p:nvPr/>
         </p:nvSpPr>
         <p:spPr>
           <a:xfrm>
-            <a:off x="914400" y="3383280"/>
-            <a:ext cx="10332720" cy="640080"/>
+            <a:off x="914400" y="3456432"/>
+            <a:ext cx="10332720" cy="548640"/>
           </a:xfrm>
           <a:prstGeom prst="rect">
             <a:avLst/>
@@ -3205,14 +3338,14 @@
           </a:bodyPr>
           <a:lstStyle/>
           <a:p>
-            <a:pPr algn="ctr">
-              <a:defRPr sz="2000">
+            <a:pPr algn="ctr"/>
+            <a:r>
+              <a:rPr sz="1900">
                 <a:solidFill>
                   <a:srgbClr val="C7D2FE"/>
                 </a:solidFill>
-              </a:defRPr>
-            </a:pPr>
-            <a:r>
+                <a:latin typeface="Segoe UI"/>
+              </a:rPr>
               <a:t>A Multi-Agent System for Education Document &amp; Social-Sentiment Analysis</a:t>
             </a:r>
           </a:p>
@@ -3220,14 +3353,14 @@
       </p:sp>
       <p:sp>
         <p:nvSpPr>
-          <p:cNvPr id="5" name="TextBox 4"/>
+          <p:cNvPr id="8" name="TextBox 7"/>
           <p:cNvSpPr txBox="1"/>
           <p:nvPr/>
         </p:nvSpPr>
         <p:spPr>
           <a:xfrm>
-            <a:off x="914400" y="4206240"/>
-            <a:ext cx="10332720" cy="457200"/>
+            <a:off x="914400" y="4251960"/>
+            <a:ext cx="10332720" cy="411480"/>
           </a:xfrm>
           <a:prstGeom prst="rect">
             <a:avLst/>
@@ -3240,14 +3373,14 @@
           </a:bodyPr>
           <a:lstStyle/>
           <a:p>
-            <a:pPr algn="ctr">
-              <a:defRPr sz="1500">
+            <a:pPr algn="ctr"/>
+            <a:r>
+              <a:rPr sz="1450">
                 <a:solidFill>
                   <a:srgbClr val="94A3B8"/>
                 </a:solidFill>
-              </a:defRPr>
-            </a:pPr>
-            <a:r>
+                <a:latin typeface="Segoe UI"/>
+              </a:rPr>
               <a:t>Computer Science Applications and Advancements — 2nd Semester, MSc</a:t>
             </a:r>
           </a:p>
@@ -3255,13 +3388,13 @@
       </p:sp>
       <p:sp>
         <p:nvSpPr>
-          <p:cNvPr id="6" name="TextBox 5"/>
+          <p:cNvPr id="9" name="TextBox 8"/>
           <p:cNvSpPr txBox="1"/>
           <p:nvPr/>
         </p:nvSpPr>
         <p:spPr>
           <a:xfrm>
-            <a:off x="914400" y="4846320"/>
+            <a:off x="914400" y="4892040"/>
             <a:ext cx="10332720" cy="457200"/>
           </a:xfrm>
           <a:prstGeom prst="rect">
@@ -3275,14 +3408,14 @@
           </a:bodyPr>
           <a:lstStyle/>
           <a:p>
-            <a:pPr algn="ctr">
-              <a:defRPr sz="1600" b="1">
+            <a:pPr algn="ctr"/>
+            <a:r>
+              <a:rPr sz="1600" b="1">
                 <a:solidFill>
                   <a:srgbClr val="FFFFFF"/>
                 </a:solidFill>
-              </a:defRPr>
-            </a:pPr>
-            <a:r>
+                <a:latin typeface="Segoe UI"/>
+              </a:rPr>
               <a:t>Tarin  ·  Saif  ·  Shohana  ·  Fahim</a:t>
             </a:r>
           </a:p>
@@ -3290,13 +3423,13 @@
       </p:sp>
       <p:sp>
         <p:nvSpPr>
-          <p:cNvPr id="7" name="TextBox 6"/>
+          <p:cNvPr id="10" name="TextBox 9"/>
           <p:cNvSpPr txBox="1"/>
           <p:nvPr/>
         </p:nvSpPr>
         <p:spPr>
           <a:xfrm>
-            <a:off x="914400" y="6126480"/>
+            <a:off x="914400" y="6172200"/>
             <a:ext cx="10332720" cy="365760"/>
           </a:xfrm>
           <a:prstGeom prst="rect">
@@ -3310,14 +3443,14 @@
           </a:bodyPr>
           <a:lstStyle/>
           <a:p>
-            <a:pPr algn="ctr">
-              <a:defRPr sz="1200">
+            <a:pPr algn="ctr"/>
+            <a:r>
+              <a:rPr sz="1200">
                 <a:solidFill>
                   <a:srgbClr val="64748B"/>
                 </a:solidFill>
-              </a:defRPr>
-            </a:pPr>
-            <a:r>
+                <a:latin typeface="Segoe UI"/>
+              </a:rPr>
               <a:t>30 August 2026</a:t>
             </a:r>
           </a:p>
@@ -3369,6 +3502,7 @@
           <a:ln>
             <a:noFill/>
           </a:ln>
+          <a:effectLst/>
         </p:spPr>
         <p:style>
           <a:lnRef idx="1">
@@ -3400,8 +3534,8 @@
         </p:nvSpPr>
         <p:spPr>
           <a:xfrm>
-            <a:off x="502920" y="365760"/>
-            <a:ext cx="10972800" cy="822960"/>
+            <a:off x="502920" y="292608"/>
+            <a:ext cx="9144000" cy="274320"/>
           </a:xfrm>
           <a:prstGeom prst="rect">
             <a:avLst/>
@@ -3415,38 +3549,77 @@
           <a:lstStyle/>
           <a:p>
             <a:pPr>
-              <a:defRPr sz="3200" b="1">
+              <a:spcAft>
+                <a:spcPts val="0"/>
+              </a:spcAft>
+            </a:pPr>
+            <a:r>
+              <a:rPr sz="1100" b="1">
+                <a:solidFill>
+                  <a:srgbClr val="4F46E5"/>
+                </a:solidFill>
+                <a:latin typeface="Segoe UI"/>
+              </a:rPr>
+              <a:t>09 · TEAM</a:t>
+            </a:r>
+          </a:p>
+        </p:txBody>
+      </p:sp>
+      <p:sp>
+        <p:nvSpPr>
+          <p:cNvPr id="4" name="TextBox 3"/>
+          <p:cNvSpPr txBox="1"/>
+          <p:nvPr/>
+        </p:nvSpPr>
+        <p:spPr>
+          <a:xfrm>
+            <a:off x="502920" y="530352"/>
+            <a:ext cx="10424160" cy="822960"/>
+          </a:xfrm>
+          <a:prstGeom prst="rect">
+            <a:avLst/>
+          </a:prstGeom>
+          <a:noFill/>
+        </p:spPr>
+        <p:txBody>
+          <a:bodyPr wrap="none">
+            <a:spAutoFit/>
+          </a:bodyPr>
+          <a:lstStyle/>
+          <a:p>
+            <a:r>
+              <a:rPr sz="3000" b="1">
                 <a:solidFill>
                   <a:srgbClr val="1E293B"/>
                 </a:solidFill>
-              </a:defRPr>
-            </a:pPr>
-            <a:r>
-              <a:t>Team &amp; What's Next</a:t>
-            </a:r>
-          </a:p>
-        </p:txBody>
-      </p:sp>
-      <p:sp>
-        <p:nvSpPr>
-          <p:cNvPr id="4" name="Rectangle 3"/>
+                <a:latin typeface="Segoe UI"/>
+              </a:rPr>
+              <a:t>Team &amp; Contributions</a:t>
+            </a:r>
+          </a:p>
+        </p:txBody>
+      </p:sp>
+      <p:sp>
+        <p:nvSpPr>
+          <p:cNvPr id="5" name="Rectangle 4"/>
           <p:cNvSpPr/>
           <p:nvPr/>
         </p:nvSpPr>
         <p:spPr>
           <a:xfrm>
-            <a:off x="640080" y="1417320"/>
-            <a:ext cx="10881360" cy="658368"/>
+            <a:off x="530352" y="1188720"/>
+            <a:ext cx="548640" cy="38100"/>
           </a:xfrm>
           <a:prstGeom prst="rect">
             <a:avLst/>
           </a:prstGeom>
           <a:solidFill>
-            <a:srgbClr val="EEF2FF"/>
+            <a:srgbClr val="4F46E5"/>
           </a:solidFill>
           <a:ln>
             <a:noFill/>
           </a:ln>
+          <a:effectLst/>
         </p:spPr>
         <p:style>
           <a:lnRef idx="1">
@@ -3463,49 +3636,548 @@
           </a:fontRef>
         </p:style>
         <p:txBody>
-          <a:bodyPr rtlCol="0" anchor="ctr" lIns="182880" tIns="91440"/>
+          <a:bodyPr rtlCol="0" anchor="ctr"/>
           <a:lstStyle/>
           <a:p>
             <a:pPr algn="ctr"/>
-            <a:r>
-              <a:rPr b="1" sz="1500">
-                <a:solidFill>
-                  <a:srgbClr val="4F46E5"/>
-                </a:solidFill>
-              </a:rPr>
-              <a:t>Tarin</a:t>
-            </a:r>
-            <a:r>
-              <a:rPr sz="1400">
+          </a:p>
+        </p:txBody>
+      </p:sp>
+      <p:graphicFrame>
+        <p:nvGraphicFramePr>
+          <p:cNvPr id="6" name="Table 5"/>
+          <p:cNvGraphicFramePr>
+            <a:graphicFrameLocks noGrp="1"/>
+          </p:cNvGraphicFramePr>
+          <p:nvPr/>
+        </p:nvGraphicFramePr>
+        <p:xfrm>
+          <a:off x="640080" y="1490472"/>
+          <a:ext cx="5486400" cy="2514600"/>
+        </p:xfrm>
+        <a:graphic>
+          <a:graphicData uri="http://schemas.openxmlformats.org/drawingml/2006/table">
+            <a:tbl>
+              <a:tblPr firstRow="1" bandRow="1">
+                <a:tableStyleId>{5C22544A-7EE6-4342-B048-85BDC9FD1C3A}</a:tableStyleId>
+              </a:tblPr>
+              <a:tblGrid>
+                <a:gridCol w="3108960"/>
+                <a:gridCol w="2377440"/>
+              </a:tblGrid>
+              <a:tr h="502920">
+                <a:tc>
+                  <a:txBody>
+                    <a:bodyPr/>
+                    <a:lstStyle/>
+                    <a:p>
+                      <a:pPr>
+                        <a:defRPr b="1" sz="1500">
+                          <a:solidFill>
+                            <a:srgbClr val="FFFFFF"/>
+                          </a:solidFill>
+                        </a:defRPr>
+                      </a:pPr>
+                      <a:r>
+                        <a:rPr>
+                          <a:latin typeface="Segoe UI"/>
+                        </a:rPr>
+                        <a:t>Name</a:t>
+                      </a:r>
+                    </a:p>
+                  </a:txBody>
+                  <a:tcPr marL="164592" marR="109728" marT="73152" marB="73152" anchor="ctr">
+                    <a:solidFill>
+                      <a:srgbClr val="4F46E5"/>
+                    </a:solidFill>
+                  </a:tcPr>
+                </a:tc>
+                <a:tc>
+                  <a:txBody>
+                    <a:bodyPr/>
+                    <a:lstStyle/>
+                    <a:p>
+                      <a:pPr>
+                        <a:defRPr b="1" sz="1500">
+                          <a:solidFill>
+                            <a:srgbClr val="FFFFFF"/>
+                          </a:solidFill>
+                        </a:defRPr>
+                      </a:pPr>
+                      <a:r>
+                        <a:rPr>
+                          <a:latin typeface="Segoe UI"/>
+                        </a:rPr>
+                        <a:t>Student ID</a:t>
+                      </a:r>
+                    </a:p>
+                  </a:txBody>
+                  <a:tcPr marL="164592" marR="109728" marT="73152" marB="73152" anchor="ctr">
+                    <a:solidFill>
+                      <a:srgbClr val="4F46E5"/>
+                    </a:solidFill>
+                  </a:tcPr>
+                </a:tc>
+              </a:tr>
+              <a:tr h="502920">
+                <a:tc>
+                  <a:txBody>
+                    <a:bodyPr/>
+                    <a:lstStyle/>
+                    <a:p>
+                      <a:pPr>
+                        <a:defRPr sz="1500" b="1">
+                          <a:solidFill>
+                            <a:srgbClr val="4F46E5"/>
+                          </a:solidFill>
+                        </a:defRPr>
+                      </a:pPr>
+                      <a:r>
+                        <a:rPr>
+                          <a:latin typeface="Segoe UI"/>
+                        </a:rPr>
+                        <a:t>Tarin</a:t>
+                      </a:r>
+                    </a:p>
+                  </a:txBody>
+                  <a:tcPr marL="164592" marR="109728" marT="73152" marB="73152" anchor="ctr">
+                    <a:solidFill>
+                      <a:srgbClr val="FFFFFF"/>
+                    </a:solidFill>
+                  </a:tcPr>
+                </a:tc>
+                <a:tc>
+                  <a:txBody>
+                    <a:bodyPr/>
+                    <a:lstStyle/>
+                    <a:p>
+                      <a:pPr>
+                        <a:defRPr sz="1500">
+                          <a:solidFill>
+                            <a:srgbClr val="475569"/>
+                          </a:solidFill>
+                        </a:defRPr>
+                      </a:pPr>
+                    </a:p>
+                  </a:txBody>
+                  <a:tcPr marL="164592" marR="109728" marT="73152" marB="73152" anchor="ctr">
+                    <a:solidFill>
+                      <a:srgbClr val="FFFFFF"/>
+                    </a:solidFill>
+                  </a:tcPr>
+                </a:tc>
+              </a:tr>
+              <a:tr h="502920">
+                <a:tc>
+                  <a:txBody>
+                    <a:bodyPr/>
+                    <a:lstStyle/>
+                    <a:p>
+                      <a:pPr>
+                        <a:defRPr sz="1500" b="1">
+                          <a:solidFill>
+                            <a:srgbClr val="4F46E5"/>
+                          </a:solidFill>
+                        </a:defRPr>
+                      </a:pPr>
+                      <a:r>
+                        <a:rPr>
+                          <a:latin typeface="Segoe UI"/>
+                        </a:rPr>
+                        <a:t>Saif</a:t>
+                      </a:r>
+                    </a:p>
+                  </a:txBody>
+                  <a:tcPr marL="164592" marR="109728" marT="73152" marB="73152" anchor="ctr">
+                    <a:solidFill>
+                      <a:srgbClr val="F8FAFC"/>
+                    </a:solidFill>
+                  </a:tcPr>
+                </a:tc>
+                <a:tc>
+                  <a:txBody>
+                    <a:bodyPr/>
+                    <a:lstStyle/>
+                    <a:p>
+                      <a:pPr>
+                        <a:defRPr sz="1500">
+                          <a:solidFill>
+                            <a:srgbClr val="475569"/>
+                          </a:solidFill>
+                        </a:defRPr>
+                      </a:pPr>
+                    </a:p>
+                  </a:txBody>
+                  <a:tcPr marL="164592" marR="109728" marT="73152" marB="73152" anchor="ctr">
+                    <a:solidFill>
+                      <a:srgbClr val="F8FAFC"/>
+                    </a:solidFill>
+                  </a:tcPr>
+                </a:tc>
+              </a:tr>
+              <a:tr h="502920">
+                <a:tc>
+                  <a:txBody>
+                    <a:bodyPr/>
+                    <a:lstStyle/>
+                    <a:p>
+                      <a:pPr>
+                        <a:defRPr sz="1500" b="1">
+                          <a:solidFill>
+                            <a:srgbClr val="4F46E5"/>
+                          </a:solidFill>
+                        </a:defRPr>
+                      </a:pPr>
+                      <a:r>
+                        <a:rPr>
+                          <a:latin typeface="Segoe UI"/>
+                        </a:rPr>
+                        <a:t>Shohana</a:t>
+                      </a:r>
+                    </a:p>
+                  </a:txBody>
+                  <a:tcPr marL="164592" marR="109728" marT="73152" marB="73152" anchor="ctr">
+                    <a:solidFill>
+                      <a:srgbClr val="FFFFFF"/>
+                    </a:solidFill>
+                  </a:tcPr>
+                </a:tc>
+                <a:tc>
+                  <a:txBody>
+                    <a:bodyPr/>
+                    <a:lstStyle/>
+                    <a:p>
+                      <a:pPr>
+                        <a:defRPr sz="1500">
+                          <a:solidFill>
+                            <a:srgbClr val="475569"/>
+                          </a:solidFill>
+                        </a:defRPr>
+                      </a:pPr>
+                    </a:p>
+                  </a:txBody>
+                  <a:tcPr marL="164592" marR="109728" marT="73152" marB="73152" anchor="ctr">
+                    <a:solidFill>
+                      <a:srgbClr val="FFFFFF"/>
+                    </a:solidFill>
+                  </a:tcPr>
+                </a:tc>
+              </a:tr>
+              <a:tr h="502920">
+                <a:tc>
+                  <a:txBody>
+                    <a:bodyPr/>
+                    <a:lstStyle/>
+                    <a:p>
+                      <a:pPr>
+                        <a:defRPr sz="1500" b="1">
+                          <a:solidFill>
+                            <a:srgbClr val="4F46E5"/>
+                          </a:solidFill>
+                        </a:defRPr>
+                      </a:pPr>
+                      <a:r>
+                        <a:rPr>
+                          <a:latin typeface="Segoe UI"/>
+                        </a:rPr>
+                        <a:t>Fahim</a:t>
+                      </a:r>
+                    </a:p>
+                  </a:txBody>
+                  <a:tcPr marL="164592" marR="109728" marT="73152" marB="73152" anchor="ctr">
+                    <a:solidFill>
+                      <a:srgbClr val="F8FAFC"/>
+                    </a:solidFill>
+                  </a:tcPr>
+                </a:tc>
+                <a:tc>
+                  <a:txBody>
+                    <a:bodyPr/>
+                    <a:lstStyle/>
+                    <a:p>
+                      <a:pPr>
+                        <a:defRPr sz="1500">
+                          <a:solidFill>
+                            <a:srgbClr val="475569"/>
+                          </a:solidFill>
+                        </a:defRPr>
+                      </a:pPr>
+                    </a:p>
+                  </a:txBody>
+                  <a:tcPr marL="164592" marR="109728" marT="73152" marB="73152" anchor="ctr">
+                    <a:solidFill>
+                      <a:srgbClr val="F8FAFC"/>
+                    </a:solidFill>
+                  </a:tcPr>
+                </a:tc>
+              </a:tr>
+            </a:tbl>
+          </a:graphicData>
+        </a:graphic>
+      </p:graphicFrame>
+      <p:sp>
+        <p:nvSpPr>
+          <p:cNvPr id="7" name="TextBox 6"/>
+          <p:cNvSpPr txBox="1"/>
+          <p:nvPr/>
+        </p:nvSpPr>
+        <p:spPr>
+          <a:xfrm>
+            <a:off x="6446520" y="1472184"/>
+            <a:ext cx="5074920" cy="365760"/>
+          </a:xfrm>
+          <a:prstGeom prst="rect">
+            <a:avLst/>
+          </a:prstGeom>
+          <a:noFill/>
+        </p:spPr>
+        <p:txBody>
+          <a:bodyPr wrap="none">
+            <a:spAutoFit/>
+          </a:bodyPr>
+          <a:lstStyle/>
+          <a:p>
+            <a:r>
+              <a:rPr b="1" sz="1400">
+                <a:solidFill>
+                  <a:srgbClr val="64748B"/>
+                </a:solidFill>
+                <a:latin typeface="Segoe UI"/>
+              </a:rPr>
+              <a:t>Contributions</a:t>
+            </a:r>
+          </a:p>
+        </p:txBody>
+      </p:sp>
+      <p:sp>
+        <p:nvSpPr>
+          <p:cNvPr id="8" name="TextBox 7"/>
+          <p:cNvSpPr txBox="1"/>
+          <p:nvPr/>
+        </p:nvSpPr>
+        <p:spPr>
+          <a:xfrm>
+            <a:off x="6446520" y="1856232"/>
+            <a:ext cx="5074920" cy="2377440"/>
+          </a:xfrm>
+          <a:prstGeom prst="rect">
+            <a:avLst/>
+          </a:prstGeom>
+          <a:noFill/>
+        </p:spPr>
+        <p:txBody>
+          <a:bodyPr wrap="square">
+            <a:spAutoFit/>
+          </a:bodyPr>
+          <a:lstStyle/>
+          <a:p>
+            <a:pPr>
+              <a:lnSpc>
+                <a:spcPct val="115000"/>
+              </a:lnSpc>
+              <a:spcAft>
+                <a:spcPts val="1100"/>
+              </a:spcAft>
+            </a:pPr>
+            <a:r>
+              <a:rPr b="1" sz="1350">
+                <a:solidFill>
+                  <a:srgbClr val="1E293B"/>
+                </a:solidFill>
+                <a:latin typeface="Segoe UI"/>
+              </a:rPr>
+              <a:t>Tarin  </a:t>
+            </a:r>
+            <a:r>
+              <a:rPr sz="1300">
                 <a:solidFill>
                   <a:srgbClr val="475569"/>
                 </a:solidFill>
-              </a:rPr>
-              <a:t>   Core backend, agent pipeline foundation, testing, deployment</a:t>
-            </a:r>
-          </a:p>
-        </p:txBody>
-      </p:sp>
-      <p:sp>
-        <p:nvSpPr>
-          <p:cNvPr id="5" name="Rectangle 4"/>
+                <a:latin typeface="Segoe UI"/>
+              </a:rPr>
+              <a:t>Core backend, agent pipeline foundation, testing, deployment</a:t>
+            </a:r>
+          </a:p>
+          <a:p>
+            <a:pPr>
+              <a:lnSpc>
+                <a:spcPct val="115000"/>
+              </a:lnSpc>
+              <a:spcAft>
+                <a:spcPts val="1100"/>
+              </a:spcAft>
+            </a:pPr>
+            <a:r>
+              <a:rPr b="1" sz="1350">
+                <a:solidFill>
+                  <a:srgbClr val="1E293B"/>
+                </a:solidFill>
+                <a:latin typeface="Segoe UI"/>
+              </a:rPr>
+              <a:t>Saif  </a:t>
+            </a:r>
+            <a:r>
+              <a:rPr sz="1300">
+                <a:solidFill>
+                  <a:srgbClr val="475569"/>
+                </a:solidFill>
+                <a:latin typeface="Segoe UI"/>
+              </a:rPr>
+              <a:t>Knowledge/RAG, data analysis, frontend UI</a:t>
+            </a:r>
+          </a:p>
+          <a:p>
+            <a:pPr>
+              <a:lnSpc>
+                <a:spcPct val="115000"/>
+              </a:lnSpc>
+              <a:spcAft>
+                <a:spcPts val="1100"/>
+              </a:spcAft>
+            </a:pPr>
+            <a:r>
+              <a:rPr b="1" sz="1350">
+                <a:solidFill>
+                  <a:srgbClr val="1E293B"/>
+                </a:solidFill>
+                <a:latin typeface="Segoe UI"/>
+              </a:rPr>
+              <a:t>Shohana  </a:t>
+            </a:r>
+            <a:r>
+              <a:rPr sz="1300">
+                <a:solidFill>
+                  <a:srgbClr val="475569"/>
+                </a:solidFill>
+                <a:latin typeface="Segoe UI"/>
+              </a:rPr>
+              <a:t>Sample data, Social Intelligence agent, documentation</a:t>
+            </a:r>
+          </a:p>
+          <a:p>
+            <a:pPr>
+              <a:lnSpc>
+                <a:spcPct val="115000"/>
+              </a:lnSpc>
+              <a:spcAft>
+                <a:spcPts val="1100"/>
+              </a:spcAft>
+            </a:pPr>
+            <a:r>
+              <a:rPr b="1" sz="1350">
+                <a:solidFill>
+                  <a:srgbClr val="1E293B"/>
+                </a:solidFill>
+                <a:latin typeface="Segoe UI"/>
+              </a:rPr>
+              <a:t>Fahim  </a:t>
+            </a:r>
+            <a:r>
+              <a:rPr sz="1300">
+                <a:solidFill>
+                  <a:srgbClr val="475569"/>
+                </a:solidFill>
+                <a:latin typeface="Segoe UI"/>
+              </a:rPr>
+              <a:t>Report generation, QA/Critic, CI/CD, demo prep</a:t>
+            </a:r>
+          </a:p>
+        </p:txBody>
+      </p:sp>
+      <p:sp>
+        <p:nvSpPr>
+          <p:cNvPr id="9" name="TextBox 8"/>
+          <p:cNvSpPr txBox="1"/>
+          <p:nvPr/>
+        </p:nvSpPr>
+        <p:spPr>
+          <a:xfrm>
+            <a:off x="640080" y="5577840"/>
+            <a:ext cx="10881360" cy="731520"/>
+          </a:xfrm>
+          <a:prstGeom prst="rect">
+            <a:avLst/>
+          </a:prstGeom>
+          <a:noFill/>
+        </p:spPr>
+        <p:txBody>
+          <a:bodyPr wrap="none">
+            <a:spAutoFit/>
+          </a:bodyPr>
+          <a:lstStyle/>
+          <a:p>
+            <a:pPr algn="ctr"/>
+            <a:r>
+              <a:rPr b="1" sz="2400">
+                <a:solidFill>
+                  <a:srgbClr val="1E293B"/>
+                </a:solidFill>
+                <a:latin typeface="Segoe UI"/>
+              </a:rPr>
+              <a:t>Thank you</a:t>
+            </a:r>
+          </a:p>
+        </p:txBody>
+      </p:sp>
+      <p:sp>
+        <p:nvSpPr>
+          <p:cNvPr id="10" name="TextBox 9"/>
+          <p:cNvSpPr txBox="1"/>
+          <p:nvPr/>
+        </p:nvSpPr>
+        <p:spPr>
+          <a:xfrm>
+            <a:off x="502920" y="6492240"/>
+            <a:ext cx="5486400" cy="274320"/>
+          </a:xfrm>
+          <a:prstGeom prst="rect">
+            <a:avLst/>
+          </a:prstGeom>
+          <a:noFill/>
+        </p:spPr>
+        <p:txBody>
+          <a:bodyPr wrap="none">
+            <a:spAutoFit/>
+          </a:bodyPr>
+          <a:lstStyle/>
+          <a:p>
+            <a:pPr>
+              <a:defRPr sz="950">
+                <a:solidFill>
+                  <a:srgbClr val="64748B"/>
+                </a:solidFill>
+                <a:latin typeface="Segoe UI"/>
+              </a:defRPr>
+            </a:pPr>
+            <a:r>
+              <a:t>Education AI Analyst</a:t>
+            </a:r>
+          </a:p>
+        </p:txBody>
+      </p:sp>
+      <p:sp>
+        <p:nvSpPr>
+          <p:cNvPr id="11" name="Rounded Rectangle 10"/>
           <p:cNvSpPr/>
           <p:nvPr/>
         </p:nvSpPr>
         <p:spPr>
           <a:xfrm>
-            <a:off x="640080" y="2075688"/>
-            <a:ext cx="10881360" cy="658368"/>
-          </a:xfrm>
-          <a:prstGeom prst="rect">
-            <a:avLst/>
+            <a:off x="11475720" y="320040"/>
+            <a:ext cx="457200" cy="292608"/>
+          </a:xfrm>
+          <a:prstGeom prst="roundRect">
+            <a:avLst>
+              <a:gd name="adj" fmla="val 50000"/>
+            </a:avLst>
           </a:prstGeom>
           <a:solidFill>
-            <a:srgbClr val="FFFFFF"/>
+            <a:srgbClr val="4F46E5"/>
           </a:solidFill>
           <a:ln>
             <a:noFill/>
           </a:ln>
+          <a:effectLst/>
         </p:spPr>
         <p:style>
           <a:lnRef idx="1">
@@ -3522,324 +4194,17 @@
           </a:fontRef>
         </p:style>
         <p:txBody>
-          <a:bodyPr rtlCol="0" anchor="ctr" lIns="182880" tIns="91440"/>
+          <a:bodyPr rtlCol="0" anchor="ctr" lIns="0" rIns="0" tIns="0" bIns="0"/>
           <a:lstStyle/>
           <a:p>
             <a:pPr algn="ctr"/>
             <a:r>
-              <a:rPr b="1" sz="1500">
-                <a:solidFill>
-                  <a:srgbClr val="4F46E5"/>
-                </a:solidFill>
-              </a:rPr>
-              <a:t>Saif</a:t>
-            </a:r>
-            <a:r>
-              <a:rPr sz="1400">
-                <a:solidFill>
-                  <a:srgbClr val="475569"/>
-                </a:solidFill>
-              </a:rPr>
-              <a:t>   Knowledge/RAG, data analysis, frontend UI</a:t>
-            </a:r>
-          </a:p>
-        </p:txBody>
-      </p:sp>
-      <p:sp>
-        <p:nvSpPr>
-          <p:cNvPr id="6" name="Rectangle 5"/>
-          <p:cNvSpPr/>
-          <p:nvPr/>
-        </p:nvSpPr>
-        <p:spPr>
-          <a:xfrm>
-            <a:off x="640080" y="2734056"/>
-            <a:ext cx="10881360" cy="658368"/>
-          </a:xfrm>
-          <a:prstGeom prst="rect">
-            <a:avLst/>
-          </a:prstGeom>
-          <a:solidFill>
-            <a:srgbClr val="EEF2FF"/>
-          </a:solidFill>
-          <a:ln>
-            <a:noFill/>
-          </a:ln>
-        </p:spPr>
-        <p:style>
-          <a:lnRef idx="1">
-            <a:schemeClr val="accent1"/>
-          </a:lnRef>
-          <a:fillRef idx="3">
-            <a:schemeClr val="accent1"/>
-          </a:fillRef>
-          <a:effectRef idx="2">
-            <a:schemeClr val="accent1"/>
-          </a:effectRef>
-          <a:fontRef idx="minor">
-            <a:schemeClr val="lt1"/>
-          </a:fontRef>
-        </p:style>
-        <p:txBody>
-          <a:bodyPr rtlCol="0" anchor="ctr" lIns="182880" tIns="91440"/>
-          <a:lstStyle/>
-          <a:p>
-            <a:pPr algn="ctr"/>
-            <a:r>
-              <a:rPr b="1" sz="1500">
-                <a:solidFill>
-                  <a:srgbClr val="4F46E5"/>
-                </a:solidFill>
-              </a:rPr>
-              <a:t>Shohana</a:t>
-            </a:r>
-            <a:r>
-              <a:rPr sz="1400">
-                <a:solidFill>
-                  <a:srgbClr val="475569"/>
-                </a:solidFill>
-              </a:rPr>
-              <a:t>   Sample data, Social Intelligence agent, documentation</a:t>
-            </a:r>
-          </a:p>
-        </p:txBody>
-      </p:sp>
-      <p:sp>
-        <p:nvSpPr>
-          <p:cNvPr id="7" name="Rectangle 6"/>
-          <p:cNvSpPr/>
-          <p:nvPr/>
-        </p:nvSpPr>
-        <p:spPr>
-          <a:xfrm>
-            <a:off x="640080" y="3392424"/>
-            <a:ext cx="10881360" cy="658368"/>
-          </a:xfrm>
-          <a:prstGeom prst="rect">
-            <a:avLst/>
-          </a:prstGeom>
-          <a:solidFill>
-            <a:srgbClr val="FFFFFF"/>
-          </a:solidFill>
-          <a:ln>
-            <a:noFill/>
-          </a:ln>
-        </p:spPr>
-        <p:style>
-          <a:lnRef idx="1">
-            <a:schemeClr val="accent1"/>
-          </a:lnRef>
-          <a:fillRef idx="3">
-            <a:schemeClr val="accent1"/>
-          </a:fillRef>
-          <a:effectRef idx="2">
-            <a:schemeClr val="accent1"/>
-          </a:effectRef>
-          <a:fontRef idx="minor">
-            <a:schemeClr val="lt1"/>
-          </a:fontRef>
-        </p:style>
-        <p:txBody>
-          <a:bodyPr rtlCol="0" anchor="ctr" lIns="182880" tIns="91440"/>
-          <a:lstStyle/>
-          <a:p>
-            <a:pPr algn="ctr"/>
-            <a:r>
-              <a:rPr b="1" sz="1500">
-                <a:solidFill>
-                  <a:srgbClr val="4F46E5"/>
-                </a:solidFill>
-              </a:rPr>
-              <a:t>Fahim</a:t>
-            </a:r>
-            <a:r>
-              <a:rPr sz="1400">
-                <a:solidFill>
-                  <a:srgbClr val="475569"/>
-                </a:solidFill>
-              </a:rPr>
-              <a:t>   Report generation, QA/Critic, CI/CD, demo prep</a:t>
-            </a:r>
-          </a:p>
-        </p:txBody>
-      </p:sp>
-      <p:sp>
-        <p:nvSpPr>
-          <p:cNvPr id="8" name="TextBox 7"/>
-          <p:cNvSpPr txBox="1"/>
-          <p:nvPr/>
-        </p:nvSpPr>
-        <p:spPr>
-          <a:xfrm>
-            <a:off x="640080" y="4160520"/>
-            <a:ext cx="10881360" cy="365760"/>
-          </a:xfrm>
-          <a:prstGeom prst="rect">
-            <a:avLst/>
-          </a:prstGeom>
-          <a:noFill/>
-        </p:spPr>
-        <p:txBody>
-          <a:bodyPr wrap="none">
-            <a:spAutoFit/>
-          </a:bodyPr>
-          <a:lstStyle/>
-          <a:p>
-            <a:pPr>
-              <a:defRPr b="1" sz="1600">
-                <a:solidFill>
-                  <a:srgbClr val="1E293B"/>
-                </a:solidFill>
-              </a:defRPr>
-            </a:pPr>
-            <a:r>
-              <a:t>Next</a:t>
-            </a:r>
-          </a:p>
-        </p:txBody>
-      </p:sp>
-      <p:sp>
-        <p:nvSpPr>
-          <p:cNvPr id="9" name="TextBox 8"/>
-          <p:cNvSpPr txBox="1"/>
-          <p:nvPr/>
-        </p:nvSpPr>
-        <p:spPr>
-          <a:xfrm>
-            <a:off x="640080" y="4572000"/>
-            <a:ext cx="10789920" cy="1463040"/>
-          </a:xfrm>
-          <a:prstGeom prst="rect">
-            <a:avLst/>
-          </a:prstGeom>
-          <a:noFill/>
-        </p:spPr>
-        <p:txBody>
-          <a:bodyPr wrap="square">
-            <a:spAutoFit/>
-          </a:bodyPr>
-          <a:lstStyle/>
-          <a:p>
-            <a:pPr>
-              <a:lnSpc>
-                <a:spcPct val="125000"/>
-              </a:lnSpc>
-              <a:spcAft>
-                <a:spcPts val="1400"/>
-              </a:spcAft>
-            </a:pPr>
-            <a:r>
-              <a:rPr sz="1550">
-                <a:solidFill>
-                  <a:srgbClr val="475569"/>
-                </a:solidFill>
-              </a:rPr>
-              <a:t>Full Facebook Graph API OAuth polish for production Page access</a:t>
-            </a:r>
-          </a:p>
-          <a:p>
-            <a:pPr>
-              <a:lnSpc>
-                <a:spcPct val="125000"/>
-              </a:lnSpc>
-              <a:spcAft>
-                <a:spcPts val="1400"/>
-              </a:spcAft>
-            </a:pPr>
-            <a:r>
-              <a:rPr sz="1550">
-                <a:solidFill>
-                  <a:srgbClr val="475569"/>
-                </a:solidFill>
-              </a:rPr>
-              <a:t>Postgres for production deployment (SQLite covers local dev)</a:t>
-            </a:r>
-          </a:p>
-          <a:p>
-            <a:pPr>
-              <a:lnSpc>
-                <a:spcPct val="125000"/>
-              </a:lnSpc>
-              <a:spcAft>
-                <a:spcPts val="1400"/>
-              </a:spcAft>
-            </a:pPr>
-            <a:r>
-              <a:rPr sz="1550">
-                <a:solidFill>
-                  <a:srgbClr val="475569"/>
-                </a:solidFill>
-              </a:rPr>
-              <a:t>Expanded test coverage as remaining edge cases surface</a:t>
-            </a:r>
-          </a:p>
-        </p:txBody>
-      </p:sp>
-      <p:sp>
-        <p:nvSpPr>
-          <p:cNvPr id="10" name="TextBox 9"/>
-          <p:cNvSpPr txBox="1"/>
-          <p:nvPr/>
-        </p:nvSpPr>
-        <p:spPr>
-          <a:xfrm>
-            <a:off x="457200" y="6473952"/>
-            <a:ext cx="5486400" cy="320040"/>
-          </a:xfrm>
-          <a:prstGeom prst="rect">
-            <a:avLst/>
-          </a:prstGeom>
-          <a:noFill/>
-        </p:spPr>
-        <p:txBody>
-          <a:bodyPr wrap="none">
-            <a:spAutoFit/>
-          </a:bodyPr>
-          <a:lstStyle/>
-          <a:p>
-            <a:pPr>
-              <a:defRPr sz="1000">
-                <a:solidFill>
-                  <a:srgbClr val="64748B"/>
-                </a:solidFill>
-              </a:defRPr>
-            </a:pPr>
-            <a:r>
-              <a:t>Education AI Analyst</a:t>
-            </a:r>
-          </a:p>
-        </p:txBody>
-      </p:sp>
-      <p:sp>
-        <p:nvSpPr>
-          <p:cNvPr id="11" name="TextBox 10"/>
-          <p:cNvSpPr txBox="1"/>
-          <p:nvPr/>
-        </p:nvSpPr>
-        <p:spPr>
-          <a:xfrm>
-            <a:off x="11247120" y="6473952"/>
-            <a:ext cx="640080" cy="320040"/>
-          </a:xfrm>
-          <a:prstGeom prst="rect">
-            <a:avLst/>
-          </a:prstGeom>
-          <a:noFill/>
-        </p:spPr>
-        <p:txBody>
-          <a:bodyPr wrap="none">
-            <a:spAutoFit/>
-          </a:bodyPr>
-          <a:lstStyle/>
-          <a:p>
-            <a:pPr algn="r">
-              <a:defRPr sz="1000">
-                <a:solidFill>
-                  <a:srgbClr val="64748B"/>
-                </a:solidFill>
-              </a:defRPr>
-            </a:pPr>
-            <a:r>
+              <a:rPr sz="1200" b="1">
+                <a:solidFill>
+                  <a:srgbClr val="FFFFFF"/>
+                </a:solidFill>
+                <a:latin typeface="Segoe UI"/>
+              </a:rPr>
               <a:t>10</a:t>
             </a:r>
           </a:p>
@@ -3891,6 +4256,7 @@
           <a:ln>
             <a:noFill/>
           </a:ln>
+          <a:effectLst/>
         </p:spPr>
         <p:style>
           <a:lnRef idx="1">
@@ -3922,8 +4288,8 @@
         </p:nvSpPr>
         <p:spPr>
           <a:xfrm>
-            <a:off x="502920" y="365760"/>
-            <a:ext cx="10972800" cy="822960"/>
+            <a:off x="502920" y="292608"/>
+            <a:ext cx="9144000" cy="274320"/>
           </a:xfrm>
           <a:prstGeom prst="rect">
             <a:avLst/>
@@ -3937,14 +4303,18 @@
           <a:lstStyle/>
           <a:p>
             <a:pPr>
-              <a:defRPr sz="3200" b="1">
-                <a:solidFill>
-                  <a:srgbClr val="1E293B"/>
-                </a:solidFill>
-              </a:defRPr>
+              <a:spcAft>
+                <a:spcPts val="0"/>
+              </a:spcAft>
             </a:pPr>
             <a:r>
-              <a:t>The Problem</a:t>
+              <a:rPr sz="1100" b="1">
+                <a:solidFill>
+                  <a:srgbClr val="4F46E5"/>
+                </a:solidFill>
+                <a:latin typeface="Segoe UI"/>
+              </a:rPr>
+              <a:t>01 · MOTIVATION</a:t>
             </a:r>
           </a:p>
         </p:txBody>
@@ -3957,8 +4327,139 @@
         </p:nvSpPr>
         <p:spPr>
           <a:xfrm>
-            <a:off x="640080" y="1554480"/>
-            <a:ext cx="10789920" cy="4754880"/>
+            <a:off x="502920" y="530352"/>
+            <a:ext cx="10424160" cy="822960"/>
+          </a:xfrm>
+          <a:prstGeom prst="rect">
+            <a:avLst/>
+          </a:prstGeom>
+          <a:noFill/>
+        </p:spPr>
+        <p:txBody>
+          <a:bodyPr wrap="none">
+            <a:spAutoFit/>
+          </a:bodyPr>
+          <a:lstStyle/>
+          <a:p>
+            <a:r>
+              <a:rPr sz="3000" b="1">
+                <a:solidFill>
+                  <a:srgbClr val="1E293B"/>
+                </a:solidFill>
+                <a:latin typeface="Segoe UI"/>
+              </a:rPr>
+              <a:t>The Problem</a:t>
+            </a:r>
+          </a:p>
+        </p:txBody>
+      </p:sp>
+      <p:sp>
+        <p:nvSpPr>
+          <p:cNvPr id="5" name="Rectangle 4"/>
+          <p:cNvSpPr/>
+          <p:nvPr/>
+        </p:nvSpPr>
+        <p:spPr>
+          <a:xfrm>
+            <a:off x="530352" y="1188720"/>
+            <a:ext cx="548640" cy="38100"/>
+          </a:xfrm>
+          <a:prstGeom prst="rect">
+            <a:avLst/>
+          </a:prstGeom>
+          <a:solidFill>
+            <a:srgbClr val="4F46E5"/>
+          </a:solidFill>
+          <a:ln>
+            <a:noFill/>
+          </a:ln>
+          <a:effectLst/>
+        </p:spPr>
+        <p:style>
+          <a:lnRef idx="1">
+            <a:schemeClr val="accent1"/>
+          </a:lnRef>
+          <a:fillRef idx="3">
+            <a:schemeClr val="accent1"/>
+          </a:fillRef>
+          <a:effectRef idx="2">
+            <a:schemeClr val="accent1"/>
+          </a:effectRef>
+          <a:fontRef idx="minor">
+            <a:schemeClr val="lt1"/>
+          </a:fontRef>
+        </p:style>
+        <p:txBody>
+          <a:bodyPr rtlCol="0" anchor="ctr"/>
+          <a:lstStyle/>
+          <a:p>
+            <a:pPr algn="ctr"/>
+          </a:p>
+        </p:txBody>
+      </p:sp>
+      <p:sp>
+        <p:nvSpPr>
+          <p:cNvPr id="6" name="Oval 5"/>
+          <p:cNvSpPr/>
+          <p:nvPr/>
+        </p:nvSpPr>
+        <p:spPr>
+          <a:xfrm>
+            <a:off x="640080" y="1490472"/>
+            <a:ext cx="384048" cy="384048"/>
+          </a:xfrm>
+          <a:prstGeom prst="ellipse">
+            <a:avLst/>
+          </a:prstGeom>
+          <a:solidFill>
+            <a:srgbClr val="D97706"/>
+          </a:solidFill>
+          <a:ln>
+            <a:noFill/>
+          </a:ln>
+          <a:effectLst/>
+        </p:spPr>
+        <p:style>
+          <a:lnRef idx="1">
+            <a:schemeClr val="accent1"/>
+          </a:lnRef>
+          <a:fillRef idx="3">
+            <a:schemeClr val="accent1"/>
+          </a:fillRef>
+          <a:effectRef idx="2">
+            <a:schemeClr val="accent1"/>
+          </a:effectRef>
+          <a:fontRef idx="minor">
+            <a:schemeClr val="lt1"/>
+          </a:fontRef>
+        </p:style>
+        <p:txBody>
+          <a:bodyPr rtlCol="0" anchor="ctr" lIns="0" rIns="0" tIns="0" bIns="0"/>
+          <a:lstStyle/>
+          <a:p>
+            <a:pPr algn="ctr"/>
+            <a:r>
+              <a:rPr sz="1500" b="1">
+                <a:solidFill>
+                  <a:srgbClr val="FFFFFF"/>
+                </a:solidFill>
+                <a:latin typeface="Segoe UI"/>
+              </a:rPr>
+              <a:t>1</a:t>
+            </a:r>
+          </a:p>
+        </p:txBody>
+      </p:sp>
+      <p:sp>
+        <p:nvSpPr>
+          <p:cNvPr id="7" name="TextBox 6"/>
+          <p:cNvSpPr txBox="1"/>
+          <p:nvPr/>
+        </p:nvSpPr>
+        <p:spPr>
+          <a:xfrm>
+            <a:off x="1207008" y="1453896"/>
+            <a:ext cx="10149840" cy="1051560"/>
           </a:xfrm>
           <a:prstGeom prst="rect">
             <a:avLst/>
@@ -3973,93 +4474,93 @@
           <a:p>
             <a:pPr>
               <a:lnSpc>
-                <a:spcPct val="125000"/>
+                <a:spcPct val="115000"/>
               </a:lnSpc>
-              <a:spcAft>
-                <a:spcPts val="1400"/>
-              </a:spcAft>
             </a:pPr>
             <a:r>
-              <a:rPr b="1" sz="1900">
+              <a:rPr b="1" sz="1550">
                 <a:solidFill>
                   <a:srgbClr val="1E293B"/>
                 </a:solidFill>
+                <a:latin typeface="Segoe UI"/>
               </a:rPr>
               <a:t>Scattered evidence.  </a:t>
             </a:r>
             <a:r>
-              <a:rPr sz="1900">
+              <a:rPr sz="1550">
                 <a:solidFill>
                   <a:srgbClr val="475569"/>
                 </a:solidFill>
+                <a:latin typeface="Segoe UI"/>
               </a:rPr>
               <a:t>Teacher-performance and enrollment signal lives across result sheets, scanned forms, spreadsheets, and Facebook comments — nowhere unified.</a:t>
             </a:r>
           </a:p>
-          <a:p>
-            <a:pPr>
-              <a:lnSpc>
-                <a:spcPct val="125000"/>
-              </a:lnSpc>
-              <a:spcAft>
-                <a:spcPts val="1400"/>
-              </a:spcAft>
-            </a:pPr>
-            <a:r>
-              <a:rPr b="1" sz="1900">
-                <a:solidFill>
-                  <a:srgbClr val="1E293B"/>
-                </a:solidFill>
-              </a:rPr>
-              <a:t>Slow, manual synthesis.  </a:t>
-            </a:r>
-            <a:r>
-              <a:rPr sz="1900">
-                <a:solidFill>
-                  <a:srgbClr val="475569"/>
-                </a:solidFill>
-              </a:rPr>
-              <a:t>Reading and cross-referencing all of it by hand takes days per term, for every department.</a:t>
-            </a:r>
-          </a:p>
-          <a:p>
-            <a:pPr>
-              <a:lnSpc>
-                <a:spcPct val="125000"/>
-              </a:lnSpc>
-              <a:spcAft>
-                <a:spcPts val="1400"/>
-              </a:spcAft>
-            </a:pPr>
-            <a:r>
-              <a:rPr b="1" sz="1900">
-                <a:solidFill>
-                  <a:srgbClr val="1E293B"/>
-                </a:solidFill>
-              </a:rPr>
-              <a:t>High stakes, low tolerance for error.  </a:t>
-            </a:r>
-            <a:r>
-              <a:rPr sz="1900">
-                <a:solidFill>
-                  <a:srgbClr val="475569"/>
-                </a:solidFill>
-              </a:rPr>
-              <a:t>Any AI-generated judgment about staff performance is sensitive — it must be checked by a real person before anyone acts on it.</a:t>
-            </a:r>
-          </a:p>
-        </p:txBody>
-      </p:sp>
-      <p:sp>
-        <p:nvSpPr>
-          <p:cNvPr id="5" name="TextBox 4"/>
+        </p:txBody>
+      </p:sp>
+      <p:sp>
+        <p:nvSpPr>
+          <p:cNvPr id="8" name="Oval 7"/>
+          <p:cNvSpPr/>
+          <p:nvPr/>
+        </p:nvSpPr>
+        <p:spPr>
+          <a:xfrm>
+            <a:off x="640080" y="2542032"/>
+            <a:ext cx="384048" cy="384048"/>
+          </a:xfrm>
+          <a:prstGeom prst="ellipse">
+            <a:avLst/>
+          </a:prstGeom>
+          <a:solidFill>
+            <a:srgbClr val="D97706"/>
+          </a:solidFill>
+          <a:ln>
+            <a:noFill/>
+          </a:ln>
+          <a:effectLst/>
+        </p:spPr>
+        <p:style>
+          <a:lnRef idx="1">
+            <a:schemeClr val="accent1"/>
+          </a:lnRef>
+          <a:fillRef idx="3">
+            <a:schemeClr val="accent1"/>
+          </a:fillRef>
+          <a:effectRef idx="2">
+            <a:schemeClr val="accent1"/>
+          </a:effectRef>
+          <a:fontRef idx="minor">
+            <a:schemeClr val="lt1"/>
+          </a:fontRef>
+        </p:style>
+        <p:txBody>
+          <a:bodyPr rtlCol="0" anchor="ctr" lIns="0" rIns="0" tIns="0" bIns="0"/>
+          <a:lstStyle/>
+          <a:p>
+            <a:pPr algn="ctr"/>
+            <a:r>
+              <a:rPr sz="1500" b="1">
+                <a:solidFill>
+                  <a:srgbClr val="FFFFFF"/>
+                </a:solidFill>
+                <a:latin typeface="Segoe UI"/>
+              </a:rPr>
+              <a:t>2</a:t>
+            </a:r>
+          </a:p>
+        </p:txBody>
+      </p:sp>
+      <p:sp>
+        <p:nvSpPr>
+          <p:cNvPr id="9" name="TextBox 8"/>
           <p:cNvSpPr txBox="1"/>
           <p:nvPr/>
         </p:nvSpPr>
         <p:spPr>
           <a:xfrm>
-            <a:off x="640080" y="5486400"/>
-            <a:ext cx="10789920" cy="822960"/>
+            <a:off x="1207008" y="2505456"/>
+            <a:ext cx="10149840" cy="1051560"/>
           </a:xfrm>
           <a:prstGeom prst="rect">
             <a:avLst/>
@@ -4073,28 +4574,197 @@
           <a:lstStyle/>
           <a:p>
             <a:pPr>
-              <a:defRPr sz="1800" b="1" i="1">
-                <a:solidFill>
-                  <a:srgbClr val="4F46E5"/>
-                </a:solidFill>
-              </a:defRPr>
+              <a:lnSpc>
+                <a:spcPct val="115000"/>
+              </a:lnSpc>
             </a:pPr>
             <a:r>
-              <a:t>Goal: automate the reading and analysis — keep a human firmly in control of what's released.</a:t>
-            </a:r>
-          </a:p>
-        </p:txBody>
-      </p:sp>
-      <p:sp>
-        <p:nvSpPr>
-          <p:cNvPr id="6" name="TextBox 5"/>
+              <a:rPr b="1" sz="1550">
+                <a:solidFill>
+                  <a:srgbClr val="1E293B"/>
+                </a:solidFill>
+                <a:latin typeface="Segoe UI"/>
+              </a:rPr>
+              <a:t>Slow, manual synthesis.  </a:t>
+            </a:r>
+            <a:r>
+              <a:rPr sz="1550">
+                <a:solidFill>
+                  <a:srgbClr val="475569"/>
+                </a:solidFill>
+                <a:latin typeface="Segoe UI"/>
+              </a:rPr>
+              <a:t>Reading and cross-referencing all of it by hand takes days per term, for every department.</a:t>
+            </a:r>
+          </a:p>
+        </p:txBody>
+      </p:sp>
+      <p:sp>
+        <p:nvSpPr>
+          <p:cNvPr id="10" name="Oval 9"/>
+          <p:cNvSpPr/>
+          <p:nvPr/>
+        </p:nvSpPr>
+        <p:spPr>
+          <a:xfrm>
+            <a:off x="640080" y="3593592"/>
+            <a:ext cx="384048" cy="384048"/>
+          </a:xfrm>
+          <a:prstGeom prst="ellipse">
+            <a:avLst/>
+          </a:prstGeom>
+          <a:solidFill>
+            <a:srgbClr val="D97706"/>
+          </a:solidFill>
+          <a:ln>
+            <a:noFill/>
+          </a:ln>
+          <a:effectLst/>
+        </p:spPr>
+        <p:style>
+          <a:lnRef idx="1">
+            <a:schemeClr val="accent1"/>
+          </a:lnRef>
+          <a:fillRef idx="3">
+            <a:schemeClr val="accent1"/>
+          </a:fillRef>
+          <a:effectRef idx="2">
+            <a:schemeClr val="accent1"/>
+          </a:effectRef>
+          <a:fontRef idx="minor">
+            <a:schemeClr val="lt1"/>
+          </a:fontRef>
+        </p:style>
+        <p:txBody>
+          <a:bodyPr rtlCol="0" anchor="ctr" lIns="0" rIns="0" tIns="0" bIns="0"/>
+          <a:lstStyle/>
+          <a:p>
+            <a:pPr algn="ctr"/>
+            <a:r>
+              <a:rPr sz="1500" b="1">
+                <a:solidFill>
+                  <a:srgbClr val="FFFFFF"/>
+                </a:solidFill>
+                <a:latin typeface="Segoe UI"/>
+              </a:rPr>
+              <a:t>3</a:t>
+            </a:r>
+          </a:p>
+        </p:txBody>
+      </p:sp>
+      <p:sp>
+        <p:nvSpPr>
+          <p:cNvPr id="11" name="TextBox 10"/>
           <p:cNvSpPr txBox="1"/>
           <p:nvPr/>
         </p:nvSpPr>
         <p:spPr>
           <a:xfrm>
-            <a:off x="457200" y="6473952"/>
-            <a:ext cx="5486400" cy="320040"/>
+            <a:off x="1207008" y="3557016"/>
+            <a:ext cx="10149840" cy="1051560"/>
+          </a:xfrm>
+          <a:prstGeom prst="rect">
+            <a:avLst/>
+          </a:prstGeom>
+          <a:noFill/>
+        </p:spPr>
+        <p:txBody>
+          <a:bodyPr wrap="square">
+            <a:spAutoFit/>
+          </a:bodyPr>
+          <a:lstStyle/>
+          <a:p>
+            <a:pPr>
+              <a:lnSpc>
+                <a:spcPct val="115000"/>
+              </a:lnSpc>
+            </a:pPr>
+            <a:r>
+              <a:rPr b="1" sz="1550">
+                <a:solidFill>
+                  <a:srgbClr val="1E293B"/>
+                </a:solidFill>
+                <a:latin typeface="Segoe UI"/>
+              </a:rPr>
+              <a:t>High stakes, low tolerance for error.  </a:t>
+            </a:r>
+            <a:r>
+              <a:rPr sz="1550">
+                <a:solidFill>
+                  <a:srgbClr val="475569"/>
+                </a:solidFill>
+                <a:latin typeface="Segoe UI"/>
+              </a:rPr>
+              <a:t>Any AI-generated judgment about staff performance is sensitive — it must be checked by a real person before anyone acts on it.</a:t>
+            </a:r>
+          </a:p>
+        </p:txBody>
+      </p:sp>
+      <p:sp>
+        <p:nvSpPr>
+          <p:cNvPr id="12" name="Rounded Rectangle 11"/>
+          <p:cNvSpPr/>
+          <p:nvPr/>
+        </p:nvSpPr>
+        <p:spPr>
+          <a:xfrm>
+            <a:off x="640080" y="5166360"/>
+            <a:ext cx="10881360" cy="868680"/>
+          </a:xfrm>
+          <a:prstGeom prst="roundRect">
+            <a:avLst/>
+          </a:prstGeom>
+          <a:solidFill>
+            <a:srgbClr val="EEF2FF"/>
+          </a:solidFill>
+          <a:ln w="12700">
+            <a:solidFill>
+              <a:srgbClr val="4F46E5"/>
+            </a:solidFill>
+          </a:ln>
+          <a:effectLst/>
+        </p:spPr>
+        <p:style>
+          <a:lnRef idx="1">
+            <a:schemeClr val="accent1"/>
+          </a:lnRef>
+          <a:fillRef idx="3">
+            <a:schemeClr val="accent1"/>
+          </a:fillRef>
+          <a:effectRef idx="2">
+            <a:schemeClr val="accent1"/>
+          </a:effectRef>
+          <a:fontRef idx="minor">
+            <a:schemeClr val="lt1"/>
+          </a:fontRef>
+        </p:style>
+        <p:txBody>
+          <a:bodyPr rtlCol="0" anchor="ctr" wrap="square" lIns="228600"/>
+          <a:lstStyle/>
+          <a:p>
+            <a:pPr algn="ctr"/>
+            <a:r>
+              <a:rPr sz="1550" b="1" i="1">
+                <a:solidFill>
+                  <a:srgbClr val="4338CA"/>
+                </a:solidFill>
+                <a:latin typeface="Segoe UI"/>
+              </a:rPr>
+              <a:t>Goal — automate the reading and analysis. Keep a human firmly in control of what's released.</a:t>
+            </a:r>
+          </a:p>
+        </p:txBody>
+      </p:sp>
+      <p:sp>
+        <p:nvSpPr>
+          <p:cNvPr id="13" name="TextBox 12"/>
+          <p:cNvSpPr txBox="1"/>
+          <p:nvPr/>
+        </p:nvSpPr>
+        <p:spPr>
+          <a:xfrm>
+            <a:off x="502920" y="6492240"/>
+            <a:ext cx="5486400" cy="274320"/>
           </a:xfrm>
           <a:prstGeom prst="rect">
             <a:avLst/>
@@ -4108,10 +4778,11 @@
           <a:lstStyle/>
           <a:p>
             <a:pPr>
-              <a:defRPr sz="1000">
+              <a:defRPr sz="950">
                 <a:solidFill>
                   <a:srgbClr val="64748B"/>
                 </a:solidFill>
+                <a:latin typeface="Segoe UI"/>
               </a:defRPr>
             </a:pPr>
             <a:r>
@@ -4122,35 +4793,55 @@
       </p:sp>
       <p:sp>
         <p:nvSpPr>
-          <p:cNvPr id="7" name="TextBox 6"/>
-          <p:cNvSpPr txBox="1"/>
-          <p:nvPr/>
-        </p:nvSpPr>
-        <p:spPr>
-          <a:xfrm>
-            <a:off x="11247120" y="6473952"/>
-            <a:ext cx="640080" cy="320040"/>
-          </a:xfrm>
-          <a:prstGeom prst="rect">
-            <a:avLst/>
-          </a:prstGeom>
-          <a:noFill/>
-        </p:spPr>
-        <p:txBody>
-          <a:bodyPr wrap="none">
-            <a:spAutoFit/>
-          </a:bodyPr>
-          <a:lstStyle/>
-          <a:p>
-            <a:pPr algn="r">
-              <a:defRPr sz="1000">
-                <a:solidFill>
-                  <a:srgbClr val="64748B"/>
-                </a:solidFill>
-              </a:defRPr>
-            </a:pPr>
-            <a:r>
-              <a:t>2</a:t>
+          <p:cNvPr id="14" name="Rounded Rectangle 13"/>
+          <p:cNvSpPr/>
+          <p:nvPr/>
+        </p:nvSpPr>
+        <p:spPr>
+          <a:xfrm>
+            <a:off x="11475720" y="320040"/>
+            <a:ext cx="457200" cy="292608"/>
+          </a:xfrm>
+          <a:prstGeom prst="roundRect">
+            <a:avLst>
+              <a:gd name="adj" fmla="val 50000"/>
+            </a:avLst>
+          </a:prstGeom>
+          <a:solidFill>
+            <a:srgbClr val="4F46E5"/>
+          </a:solidFill>
+          <a:ln>
+            <a:noFill/>
+          </a:ln>
+          <a:effectLst/>
+        </p:spPr>
+        <p:style>
+          <a:lnRef idx="1">
+            <a:schemeClr val="accent1"/>
+          </a:lnRef>
+          <a:fillRef idx="3">
+            <a:schemeClr val="accent1"/>
+          </a:fillRef>
+          <a:effectRef idx="2">
+            <a:schemeClr val="accent1"/>
+          </a:effectRef>
+          <a:fontRef idx="minor">
+            <a:schemeClr val="lt1"/>
+          </a:fontRef>
+        </p:style>
+        <p:txBody>
+          <a:bodyPr rtlCol="0" anchor="ctr" lIns="0" rIns="0" tIns="0" bIns="0"/>
+          <a:lstStyle/>
+          <a:p>
+            <a:pPr algn="ctr"/>
+            <a:r>
+              <a:rPr sz="1200" b="1">
+                <a:solidFill>
+                  <a:srgbClr val="FFFFFF"/>
+                </a:solidFill>
+                <a:latin typeface="Segoe UI"/>
+              </a:rPr>
+              <a:t>02</a:t>
             </a:r>
           </a:p>
         </p:txBody>
@@ -4201,6 +4892,7 @@
           <a:ln>
             <a:noFill/>
           </a:ln>
+          <a:effectLst/>
         </p:spPr>
         <p:style>
           <a:lnRef idx="1">
@@ -4232,8 +4924,8 @@
         </p:nvSpPr>
         <p:spPr>
           <a:xfrm>
-            <a:off x="502920" y="365760"/>
-            <a:ext cx="10972800" cy="822960"/>
+            <a:off x="502920" y="292608"/>
+            <a:ext cx="9144000" cy="274320"/>
           </a:xfrm>
           <a:prstGeom prst="rect">
             <a:avLst/>
@@ -4247,14 +4939,18 @@
           <a:lstStyle/>
           <a:p>
             <a:pPr>
-              <a:defRPr sz="3200" b="1">
-                <a:solidFill>
-                  <a:srgbClr val="1E293B"/>
-                </a:solidFill>
-              </a:defRPr>
+              <a:spcAft>
+                <a:spcPts val="0"/>
+              </a:spcAft>
             </a:pPr>
             <a:r>
-              <a:t>Solution Overview</a:t>
+              <a:rPr sz="1100" b="1">
+                <a:solidFill>
+                  <a:srgbClr val="4F46E5"/>
+                </a:solidFill>
+                <a:latin typeface="Segoe UI"/>
+              </a:rPr>
+              <a:t>02 · APPROACH</a:t>
             </a:r>
           </a:p>
         </p:txBody>
@@ -4267,8 +4963,86 @@
         </p:nvSpPr>
         <p:spPr>
           <a:xfrm>
-            <a:off x="640080" y="1554480"/>
-            <a:ext cx="10789920" cy="4754880"/>
+            <a:off x="502920" y="530352"/>
+            <a:ext cx="10424160" cy="822960"/>
+          </a:xfrm>
+          <a:prstGeom prst="rect">
+            <a:avLst/>
+          </a:prstGeom>
+          <a:noFill/>
+        </p:spPr>
+        <p:txBody>
+          <a:bodyPr wrap="none">
+            <a:spAutoFit/>
+          </a:bodyPr>
+          <a:lstStyle/>
+          <a:p>
+            <a:r>
+              <a:rPr sz="3000" b="1">
+                <a:solidFill>
+                  <a:srgbClr val="1E293B"/>
+                </a:solidFill>
+                <a:latin typeface="Segoe UI"/>
+              </a:rPr>
+              <a:t>Solution Overview</a:t>
+            </a:r>
+          </a:p>
+        </p:txBody>
+      </p:sp>
+      <p:sp>
+        <p:nvSpPr>
+          <p:cNvPr id="5" name="Rectangle 4"/>
+          <p:cNvSpPr/>
+          <p:nvPr/>
+        </p:nvSpPr>
+        <p:spPr>
+          <a:xfrm>
+            <a:off x="530352" y="1188720"/>
+            <a:ext cx="548640" cy="38100"/>
+          </a:xfrm>
+          <a:prstGeom prst="rect">
+            <a:avLst/>
+          </a:prstGeom>
+          <a:solidFill>
+            <a:srgbClr val="4F46E5"/>
+          </a:solidFill>
+          <a:ln>
+            <a:noFill/>
+          </a:ln>
+          <a:effectLst/>
+        </p:spPr>
+        <p:style>
+          <a:lnRef idx="1">
+            <a:schemeClr val="accent1"/>
+          </a:lnRef>
+          <a:fillRef idx="3">
+            <a:schemeClr val="accent1"/>
+          </a:fillRef>
+          <a:effectRef idx="2">
+            <a:schemeClr val="accent1"/>
+          </a:effectRef>
+          <a:fontRef idx="minor">
+            <a:schemeClr val="lt1"/>
+          </a:fontRef>
+        </p:style>
+        <p:txBody>
+          <a:bodyPr rtlCol="0" anchor="ctr"/>
+          <a:lstStyle/>
+          <a:p>
+            <a:pPr algn="ctr"/>
+          </a:p>
+        </p:txBody>
+      </p:sp>
+      <p:sp>
+        <p:nvSpPr>
+          <p:cNvPr id="6" name="TextBox 5"/>
+          <p:cNvSpPr txBox="1"/>
+          <p:nvPr/>
+        </p:nvSpPr>
+        <p:spPr>
+          <a:xfrm>
+            <a:off x="640080" y="1490472"/>
+            <a:ext cx="10789920" cy="4572000"/>
           </a:xfrm>
           <a:prstGeom prst="rect">
             <a:avLst/>
@@ -4283,25 +5057,27 @@
           <a:p>
             <a:pPr>
               <a:lnSpc>
-                <a:spcPct val="125000"/>
+                <a:spcPct val="120000"/>
               </a:lnSpc>
               <a:spcAft>
-                <a:spcPts val="1400"/>
+                <a:spcPts val="1300"/>
               </a:spcAft>
             </a:pPr>
             <a:r>
-              <a:rPr b="1" sz="1900">
+              <a:rPr b="1" sz="1750">
                 <a:solidFill>
                   <a:srgbClr val="1E293B"/>
                 </a:solidFill>
+                <a:latin typeface="Segoe UI"/>
               </a:rPr>
               <a:t>One Manager, seven Specialists.  </a:t>
             </a:r>
             <a:r>
-              <a:rPr sz="1900">
+              <a:rPr sz="1750">
                 <a:solidFill>
                   <a:srgbClr val="475569"/>
                 </a:solidFill>
+                <a:latin typeface="Segoe UI"/>
               </a:rPr>
               <a:t>A Supervisor agent plans and routes; seven worker agents each do one job — reading documents, reading images, analyzing numbers, reading sentiment, remembering context, writing the report, fact-checking it.</a:t>
             </a:r>
@@ -4309,67 +5085,395 @@
           <a:p>
             <a:pPr>
               <a:lnSpc>
-                <a:spcPct val="125000"/>
+                <a:spcPct val="120000"/>
               </a:lnSpc>
               <a:spcAft>
-                <a:spcPts val="1400"/>
+                <a:spcPts val="1300"/>
               </a:spcAft>
             </a:pPr>
             <a:r>
-              <a:rPr b="1" sz="1900">
+              <a:rPr b="1" sz="1750">
                 <a:solidFill>
                   <a:srgbClr val="1E293B"/>
                 </a:solidFill>
-              </a:rPr>
-              <a:t>End-to-end flow.  </a:t>
-            </a:r>
-            <a:r>
-              <a:rPr sz="1900">
+                <a:latin typeface="Segoe UI"/>
+              </a:rPr>
+              <a:t>Built to be demo-ready on a free budget.  </a:t>
+            </a:r>
+            <a:r>
+              <a:rPr sz="1750">
                 <a:solidFill>
                   <a:srgbClr val="475569"/>
                 </a:solidFill>
-              </a:rPr>
-              <a:t>Upload documents + Facebook data → agents analyze → draft report → a human approves → download the finished report.</a:t>
-            </a:r>
-          </a:p>
-          <a:p>
-            <a:pPr>
-              <a:lnSpc>
-                <a:spcPct val="125000"/>
-              </a:lnSpc>
-              <a:spcAft>
-                <a:spcPts val="1400"/>
-              </a:spcAft>
-            </a:pPr>
-            <a:r>
-              <a:rPr b="1" sz="1900">
-                <a:solidFill>
-                  <a:srgbClr val="1E293B"/>
-                </a:solidFill>
-              </a:rPr>
-              <a:t>Built to be demo-ready on a free budget.  </a:t>
-            </a:r>
-            <a:r>
-              <a:rPr sz="1900">
-                <a:solidFill>
-                  <a:srgbClr val="475569"/>
-                </a:solidFill>
-              </a:rPr>
-              <a:t>LangGraph + FastAPI + Streamlit, powered by free-tier OpenRouter models with automatic fallback, local embeddings (no extra API cost), and a CSV-import path so the demo never blocks on Facebook app review.</a:t>
-            </a:r>
-          </a:p>
-        </p:txBody>
-      </p:sp>
-      <p:sp>
-        <p:nvSpPr>
-          <p:cNvPr id="5" name="TextBox 4"/>
+                <a:latin typeface="Segoe UI"/>
+              </a:rPr>
+              <a:t>LangGraph + FastAPI + Streamlit, powered by free-tier OpenRouter models with automatic fallback, local embeddings, and a CSV-import path so the demo never blocks on Facebook app review.</a:t>
+            </a:r>
+          </a:p>
+        </p:txBody>
+      </p:sp>
+      <p:sp>
+        <p:nvSpPr>
+          <p:cNvPr id="7" name="Rounded Rectangle 6"/>
+          <p:cNvSpPr/>
+          <p:nvPr/>
+        </p:nvSpPr>
+        <p:spPr>
+          <a:xfrm>
+            <a:off x="678027" y="5074920"/>
+            <a:ext cx="2331720" cy="777240"/>
+          </a:xfrm>
+          <a:prstGeom prst="roundRect">
+            <a:avLst/>
+          </a:prstGeom>
+          <a:solidFill>
+            <a:srgbClr val="4F46E5"/>
+          </a:solidFill>
+          <a:ln w="12700">
+            <a:solidFill>
+              <a:srgbClr val="4F46E5"/>
+            </a:solidFill>
+          </a:ln>
+          <a:effectLst/>
+        </p:spPr>
+        <p:style>
+          <a:lnRef idx="1">
+            <a:schemeClr val="accent1"/>
+          </a:lnRef>
+          <a:fillRef idx="3">
+            <a:schemeClr val="accent1"/>
+          </a:fillRef>
+          <a:effectRef idx="2">
+            <a:schemeClr val="accent1"/>
+          </a:effectRef>
+          <a:fontRef idx="minor">
+            <a:schemeClr val="lt1"/>
+          </a:fontRef>
+        </p:style>
+        <p:txBody>
+          <a:bodyPr rtlCol="0" anchor="ctr" lIns="0" rIns="0"/>
+          <a:lstStyle/>
+          <a:p>
+            <a:pPr algn="ctr"/>
+            <a:r>
+              <a:rPr sz="1500" b="1">
+                <a:solidFill>
+                  <a:srgbClr val="FFFFFF"/>
+                </a:solidFill>
+                <a:latin typeface="Segoe UI"/>
+              </a:rPr>
+              <a:t>1. Upload</a:t>
+            </a:r>
+          </a:p>
+        </p:txBody>
+      </p:sp>
+      <p:sp>
+        <p:nvSpPr>
+          <p:cNvPr id="8" name="Right Arrow 7"/>
+          <p:cNvSpPr/>
+          <p:nvPr/>
+        </p:nvSpPr>
+        <p:spPr>
+          <a:xfrm>
+            <a:off x="3037179" y="5349240"/>
+            <a:ext cx="448056" cy="228600"/>
+          </a:xfrm>
+          <a:prstGeom prst="rightArrow">
+            <a:avLst/>
+          </a:prstGeom>
+          <a:solidFill>
+            <a:srgbClr val="64748B"/>
+          </a:solidFill>
+          <a:ln>
+            <a:noFill/>
+          </a:ln>
+          <a:effectLst/>
+        </p:spPr>
+        <p:style>
+          <a:lnRef idx="1">
+            <a:schemeClr val="accent1"/>
+          </a:lnRef>
+          <a:fillRef idx="3">
+            <a:schemeClr val="accent1"/>
+          </a:fillRef>
+          <a:effectRef idx="2">
+            <a:schemeClr val="accent1"/>
+          </a:effectRef>
+          <a:fontRef idx="minor">
+            <a:schemeClr val="lt1"/>
+          </a:fontRef>
+        </p:style>
+        <p:txBody>
+          <a:bodyPr rtlCol="0" anchor="ctr"/>
+          <a:lstStyle/>
+          <a:p>
+            <a:pPr algn="ctr"/>
+          </a:p>
+        </p:txBody>
+      </p:sp>
+      <p:sp>
+        <p:nvSpPr>
+          <p:cNvPr id="9" name="Rounded Rectangle 8"/>
+          <p:cNvSpPr/>
+          <p:nvPr/>
+        </p:nvSpPr>
+        <p:spPr>
+          <a:xfrm>
+            <a:off x="3512667" y="5074920"/>
+            <a:ext cx="2331720" cy="777240"/>
+          </a:xfrm>
+          <a:prstGeom prst="roundRect">
+            <a:avLst/>
+          </a:prstGeom>
+          <a:solidFill>
+            <a:srgbClr val="EEF2FF"/>
+          </a:solidFill>
+          <a:ln w="12700">
+            <a:solidFill>
+              <a:srgbClr val="4F46E5"/>
+            </a:solidFill>
+          </a:ln>
+          <a:effectLst/>
+        </p:spPr>
+        <p:style>
+          <a:lnRef idx="1">
+            <a:schemeClr val="accent1"/>
+          </a:lnRef>
+          <a:fillRef idx="3">
+            <a:schemeClr val="accent1"/>
+          </a:fillRef>
+          <a:effectRef idx="2">
+            <a:schemeClr val="accent1"/>
+          </a:effectRef>
+          <a:fontRef idx="minor">
+            <a:schemeClr val="lt1"/>
+          </a:fontRef>
+        </p:style>
+        <p:txBody>
+          <a:bodyPr rtlCol="0" anchor="ctr" lIns="0" rIns="0"/>
+          <a:lstStyle/>
+          <a:p>
+            <a:pPr algn="ctr"/>
+            <a:r>
+              <a:rPr sz="1500" b="1">
+                <a:solidFill>
+                  <a:srgbClr val="4338CA"/>
+                </a:solidFill>
+                <a:latin typeface="Segoe UI"/>
+              </a:rPr>
+              <a:t>2. Analyze</a:t>
+            </a:r>
+          </a:p>
+        </p:txBody>
+      </p:sp>
+      <p:sp>
+        <p:nvSpPr>
+          <p:cNvPr id="10" name="Right Arrow 9"/>
+          <p:cNvSpPr/>
+          <p:nvPr/>
+        </p:nvSpPr>
+        <p:spPr>
+          <a:xfrm>
+            <a:off x="5871819" y="5349240"/>
+            <a:ext cx="448056" cy="228600"/>
+          </a:xfrm>
+          <a:prstGeom prst="rightArrow">
+            <a:avLst/>
+          </a:prstGeom>
+          <a:solidFill>
+            <a:srgbClr val="64748B"/>
+          </a:solidFill>
+          <a:ln>
+            <a:noFill/>
+          </a:ln>
+          <a:effectLst/>
+        </p:spPr>
+        <p:style>
+          <a:lnRef idx="1">
+            <a:schemeClr val="accent1"/>
+          </a:lnRef>
+          <a:fillRef idx="3">
+            <a:schemeClr val="accent1"/>
+          </a:fillRef>
+          <a:effectRef idx="2">
+            <a:schemeClr val="accent1"/>
+          </a:effectRef>
+          <a:fontRef idx="minor">
+            <a:schemeClr val="lt1"/>
+          </a:fontRef>
+        </p:style>
+        <p:txBody>
+          <a:bodyPr rtlCol="0" anchor="ctr"/>
+          <a:lstStyle/>
+          <a:p>
+            <a:pPr algn="ctr"/>
+          </a:p>
+        </p:txBody>
+      </p:sp>
+      <p:sp>
+        <p:nvSpPr>
+          <p:cNvPr id="11" name="Rounded Rectangle 10"/>
+          <p:cNvSpPr/>
+          <p:nvPr/>
+        </p:nvSpPr>
+        <p:spPr>
+          <a:xfrm>
+            <a:off x="6347307" y="5074920"/>
+            <a:ext cx="2331720" cy="777240"/>
+          </a:xfrm>
+          <a:prstGeom prst="roundRect">
+            <a:avLst/>
+          </a:prstGeom>
+          <a:solidFill>
+            <a:srgbClr val="EEF2FF"/>
+          </a:solidFill>
+          <a:ln w="12700">
+            <a:solidFill>
+              <a:srgbClr val="4F46E5"/>
+            </a:solidFill>
+          </a:ln>
+          <a:effectLst/>
+        </p:spPr>
+        <p:style>
+          <a:lnRef idx="1">
+            <a:schemeClr val="accent1"/>
+          </a:lnRef>
+          <a:fillRef idx="3">
+            <a:schemeClr val="accent1"/>
+          </a:fillRef>
+          <a:effectRef idx="2">
+            <a:schemeClr val="accent1"/>
+          </a:effectRef>
+          <a:fontRef idx="minor">
+            <a:schemeClr val="lt1"/>
+          </a:fontRef>
+        </p:style>
+        <p:txBody>
+          <a:bodyPr rtlCol="0" anchor="ctr" lIns="0" rIns="0"/>
+          <a:lstStyle/>
+          <a:p>
+            <a:pPr algn="ctr"/>
+            <a:r>
+              <a:rPr sz="1500" b="1">
+                <a:solidFill>
+                  <a:srgbClr val="4338CA"/>
+                </a:solidFill>
+                <a:latin typeface="Segoe UI"/>
+              </a:rPr>
+              <a:t>3. Approve</a:t>
+            </a:r>
+          </a:p>
+        </p:txBody>
+      </p:sp>
+      <p:sp>
+        <p:nvSpPr>
+          <p:cNvPr id="12" name="Right Arrow 11"/>
+          <p:cNvSpPr/>
+          <p:nvPr/>
+        </p:nvSpPr>
+        <p:spPr>
+          <a:xfrm>
+            <a:off x="8706459" y="5349240"/>
+            <a:ext cx="448056" cy="228600"/>
+          </a:xfrm>
+          <a:prstGeom prst="rightArrow">
+            <a:avLst/>
+          </a:prstGeom>
+          <a:solidFill>
+            <a:srgbClr val="64748B"/>
+          </a:solidFill>
+          <a:ln>
+            <a:noFill/>
+          </a:ln>
+          <a:effectLst/>
+        </p:spPr>
+        <p:style>
+          <a:lnRef idx="1">
+            <a:schemeClr val="accent1"/>
+          </a:lnRef>
+          <a:fillRef idx="3">
+            <a:schemeClr val="accent1"/>
+          </a:fillRef>
+          <a:effectRef idx="2">
+            <a:schemeClr val="accent1"/>
+          </a:effectRef>
+          <a:fontRef idx="minor">
+            <a:schemeClr val="lt1"/>
+          </a:fontRef>
+        </p:style>
+        <p:txBody>
+          <a:bodyPr rtlCol="0" anchor="ctr"/>
+          <a:lstStyle/>
+          <a:p>
+            <a:pPr algn="ctr"/>
+          </a:p>
+        </p:txBody>
+      </p:sp>
+      <p:sp>
+        <p:nvSpPr>
+          <p:cNvPr id="13" name="Rounded Rectangle 12"/>
+          <p:cNvSpPr/>
+          <p:nvPr/>
+        </p:nvSpPr>
+        <p:spPr>
+          <a:xfrm>
+            <a:off x="9181947" y="5074920"/>
+            <a:ext cx="2331720" cy="777240"/>
+          </a:xfrm>
+          <a:prstGeom prst="roundRect">
+            <a:avLst/>
+          </a:prstGeom>
+          <a:solidFill>
+            <a:srgbClr val="4F46E5"/>
+          </a:solidFill>
+          <a:ln w="12700">
+            <a:solidFill>
+              <a:srgbClr val="4F46E5"/>
+            </a:solidFill>
+          </a:ln>
+          <a:effectLst/>
+        </p:spPr>
+        <p:style>
+          <a:lnRef idx="1">
+            <a:schemeClr val="accent1"/>
+          </a:lnRef>
+          <a:fillRef idx="3">
+            <a:schemeClr val="accent1"/>
+          </a:fillRef>
+          <a:effectRef idx="2">
+            <a:schemeClr val="accent1"/>
+          </a:effectRef>
+          <a:fontRef idx="minor">
+            <a:schemeClr val="lt1"/>
+          </a:fontRef>
+        </p:style>
+        <p:txBody>
+          <a:bodyPr rtlCol="0" anchor="ctr" lIns="0" rIns="0"/>
+          <a:lstStyle/>
+          <a:p>
+            <a:pPr algn="ctr"/>
+            <a:r>
+              <a:rPr sz="1500" b="1">
+                <a:solidFill>
+                  <a:srgbClr val="FFFFFF"/>
+                </a:solidFill>
+                <a:latin typeface="Segoe UI"/>
+              </a:rPr>
+              <a:t>4. Download</a:t>
+            </a:r>
+          </a:p>
+        </p:txBody>
+      </p:sp>
+      <p:sp>
+        <p:nvSpPr>
+          <p:cNvPr id="14" name="TextBox 13"/>
           <p:cNvSpPr txBox="1"/>
           <p:nvPr/>
         </p:nvSpPr>
         <p:spPr>
           <a:xfrm>
-            <a:off x="457200" y="6473952"/>
-            <a:ext cx="5486400" cy="320040"/>
+            <a:off x="502920" y="6492240"/>
+            <a:ext cx="5486400" cy="274320"/>
           </a:xfrm>
           <a:prstGeom prst="rect">
             <a:avLst/>
@@ -4383,10 +5487,11 @@
           <a:lstStyle/>
           <a:p>
             <a:pPr>
-              <a:defRPr sz="1000">
+              <a:defRPr sz="950">
                 <a:solidFill>
                   <a:srgbClr val="64748B"/>
                 </a:solidFill>
+                <a:latin typeface="Segoe UI"/>
               </a:defRPr>
             </a:pPr>
             <a:r>
@@ -4397,35 +5502,55 @@
       </p:sp>
       <p:sp>
         <p:nvSpPr>
-          <p:cNvPr id="6" name="TextBox 5"/>
-          <p:cNvSpPr txBox="1"/>
-          <p:nvPr/>
-        </p:nvSpPr>
-        <p:spPr>
-          <a:xfrm>
-            <a:off x="11247120" y="6473952"/>
-            <a:ext cx="640080" cy="320040"/>
-          </a:xfrm>
-          <a:prstGeom prst="rect">
-            <a:avLst/>
-          </a:prstGeom>
-          <a:noFill/>
-        </p:spPr>
-        <p:txBody>
-          <a:bodyPr wrap="none">
-            <a:spAutoFit/>
-          </a:bodyPr>
-          <a:lstStyle/>
-          <a:p>
-            <a:pPr algn="r">
-              <a:defRPr sz="1000">
-                <a:solidFill>
-                  <a:srgbClr val="64748B"/>
-                </a:solidFill>
-              </a:defRPr>
-            </a:pPr>
-            <a:r>
-              <a:t>3</a:t>
+          <p:cNvPr id="15" name="Rounded Rectangle 14"/>
+          <p:cNvSpPr/>
+          <p:nvPr/>
+        </p:nvSpPr>
+        <p:spPr>
+          <a:xfrm>
+            <a:off x="11475720" y="320040"/>
+            <a:ext cx="457200" cy="292608"/>
+          </a:xfrm>
+          <a:prstGeom prst="roundRect">
+            <a:avLst>
+              <a:gd name="adj" fmla="val 50000"/>
+            </a:avLst>
+          </a:prstGeom>
+          <a:solidFill>
+            <a:srgbClr val="4F46E5"/>
+          </a:solidFill>
+          <a:ln>
+            <a:noFill/>
+          </a:ln>
+          <a:effectLst/>
+        </p:spPr>
+        <p:style>
+          <a:lnRef idx="1">
+            <a:schemeClr val="accent1"/>
+          </a:lnRef>
+          <a:fillRef idx="3">
+            <a:schemeClr val="accent1"/>
+          </a:fillRef>
+          <a:effectRef idx="2">
+            <a:schemeClr val="accent1"/>
+          </a:effectRef>
+          <a:fontRef idx="minor">
+            <a:schemeClr val="lt1"/>
+          </a:fontRef>
+        </p:style>
+        <p:txBody>
+          <a:bodyPr rtlCol="0" anchor="ctr" lIns="0" rIns="0" tIns="0" bIns="0"/>
+          <a:lstStyle/>
+          <a:p>
+            <a:pPr algn="ctr"/>
+            <a:r>
+              <a:rPr sz="1200" b="1">
+                <a:solidFill>
+                  <a:srgbClr val="FFFFFF"/>
+                </a:solidFill>
+                <a:latin typeface="Segoe UI"/>
+              </a:rPr>
+              <a:t>03</a:t>
             </a:r>
           </a:p>
         </p:txBody>
@@ -4476,6 +5601,7 @@
           <a:ln>
             <a:noFill/>
           </a:ln>
+          <a:effectLst/>
         </p:spPr>
         <p:style>
           <a:lnRef idx="1">
@@ -4507,8 +5633,8 @@
         </p:nvSpPr>
         <p:spPr>
           <a:xfrm>
-            <a:off x="502920" y="365760"/>
-            <a:ext cx="10972800" cy="822960"/>
+            <a:off x="502920" y="292608"/>
+            <a:ext cx="9144000" cy="274320"/>
           </a:xfrm>
           <a:prstGeom prst="rect">
             <a:avLst/>
@@ -4522,21 +5648,149 @@
           <a:lstStyle/>
           <a:p>
             <a:pPr>
-              <a:defRPr sz="3200" b="1">
+              <a:spcAft>
+                <a:spcPts val="0"/>
+              </a:spcAft>
+            </a:pPr>
+            <a:r>
+              <a:rPr sz="1100" b="1">
+                <a:solidFill>
+                  <a:srgbClr val="4F46E5"/>
+                </a:solidFill>
+                <a:latin typeface="Segoe UI"/>
+              </a:rPr>
+              <a:t>03 · DESIGN</a:t>
+            </a:r>
+          </a:p>
+        </p:txBody>
+      </p:sp>
+      <p:sp>
+        <p:nvSpPr>
+          <p:cNvPr id="4" name="TextBox 3"/>
+          <p:cNvSpPr txBox="1"/>
+          <p:nvPr/>
+        </p:nvSpPr>
+        <p:spPr>
+          <a:xfrm>
+            <a:off x="502920" y="530352"/>
+            <a:ext cx="10424160" cy="822960"/>
+          </a:xfrm>
+          <a:prstGeom prst="rect">
+            <a:avLst/>
+          </a:prstGeom>
+          <a:noFill/>
+        </p:spPr>
+        <p:txBody>
+          <a:bodyPr wrap="none">
+            <a:spAutoFit/>
+          </a:bodyPr>
+          <a:lstStyle/>
+          <a:p>
+            <a:r>
+              <a:rPr sz="3000" b="1">
                 <a:solidFill>
                   <a:srgbClr val="1E293B"/>
                 </a:solidFill>
-              </a:defRPr>
-            </a:pPr>
-            <a:r>
+                <a:latin typeface="Segoe UI"/>
+              </a:rPr>
               <a:t>System Architecture</a:t>
             </a:r>
+          </a:p>
+        </p:txBody>
+      </p:sp>
+      <p:sp>
+        <p:nvSpPr>
+          <p:cNvPr id="5" name="Rectangle 4"/>
+          <p:cNvSpPr/>
+          <p:nvPr/>
+        </p:nvSpPr>
+        <p:spPr>
+          <a:xfrm>
+            <a:off x="530352" y="1188720"/>
+            <a:ext cx="548640" cy="38100"/>
+          </a:xfrm>
+          <a:prstGeom prst="rect">
+            <a:avLst/>
+          </a:prstGeom>
+          <a:solidFill>
+            <a:srgbClr val="4F46E5"/>
+          </a:solidFill>
+          <a:ln>
+            <a:noFill/>
+          </a:ln>
+          <a:effectLst/>
+        </p:spPr>
+        <p:style>
+          <a:lnRef idx="1">
+            <a:schemeClr val="accent1"/>
+          </a:lnRef>
+          <a:fillRef idx="3">
+            <a:schemeClr val="accent1"/>
+          </a:fillRef>
+          <a:effectRef idx="2">
+            <a:schemeClr val="accent1"/>
+          </a:effectRef>
+          <a:fontRef idx="minor">
+            <a:schemeClr val="lt1"/>
+          </a:fontRef>
+        </p:style>
+        <p:txBody>
+          <a:bodyPr rtlCol="0" anchor="ctr"/>
+          <a:lstStyle/>
+          <a:p>
+            <a:pPr algn="ctr"/>
+          </a:p>
+        </p:txBody>
+      </p:sp>
+      <p:sp>
+        <p:nvSpPr>
+          <p:cNvPr id="6" name="Rectangle 5"/>
+          <p:cNvSpPr/>
+          <p:nvPr/>
+        </p:nvSpPr>
+        <p:spPr>
+          <a:xfrm>
+            <a:off x="3123712" y="1362456"/>
+            <a:ext cx="5944271" cy="5001768"/>
+          </a:xfrm>
+          <a:prstGeom prst="rect">
+            <a:avLst/>
+          </a:prstGeom>
+          <a:solidFill>
+            <a:srgbClr val="FFFFFF"/>
+          </a:solidFill>
+          <a:ln w="12700">
+            <a:solidFill>
+              <a:srgbClr val="CBD5E1"/>
+            </a:solidFill>
+          </a:ln>
+          <a:effectLst/>
+        </p:spPr>
+        <p:style>
+          <a:lnRef idx="1">
+            <a:schemeClr val="accent1"/>
+          </a:lnRef>
+          <a:fillRef idx="3">
+            <a:schemeClr val="accent1"/>
+          </a:fillRef>
+          <a:effectRef idx="2">
+            <a:schemeClr val="accent1"/>
+          </a:effectRef>
+          <a:fontRef idx="minor">
+            <a:schemeClr val="lt1"/>
+          </a:fontRef>
+        </p:style>
+        <p:txBody>
+          <a:bodyPr rtlCol="0" anchor="ctr"/>
+          <a:lstStyle/>
+          <a:p>
+            <a:pPr algn="ctr"/>
           </a:p>
         </p:txBody>
       </p:sp>
       <p:pic>
         <p:nvPicPr>
-          <p:cNvPr id="4" name="Picture 3" descr="arch-diagram-preview.png"/>
+          <p:cNvPr id="7" name="Picture 6" descr="arch-diagram-preview.png"/>
           <p:cNvPicPr>
             <a:picLocks noChangeAspect="1"/>
           </p:cNvPicPr>
@@ -4550,8 +5804,8 @@
         </p:blipFill>
         <p:spPr>
           <a:xfrm>
-            <a:off x="3069519" y="1234440"/>
-            <a:ext cx="6052656" cy="5074920"/>
+            <a:off x="3178576" y="1417320"/>
+            <a:ext cx="5834543" cy="4892040"/>
           </a:xfrm>
           <a:prstGeom prst="rect">
             <a:avLst/>
@@ -4560,14 +5814,14 @@
       </p:pic>
       <p:sp>
         <p:nvSpPr>
-          <p:cNvPr id="5" name="TextBox 4"/>
+          <p:cNvPr id="8" name="TextBox 7"/>
           <p:cNvSpPr txBox="1"/>
           <p:nvPr/>
         </p:nvSpPr>
         <p:spPr>
           <a:xfrm>
-            <a:off x="457200" y="6473952"/>
-            <a:ext cx="5486400" cy="320040"/>
+            <a:off x="502920" y="6492240"/>
+            <a:ext cx="5486400" cy="274320"/>
           </a:xfrm>
           <a:prstGeom prst="rect">
             <a:avLst/>
@@ -4581,10 +5835,11 @@
           <a:lstStyle/>
           <a:p>
             <a:pPr>
-              <a:defRPr sz="1000">
+              <a:defRPr sz="950">
                 <a:solidFill>
                   <a:srgbClr val="64748B"/>
                 </a:solidFill>
+                <a:latin typeface="Segoe UI"/>
               </a:defRPr>
             </a:pPr>
             <a:r>
@@ -4595,35 +5850,55 @@
       </p:sp>
       <p:sp>
         <p:nvSpPr>
-          <p:cNvPr id="6" name="TextBox 5"/>
-          <p:cNvSpPr txBox="1"/>
-          <p:nvPr/>
-        </p:nvSpPr>
-        <p:spPr>
-          <a:xfrm>
-            <a:off x="11247120" y="6473952"/>
-            <a:ext cx="640080" cy="320040"/>
-          </a:xfrm>
-          <a:prstGeom prst="rect">
-            <a:avLst/>
-          </a:prstGeom>
-          <a:noFill/>
-        </p:spPr>
-        <p:txBody>
-          <a:bodyPr wrap="none">
-            <a:spAutoFit/>
-          </a:bodyPr>
-          <a:lstStyle/>
-          <a:p>
-            <a:pPr algn="r">
-              <a:defRPr sz="1000">
-                <a:solidFill>
-                  <a:srgbClr val="64748B"/>
-                </a:solidFill>
-              </a:defRPr>
-            </a:pPr>
-            <a:r>
-              <a:t>4</a:t>
+          <p:cNvPr id="9" name="Rounded Rectangle 8"/>
+          <p:cNvSpPr/>
+          <p:nvPr/>
+        </p:nvSpPr>
+        <p:spPr>
+          <a:xfrm>
+            <a:off x="11475720" y="320040"/>
+            <a:ext cx="457200" cy="292608"/>
+          </a:xfrm>
+          <a:prstGeom prst="roundRect">
+            <a:avLst>
+              <a:gd name="adj" fmla="val 50000"/>
+            </a:avLst>
+          </a:prstGeom>
+          <a:solidFill>
+            <a:srgbClr val="4F46E5"/>
+          </a:solidFill>
+          <a:ln>
+            <a:noFill/>
+          </a:ln>
+          <a:effectLst/>
+        </p:spPr>
+        <p:style>
+          <a:lnRef idx="1">
+            <a:schemeClr val="accent1"/>
+          </a:lnRef>
+          <a:fillRef idx="3">
+            <a:schemeClr val="accent1"/>
+          </a:fillRef>
+          <a:effectRef idx="2">
+            <a:schemeClr val="accent1"/>
+          </a:effectRef>
+          <a:fontRef idx="minor">
+            <a:schemeClr val="lt1"/>
+          </a:fontRef>
+        </p:style>
+        <p:txBody>
+          <a:bodyPr rtlCol="0" anchor="ctr" lIns="0" rIns="0" tIns="0" bIns="0"/>
+          <a:lstStyle/>
+          <a:p>
+            <a:pPr algn="ctr"/>
+            <a:r>
+              <a:rPr sz="1200" b="1">
+                <a:solidFill>
+                  <a:srgbClr val="FFFFFF"/>
+                </a:solidFill>
+                <a:latin typeface="Segoe UI"/>
+              </a:rPr>
+              <a:t>04</a:t>
             </a:r>
           </a:p>
         </p:txBody>
@@ -4674,6 +5949,7 @@
           <a:ln>
             <a:noFill/>
           </a:ln>
+          <a:effectLst/>
         </p:spPr>
         <p:style>
           <a:lnRef idx="1">
@@ -4705,8 +5981,8 @@
         </p:nvSpPr>
         <p:spPr>
           <a:xfrm>
-            <a:off x="502920" y="365760"/>
-            <a:ext cx="10972800" cy="822960"/>
+            <a:off x="502920" y="292608"/>
+            <a:ext cx="9144000" cy="274320"/>
           </a:xfrm>
           <a:prstGeom prst="rect">
             <a:avLst/>
@@ -4720,13 +5996,51 @@
           <a:lstStyle/>
           <a:p>
             <a:pPr>
-              <a:defRPr sz="3200" b="1">
+              <a:spcAft>
+                <a:spcPts val="0"/>
+              </a:spcAft>
+            </a:pPr>
+            <a:r>
+              <a:rPr sz="1100" b="1">
+                <a:solidFill>
+                  <a:srgbClr val="4F46E5"/>
+                </a:solidFill>
+                <a:latin typeface="Segoe UI"/>
+              </a:rPr>
+              <a:t>04 · AGENTS</a:t>
+            </a:r>
+          </a:p>
+        </p:txBody>
+      </p:sp>
+      <p:sp>
+        <p:nvSpPr>
+          <p:cNvPr id="4" name="TextBox 3"/>
+          <p:cNvSpPr txBox="1"/>
+          <p:nvPr/>
+        </p:nvSpPr>
+        <p:spPr>
+          <a:xfrm>
+            <a:off x="502920" y="530352"/>
+            <a:ext cx="10424160" cy="822960"/>
+          </a:xfrm>
+          <a:prstGeom prst="rect">
+            <a:avLst/>
+          </a:prstGeom>
+          <a:noFill/>
+        </p:spPr>
+        <p:txBody>
+          <a:bodyPr wrap="none">
+            <a:spAutoFit/>
+          </a:bodyPr>
+          <a:lstStyle/>
+          <a:p>
+            <a:r>
+              <a:rPr sz="3000" b="1">
                 <a:solidFill>
                   <a:srgbClr val="1E293B"/>
                 </a:solidFill>
-              </a:defRPr>
-            </a:pPr>
-            <a:r>
+                <a:latin typeface="Segoe UI"/>
+              </a:rPr>
               <a:t>Supervisor + 7 Worker Agents</a:t>
             </a:r>
           </a:p>
@@ -4734,14 +6048,124 @@
       </p:sp>
       <p:sp>
         <p:nvSpPr>
-          <p:cNvPr id="4" name="Rounded Rectangle 3"/>
+          <p:cNvPr id="5" name="Rectangle 4"/>
           <p:cNvSpPr/>
           <p:nvPr/>
         </p:nvSpPr>
         <p:spPr>
           <a:xfrm>
-            <a:off x="640080" y="1417320"/>
-            <a:ext cx="5349240" cy="960120"/>
+            <a:off x="530352" y="1188720"/>
+            <a:ext cx="548640" cy="38100"/>
+          </a:xfrm>
+          <a:prstGeom prst="rect">
+            <a:avLst/>
+          </a:prstGeom>
+          <a:solidFill>
+            <a:srgbClr val="4F46E5"/>
+          </a:solidFill>
+          <a:ln>
+            <a:noFill/>
+          </a:ln>
+          <a:effectLst/>
+        </p:spPr>
+        <p:style>
+          <a:lnRef idx="1">
+            <a:schemeClr val="accent1"/>
+          </a:lnRef>
+          <a:fillRef idx="3">
+            <a:schemeClr val="accent1"/>
+          </a:fillRef>
+          <a:effectRef idx="2">
+            <a:schemeClr val="accent1"/>
+          </a:effectRef>
+          <a:fontRef idx="minor">
+            <a:schemeClr val="lt1"/>
+          </a:fontRef>
+        </p:style>
+        <p:txBody>
+          <a:bodyPr rtlCol="0" anchor="ctr"/>
+          <a:lstStyle/>
+          <a:p>
+            <a:pPr algn="ctr"/>
+          </a:p>
+        </p:txBody>
+      </p:sp>
+      <p:sp>
+        <p:nvSpPr>
+          <p:cNvPr id="6" name="Rounded Rectangle 5"/>
+          <p:cNvSpPr/>
+          <p:nvPr/>
+        </p:nvSpPr>
+        <p:spPr>
+          <a:xfrm>
+            <a:off x="640080" y="1490472"/>
+            <a:ext cx="5349240" cy="914400"/>
+          </a:xfrm>
+          <a:prstGeom prst="roundRect">
+            <a:avLst/>
+          </a:prstGeom>
+          <a:solidFill>
+            <a:srgbClr val="4F46E5"/>
+          </a:solidFill>
+          <a:ln w="12700">
+            <a:solidFill>
+              <a:srgbClr val="4F46E5"/>
+            </a:solidFill>
+          </a:ln>
+          <a:effectLst/>
+        </p:spPr>
+        <p:style>
+          <a:lnRef idx="1">
+            <a:schemeClr val="accent1"/>
+          </a:lnRef>
+          <a:fillRef idx="3">
+            <a:schemeClr val="accent1"/>
+          </a:fillRef>
+          <a:effectRef idx="2">
+            <a:schemeClr val="accent1"/>
+          </a:effectRef>
+          <a:fontRef idx="minor">
+            <a:schemeClr val="lt1"/>
+          </a:fontRef>
+        </p:style>
+        <p:txBody>
+          <a:bodyPr rtlCol="0" anchor="ctr" wrap="square" lIns="182880" tIns="91440"/>
+          <a:lstStyle/>
+          <a:p>
+            <a:pPr algn="ctr"/>
+            <a:r>
+              <a:rPr b="1" sz="1450">
+                <a:solidFill>
+                  <a:srgbClr val="FFFFFF"/>
+                </a:solidFill>
+                <a:latin typeface="Segoe UI"/>
+              </a:rPr>
+              <a:t>Supervisor</a:t>
+            </a:r>
+          </a:p>
+          <a:p>
+            <a:r>
+              <a:rPr sz="1100">
+                <a:solidFill>
+                  <a:srgbClr val="E0E7FF"/>
+                </a:solidFill>
+                <a:latin typeface="Segoe UI"/>
+              </a:rPr>
+              <a:t>Plans work, routes documents, aggregates results</a:t>
+            </a:r>
+          </a:p>
+        </p:txBody>
+      </p:sp>
+      <p:sp>
+        <p:nvSpPr>
+          <p:cNvPr id="7" name="Rounded Rectangle 6"/>
+          <p:cNvSpPr/>
+          <p:nvPr/>
+        </p:nvSpPr>
+        <p:spPr>
+          <a:xfrm>
+            <a:off x="640080" y="2532887"/>
+            <a:ext cx="5349240" cy="914400"/>
           </a:xfrm>
           <a:prstGeom prst="roundRect">
             <a:avLst/>
@@ -4771,44 +6195,43 @@
           </a:fontRef>
         </p:style>
         <p:txBody>
-          <a:bodyPr rtlCol="0" anchor="ctr" wrap="square" lIns="164592" tIns="91440"/>
-          <a:lstStyle/>
-          <a:p>
-            <a:pPr algn="ctr">
-              <a:defRPr b="1" sz="1500">
+          <a:bodyPr rtlCol="0" anchor="ctr" wrap="square" lIns="182880" tIns="91440"/>
+          <a:lstStyle/>
+          <a:p>
+            <a:pPr algn="ctr"/>
+            <a:r>
+              <a:rPr b="1" sz="1450">
                 <a:solidFill>
                   <a:srgbClr val="1E293B"/>
                 </a:solidFill>
-              </a:defRPr>
-            </a:pPr>
-            <a:r>
-              <a:t>Supervisor</a:t>
-            </a:r>
-          </a:p>
-          <a:p>
-            <a:pPr>
-              <a:defRPr sz="1150">
+                <a:latin typeface="Segoe UI"/>
+              </a:rPr>
+              <a:t>Document Ingestion</a:t>
+            </a:r>
+          </a:p>
+          <a:p>
+            <a:r>
+              <a:rPr sz="1100">
                 <a:solidFill>
                   <a:srgbClr val="475569"/>
                 </a:solidFill>
-              </a:defRPr>
-            </a:pPr>
-            <a:r>
-              <a:t>Plans work, routes documents, aggregates results</a:t>
-            </a:r>
-          </a:p>
-        </p:txBody>
-      </p:sp>
-      <p:sp>
-        <p:nvSpPr>
-          <p:cNvPr id="5" name="Rounded Rectangle 4"/>
+                <a:latin typeface="Segoe UI"/>
+              </a:rPr>
+              <a:t>PDF / DOCX / PPTX / XLSX → structured text &amp; tables</a:t>
+            </a:r>
+          </a:p>
+        </p:txBody>
+      </p:sp>
+      <p:sp>
+        <p:nvSpPr>
+          <p:cNvPr id="8" name="Rounded Rectangle 7"/>
           <p:cNvSpPr/>
           <p:nvPr/>
         </p:nvSpPr>
         <p:spPr>
           <a:xfrm>
-            <a:off x="640080" y="2532888"/>
-            <a:ext cx="5349240" cy="960120"/>
+            <a:off x="640080" y="3575302"/>
+            <a:ext cx="5349240" cy="914400"/>
           </a:xfrm>
           <a:prstGeom prst="roundRect">
             <a:avLst/>
@@ -4838,44 +6261,43 @@
           </a:fontRef>
         </p:style>
         <p:txBody>
-          <a:bodyPr rtlCol="0" anchor="ctr" wrap="square" lIns="164592" tIns="91440"/>
-          <a:lstStyle/>
-          <a:p>
-            <a:pPr algn="ctr">
-              <a:defRPr b="1" sz="1500">
+          <a:bodyPr rtlCol="0" anchor="ctr" wrap="square" lIns="182880" tIns="91440"/>
+          <a:lstStyle/>
+          <a:p>
+            <a:pPr algn="ctr"/>
+            <a:r>
+              <a:rPr b="1" sz="1450">
                 <a:solidFill>
                   <a:srgbClr val="1E293B"/>
                 </a:solidFill>
-              </a:defRPr>
-            </a:pPr>
-            <a:r>
-              <a:t>Document Ingestion</a:t>
-            </a:r>
-          </a:p>
-          <a:p>
-            <a:pPr>
-              <a:defRPr sz="1150">
+                <a:latin typeface="Segoe UI"/>
+              </a:rPr>
+              <a:t>Vision / OCR</a:t>
+            </a:r>
+          </a:p>
+          <a:p>
+            <a:r>
+              <a:rPr sz="1100">
                 <a:solidFill>
                   <a:srgbClr val="475569"/>
                 </a:solidFill>
-              </a:defRPr>
-            </a:pPr>
-            <a:r>
-              <a:t>PDF / DOCX / PPTX / XLSX → structured text &amp; tables</a:t>
-            </a:r>
-          </a:p>
-        </p:txBody>
-      </p:sp>
-      <p:sp>
-        <p:nvSpPr>
-          <p:cNvPr id="6" name="Rounded Rectangle 5"/>
+                <a:latin typeface="Segoe UI"/>
+              </a:rPr>
+              <a:t>Scanned forms, screenshots → text (vision LLM)</a:t>
+            </a:r>
+          </a:p>
+        </p:txBody>
+      </p:sp>
+      <p:sp>
+        <p:nvSpPr>
+          <p:cNvPr id="9" name="Rounded Rectangle 8"/>
           <p:cNvSpPr/>
           <p:nvPr/>
         </p:nvSpPr>
         <p:spPr>
           <a:xfrm>
-            <a:off x="640080" y="3648456"/>
-            <a:ext cx="5349240" cy="960120"/>
+            <a:off x="640080" y="4617717"/>
+            <a:ext cx="5349240" cy="914400"/>
           </a:xfrm>
           <a:prstGeom prst="roundRect">
             <a:avLst/>
@@ -4905,44 +6327,43 @@
           </a:fontRef>
         </p:style>
         <p:txBody>
-          <a:bodyPr rtlCol="0" anchor="ctr" wrap="square" lIns="164592" tIns="91440"/>
-          <a:lstStyle/>
-          <a:p>
-            <a:pPr algn="ctr">
-              <a:defRPr b="1" sz="1500">
+          <a:bodyPr rtlCol="0" anchor="ctr" wrap="square" lIns="182880" tIns="91440"/>
+          <a:lstStyle/>
+          <a:p>
+            <a:pPr algn="ctr"/>
+            <a:r>
+              <a:rPr b="1" sz="1450">
                 <a:solidFill>
                   <a:srgbClr val="1E293B"/>
                 </a:solidFill>
-              </a:defRPr>
-            </a:pPr>
-            <a:r>
-              <a:t>Vision / OCR</a:t>
-            </a:r>
-          </a:p>
-          <a:p>
-            <a:pPr>
-              <a:defRPr sz="1150">
+                <a:latin typeface="Segoe UI"/>
+              </a:rPr>
+              <a:t>Data Analyst</a:t>
+            </a:r>
+          </a:p>
+          <a:p>
+            <a:r>
+              <a:rPr sz="1100">
                 <a:solidFill>
                   <a:srgbClr val="475569"/>
                 </a:solidFill>
-              </a:defRPr>
-            </a:pPr>
-            <a:r>
-              <a:t>Scanned forms, screenshots → text (vision LLM)</a:t>
-            </a:r>
-          </a:p>
-        </p:txBody>
-      </p:sp>
-      <p:sp>
-        <p:nvSpPr>
-          <p:cNvPr id="7" name="Rounded Rectangle 6"/>
+                <a:latin typeface="Segoe UI"/>
+              </a:rPr>
+              <a:t>pandas over enrollment/results, optional web-search context</a:t>
+            </a:r>
+          </a:p>
+        </p:txBody>
+      </p:sp>
+      <p:sp>
+        <p:nvSpPr>
+          <p:cNvPr id="10" name="Rounded Rectangle 9"/>
           <p:cNvSpPr/>
           <p:nvPr/>
         </p:nvSpPr>
         <p:spPr>
           <a:xfrm>
-            <a:off x="640080" y="4764024"/>
-            <a:ext cx="5349240" cy="960120"/>
+            <a:off x="6263640" y="1490472"/>
+            <a:ext cx="5349240" cy="914400"/>
           </a:xfrm>
           <a:prstGeom prst="roundRect">
             <a:avLst/>
@@ -4972,44 +6393,43 @@
           </a:fontRef>
         </p:style>
         <p:txBody>
-          <a:bodyPr rtlCol="0" anchor="ctr" wrap="square" lIns="164592" tIns="91440"/>
-          <a:lstStyle/>
-          <a:p>
-            <a:pPr algn="ctr">
-              <a:defRPr b="1" sz="1500">
+          <a:bodyPr rtlCol="0" anchor="ctr" wrap="square" lIns="182880" tIns="91440"/>
+          <a:lstStyle/>
+          <a:p>
+            <a:pPr algn="ctr"/>
+            <a:r>
+              <a:rPr b="1" sz="1450">
                 <a:solidFill>
                   <a:srgbClr val="1E293B"/>
                 </a:solidFill>
-              </a:defRPr>
-            </a:pPr>
-            <a:r>
-              <a:t>Data Analyst</a:t>
-            </a:r>
-          </a:p>
-          <a:p>
-            <a:pPr>
-              <a:defRPr sz="1150">
+                <a:latin typeface="Segoe UI"/>
+              </a:rPr>
+              <a:t>Social Intelligence</a:t>
+            </a:r>
+          </a:p>
+          <a:p>
+            <a:r>
+              <a:rPr sz="1100">
                 <a:solidFill>
                   <a:srgbClr val="475569"/>
                 </a:solidFill>
-              </a:defRPr>
-            </a:pPr>
-            <a:r>
-              <a:t>pandas over enrollment/results, optional web-search context</a:t>
-            </a:r>
-          </a:p>
-        </p:txBody>
-      </p:sp>
-      <p:sp>
-        <p:nvSpPr>
-          <p:cNvPr id="8" name="Rounded Rectangle 7"/>
+                <a:latin typeface="Segoe UI"/>
+              </a:rPr>
+              <a:t>Facebook comments → sentiment (live API or CSV import)</a:t>
+            </a:r>
+          </a:p>
+        </p:txBody>
+      </p:sp>
+      <p:sp>
+        <p:nvSpPr>
+          <p:cNvPr id="11" name="Rounded Rectangle 10"/>
           <p:cNvSpPr/>
           <p:nvPr/>
         </p:nvSpPr>
         <p:spPr>
           <a:xfrm>
-            <a:off x="6263640" y="1417320"/>
-            <a:ext cx="5349240" cy="960120"/>
+            <a:off x="6263640" y="2532887"/>
+            <a:ext cx="5349240" cy="914400"/>
           </a:xfrm>
           <a:prstGeom prst="roundRect">
             <a:avLst/>
@@ -5039,44 +6459,43 @@
           </a:fontRef>
         </p:style>
         <p:txBody>
-          <a:bodyPr rtlCol="0" anchor="ctr" wrap="square" lIns="164592" tIns="91440"/>
-          <a:lstStyle/>
-          <a:p>
-            <a:pPr algn="ctr">
-              <a:defRPr b="1" sz="1500">
+          <a:bodyPr rtlCol="0" anchor="ctr" wrap="square" lIns="182880" tIns="91440"/>
+          <a:lstStyle/>
+          <a:p>
+            <a:pPr algn="ctr"/>
+            <a:r>
+              <a:rPr b="1" sz="1450">
                 <a:solidFill>
                   <a:srgbClr val="1E293B"/>
                 </a:solidFill>
-              </a:defRPr>
-            </a:pPr>
-            <a:r>
-              <a:t>Social Intelligence</a:t>
-            </a:r>
-          </a:p>
-          <a:p>
-            <a:pPr>
-              <a:defRPr sz="1150">
+                <a:latin typeface="Segoe UI"/>
+              </a:rPr>
+              <a:t>Knowledge / RAG</a:t>
+            </a:r>
+          </a:p>
+          <a:p>
+            <a:r>
+              <a:rPr sz="1100">
                 <a:solidFill>
                   <a:srgbClr val="475569"/>
                 </a:solidFill>
-              </a:defRPr>
-            </a:pPr>
-            <a:r>
-              <a:t>Facebook comments → sentiment (live API or CSV import)</a:t>
-            </a:r>
-          </a:p>
-        </p:txBody>
-      </p:sp>
-      <p:sp>
-        <p:nvSpPr>
-          <p:cNvPr id="9" name="Rounded Rectangle 8"/>
+                <a:latin typeface="Segoe UI"/>
+              </a:rPr>
+              <a:t>Chroma-backed semantic memory shared across the run</a:t>
+            </a:r>
+          </a:p>
+        </p:txBody>
+      </p:sp>
+      <p:sp>
+        <p:nvSpPr>
+          <p:cNvPr id="12" name="Rounded Rectangle 11"/>
           <p:cNvSpPr/>
           <p:nvPr/>
         </p:nvSpPr>
         <p:spPr>
           <a:xfrm>
-            <a:off x="6263640" y="2532888"/>
-            <a:ext cx="5349240" cy="960120"/>
+            <a:off x="6263640" y="3575302"/>
+            <a:ext cx="5349240" cy="914400"/>
           </a:xfrm>
           <a:prstGeom prst="roundRect">
             <a:avLst/>
@@ -5106,44 +6525,43 @@
           </a:fontRef>
         </p:style>
         <p:txBody>
-          <a:bodyPr rtlCol="0" anchor="ctr" wrap="square" lIns="164592" tIns="91440"/>
-          <a:lstStyle/>
-          <a:p>
-            <a:pPr algn="ctr">
-              <a:defRPr b="1" sz="1500">
+          <a:bodyPr rtlCol="0" anchor="ctr" wrap="square" lIns="182880" tIns="91440"/>
+          <a:lstStyle/>
+          <a:p>
+            <a:pPr algn="ctr"/>
+            <a:r>
+              <a:rPr b="1" sz="1450">
                 <a:solidFill>
                   <a:srgbClr val="1E293B"/>
                 </a:solidFill>
-              </a:defRPr>
-            </a:pPr>
-            <a:r>
-              <a:t>Knowledge / RAG</a:t>
-            </a:r>
-          </a:p>
-          <a:p>
-            <a:pPr>
-              <a:defRPr sz="1150">
+                <a:latin typeface="Segoe UI"/>
+              </a:rPr>
+              <a:t>Report Generator</a:t>
+            </a:r>
+          </a:p>
+          <a:p>
+            <a:r>
+              <a:rPr sz="1100">
                 <a:solidFill>
                   <a:srgbClr val="475569"/>
                 </a:solidFill>
-              </a:defRPr>
-            </a:pPr>
-            <a:r>
-              <a:t>Chroma-backed semantic memory shared across the run</a:t>
-            </a:r>
-          </a:p>
-        </p:txBody>
-      </p:sp>
-      <p:sp>
-        <p:nvSpPr>
-          <p:cNvPr id="10" name="Rounded Rectangle 9"/>
+                <a:latin typeface="Segoe UI"/>
+              </a:rPr>
+              <a:t>Compiles a cited DOCX + PPTX report</a:t>
+            </a:r>
+          </a:p>
+        </p:txBody>
+      </p:sp>
+      <p:sp>
+        <p:nvSpPr>
+          <p:cNvPr id="13" name="Rounded Rectangle 12"/>
           <p:cNvSpPr/>
           <p:nvPr/>
         </p:nvSpPr>
         <p:spPr>
           <a:xfrm>
-            <a:off x="6263640" y="3648456"/>
-            <a:ext cx="5349240" cy="960120"/>
+            <a:off x="6263640" y="4617717"/>
+            <a:ext cx="5349240" cy="914400"/>
           </a:xfrm>
           <a:prstGeom prst="roundRect">
             <a:avLst/>
@@ -5173,55 +6591,90 @@
           </a:fontRef>
         </p:style>
         <p:txBody>
-          <a:bodyPr rtlCol="0" anchor="ctr" wrap="square" lIns="164592" tIns="91440"/>
-          <a:lstStyle/>
-          <a:p>
-            <a:pPr algn="ctr">
-              <a:defRPr b="1" sz="1500">
+          <a:bodyPr rtlCol="0" anchor="ctr" wrap="square" lIns="182880" tIns="91440"/>
+          <a:lstStyle/>
+          <a:p>
+            <a:pPr algn="ctr"/>
+            <a:r>
+              <a:rPr b="1" sz="1450">
                 <a:solidFill>
                   <a:srgbClr val="1E293B"/>
                 </a:solidFill>
+                <a:latin typeface="Segoe UI"/>
+              </a:rPr>
+              <a:t>QA / Critic</a:t>
+            </a:r>
+          </a:p>
+          <a:p>
+            <a:r>
+              <a:rPr sz="1100">
+                <a:solidFill>
+                  <a:srgbClr val="475569"/>
+                </a:solidFill>
+                <a:latin typeface="Segoe UI"/>
+              </a:rPr>
+              <a:t>Fact-checks the draft against source data before a human sees it</a:t>
+            </a:r>
+          </a:p>
+        </p:txBody>
+      </p:sp>
+      <p:sp>
+        <p:nvSpPr>
+          <p:cNvPr id="14" name="TextBox 13"/>
+          <p:cNvSpPr txBox="1"/>
+          <p:nvPr/>
+        </p:nvSpPr>
+        <p:spPr>
+          <a:xfrm>
+            <a:off x="502920" y="6492240"/>
+            <a:ext cx="5486400" cy="274320"/>
+          </a:xfrm>
+          <a:prstGeom prst="rect">
+            <a:avLst/>
+          </a:prstGeom>
+          <a:noFill/>
+        </p:spPr>
+        <p:txBody>
+          <a:bodyPr wrap="none">
+            <a:spAutoFit/>
+          </a:bodyPr>
+          <a:lstStyle/>
+          <a:p>
+            <a:pPr>
+              <a:defRPr sz="950">
+                <a:solidFill>
+                  <a:srgbClr val="64748B"/>
+                </a:solidFill>
+                <a:latin typeface="Segoe UI"/>
               </a:defRPr>
             </a:pPr>
             <a:r>
-              <a:t>Report Generator</a:t>
-            </a:r>
-          </a:p>
-          <a:p>
-            <a:pPr>
-              <a:defRPr sz="1150">
-                <a:solidFill>
-                  <a:srgbClr val="475569"/>
-                </a:solidFill>
-              </a:defRPr>
-            </a:pPr>
-            <a:r>
-              <a:t>Compiles a cited DOCX + PPTX report</a:t>
-            </a:r>
-          </a:p>
-        </p:txBody>
-      </p:sp>
-      <p:sp>
-        <p:nvSpPr>
-          <p:cNvPr id="11" name="Rounded Rectangle 10"/>
+              <a:t>Education AI Analyst</a:t>
+            </a:r>
+          </a:p>
+        </p:txBody>
+      </p:sp>
+      <p:sp>
+        <p:nvSpPr>
+          <p:cNvPr id="15" name="Rounded Rectangle 14"/>
           <p:cNvSpPr/>
           <p:nvPr/>
         </p:nvSpPr>
         <p:spPr>
           <a:xfrm>
-            <a:off x="6263640" y="4764024"/>
-            <a:ext cx="5349240" cy="960120"/>
+            <a:off x="11475720" y="320040"/>
+            <a:ext cx="457200" cy="292608"/>
           </a:xfrm>
           <a:prstGeom prst="roundRect">
-            <a:avLst/>
+            <a:avLst>
+              <a:gd name="adj" fmla="val 50000"/>
+            </a:avLst>
           </a:prstGeom>
           <a:solidFill>
-            <a:srgbClr val="EEF2FF"/>
+            <a:srgbClr val="4F46E5"/>
           </a:solidFill>
-          <a:ln w="12700">
-            <a:solidFill>
-              <a:srgbClr val="4F46E5"/>
-            </a:solidFill>
+          <a:ln>
+            <a:noFill/>
           </a:ln>
           <a:effectLst/>
         </p:spPr>
@@ -5240,100 +6693,18 @@
           </a:fontRef>
         </p:style>
         <p:txBody>
-          <a:bodyPr rtlCol="0" anchor="ctr" wrap="square" lIns="164592" tIns="91440"/>
-          <a:lstStyle/>
-          <a:p>
-            <a:pPr algn="ctr">
-              <a:defRPr b="1" sz="1500">
-                <a:solidFill>
-                  <a:srgbClr val="1E293B"/>
-                </a:solidFill>
-              </a:defRPr>
-            </a:pPr>
-            <a:r>
-              <a:t>QA / Critic</a:t>
-            </a:r>
-          </a:p>
-          <a:p>
-            <a:pPr>
-              <a:defRPr sz="1150">
-                <a:solidFill>
-                  <a:srgbClr val="475569"/>
-                </a:solidFill>
-              </a:defRPr>
-            </a:pPr>
-            <a:r>
-              <a:t>Fact-checks the draft against source data before a human sees it</a:t>
-            </a:r>
-          </a:p>
-        </p:txBody>
-      </p:sp>
-      <p:sp>
-        <p:nvSpPr>
-          <p:cNvPr id="12" name="TextBox 11"/>
-          <p:cNvSpPr txBox="1"/>
-          <p:nvPr/>
-        </p:nvSpPr>
-        <p:spPr>
-          <a:xfrm>
-            <a:off x="457200" y="6473952"/>
-            <a:ext cx="5486400" cy="320040"/>
-          </a:xfrm>
-          <a:prstGeom prst="rect">
-            <a:avLst/>
-          </a:prstGeom>
-          <a:noFill/>
-        </p:spPr>
-        <p:txBody>
-          <a:bodyPr wrap="none">
-            <a:spAutoFit/>
-          </a:bodyPr>
-          <a:lstStyle/>
-          <a:p>
-            <a:pPr>
-              <a:defRPr sz="1000">
-                <a:solidFill>
-                  <a:srgbClr val="64748B"/>
-                </a:solidFill>
-              </a:defRPr>
-            </a:pPr>
-            <a:r>
-              <a:t>Education AI Analyst</a:t>
-            </a:r>
-          </a:p>
-        </p:txBody>
-      </p:sp>
-      <p:sp>
-        <p:nvSpPr>
-          <p:cNvPr id="13" name="TextBox 12"/>
-          <p:cNvSpPr txBox="1"/>
-          <p:nvPr/>
-        </p:nvSpPr>
-        <p:spPr>
-          <a:xfrm>
-            <a:off x="11247120" y="6473952"/>
-            <a:ext cx="640080" cy="320040"/>
-          </a:xfrm>
-          <a:prstGeom prst="rect">
-            <a:avLst/>
-          </a:prstGeom>
-          <a:noFill/>
-        </p:spPr>
-        <p:txBody>
-          <a:bodyPr wrap="none">
-            <a:spAutoFit/>
-          </a:bodyPr>
-          <a:lstStyle/>
-          <a:p>
-            <a:pPr algn="r">
-              <a:defRPr sz="1000">
-                <a:solidFill>
-                  <a:srgbClr val="64748B"/>
-                </a:solidFill>
-              </a:defRPr>
-            </a:pPr>
-            <a:r>
-              <a:t>5</a:t>
+          <a:bodyPr rtlCol="0" anchor="ctr" lIns="0" rIns="0" tIns="0" bIns="0"/>
+          <a:lstStyle/>
+          <a:p>
+            <a:pPr algn="ctr"/>
+            <a:r>
+              <a:rPr sz="1200" b="1">
+                <a:solidFill>
+                  <a:srgbClr val="FFFFFF"/>
+                </a:solidFill>
+                <a:latin typeface="Segoe UI"/>
+              </a:rPr>
+              <a:t>05</a:t>
             </a:r>
           </a:p>
         </p:txBody>
@@ -5384,6 +6755,7 @@
           <a:ln>
             <a:noFill/>
           </a:ln>
+          <a:effectLst/>
         </p:spPr>
         <p:style>
           <a:lnRef idx="1">
@@ -5415,8 +6787,8 @@
         </p:nvSpPr>
         <p:spPr>
           <a:xfrm>
-            <a:off x="502920" y="365760"/>
-            <a:ext cx="10972800" cy="822960"/>
+            <a:off x="502920" y="292608"/>
+            <a:ext cx="9144000" cy="274320"/>
           </a:xfrm>
           <a:prstGeom prst="rect">
             <a:avLst/>
@@ -5430,13 +6802,51 @@
           <a:lstStyle/>
           <a:p>
             <a:pPr>
-              <a:defRPr sz="3200" b="1">
+              <a:spcAft>
+                <a:spcPts val="0"/>
+              </a:spcAft>
+            </a:pPr>
+            <a:r>
+              <a:rPr sz="1100" b="1">
+                <a:solidFill>
+                  <a:srgbClr val="4F46E5"/>
+                </a:solidFill>
+                <a:latin typeface="Segoe UI"/>
+              </a:rPr>
+              <a:t>05 · DESIGN DECISION</a:t>
+            </a:r>
+          </a:p>
+        </p:txBody>
+      </p:sp>
+      <p:sp>
+        <p:nvSpPr>
+          <p:cNvPr id="4" name="TextBox 3"/>
+          <p:cNvSpPr txBox="1"/>
+          <p:nvPr/>
+        </p:nvSpPr>
+        <p:spPr>
+          <a:xfrm>
+            <a:off x="502920" y="530352"/>
+            <a:ext cx="10424160" cy="822960"/>
+          </a:xfrm>
+          <a:prstGeom prst="rect">
+            <a:avLst/>
+          </a:prstGeom>
+          <a:noFill/>
+        </p:spPr>
+        <p:txBody>
+          <a:bodyPr wrap="none">
+            <a:spAutoFit/>
+          </a:bodyPr>
+          <a:lstStyle/>
+          <a:p>
+            <a:r>
+              <a:rPr sz="3000" b="1">
                 <a:solidFill>
                   <a:srgbClr val="1E293B"/>
                 </a:solidFill>
-              </a:defRPr>
-            </a:pPr>
-            <a:r>
+                <a:latin typeface="Segoe UI"/>
+              </a:rPr>
               <a:t>Two Collaboration Patterns, Chosen Deliberately</a:t>
             </a:r>
           </a:p>
@@ -5444,14 +6854,58 @@
       </p:sp>
       <p:sp>
         <p:nvSpPr>
-          <p:cNvPr id="4" name="Rounded Rectangle 3"/>
+          <p:cNvPr id="5" name="Rectangle 4"/>
           <p:cNvSpPr/>
           <p:nvPr/>
         </p:nvSpPr>
         <p:spPr>
           <a:xfrm>
-            <a:off x="640080" y="1463040"/>
-            <a:ext cx="5212080" cy="4206240"/>
+            <a:off x="530352" y="1188720"/>
+            <a:ext cx="548640" cy="38100"/>
+          </a:xfrm>
+          <a:prstGeom prst="rect">
+            <a:avLst/>
+          </a:prstGeom>
+          <a:solidFill>
+            <a:srgbClr val="4F46E5"/>
+          </a:solidFill>
+          <a:ln>
+            <a:noFill/>
+          </a:ln>
+          <a:effectLst/>
+        </p:spPr>
+        <p:style>
+          <a:lnRef idx="1">
+            <a:schemeClr val="accent1"/>
+          </a:lnRef>
+          <a:fillRef idx="3">
+            <a:schemeClr val="accent1"/>
+          </a:fillRef>
+          <a:effectRef idx="2">
+            <a:schemeClr val="accent1"/>
+          </a:effectRef>
+          <a:fontRef idx="minor">
+            <a:schemeClr val="lt1"/>
+          </a:fontRef>
+        </p:style>
+        <p:txBody>
+          <a:bodyPr rtlCol="0" anchor="ctr"/>
+          <a:lstStyle/>
+          <a:p>
+            <a:pPr algn="ctr"/>
+          </a:p>
+        </p:txBody>
+      </p:sp>
+      <p:sp>
+        <p:nvSpPr>
+          <p:cNvPr id="6" name="Rounded Rectangle 5"/>
+          <p:cNvSpPr/>
+          <p:nvPr/>
+        </p:nvSpPr>
+        <p:spPr>
+          <a:xfrm>
+            <a:off x="640080" y="1490472"/>
+            <a:ext cx="5212080" cy="3977639"/>
           </a:xfrm>
           <a:prstGeom prst="roundRect">
             <a:avLst/>
@@ -5461,9 +6915,10 @@
           </a:solidFill>
           <a:ln>
             <a:solidFill>
-              <a:srgbClr val="94A3B8"/>
+              <a:srgbClr val="CBD5E1"/>
             </a:solidFill>
           </a:ln>
+          <a:effectLst/>
         </p:spPr>
         <p:style>
           <a:lnRef idx="1">
@@ -5483,14 +6938,14 @@
           <a:bodyPr rtlCol="0" anchor="ctr" wrap="square" lIns="274320" tIns="228600"/>
           <a:lstStyle/>
           <a:p>
-            <a:pPr algn="ctr">
-              <a:defRPr b="1" sz="1900">
+            <a:pPr algn="ctr"/>
+            <a:r>
+              <a:rPr b="1" sz="1800">
                 <a:solidFill>
                   <a:srgbClr val="4F46E5"/>
                 </a:solidFill>
-              </a:defRPr>
-            </a:pPr>
-            <a:r>
+                <a:latin typeface="Segoe UI"/>
+              </a:rPr>
               <a:t>Intake Graph — Supervisor Hub</a:t>
             </a:r>
           </a:p>
@@ -5499,13 +6954,14 @@
               <a:spcBef>
                 <a:spcPts val="1200"/>
               </a:spcBef>
-              <a:defRPr sz="1500">
+            </a:pPr>
+            <a:r>
+              <a:rPr sz="1450">
                 <a:solidFill>
                   <a:srgbClr val="475569"/>
                 </a:solidFill>
-              </a:defRPr>
-            </a:pPr>
-            <a:r>
+                <a:latin typeface="Segoe UI"/>
+              </a:rPr>
               <a:t>A type-based dispatch problem.</a:t>
             </a:r>
           </a:p>
@@ -5514,13 +6970,14 @@
               <a:spcBef>
                 <a:spcPts val="1000"/>
               </a:spcBef>
-              <a:defRPr sz="1450">
+            </a:pPr>
+            <a:r>
+              <a:rPr sz="1400">
                 <a:solidFill>
                   <a:srgbClr val="475569"/>
                 </a:solidFill>
-              </a:defRPr>
-            </a:pPr>
-            <a:r>
+                <a:latin typeface="Segoe UI"/>
+              </a:rPr>
               <a:t>Every worker (Document Ingestion, Vision/OCR, Social Intel) returns control to the Supervisor when done — routing logic stays centralized.</a:t>
             </a:r>
           </a:p>
@@ -5529,13 +6986,14 @@
               <a:spcBef>
                 <a:spcPts val="1400"/>
               </a:spcBef>
-              <a:defRPr sz="1450" i="1">
+            </a:pPr>
+            <a:r>
+              <a:rPr sz="1400" i="1">
                 <a:solidFill>
                   <a:srgbClr val="64748B"/>
                 </a:solidFill>
-              </a:defRPr>
-            </a:pPr>
-            <a:r>
+                <a:latin typeface="Segoe UI"/>
+              </a:rPr>
               <a:t>Adding worker #9 doesn't require touching worker #4's code.</a:t>
             </a:r>
           </a:p>
@@ -5543,14 +7001,14 @@
       </p:sp>
       <p:sp>
         <p:nvSpPr>
-          <p:cNvPr id="5" name="Rounded Rectangle 4"/>
+          <p:cNvPr id="7" name="Rounded Rectangle 6"/>
           <p:cNvSpPr/>
           <p:nvPr/>
         </p:nvSpPr>
         <p:spPr>
           <a:xfrm>
-            <a:off x="6309360" y="1463040"/>
-            <a:ext cx="5212080" cy="4206240"/>
+            <a:off x="6309360" y="1490472"/>
+            <a:ext cx="5212080" cy="3977639"/>
           </a:xfrm>
           <a:prstGeom prst="roundRect">
             <a:avLst/>
@@ -5560,9 +7018,10 @@
           </a:solidFill>
           <a:ln>
             <a:solidFill>
-              <a:srgbClr val="94A3B8"/>
+              <a:srgbClr val="CBD5E1"/>
             </a:solidFill>
           </a:ln>
+          <a:effectLst/>
         </p:spPr>
         <p:style>
           <a:lnRef idx="1">
@@ -5582,14 +7041,14 @@
           <a:bodyPr rtlCol="0" anchor="ctr" wrap="square" lIns="274320" tIns="228600"/>
           <a:lstStyle/>
           <a:p>
-            <a:pPr algn="ctr">
-              <a:defRPr b="1" sz="1900">
+            <a:pPr algn="ctr"/>
+            <a:r>
+              <a:rPr b="1" sz="1800">
                 <a:solidFill>
                   <a:srgbClr val="D97706"/>
                 </a:solidFill>
-              </a:defRPr>
-            </a:pPr>
-            <a:r>
+                <a:latin typeface="Segoe UI"/>
+              </a:rPr>
               <a:t>Report Graph — Direct Chain</a:t>
             </a:r>
           </a:p>
@@ -5598,13 +7057,14 @@
               <a:spcBef>
                 <a:spcPts val="1200"/>
               </a:spcBef>
-              <a:defRPr sz="1500">
+            </a:pPr>
+            <a:r>
+              <a:rPr sz="1450">
                 <a:solidFill>
                   <a:srgbClr val="475569"/>
                 </a:solidFill>
-              </a:defRPr>
-            </a:pPr>
-            <a:r>
+                <a:latin typeface="Segoe UI"/>
+              </a:rPr>
               <a:t>An inherently sequential problem.</a:t>
             </a:r>
           </a:p>
@@ -5613,13 +7073,14 @@
               <a:spcBef>
                 <a:spcPts val="1000"/>
               </a:spcBef>
-              <a:defRPr sz="1450">
+            </a:pPr>
+            <a:r>
+              <a:rPr sz="1400">
                 <a:solidFill>
                   <a:srgbClr val="475569"/>
                 </a:solidFill>
-              </a:defRPr>
-            </a:pPr>
-            <a:r>
+                <a:latin typeface="Segoe UI"/>
+              </a:rPr>
               <a:t>Data Analyst → Knowledge/RAG → Report Generator → QA/Critic → HITL — zero Supervisor node, each agent hands off straight to the next.</a:t>
             </a:r>
           </a:p>
@@ -5628,13 +7089,14 @@
               <a:spcBef>
                 <a:spcPts val="1400"/>
               </a:spcBef>
-              <a:defRPr sz="1450" i="1">
+            </a:pPr>
+            <a:r>
+              <a:rPr sz="1400" i="1">
                 <a:solidFill>
                   <a:srgbClr val="64748B"/>
                 </a:solidFill>
-              </a:defRPr>
-            </a:pPr>
-            <a:r>
+                <a:latin typeface="Segoe UI"/>
+              </a:rPr>
               <a:t>Confirmed straight from the compiled graph objects (.get_graph().draw_mermaid()), not just claimed.</a:t>
             </a:r>
           </a:p>
@@ -5642,14 +7104,69 @@
       </p:sp>
       <p:sp>
         <p:nvSpPr>
-          <p:cNvPr id="6" name="TextBox 5"/>
+          <p:cNvPr id="8" name="Rounded Rectangle 7"/>
+          <p:cNvSpPr/>
+          <p:nvPr/>
+        </p:nvSpPr>
+        <p:spPr>
+          <a:xfrm>
+            <a:off x="640080" y="5650991"/>
+            <a:ext cx="10881360" cy="594360"/>
+          </a:xfrm>
+          <a:prstGeom prst="roundRect">
+            <a:avLst/>
+          </a:prstGeom>
+          <a:solidFill>
+            <a:srgbClr val="EEF2FF"/>
+          </a:solidFill>
+          <a:ln w="12700">
+            <a:solidFill>
+              <a:srgbClr val="4F46E5"/>
+            </a:solidFill>
+          </a:ln>
+          <a:effectLst/>
+        </p:spPr>
+        <p:style>
+          <a:lnRef idx="1">
+            <a:schemeClr val="accent1"/>
+          </a:lnRef>
+          <a:fillRef idx="3">
+            <a:schemeClr val="accent1"/>
+          </a:fillRef>
+          <a:effectRef idx="2">
+            <a:schemeClr val="accent1"/>
+          </a:effectRef>
+          <a:fontRef idx="minor">
+            <a:schemeClr val="lt1"/>
+          </a:fontRef>
+        </p:style>
+        <p:txBody>
+          <a:bodyPr rtlCol="0" anchor="ctr" wrap="square" lIns="228600"/>
+          <a:lstStyle/>
+          <a:p>
+            <a:pPr algn="ctr"/>
+            <a:r>
+              <a:rPr sz="1350" b="1">
+                <a:solidFill>
+                  <a:srgbClr val="4338CA"/>
+                </a:solidFill>
+                <a:latin typeface="Segoe UI"/>
+              </a:rPr>
+              <a:t>The Execution Graph panel renders both live from the running code — the diagram cannot lie or go stale.</a:t>
+            </a:r>
+          </a:p>
+        </p:txBody>
+      </p:sp>
+      <p:sp>
+        <p:nvSpPr>
+          <p:cNvPr id="9" name="TextBox 8"/>
           <p:cNvSpPr txBox="1"/>
           <p:nvPr/>
         </p:nvSpPr>
         <p:spPr>
           <a:xfrm>
-            <a:off x="640080" y="5897880"/>
-            <a:ext cx="10881360" cy="457200"/>
+            <a:off x="502920" y="6492240"/>
+            <a:ext cx="5486400" cy="274320"/>
           </a:xfrm>
           <a:prstGeom prst="rect">
             <a:avLst/>
@@ -5663,48 +7180,14 @@
           <a:lstStyle/>
           <a:p>
             <a:pPr>
-              <a:defRPr sz="1300" b="1">
-                <a:solidFill>
-                  <a:srgbClr val="4F46E5"/>
-                </a:solidFill>
+              <a:defRPr sz="950">
+                <a:solidFill>
+                  <a:srgbClr val="64748B"/>
+                </a:solidFill>
+                <a:latin typeface="Segoe UI"/>
               </a:defRPr>
             </a:pPr>
             <a:r>
-              <a:t>The Execution Graph panel renders both live from the running code — the diagram cannot lie or go stale.</a:t>
-            </a:r>
-          </a:p>
-        </p:txBody>
-      </p:sp>
-      <p:sp>
-        <p:nvSpPr>
-          <p:cNvPr id="7" name="TextBox 6"/>
-          <p:cNvSpPr txBox="1"/>
-          <p:nvPr/>
-        </p:nvSpPr>
-        <p:spPr>
-          <a:xfrm>
-            <a:off x="457200" y="6473952"/>
-            <a:ext cx="5486400" cy="320040"/>
-          </a:xfrm>
-          <a:prstGeom prst="rect">
-            <a:avLst/>
-          </a:prstGeom>
-          <a:noFill/>
-        </p:spPr>
-        <p:txBody>
-          <a:bodyPr wrap="none">
-            <a:spAutoFit/>
-          </a:bodyPr>
-          <a:lstStyle/>
-          <a:p>
-            <a:pPr>
-              <a:defRPr sz="1000">
-                <a:solidFill>
-                  <a:srgbClr val="64748B"/>
-                </a:solidFill>
-              </a:defRPr>
-            </a:pPr>
-            <a:r>
               <a:t>Education AI Analyst</a:t>
             </a:r>
           </a:p>
@@ -5712,35 +7195,55 @@
       </p:sp>
       <p:sp>
         <p:nvSpPr>
-          <p:cNvPr id="8" name="TextBox 7"/>
-          <p:cNvSpPr txBox="1"/>
-          <p:nvPr/>
-        </p:nvSpPr>
-        <p:spPr>
-          <a:xfrm>
-            <a:off x="11247120" y="6473952"/>
-            <a:ext cx="640080" cy="320040"/>
-          </a:xfrm>
-          <a:prstGeom prst="rect">
-            <a:avLst/>
-          </a:prstGeom>
-          <a:noFill/>
-        </p:spPr>
-        <p:txBody>
-          <a:bodyPr wrap="none">
-            <a:spAutoFit/>
-          </a:bodyPr>
-          <a:lstStyle/>
-          <a:p>
-            <a:pPr algn="r">
-              <a:defRPr sz="1000">
-                <a:solidFill>
-                  <a:srgbClr val="64748B"/>
-                </a:solidFill>
-              </a:defRPr>
-            </a:pPr>
-            <a:r>
-              <a:t>6</a:t>
+          <p:cNvPr id="10" name="Rounded Rectangle 9"/>
+          <p:cNvSpPr/>
+          <p:nvPr/>
+        </p:nvSpPr>
+        <p:spPr>
+          <a:xfrm>
+            <a:off x="11475720" y="320040"/>
+            <a:ext cx="457200" cy="292608"/>
+          </a:xfrm>
+          <a:prstGeom prst="roundRect">
+            <a:avLst>
+              <a:gd name="adj" fmla="val 50000"/>
+            </a:avLst>
+          </a:prstGeom>
+          <a:solidFill>
+            <a:srgbClr val="4F46E5"/>
+          </a:solidFill>
+          <a:ln>
+            <a:noFill/>
+          </a:ln>
+          <a:effectLst/>
+        </p:spPr>
+        <p:style>
+          <a:lnRef idx="1">
+            <a:schemeClr val="accent1"/>
+          </a:lnRef>
+          <a:fillRef idx="3">
+            <a:schemeClr val="accent1"/>
+          </a:fillRef>
+          <a:effectRef idx="2">
+            <a:schemeClr val="accent1"/>
+          </a:effectRef>
+          <a:fontRef idx="minor">
+            <a:schemeClr val="lt1"/>
+          </a:fontRef>
+        </p:style>
+        <p:txBody>
+          <a:bodyPr rtlCol="0" anchor="ctr" lIns="0" rIns="0" tIns="0" bIns="0"/>
+          <a:lstStyle/>
+          <a:p>
+            <a:pPr algn="ctr"/>
+            <a:r>
+              <a:rPr sz="1200" b="1">
+                <a:solidFill>
+                  <a:srgbClr val="FFFFFF"/>
+                </a:solidFill>
+                <a:latin typeface="Segoe UI"/>
+              </a:rPr>
+              <a:t>06</a:t>
             </a:r>
           </a:p>
         </p:txBody>
@@ -5791,6 +7294,7 @@
           <a:ln>
             <a:noFill/>
           </a:ln>
+          <a:effectLst/>
         </p:spPr>
         <p:style>
           <a:lnRef idx="1">
@@ -5822,8 +7326,8 @@
         </p:nvSpPr>
         <p:spPr>
           <a:xfrm>
-            <a:off x="502920" y="365760"/>
-            <a:ext cx="10972800" cy="822960"/>
+            <a:off x="502920" y="292608"/>
+            <a:ext cx="9144000" cy="274320"/>
           </a:xfrm>
           <a:prstGeom prst="rect">
             <a:avLst/>
@@ -5837,14 +7341,18 @@
           <a:lstStyle/>
           <a:p>
             <a:pPr>
-              <a:defRPr sz="3200" b="1">
-                <a:solidFill>
-                  <a:srgbClr val="1E293B"/>
-                </a:solidFill>
-              </a:defRPr>
+              <a:spcAft>
+                <a:spcPts val="0"/>
+              </a:spcAft>
             </a:pPr>
             <a:r>
-              <a:t>Key Features</a:t>
+              <a:rPr sz="1100" b="1">
+                <a:solidFill>
+                  <a:srgbClr val="4F46E5"/>
+                </a:solidFill>
+                <a:latin typeface="Segoe UI"/>
+              </a:rPr>
+              <a:t>06 · WHAT MAKES IT WORK</a:t>
             </a:r>
           </a:p>
         </p:txBody>
@@ -5857,8 +7365,139 @@
         </p:nvSpPr>
         <p:spPr>
           <a:xfrm>
-            <a:off x="640080" y="1417320"/>
-            <a:ext cx="10789920" cy="4754880"/>
+            <a:off x="502920" y="530352"/>
+            <a:ext cx="10424160" cy="822960"/>
+          </a:xfrm>
+          <a:prstGeom prst="rect">
+            <a:avLst/>
+          </a:prstGeom>
+          <a:noFill/>
+        </p:spPr>
+        <p:txBody>
+          <a:bodyPr wrap="none">
+            <a:spAutoFit/>
+          </a:bodyPr>
+          <a:lstStyle/>
+          <a:p>
+            <a:r>
+              <a:rPr sz="3000" b="1">
+                <a:solidFill>
+                  <a:srgbClr val="1E293B"/>
+                </a:solidFill>
+                <a:latin typeface="Segoe UI"/>
+              </a:rPr>
+              <a:t>Key Features</a:t>
+            </a:r>
+          </a:p>
+        </p:txBody>
+      </p:sp>
+      <p:sp>
+        <p:nvSpPr>
+          <p:cNvPr id="5" name="Rectangle 4"/>
+          <p:cNvSpPr/>
+          <p:nvPr/>
+        </p:nvSpPr>
+        <p:spPr>
+          <a:xfrm>
+            <a:off x="530352" y="1188720"/>
+            <a:ext cx="548640" cy="38100"/>
+          </a:xfrm>
+          <a:prstGeom prst="rect">
+            <a:avLst/>
+          </a:prstGeom>
+          <a:solidFill>
+            <a:srgbClr val="4F46E5"/>
+          </a:solidFill>
+          <a:ln>
+            <a:noFill/>
+          </a:ln>
+          <a:effectLst/>
+        </p:spPr>
+        <p:style>
+          <a:lnRef idx="1">
+            <a:schemeClr val="accent1"/>
+          </a:lnRef>
+          <a:fillRef idx="3">
+            <a:schemeClr val="accent1"/>
+          </a:fillRef>
+          <a:effectRef idx="2">
+            <a:schemeClr val="accent1"/>
+          </a:effectRef>
+          <a:fontRef idx="minor">
+            <a:schemeClr val="lt1"/>
+          </a:fontRef>
+        </p:style>
+        <p:txBody>
+          <a:bodyPr rtlCol="0" anchor="ctr"/>
+          <a:lstStyle/>
+          <a:p>
+            <a:pPr algn="ctr"/>
+          </a:p>
+        </p:txBody>
+      </p:sp>
+      <p:sp>
+        <p:nvSpPr>
+          <p:cNvPr id="6" name="Oval 5"/>
+          <p:cNvSpPr/>
+          <p:nvPr/>
+        </p:nvSpPr>
+        <p:spPr>
+          <a:xfrm>
+            <a:off x="640080" y="1490472"/>
+            <a:ext cx="384048" cy="384048"/>
+          </a:xfrm>
+          <a:prstGeom prst="ellipse">
+            <a:avLst/>
+          </a:prstGeom>
+          <a:solidFill>
+            <a:srgbClr val="4F46E5"/>
+          </a:solidFill>
+          <a:ln>
+            <a:noFill/>
+          </a:ln>
+          <a:effectLst/>
+        </p:spPr>
+        <p:style>
+          <a:lnRef idx="1">
+            <a:schemeClr val="accent1"/>
+          </a:lnRef>
+          <a:fillRef idx="3">
+            <a:schemeClr val="accent1"/>
+          </a:fillRef>
+          <a:effectRef idx="2">
+            <a:schemeClr val="accent1"/>
+          </a:effectRef>
+          <a:fontRef idx="minor">
+            <a:schemeClr val="lt1"/>
+          </a:fontRef>
+        </p:style>
+        <p:txBody>
+          <a:bodyPr rtlCol="0" anchor="ctr" lIns="0" rIns="0" tIns="0" bIns="0"/>
+          <a:lstStyle/>
+          <a:p>
+            <a:pPr algn="ctr"/>
+            <a:r>
+              <a:rPr sz="1500" b="1">
+                <a:solidFill>
+                  <a:srgbClr val="FFFFFF"/>
+                </a:solidFill>
+                <a:latin typeface="Segoe UI"/>
+              </a:rPr>
+              <a:t>1</a:t>
+            </a:r>
+          </a:p>
+        </p:txBody>
+      </p:sp>
+      <p:sp>
+        <p:nvSpPr>
+          <p:cNvPr id="7" name="TextBox 6"/>
+          <p:cNvSpPr txBox="1"/>
+          <p:nvPr/>
+        </p:nvSpPr>
+        <p:spPr>
+          <a:xfrm>
+            <a:off x="1207008" y="1453896"/>
+            <a:ext cx="10149840" cy="777240"/>
           </a:xfrm>
           <a:prstGeom prst="rect">
             <a:avLst/>
@@ -5875,169 +7514,543 @@
               <a:lnSpc>
                 <a:spcPct val="115000"/>
               </a:lnSpc>
-              <a:spcAft>
-                <a:spcPts val="1400"/>
-              </a:spcAft>
             </a:pPr>
             <a:r>
-              <a:rPr b="1" sz="1650">
+              <a:rPr b="1" sz="1550">
                 <a:solidFill>
                   <a:srgbClr val="1E293B"/>
                 </a:solidFill>
+                <a:latin typeface="Segoe UI"/>
               </a:rPr>
               <a:t>Human-in-the-loop approval.  </a:t>
             </a:r>
             <a:r>
-              <a:rPr sz="1650">
+              <a:rPr sz="1550">
                 <a:solidFill>
                   <a:srgbClr val="475569"/>
                 </a:solidFill>
+                <a:latin typeface="Segoe UI"/>
               </a:rPr>
               <a:t>interrupt() pauses before release — approve, reject with feedback, or retry.</a:t>
             </a:r>
           </a:p>
+        </p:txBody>
+      </p:sp>
+      <p:sp>
+        <p:nvSpPr>
+          <p:cNvPr id="8" name="Oval 7"/>
+          <p:cNvSpPr/>
+          <p:nvPr/>
+        </p:nvSpPr>
+        <p:spPr>
+          <a:xfrm>
+            <a:off x="640080" y="2267712"/>
+            <a:ext cx="384048" cy="384048"/>
+          </a:xfrm>
+          <a:prstGeom prst="ellipse">
+            <a:avLst/>
+          </a:prstGeom>
+          <a:solidFill>
+            <a:srgbClr val="4F46E5"/>
+          </a:solidFill>
+          <a:ln>
+            <a:noFill/>
+          </a:ln>
+          <a:effectLst/>
+        </p:spPr>
+        <p:style>
+          <a:lnRef idx="1">
+            <a:schemeClr val="accent1"/>
+          </a:lnRef>
+          <a:fillRef idx="3">
+            <a:schemeClr val="accent1"/>
+          </a:fillRef>
+          <a:effectRef idx="2">
+            <a:schemeClr val="accent1"/>
+          </a:effectRef>
+          <a:fontRef idx="minor">
+            <a:schemeClr val="lt1"/>
+          </a:fontRef>
+        </p:style>
+        <p:txBody>
+          <a:bodyPr rtlCol="0" anchor="ctr" lIns="0" rIns="0" tIns="0" bIns="0"/>
+          <a:lstStyle/>
+          <a:p>
+            <a:pPr algn="ctr"/>
+            <a:r>
+              <a:rPr sz="1500" b="1">
+                <a:solidFill>
+                  <a:srgbClr val="FFFFFF"/>
+                </a:solidFill>
+                <a:latin typeface="Segoe UI"/>
+              </a:rPr>
+              <a:t>2</a:t>
+            </a:r>
+          </a:p>
+        </p:txBody>
+      </p:sp>
+      <p:sp>
+        <p:nvSpPr>
+          <p:cNvPr id="9" name="TextBox 8"/>
+          <p:cNvSpPr txBox="1"/>
+          <p:nvPr/>
+        </p:nvSpPr>
+        <p:spPr>
+          <a:xfrm>
+            <a:off x="1207008" y="2231136"/>
+            <a:ext cx="10149840" cy="777240"/>
+          </a:xfrm>
+          <a:prstGeom prst="rect">
+            <a:avLst/>
+          </a:prstGeom>
+          <a:noFill/>
+        </p:spPr>
+        <p:txBody>
+          <a:bodyPr wrap="square">
+            <a:spAutoFit/>
+          </a:bodyPr>
+          <a:lstStyle/>
           <a:p>
             <a:pPr>
               <a:lnSpc>
                 <a:spcPct val="115000"/>
               </a:lnSpc>
-              <a:spcAft>
-                <a:spcPts val="1400"/>
-              </a:spcAft>
             </a:pPr>
             <a:r>
-              <a:rPr b="1" sz="1650">
+              <a:rPr b="1" sz="1550">
                 <a:solidFill>
                   <a:srgbClr val="1E293B"/>
                 </a:solidFill>
+                <a:latin typeface="Segoe UI"/>
               </a:rPr>
               <a:t>Live token &amp; cost tracking.  </a:t>
             </a:r>
             <a:r>
-              <a:rPr sz="1650">
+              <a:rPr sz="1550">
                 <a:solidFill>
                   <a:srgbClr val="475569"/>
                 </a:solidFill>
+                <a:latin typeface="Segoe UI"/>
               </a:rPr>
               <a:t>Every LLM call's tokens and estimated cost recorded per agent, visible in the UI.</a:t>
             </a:r>
           </a:p>
+        </p:txBody>
+      </p:sp>
+      <p:sp>
+        <p:nvSpPr>
+          <p:cNvPr id="10" name="Oval 9"/>
+          <p:cNvSpPr/>
+          <p:nvPr/>
+        </p:nvSpPr>
+        <p:spPr>
+          <a:xfrm>
+            <a:off x="640080" y="3044952"/>
+            <a:ext cx="384048" cy="384048"/>
+          </a:xfrm>
+          <a:prstGeom prst="ellipse">
+            <a:avLst/>
+          </a:prstGeom>
+          <a:solidFill>
+            <a:srgbClr val="4F46E5"/>
+          </a:solidFill>
+          <a:ln>
+            <a:noFill/>
+          </a:ln>
+          <a:effectLst/>
+        </p:spPr>
+        <p:style>
+          <a:lnRef idx="1">
+            <a:schemeClr val="accent1"/>
+          </a:lnRef>
+          <a:fillRef idx="3">
+            <a:schemeClr val="accent1"/>
+          </a:fillRef>
+          <a:effectRef idx="2">
+            <a:schemeClr val="accent1"/>
+          </a:effectRef>
+          <a:fontRef idx="minor">
+            <a:schemeClr val="lt1"/>
+          </a:fontRef>
+        </p:style>
+        <p:txBody>
+          <a:bodyPr rtlCol="0" anchor="ctr" lIns="0" rIns="0" tIns="0" bIns="0"/>
+          <a:lstStyle/>
+          <a:p>
+            <a:pPr algn="ctr"/>
+            <a:r>
+              <a:rPr sz="1500" b="1">
+                <a:solidFill>
+                  <a:srgbClr val="FFFFFF"/>
+                </a:solidFill>
+                <a:latin typeface="Segoe UI"/>
+              </a:rPr>
+              <a:t>3</a:t>
+            </a:r>
+          </a:p>
+        </p:txBody>
+      </p:sp>
+      <p:sp>
+        <p:nvSpPr>
+          <p:cNvPr id="11" name="TextBox 10"/>
+          <p:cNvSpPr txBox="1"/>
+          <p:nvPr/>
+        </p:nvSpPr>
+        <p:spPr>
+          <a:xfrm>
+            <a:off x="1207008" y="3008376"/>
+            <a:ext cx="10149840" cy="777240"/>
+          </a:xfrm>
+          <a:prstGeom prst="rect">
+            <a:avLst/>
+          </a:prstGeom>
+          <a:noFill/>
+        </p:spPr>
+        <p:txBody>
+          <a:bodyPr wrap="square">
+            <a:spAutoFit/>
+          </a:bodyPr>
+          <a:lstStyle/>
           <a:p>
             <a:pPr>
               <a:lnSpc>
                 <a:spcPct val="115000"/>
               </a:lnSpc>
-              <a:spcAft>
-                <a:spcPts val="1400"/>
-              </a:spcAft>
             </a:pPr>
             <a:r>
-              <a:rPr b="1" sz="1650">
+              <a:rPr b="1" sz="1550">
                 <a:solidFill>
                   <a:srgbClr val="1E293B"/>
                 </a:solidFill>
+                <a:latin typeface="Segoe UI"/>
               </a:rPr>
               <a:t>Dual export.  </a:t>
             </a:r>
             <a:r>
-              <a:rPr sz="1650">
+              <a:rPr sz="1550">
                 <a:solidFill>
                   <a:srgbClr val="475569"/>
                 </a:solidFill>
+                <a:latin typeface="Segoe UI"/>
               </a:rPr>
               <a:t>Every approved report is written as both DOCX and PPTX, with citations.</a:t>
             </a:r>
           </a:p>
+        </p:txBody>
+      </p:sp>
+      <p:sp>
+        <p:nvSpPr>
+          <p:cNvPr id="12" name="Oval 11"/>
+          <p:cNvSpPr/>
+          <p:nvPr/>
+        </p:nvSpPr>
+        <p:spPr>
+          <a:xfrm>
+            <a:off x="640080" y="3822192"/>
+            <a:ext cx="384048" cy="384048"/>
+          </a:xfrm>
+          <a:prstGeom prst="ellipse">
+            <a:avLst/>
+          </a:prstGeom>
+          <a:solidFill>
+            <a:srgbClr val="4F46E5"/>
+          </a:solidFill>
+          <a:ln>
+            <a:noFill/>
+          </a:ln>
+          <a:effectLst/>
+        </p:spPr>
+        <p:style>
+          <a:lnRef idx="1">
+            <a:schemeClr val="accent1"/>
+          </a:lnRef>
+          <a:fillRef idx="3">
+            <a:schemeClr val="accent1"/>
+          </a:fillRef>
+          <a:effectRef idx="2">
+            <a:schemeClr val="accent1"/>
+          </a:effectRef>
+          <a:fontRef idx="minor">
+            <a:schemeClr val="lt1"/>
+          </a:fontRef>
+        </p:style>
+        <p:txBody>
+          <a:bodyPr rtlCol="0" anchor="ctr" lIns="0" rIns="0" tIns="0" bIns="0"/>
+          <a:lstStyle/>
+          <a:p>
+            <a:pPr algn="ctr"/>
+            <a:r>
+              <a:rPr sz="1500" b="1">
+                <a:solidFill>
+                  <a:srgbClr val="FFFFFF"/>
+                </a:solidFill>
+                <a:latin typeface="Segoe UI"/>
+              </a:rPr>
+              <a:t>4</a:t>
+            </a:r>
+          </a:p>
+        </p:txBody>
+      </p:sp>
+      <p:sp>
+        <p:nvSpPr>
+          <p:cNvPr id="13" name="TextBox 12"/>
+          <p:cNvSpPr txBox="1"/>
+          <p:nvPr/>
+        </p:nvSpPr>
+        <p:spPr>
+          <a:xfrm>
+            <a:off x="1207008" y="3785616"/>
+            <a:ext cx="10149840" cy="777240"/>
+          </a:xfrm>
+          <a:prstGeom prst="rect">
+            <a:avLst/>
+          </a:prstGeom>
+          <a:noFill/>
+        </p:spPr>
+        <p:txBody>
+          <a:bodyPr wrap="square">
+            <a:spAutoFit/>
+          </a:bodyPr>
+          <a:lstStyle/>
           <a:p>
             <a:pPr>
               <a:lnSpc>
                 <a:spcPct val="115000"/>
               </a:lnSpc>
-              <a:spcAft>
-                <a:spcPts val="1400"/>
-              </a:spcAft>
             </a:pPr>
             <a:r>
-              <a:rPr b="1" sz="1650">
+              <a:rPr b="1" sz="1550">
                 <a:solidFill>
                   <a:srgbClr val="1E293B"/>
                 </a:solidFill>
+                <a:latin typeface="Segoe UI"/>
               </a:rPr>
               <a:t>Two independent Facebook input paths.  </a:t>
             </a:r>
             <a:r>
-              <a:rPr sz="1650">
+              <a:rPr sz="1550">
                 <a:solidFill>
                   <a:srgbClr val="475569"/>
                 </a:solidFill>
+                <a:latin typeface="Segoe UI"/>
               </a:rPr>
               <a:t>CSV import and the live Graph API both feed the exact same sentiment-scoring step.</a:t>
             </a:r>
           </a:p>
+        </p:txBody>
+      </p:sp>
+      <p:sp>
+        <p:nvSpPr>
+          <p:cNvPr id="14" name="Oval 13"/>
+          <p:cNvSpPr/>
+          <p:nvPr/>
+        </p:nvSpPr>
+        <p:spPr>
+          <a:xfrm>
+            <a:off x="640080" y="4599432"/>
+            <a:ext cx="384048" cy="384048"/>
+          </a:xfrm>
+          <a:prstGeom prst="ellipse">
+            <a:avLst/>
+          </a:prstGeom>
+          <a:solidFill>
+            <a:srgbClr val="4F46E5"/>
+          </a:solidFill>
+          <a:ln>
+            <a:noFill/>
+          </a:ln>
+          <a:effectLst/>
+        </p:spPr>
+        <p:style>
+          <a:lnRef idx="1">
+            <a:schemeClr val="accent1"/>
+          </a:lnRef>
+          <a:fillRef idx="3">
+            <a:schemeClr val="accent1"/>
+          </a:fillRef>
+          <a:effectRef idx="2">
+            <a:schemeClr val="accent1"/>
+          </a:effectRef>
+          <a:fontRef idx="minor">
+            <a:schemeClr val="lt1"/>
+          </a:fontRef>
+        </p:style>
+        <p:txBody>
+          <a:bodyPr rtlCol="0" anchor="ctr" lIns="0" rIns="0" tIns="0" bIns="0"/>
+          <a:lstStyle/>
+          <a:p>
+            <a:pPr algn="ctr"/>
+            <a:r>
+              <a:rPr sz="1500" b="1">
+                <a:solidFill>
+                  <a:srgbClr val="FFFFFF"/>
+                </a:solidFill>
+                <a:latin typeface="Segoe UI"/>
+              </a:rPr>
+              <a:t>5</a:t>
+            </a:r>
+          </a:p>
+        </p:txBody>
+      </p:sp>
+      <p:sp>
+        <p:nvSpPr>
+          <p:cNvPr id="15" name="TextBox 14"/>
+          <p:cNvSpPr txBox="1"/>
+          <p:nvPr/>
+        </p:nvSpPr>
+        <p:spPr>
+          <a:xfrm>
+            <a:off x="1207008" y="4562856"/>
+            <a:ext cx="10149840" cy="777240"/>
+          </a:xfrm>
+          <a:prstGeom prst="rect">
+            <a:avLst/>
+          </a:prstGeom>
+          <a:noFill/>
+        </p:spPr>
+        <p:txBody>
+          <a:bodyPr wrap="square">
+            <a:spAutoFit/>
+          </a:bodyPr>
+          <a:lstStyle/>
           <a:p>
             <a:pPr>
               <a:lnSpc>
                 <a:spcPct val="115000"/>
               </a:lnSpc>
-              <a:spcAft>
-                <a:spcPts val="1400"/>
-              </a:spcAft>
             </a:pPr>
             <a:r>
-              <a:rPr b="1" sz="1650">
+              <a:rPr b="1" sz="1550">
                 <a:solidFill>
                   <a:srgbClr val="1E293B"/>
                 </a:solidFill>
+                <a:latin typeface="Segoe UI"/>
               </a:rPr>
               <a:t>Resilient by design.  </a:t>
             </a:r>
             <a:r>
-              <a:rPr sz="1650">
+              <a:rPr sz="1550">
                 <a:solidFill>
                   <a:srgbClr val="475569"/>
                 </a:solidFill>
-              </a:rPr>
-              <a:t>Session state survives a backend restart (SQLite) and a browser refresh (URL-persisted session id) — found and fixed by breaking the app on purpose.</a:t>
-            </a:r>
-          </a:p>
+                <a:latin typeface="Segoe UI"/>
+              </a:rPr>
+              <a:t>Session state survives a backend restart (SQLite) and a browser refresh (URL-persisted session id).</a:t>
+            </a:r>
+          </a:p>
+        </p:txBody>
+      </p:sp>
+      <p:sp>
+        <p:nvSpPr>
+          <p:cNvPr id="16" name="Oval 15"/>
+          <p:cNvSpPr/>
+          <p:nvPr/>
+        </p:nvSpPr>
+        <p:spPr>
+          <a:xfrm>
+            <a:off x="640080" y="5376672"/>
+            <a:ext cx="384048" cy="384048"/>
+          </a:xfrm>
+          <a:prstGeom prst="ellipse">
+            <a:avLst/>
+          </a:prstGeom>
+          <a:solidFill>
+            <a:srgbClr val="4F46E5"/>
+          </a:solidFill>
+          <a:ln>
+            <a:noFill/>
+          </a:ln>
+          <a:effectLst/>
+        </p:spPr>
+        <p:style>
+          <a:lnRef idx="1">
+            <a:schemeClr val="accent1"/>
+          </a:lnRef>
+          <a:fillRef idx="3">
+            <a:schemeClr val="accent1"/>
+          </a:fillRef>
+          <a:effectRef idx="2">
+            <a:schemeClr val="accent1"/>
+          </a:effectRef>
+          <a:fontRef idx="minor">
+            <a:schemeClr val="lt1"/>
+          </a:fontRef>
+        </p:style>
+        <p:txBody>
+          <a:bodyPr rtlCol="0" anchor="ctr" lIns="0" rIns="0" tIns="0" bIns="0"/>
+          <a:lstStyle/>
+          <a:p>
+            <a:pPr algn="ctr"/>
+            <a:r>
+              <a:rPr sz="1500" b="1">
+                <a:solidFill>
+                  <a:srgbClr val="FFFFFF"/>
+                </a:solidFill>
+                <a:latin typeface="Segoe UI"/>
+              </a:rPr>
+              <a:t>6</a:t>
+            </a:r>
+          </a:p>
+        </p:txBody>
+      </p:sp>
+      <p:sp>
+        <p:nvSpPr>
+          <p:cNvPr id="17" name="TextBox 16"/>
+          <p:cNvSpPr txBox="1"/>
+          <p:nvPr/>
+        </p:nvSpPr>
+        <p:spPr>
+          <a:xfrm>
+            <a:off x="1207008" y="5340096"/>
+            <a:ext cx="10149840" cy="777240"/>
+          </a:xfrm>
+          <a:prstGeom prst="rect">
+            <a:avLst/>
+          </a:prstGeom>
+          <a:noFill/>
+        </p:spPr>
+        <p:txBody>
+          <a:bodyPr wrap="square">
+            <a:spAutoFit/>
+          </a:bodyPr>
+          <a:lstStyle/>
           <a:p>
             <a:pPr>
               <a:lnSpc>
                 <a:spcPct val="115000"/>
               </a:lnSpc>
-              <a:spcAft>
-                <a:spcPts val="1400"/>
-              </a:spcAft>
             </a:pPr>
             <a:r>
-              <a:rPr b="1" sz="1650">
+              <a:rPr b="1" sz="1550">
                 <a:solidFill>
                   <a:srgbClr val="1E293B"/>
                 </a:solidFill>
+                <a:latin typeface="Segoe UI"/>
               </a:rPr>
               <a:t>Free-tier LLM resilience.  </a:t>
             </a:r>
             <a:r>
-              <a:rPr sz="1650">
+              <a:rPr sz="1550">
                 <a:solidFill>
                   <a:srgbClr val="475569"/>
                 </a:solidFill>
-              </a:rPr>
-              <a:t>An ordered OpenRouter fallback list with retry/backoff, degrading gracefully instead of crashing when a model goes unavailable.</a:t>
-            </a:r>
-          </a:p>
-        </p:txBody>
-      </p:sp>
-      <p:sp>
-        <p:nvSpPr>
-          <p:cNvPr id="5" name="TextBox 4"/>
+                <a:latin typeface="Segoe UI"/>
+              </a:rPr>
+              <a:t>An ordered OpenRouter fallback list with retry/backoff, degrading gracefully instead of crashing.</a:t>
+            </a:r>
+          </a:p>
+        </p:txBody>
+      </p:sp>
+      <p:sp>
+        <p:nvSpPr>
+          <p:cNvPr id="18" name="TextBox 17"/>
           <p:cNvSpPr txBox="1"/>
           <p:nvPr/>
         </p:nvSpPr>
         <p:spPr>
           <a:xfrm>
-            <a:off x="457200" y="6473952"/>
-            <a:ext cx="5486400" cy="320040"/>
+            <a:off x="502920" y="6492240"/>
+            <a:ext cx="5486400" cy="274320"/>
           </a:xfrm>
           <a:prstGeom prst="rect">
             <a:avLst/>
@@ -6051,10 +8064,11 @@
           <a:lstStyle/>
           <a:p>
             <a:pPr>
-              <a:defRPr sz="1000">
+              <a:defRPr sz="950">
                 <a:solidFill>
                   <a:srgbClr val="64748B"/>
                 </a:solidFill>
+                <a:latin typeface="Segoe UI"/>
               </a:defRPr>
             </a:pPr>
             <a:r>
@@ -6065,35 +8079,55 @@
       </p:sp>
       <p:sp>
         <p:nvSpPr>
-          <p:cNvPr id="6" name="TextBox 5"/>
-          <p:cNvSpPr txBox="1"/>
-          <p:nvPr/>
-        </p:nvSpPr>
-        <p:spPr>
-          <a:xfrm>
-            <a:off x="11247120" y="6473952"/>
-            <a:ext cx="640080" cy="320040"/>
-          </a:xfrm>
-          <a:prstGeom prst="rect">
-            <a:avLst/>
-          </a:prstGeom>
-          <a:noFill/>
-        </p:spPr>
-        <p:txBody>
-          <a:bodyPr wrap="none">
-            <a:spAutoFit/>
-          </a:bodyPr>
-          <a:lstStyle/>
-          <a:p>
-            <a:pPr algn="r">
-              <a:defRPr sz="1000">
-                <a:solidFill>
-                  <a:srgbClr val="64748B"/>
-                </a:solidFill>
-              </a:defRPr>
-            </a:pPr>
-            <a:r>
-              <a:t>7</a:t>
+          <p:cNvPr id="19" name="Rounded Rectangle 18"/>
+          <p:cNvSpPr/>
+          <p:nvPr/>
+        </p:nvSpPr>
+        <p:spPr>
+          <a:xfrm>
+            <a:off x="11475720" y="320040"/>
+            <a:ext cx="457200" cy="292608"/>
+          </a:xfrm>
+          <a:prstGeom prst="roundRect">
+            <a:avLst>
+              <a:gd name="adj" fmla="val 50000"/>
+            </a:avLst>
+          </a:prstGeom>
+          <a:solidFill>
+            <a:srgbClr val="4F46E5"/>
+          </a:solidFill>
+          <a:ln>
+            <a:noFill/>
+          </a:ln>
+          <a:effectLst/>
+        </p:spPr>
+        <p:style>
+          <a:lnRef idx="1">
+            <a:schemeClr val="accent1"/>
+          </a:lnRef>
+          <a:fillRef idx="3">
+            <a:schemeClr val="accent1"/>
+          </a:fillRef>
+          <a:effectRef idx="2">
+            <a:schemeClr val="accent1"/>
+          </a:effectRef>
+          <a:fontRef idx="minor">
+            <a:schemeClr val="lt1"/>
+          </a:fontRef>
+        </p:style>
+        <p:txBody>
+          <a:bodyPr rtlCol="0" anchor="ctr" lIns="0" rIns="0" tIns="0" bIns="0"/>
+          <a:lstStyle/>
+          <a:p>
+            <a:pPr algn="ctr"/>
+            <a:r>
+              <a:rPr sz="1200" b="1">
+                <a:solidFill>
+                  <a:srgbClr val="FFFFFF"/>
+                </a:solidFill>
+                <a:latin typeface="Segoe UI"/>
+              </a:rPr>
+              <a:t>07</a:t>
             </a:r>
           </a:p>
         </p:txBody>
@@ -6144,6 +8178,7 @@
           <a:ln>
             <a:noFill/>
           </a:ln>
+          <a:effectLst/>
         </p:spPr>
         <p:style>
           <a:lnRef idx="1">
@@ -6175,8 +8210,8 @@
         </p:nvSpPr>
         <p:spPr>
           <a:xfrm>
-            <a:off x="502920" y="365760"/>
-            <a:ext cx="10972800" cy="822960"/>
+            <a:off x="502920" y="292608"/>
+            <a:ext cx="9144000" cy="274320"/>
           </a:xfrm>
           <a:prstGeom prst="rect">
             <a:avLst/>
@@ -6190,13 +8225,51 @@
           <a:lstStyle/>
           <a:p>
             <a:pPr>
-              <a:defRPr sz="3200" b="1">
+              <a:spcAft>
+                <a:spcPts val="0"/>
+              </a:spcAft>
+            </a:pPr>
+            <a:r>
+              <a:rPr sz="1100" b="1">
+                <a:solidFill>
+                  <a:srgbClr val="4F46E5"/>
+                </a:solidFill>
+                <a:latin typeface="Segoe UI"/>
+              </a:rPr>
+              <a:t>07 · IMPLEMENTATION</a:t>
+            </a:r>
+          </a:p>
+        </p:txBody>
+      </p:sp>
+      <p:sp>
+        <p:nvSpPr>
+          <p:cNvPr id="4" name="TextBox 3"/>
+          <p:cNvSpPr txBox="1"/>
+          <p:nvPr/>
+        </p:nvSpPr>
+        <p:spPr>
+          <a:xfrm>
+            <a:off x="502920" y="530352"/>
+            <a:ext cx="10424160" cy="822960"/>
+          </a:xfrm>
+          <a:prstGeom prst="rect">
+            <a:avLst/>
+          </a:prstGeom>
+          <a:noFill/>
+        </p:spPr>
+        <p:txBody>
+          <a:bodyPr wrap="none">
+            <a:spAutoFit/>
+          </a:bodyPr>
+          <a:lstStyle/>
+          <a:p>
+            <a:r>
+              <a:rPr sz="3000" b="1">
                 <a:solidFill>
                   <a:srgbClr val="1E293B"/>
                 </a:solidFill>
-              </a:defRPr>
-            </a:pPr>
-            <a:r>
+                <a:latin typeface="Segoe UI"/>
+              </a:rPr>
               <a:t>Tech Stack</a:t>
             </a:r>
           </a:p>
@@ -6204,24 +8277,25 @@
       </p:sp>
       <p:sp>
         <p:nvSpPr>
-          <p:cNvPr id="4" name="Rectangle 3"/>
+          <p:cNvPr id="5" name="Rectangle 4"/>
           <p:cNvSpPr/>
           <p:nvPr/>
         </p:nvSpPr>
         <p:spPr>
           <a:xfrm>
-            <a:off x="640080" y="1463040"/>
-            <a:ext cx="10881360" cy="530352"/>
+            <a:off x="530352" y="1188720"/>
+            <a:ext cx="548640" cy="38100"/>
           </a:xfrm>
           <a:prstGeom prst="rect">
             <a:avLst/>
           </a:prstGeom>
           <a:solidFill>
-            <a:srgbClr val="F8FAFC"/>
+            <a:srgbClr val="4F46E5"/>
           </a:solidFill>
           <a:ln>
             <a:noFill/>
           </a:ln>
+          <a:effectLst/>
         </p:spPr>
         <p:style>
           <a:lnRef idx="1">
@@ -6238,49 +8312,638 @@
           </a:fontRef>
         </p:style>
         <p:txBody>
-          <a:bodyPr rtlCol="0" anchor="ctr" lIns="182880" tIns="54864"/>
+          <a:bodyPr rtlCol="0" anchor="ctr"/>
           <a:lstStyle/>
           <a:p>
             <a:pPr algn="ctr"/>
-            <a:r>
-              <a:rPr b="1" sz="1400">
-                <a:solidFill>
-                  <a:srgbClr val="1E293B"/>
-                </a:solidFill>
-              </a:rPr>
-              <a:t>Orchestration</a:t>
-            </a:r>
-            <a:r>
-              <a:rPr sz="1400">
-                <a:solidFill>
-                  <a:srgbClr val="475569"/>
-                </a:solidFill>
-              </a:rPr>
-              <a:t>   LangGraph — StateGraph, interrupt() for HITL</a:t>
-            </a:r>
-          </a:p>
-        </p:txBody>
-      </p:sp>
-      <p:sp>
-        <p:nvSpPr>
-          <p:cNvPr id="5" name="Rectangle 4"/>
+          </a:p>
+        </p:txBody>
+      </p:sp>
+      <p:graphicFrame>
+        <p:nvGraphicFramePr>
+          <p:cNvPr id="6" name="Table 5"/>
+          <p:cNvGraphicFramePr>
+            <a:graphicFrameLocks noGrp="1"/>
+          </p:cNvGraphicFramePr>
+          <p:nvPr/>
+        </p:nvGraphicFramePr>
+        <p:xfrm>
+          <a:off x="640080" y="1490472"/>
+          <a:ext cx="10881360" cy="4754880"/>
+        </p:xfrm>
+        <a:graphic>
+          <a:graphicData uri="http://schemas.openxmlformats.org/drawingml/2006/table">
+            <a:tbl>
+              <a:tblPr firstRow="1" bandRow="1">
+                <a:tableStyleId>{5C22544A-7EE6-4342-B048-85BDC9FD1C3A}</a:tableStyleId>
+              </a:tblPr>
+              <a:tblGrid>
+                <a:gridCol w="3108960"/>
+                <a:gridCol w="7772400"/>
+              </a:tblGrid>
+              <a:tr h="475488">
+                <a:tc>
+                  <a:txBody>
+                    <a:bodyPr/>
+                    <a:lstStyle/>
+                    <a:p>
+                      <a:pPr>
+                        <a:defRPr b="1" sz="1400">
+                          <a:solidFill>
+                            <a:srgbClr val="FFFFFF"/>
+                          </a:solidFill>
+                        </a:defRPr>
+                      </a:pPr>
+                      <a:r>
+                        <a:rPr>
+                          <a:latin typeface="Segoe UI"/>
+                        </a:rPr>
+                        <a:t>Component</a:t>
+                      </a:r>
+                    </a:p>
+                  </a:txBody>
+                  <a:tcPr marL="164592" marR="109728" marT="73152" marB="73152" anchor="ctr">
+                    <a:solidFill>
+                      <a:srgbClr val="4F46E5"/>
+                    </a:solidFill>
+                  </a:tcPr>
+                </a:tc>
+                <a:tc>
+                  <a:txBody>
+                    <a:bodyPr/>
+                    <a:lstStyle/>
+                    <a:p>
+                      <a:pPr>
+                        <a:defRPr b="1" sz="1400">
+                          <a:solidFill>
+                            <a:srgbClr val="FFFFFF"/>
+                          </a:solidFill>
+                        </a:defRPr>
+                      </a:pPr>
+                      <a:r>
+                        <a:rPr>
+                          <a:latin typeface="Segoe UI"/>
+                        </a:rPr>
+                        <a:t>Choice</a:t>
+                      </a:r>
+                    </a:p>
+                  </a:txBody>
+                  <a:tcPr marL="164592" marR="109728" marT="73152" marB="73152" anchor="ctr">
+                    <a:solidFill>
+                      <a:srgbClr val="4F46E5"/>
+                    </a:solidFill>
+                  </a:tcPr>
+                </a:tc>
+              </a:tr>
+              <a:tr h="475488">
+                <a:tc>
+                  <a:txBody>
+                    <a:bodyPr/>
+                    <a:lstStyle/>
+                    <a:p>
+                      <a:pPr>
+                        <a:defRPr sz="1400" b="1">
+                          <a:solidFill>
+                            <a:srgbClr val="1E293B"/>
+                          </a:solidFill>
+                        </a:defRPr>
+                      </a:pPr>
+                      <a:r>
+                        <a:rPr>
+                          <a:latin typeface="Segoe UI"/>
+                        </a:rPr>
+                        <a:t>Orchestration</a:t>
+                      </a:r>
+                    </a:p>
+                  </a:txBody>
+                  <a:tcPr marL="164592" marR="109728" marT="73152" marB="73152" anchor="ctr">
+                    <a:solidFill>
+                      <a:srgbClr val="FFFFFF"/>
+                    </a:solidFill>
+                  </a:tcPr>
+                </a:tc>
+                <a:tc>
+                  <a:txBody>
+                    <a:bodyPr/>
+                    <a:lstStyle/>
+                    <a:p>
+                      <a:pPr>
+                        <a:defRPr sz="1400">
+                          <a:solidFill>
+                            <a:srgbClr val="475569"/>
+                          </a:solidFill>
+                        </a:defRPr>
+                      </a:pPr>
+                      <a:r>
+                        <a:rPr>
+                          <a:latin typeface="Segoe UI"/>
+                        </a:rPr>
+                        <a:t>LangGraph — StateGraph, interrupt() for HITL</a:t>
+                      </a:r>
+                    </a:p>
+                  </a:txBody>
+                  <a:tcPr marL="164592" marR="109728" marT="73152" marB="73152" anchor="ctr">
+                    <a:solidFill>
+                      <a:srgbClr val="FFFFFF"/>
+                    </a:solidFill>
+                  </a:tcPr>
+                </a:tc>
+              </a:tr>
+              <a:tr h="475488">
+                <a:tc>
+                  <a:txBody>
+                    <a:bodyPr/>
+                    <a:lstStyle/>
+                    <a:p>
+                      <a:pPr>
+                        <a:defRPr sz="1400" b="1">
+                          <a:solidFill>
+                            <a:srgbClr val="1E293B"/>
+                          </a:solidFill>
+                        </a:defRPr>
+                      </a:pPr>
+                      <a:r>
+                        <a:rPr>
+                          <a:latin typeface="Segoe UI"/>
+                        </a:rPr>
+                        <a:t>Backend</a:t>
+                      </a:r>
+                    </a:p>
+                  </a:txBody>
+                  <a:tcPr marL="164592" marR="109728" marT="73152" marB="73152" anchor="ctr">
+                    <a:solidFill>
+                      <a:srgbClr val="F8FAFC"/>
+                    </a:solidFill>
+                  </a:tcPr>
+                </a:tc>
+                <a:tc>
+                  <a:txBody>
+                    <a:bodyPr/>
+                    <a:lstStyle/>
+                    <a:p>
+                      <a:pPr>
+                        <a:defRPr sz="1400">
+                          <a:solidFill>
+                            <a:srgbClr val="475569"/>
+                          </a:solidFill>
+                        </a:defRPr>
+                      </a:pPr>
+                      <a:r>
+                        <a:rPr>
+                          <a:latin typeface="Segoe UI"/>
+                        </a:rPr>
+                        <a:t>FastAPI</a:t>
+                      </a:r>
+                    </a:p>
+                  </a:txBody>
+                  <a:tcPr marL="164592" marR="109728" marT="73152" marB="73152" anchor="ctr">
+                    <a:solidFill>
+                      <a:srgbClr val="F8FAFC"/>
+                    </a:solidFill>
+                  </a:tcPr>
+                </a:tc>
+              </a:tr>
+              <a:tr h="475488">
+                <a:tc>
+                  <a:txBody>
+                    <a:bodyPr/>
+                    <a:lstStyle/>
+                    <a:p>
+                      <a:pPr>
+                        <a:defRPr sz="1400" b="1">
+                          <a:solidFill>
+                            <a:srgbClr val="1E293B"/>
+                          </a:solidFill>
+                        </a:defRPr>
+                      </a:pPr>
+                      <a:r>
+                        <a:rPr>
+                          <a:latin typeface="Segoe UI"/>
+                        </a:rPr>
+                        <a:t>Frontend</a:t>
+                      </a:r>
+                    </a:p>
+                  </a:txBody>
+                  <a:tcPr marL="164592" marR="109728" marT="73152" marB="73152" anchor="ctr">
+                    <a:solidFill>
+                      <a:srgbClr val="FFFFFF"/>
+                    </a:solidFill>
+                  </a:tcPr>
+                </a:tc>
+                <a:tc>
+                  <a:txBody>
+                    <a:bodyPr/>
+                    <a:lstStyle/>
+                    <a:p>
+                      <a:pPr>
+                        <a:defRPr sz="1400">
+                          <a:solidFill>
+                            <a:srgbClr val="475569"/>
+                          </a:solidFill>
+                        </a:defRPr>
+                      </a:pPr>
+                      <a:r>
+                        <a:rPr>
+                          <a:latin typeface="Segoe UI"/>
+                        </a:rPr>
+                        <a:t>Streamlit — 10 pages</a:t>
+                      </a:r>
+                    </a:p>
+                  </a:txBody>
+                  <a:tcPr marL="164592" marR="109728" marT="73152" marB="73152" anchor="ctr">
+                    <a:solidFill>
+                      <a:srgbClr val="FFFFFF"/>
+                    </a:solidFill>
+                  </a:tcPr>
+                </a:tc>
+              </a:tr>
+              <a:tr h="475488">
+                <a:tc>
+                  <a:txBody>
+                    <a:bodyPr/>
+                    <a:lstStyle/>
+                    <a:p>
+                      <a:pPr>
+                        <a:defRPr sz="1400" b="1">
+                          <a:solidFill>
+                            <a:srgbClr val="1E293B"/>
+                          </a:solidFill>
+                        </a:defRPr>
+                      </a:pPr>
+                      <a:r>
+                        <a:rPr>
+                          <a:latin typeface="Segoe UI"/>
+                        </a:rPr>
+                        <a:t>LLMs</a:t>
+                      </a:r>
+                    </a:p>
+                  </a:txBody>
+                  <a:tcPr marL="164592" marR="109728" marT="73152" marB="73152" anchor="ctr">
+                    <a:solidFill>
+                      <a:srgbClr val="F8FAFC"/>
+                    </a:solidFill>
+                  </a:tcPr>
+                </a:tc>
+                <a:tc>
+                  <a:txBody>
+                    <a:bodyPr/>
+                    <a:lstStyle/>
+                    <a:p>
+                      <a:pPr>
+                        <a:defRPr sz="1400">
+                          <a:solidFill>
+                            <a:srgbClr val="475569"/>
+                          </a:solidFill>
+                        </a:defRPr>
+                      </a:pPr>
+                      <a:r>
+                        <a:rPr>
+                          <a:latin typeface="Segoe UI"/>
+                        </a:rPr>
+                        <a:t>OpenRouter — free-tier models, fallback list</a:t>
+                      </a:r>
+                    </a:p>
+                  </a:txBody>
+                  <a:tcPr marL="164592" marR="109728" marT="73152" marB="73152" anchor="ctr">
+                    <a:solidFill>
+                      <a:srgbClr val="F8FAFC"/>
+                    </a:solidFill>
+                  </a:tcPr>
+                </a:tc>
+              </a:tr>
+              <a:tr h="475488">
+                <a:tc>
+                  <a:txBody>
+                    <a:bodyPr/>
+                    <a:lstStyle/>
+                    <a:p>
+                      <a:pPr>
+                        <a:defRPr sz="1400" b="1">
+                          <a:solidFill>
+                            <a:srgbClr val="1E293B"/>
+                          </a:solidFill>
+                        </a:defRPr>
+                      </a:pPr>
+                      <a:r>
+                        <a:rPr>
+                          <a:latin typeface="Segoe UI"/>
+                        </a:rPr>
+                        <a:t>Embeddings</a:t>
+                      </a:r>
+                    </a:p>
+                  </a:txBody>
+                  <a:tcPr marL="164592" marR="109728" marT="73152" marB="73152" anchor="ctr">
+                    <a:solidFill>
+                      <a:srgbClr val="FFFFFF"/>
+                    </a:solidFill>
+                  </a:tcPr>
+                </a:tc>
+                <a:tc>
+                  <a:txBody>
+                    <a:bodyPr/>
+                    <a:lstStyle/>
+                    <a:p>
+                      <a:pPr>
+                        <a:defRPr sz="1400">
+                          <a:solidFill>
+                            <a:srgbClr val="475569"/>
+                          </a:solidFill>
+                        </a:defRPr>
+                      </a:pPr>
+                      <a:r>
+                        <a:rPr>
+                          <a:latin typeface="Segoe UI"/>
+                        </a:rPr>
+                        <a:t>sentence-transformers (local, free)</a:t>
+                      </a:r>
+                    </a:p>
+                  </a:txBody>
+                  <a:tcPr marL="164592" marR="109728" marT="73152" marB="73152" anchor="ctr">
+                    <a:solidFill>
+                      <a:srgbClr val="FFFFFF"/>
+                    </a:solidFill>
+                  </a:tcPr>
+                </a:tc>
+              </a:tr>
+              <a:tr h="475488">
+                <a:tc>
+                  <a:txBody>
+                    <a:bodyPr/>
+                    <a:lstStyle/>
+                    <a:p>
+                      <a:pPr>
+                        <a:defRPr sz="1400" b="1">
+                          <a:solidFill>
+                            <a:srgbClr val="1E293B"/>
+                          </a:solidFill>
+                        </a:defRPr>
+                      </a:pPr>
+                      <a:r>
+                        <a:rPr>
+                          <a:latin typeface="Segoe UI"/>
+                        </a:rPr>
+                        <a:t>Vector memory</a:t>
+                      </a:r>
+                    </a:p>
+                  </a:txBody>
+                  <a:tcPr marL="164592" marR="109728" marT="73152" marB="73152" anchor="ctr">
+                    <a:solidFill>
+                      <a:srgbClr val="F8FAFC"/>
+                    </a:solidFill>
+                  </a:tcPr>
+                </a:tc>
+                <a:tc>
+                  <a:txBody>
+                    <a:bodyPr/>
+                    <a:lstStyle/>
+                    <a:p>
+                      <a:pPr>
+                        <a:defRPr sz="1400">
+                          <a:solidFill>
+                            <a:srgbClr val="475569"/>
+                          </a:solidFill>
+                        </a:defRPr>
+                      </a:pPr>
+                      <a:r>
+                        <a:rPr>
+                          <a:latin typeface="Segoe UI"/>
+                        </a:rPr>
+                        <a:t>Chroma — one collection per data type</a:t>
+                      </a:r>
+                    </a:p>
+                  </a:txBody>
+                  <a:tcPr marL="164592" marR="109728" marT="73152" marB="73152" anchor="ctr">
+                    <a:solidFill>
+                      <a:srgbClr val="F8FAFC"/>
+                    </a:solidFill>
+                  </a:tcPr>
+                </a:tc>
+              </a:tr>
+              <a:tr h="475488">
+                <a:tc>
+                  <a:txBody>
+                    <a:bodyPr/>
+                    <a:lstStyle/>
+                    <a:p>
+                      <a:pPr>
+                        <a:defRPr sz="1400" b="1">
+                          <a:solidFill>
+                            <a:srgbClr val="1E293B"/>
+                          </a:solidFill>
+                        </a:defRPr>
+                      </a:pPr>
+                      <a:r>
+                        <a:rPr>
+                          <a:latin typeface="Segoe UI"/>
+                        </a:rPr>
+                        <a:t>Structured data</a:t>
+                      </a:r>
+                    </a:p>
+                  </a:txBody>
+                  <a:tcPr marL="164592" marR="109728" marT="73152" marB="73152" anchor="ctr">
+                    <a:solidFill>
+                      <a:srgbClr val="FFFFFF"/>
+                    </a:solidFill>
+                  </a:tcPr>
+                </a:tc>
+                <a:tc>
+                  <a:txBody>
+                    <a:bodyPr/>
+                    <a:lstStyle/>
+                    <a:p>
+                      <a:pPr>
+                        <a:defRPr sz="1400">
+                          <a:solidFill>
+                            <a:srgbClr val="475569"/>
+                          </a:solidFill>
+                        </a:defRPr>
+                      </a:pPr>
+                      <a:r>
+                        <a:rPr>
+                          <a:latin typeface="Segoe UI"/>
+                        </a:rPr>
+                        <a:t>SQLite — sessions + HITL checkpoints</a:t>
+                      </a:r>
+                    </a:p>
+                  </a:txBody>
+                  <a:tcPr marL="164592" marR="109728" marT="73152" marB="73152" anchor="ctr">
+                    <a:solidFill>
+                      <a:srgbClr val="FFFFFF"/>
+                    </a:solidFill>
+                  </a:tcPr>
+                </a:tc>
+              </a:tr>
+              <a:tr h="475488">
+                <a:tc>
+                  <a:txBody>
+                    <a:bodyPr/>
+                    <a:lstStyle/>
+                    <a:p>
+                      <a:pPr>
+                        <a:defRPr sz="1400" b="1">
+                          <a:solidFill>
+                            <a:srgbClr val="1E293B"/>
+                          </a:solidFill>
+                        </a:defRPr>
+                      </a:pPr>
+                      <a:r>
+                        <a:rPr>
+                          <a:latin typeface="Segoe UI"/>
+                        </a:rPr>
+                        <a:t>Live external data</a:t>
+                      </a:r>
+                    </a:p>
+                  </a:txBody>
+                  <a:tcPr marL="164592" marR="109728" marT="73152" marB="73152" anchor="ctr">
+                    <a:solidFill>
+                      <a:srgbClr val="F8FAFC"/>
+                    </a:solidFill>
+                  </a:tcPr>
+                </a:tc>
+                <a:tc>
+                  <a:txBody>
+                    <a:bodyPr/>
+                    <a:lstStyle/>
+                    <a:p>
+                      <a:pPr>
+                        <a:defRPr sz="1400">
+                          <a:solidFill>
+                            <a:srgbClr val="475569"/>
+                          </a:solidFill>
+                        </a:defRPr>
+                      </a:pPr>
+                      <a:r>
+                        <a:rPr>
+                          <a:latin typeface="Segoe UI"/>
+                        </a:rPr>
+                        <a:t>Facebook Graph API, Tavily web search</a:t>
+                      </a:r>
+                    </a:p>
+                  </a:txBody>
+                  <a:tcPr marL="164592" marR="109728" marT="73152" marB="73152" anchor="ctr">
+                    <a:solidFill>
+                      <a:srgbClr val="F8FAFC"/>
+                    </a:solidFill>
+                  </a:tcPr>
+                </a:tc>
+              </a:tr>
+              <a:tr h="475488">
+                <a:tc>
+                  <a:txBody>
+                    <a:bodyPr/>
+                    <a:lstStyle/>
+                    <a:p>
+                      <a:pPr>
+                        <a:defRPr sz="1400" b="1">
+                          <a:solidFill>
+                            <a:srgbClr val="1E293B"/>
+                          </a:solidFill>
+                        </a:defRPr>
+                      </a:pPr>
+                      <a:r>
+                        <a:rPr>
+                          <a:latin typeface="Segoe UI"/>
+                        </a:rPr>
+                        <a:t>Deployment</a:t>
+                      </a:r>
+                    </a:p>
+                  </a:txBody>
+                  <a:tcPr marL="164592" marR="109728" marT="73152" marB="73152" anchor="ctr">
+                    <a:solidFill>
+                      <a:srgbClr val="FFFFFF"/>
+                    </a:solidFill>
+                  </a:tcPr>
+                </a:tc>
+                <a:tc>
+                  <a:txBody>
+                    <a:bodyPr/>
+                    <a:lstStyle/>
+                    <a:p>
+                      <a:pPr>
+                        <a:defRPr sz="1400">
+                          <a:solidFill>
+                            <a:srgbClr val="475569"/>
+                          </a:solidFill>
+                        </a:defRPr>
+                      </a:pPr>
+                      <a:r>
+                        <a:rPr>
+                          <a:latin typeface="Segoe UI"/>
+                        </a:rPr>
+                        <a:t>Docker Compose + GitHub Actions CI</a:t>
+                      </a:r>
+                    </a:p>
+                  </a:txBody>
+                  <a:tcPr marL="164592" marR="109728" marT="73152" marB="73152" anchor="ctr">
+                    <a:solidFill>
+                      <a:srgbClr val="FFFFFF"/>
+                    </a:solidFill>
+                  </a:tcPr>
+                </a:tc>
+              </a:tr>
+            </a:tbl>
+          </a:graphicData>
+        </a:graphic>
+      </p:graphicFrame>
+      <p:sp>
+        <p:nvSpPr>
+          <p:cNvPr id="7" name="TextBox 6"/>
+          <p:cNvSpPr txBox="1"/>
+          <p:nvPr/>
+        </p:nvSpPr>
+        <p:spPr>
+          <a:xfrm>
+            <a:off x="502920" y="6492240"/>
+            <a:ext cx="5486400" cy="274320"/>
+          </a:xfrm>
+          <a:prstGeom prst="rect">
+            <a:avLst/>
+          </a:prstGeom>
+          <a:noFill/>
+        </p:spPr>
+        <p:txBody>
+          <a:bodyPr wrap="none">
+            <a:spAutoFit/>
+          </a:bodyPr>
+          <a:lstStyle/>
+          <a:p>
+            <a:pPr>
+              <a:defRPr sz="950">
+                <a:solidFill>
+                  <a:srgbClr val="64748B"/>
+                </a:solidFill>
+                <a:latin typeface="Segoe UI"/>
+              </a:defRPr>
+            </a:pPr>
+            <a:r>
+              <a:t>Education AI Analyst</a:t>
+            </a:r>
+          </a:p>
+        </p:txBody>
+      </p:sp>
+      <p:sp>
+        <p:nvSpPr>
+          <p:cNvPr id="8" name="Rounded Rectangle 7"/>
           <p:cNvSpPr/>
           <p:nvPr/>
         </p:nvSpPr>
         <p:spPr>
           <a:xfrm>
-            <a:off x="640080" y="1993392"/>
-            <a:ext cx="10881360" cy="530352"/>
-          </a:xfrm>
-          <a:prstGeom prst="rect">
-            <a:avLst/>
+            <a:off x="11475720" y="320040"/>
+            <a:ext cx="457200" cy="292608"/>
+          </a:xfrm>
+          <a:prstGeom prst="roundRect">
+            <a:avLst>
+              <a:gd name="adj" fmla="val 50000"/>
+            </a:avLst>
           </a:prstGeom>
           <a:solidFill>
-            <a:srgbClr val="FFFFFF"/>
+            <a:srgbClr val="4F46E5"/>
           </a:solidFill>
           <a:ln>
             <a:noFill/>
           </a:ln>
+          <a:effectLst/>
         </p:spPr>
         <p:style>
           <a:lnRef idx="1">
@@ -6297,508 +8960,18 @@
           </a:fontRef>
         </p:style>
         <p:txBody>
-          <a:bodyPr rtlCol="0" anchor="ctr" lIns="182880" tIns="54864"/>
+          <a:bodyPr rtlCol="0" anchor="ctr" lIns="0" rIns="0" tIns="0" bIns="0"/>
           <a:lstStyle/>
           <a:p>
             <a:pPr algn="ctr"/>
             <a:r>
-              <a:rPr b="1" sz="1400">
-                <a:solidFill>
-                  <a:srgbClr val="1E293B"/>
-                </a:solidFill>
-              </a:rPr>
-              <a:t>Backend</a:t>
-            </a:r>
-            <a:r>
-              <a:rPr sz="1400">
-                <a:solidFill>
-                  <a:srgbClr val="475569"/>
-                </a:solidFill>
-              </a:rPr>
-              <a:t>   FastAPI</a:t>
-            </a:r>
-          </a:p>
-        </p:txBody>
-      </p:sp>
-      <p:sp>
-        <p:nvSpPr>
-          <p:cNvPr id="6" name="Rectangle 5"/>
-          <p:cNvSpPr/>
-          <p:nvPr/>
-        </p:nvSpPr>
-        <p:spPr>
-          <a:xfrm>
-            <a:off x="640080" y="2523744"/>
-            <a:ext cx="10881360" cy="530352"/>
-          </a:xfrm>
-          <a:prstGeom prst="rect">
-            <a:avLst/>
-          </a:prstGeom>
-          <a:solidFill>
-            <a:srgbClr val="F8FAFC"/>
-          </a:solidFill>
-          <a:ln>
-            <a:noFill/>
-          </a:ln>
-        </p:spPr>
-        <p:style>
-          <a:lnRef idx="1">
-            <a:schemeClr val="accent1"/>
-          </a:lnRef>
-          <a:fillRef idx="3">
-            <a:schemeClr val="accent1"/>
-          </a:fillRef>
-          <a:effectRef idx="2">
-            <a:schemeClr val="accent1"/>
-          </a:effectRef>
-          <a:fontRef idx="minor">
-            <a:schemeClr val="lt1"/>
-          </a:fontRef>
-        </p:style>
-        <p:txBody>
-          <a:bodyPr rtlCol="0" anchor="ctr" lIns="182880" tIns="54864"/>
-          <a:lstStyle/>
-          <a:p>
-            <a:pPr algn="ctr"/>
-            <a:r>
-              <a:rPr b="1" sz="1400">
-                <a:solidFill>
-                  <a:srgbClr val="1E293B"/>
-                </a:solidFill>
-              </a:rPr>
-              <a:t>Frontend</a:t>
-            </a:r>
-            <a:r>
-              <a:rPr sz="1400">
-                <a:solidFill>
-                  <a:srgbClr val="475569"/>
-                </a:solidFill>
-              </a:rPr>
-              <a:t>   Streamlit — 10 pages</a:t>
-            </a:r>
-          </a:p>
-        </p:txBody>
-      </p:sp>
-      <p:sp>
-        <p:nvSpPr>
-          <p:cNvPr id="7" name="Rectangle 6"/>
-          <p:cNvSpPr/>
-          <p:nvPr/>
-        </p:nvSpPr>
-        <p:spPr>
-          <a:xfrm>
-            <a:off x="640080" y="3054096"/>
-            <a:ext cx="10881360" cy="530352"/>
-          </a:xfrm>
-          <a:prstGeom prst="rect">
-            <a:avLst/>
-          </a:prstGeom>
-          <a:solidFill>
-            <a:srgbClr val="FFFFFF"/>
-          </a:solidFill>
-          <a:ln>
-            <a:noFill/>
-          </a:ln>
-        </p:spPr>
-        <p:style>
-          <a:lnRef idx="1">
-            <a:schemeClr val="accent1"/>
-          </a:lnRef>
-          <a:fillRef idx="3">
-            <a:schemeClr val="accent1"/>
-          </a:fillRef>
-          <a:effectRef idx="2">
-            <a:schemeClr val="accent1"/>
-          </a:effectRef>
-          <a:fontRef idx="minor">
-            <a:schemeClr val="lt1"/>
-          </a:fontRef>
-        </p:style>
-        <p:txBody>
-          <a:bodyPr rtlCol="0" anchor="ctr" lIns="182880" tIns="54864"/>
-          <a:lstStyle/>
-          <a:p>
-            <a:pPr algn="ctr"/>
-            <a:r>
-              <a:rPr b="1" sz="1400">
-                <a:solidFill>
-                  <a:srgbClr val="1E293B"/>
-                </a:solidFill>
-              </a:rPr>
-              <a:t>LLMs</a:t>
-            </a:r>
-            <a:r>
-              <a:rPr sz="1400">
-                <a:solidFill>
-                  <a:srgbClr val="475569"/>
-                </a:solidFill>
-              </a:rPr>
-              <a:t>   OpenRouter — free-tier models, fallback list</a:t>
-            </a:r>
-          </a:p>
-        </p:txBody>
-      </p:sp>
-      <p:sp>
-        <p:nvSpPr>
-          <p:cNvPr id="8" name="Rectangle 7"/>
-          <p:cNvSpPr/>
-          <p:nvPr/>
-        </p:nvSpPr>
-        <p:spPr>
-          <a:xfrm>
-            <a:off x="640080" y="3584448"/>
-            <a:ext cx="10881360" cy="530352"/>
-          </a:xfrm>
-          <a:prstGeom prst="rect">
-            <a:avLst/>
-          </a:prstGeom>
-          <a:solidFill>
-            <a:srgbClr val="F8FAFC"/>
-          </a:solidFill>
-          <a:ln>
-            <a:noFill/>
-          </a:ln>
-        </p:spPr>
-        <p:style>
-          <a:lnRef idx="1">
-            <a:schemeClr val="accent1"/>
-          </a:lnRef>
-          <a:fillRef idx="3">
-            <a:schemeClr val="accent1"/>
-          </a:fillRef>
-          <a:effectRef idx="2">
-            <a:schemeClr val="accent1"/>
-          </a:effectRef>
-          <a:fontRef idx="minor">
-            <a:schemeClr val="lt1"/>
-          </a:fontRef>
-        </p:style>
-        <p:txBody>
-          <a:bodyPr rtlCol="0" anchor="ctr" lIns="182880" tIns="54864"/>
-          <a:lstStyle/>
-          <a:p>
-            <a:pPr algn="ctr"/>
-            <a:r>
-              <a:rPr b="1" sz="1400">
-                <a:solidFill>
-                  <a:srgbClr val="1E293B"/>
-                </a:solidFill>
-              </a:rPr>
-              <a:t>Embeddings</a:t>
-            </a:r>
-            <a:r>
-              <a:rPr sz="1400">
-                <a:solidFill>
-                  <a:srgbClr val="475569"/>
-                </a:solidFill>
-              </a:rPr>
-              <a:t>   sentence-transformers (local, free)</a:t>
-            </a:r>
-          </a:p>
-        </p:txBody>
-      </p:sp>
-      <p:sp>
-        <p:nvSpPr>
-          <p:cNvPr id="9" name="Rectangle 8"/>
-          <p:cNvSpPr/>
-          <p:nvPr/>
-        </p:nvSpPr>
-        <p:spPr>
-          <a:xfrm>
-            <a:off x="640080" y="4114800"/>
-            <a:ext cx="10881360" cy="530352"/>
-          </a:xfrm>
-          <a:prstGeom prst="rect">
-            <a:avLst/>
-          </a:prstGeom>
-          <a:solidFill>
-            <a:srgbClr val="FFFFFF"/>
-          </a:solidFill>
-          <a:ln>
-            <a:noFill/>
-          </a:ln>
-        </p:spPr>
-        <p:style>
-          <a:lnRef idx="1">
-            <a:schemeClr val="accent1"/>
-          </a:lnRef>
-          <a:fillRef idx="3">
-            <a:schemeClr val="accent1"/>
-          </a:fillRef>
-          <a:effectRef idx="2">
-            <a:schemeClr val="accent1"/>
-          </a:effectRef>
-          <a:fontRef idx="minor">
-            <a:schemeClr val="lt1"/>
-          </a:fontRef>
-        </p:style>
-        <p:txBody>
-          <a:bodyPr rtlCol="0" anchor="ctr" lIns="182880" tIns="54864"/>
-          <a:lstStyle/>
-          <a:p>
-            <a:pPr algn="ctr"/>
-            <a:r>
-              <a:rPr b="1" sz="1400">
-                <a:solidFill>
-                  <a:srgbClr val="1E293B"/>
-                </a:solidFill>
-              </a:rPr>
-              <a:t>Vector memory</a:t>
-            </a:r>
-            <a:r>
-              <a:rPr sz="1400">
-                <a:solidFill>
-                  <a:srgbClr val="475569"/>
-                </a:solidFill>
-              </a:rPr>
-              <a:t>   Chroma — one collection per data type</a:t>
-            </a:r>
-          </a:p>
-        </p:txBody>
-      </p:sp>
-      <p:sp>
-        <p:nvSpPr>
-          <p:cNvPr id="10" name="Rectangle 9"/>
-          <p:cNvSpPr/>
-          <p:nvPr/>
-        </p:nvSpPr>
-        <p:spPr>
-          <a:xfrm>
-            <a:off x="640080" y="4645152"/>
-            <a:ext cx="10881360" cy="530352"/>
-          </a:xfrm>
-          <a:prstGeom prst="rect">
-            <a:avLst/>
-          </a:prstGeom>
-          <a:solidFill>
-            <a:srgbClr val="F8FAFC"/>
-          </a:solidFill>
-          <a:ln>
-            <a:noFill/>
-          </a:ln>
-        </p:spPr>
-        <p:style>
-          <a:lnRef idx="1">
-            <a:schemeClr val="accent1"/>
-          </a:lnRef>
-          <a:fillRef idx="3">
-            <a:schemeClr val="accent1"/>
-          </a:fillRef>
-          <a:effectRef idx="2">
-            <a:schemeClr val="accent1"/>
-          </a:effectRef>
-          <a:fontRef idx="minor">
-            <a:schemeClr val="lt1"/>
-          </a:fontRef>
-        </p:style>
-        <p:txBody>
-          <a:bodyPr rtlCol="0" anchor="ctr" lIns="182880" tIns="54864"/>
-          <a:lstStyle/>
-          <a:p>
-            <a:pPr algn="ctr"/>
-            <a:r>
-              <a:rPr b="1" sz="1400">
-                <a:solidFill>
-                  <a:srgbClr val="1E293B"/>
-                </a:solidFill>
-              </a:rPr>
-              <a:t>Structured data</a:t>
-            </a:r>
-            <a:r>
-              <a:rPr sz="1400">
-                <a:solidFill>
-                  <a:srgbClr val="475569"/>
-                </a:solidFill>
-              </a:rPr>
-              <a:t>   SQLite — sessions + HITL checkpoints</a:t>
-            </a:r>
-          </a:p>
-        </p:txBody>
-      </p:sp>
-      <p:sp>
-        <p:nvSpPr>
-          <p:cNvPr id="11" name="Rectangle 10"/>
-          <p:cNvSpPr/>
-          <p:nvPr/>
-        </p:nvSpPr>
-        <p:spPr>
-          <a:xfrm>
-            <a:off x="640080" y="5175504"/>
-            <a:ext cx="10881360" cy="530352"/>
-          </a:xfrm>
-          <a:prstGeom prst="rect">
-            <a:avLst/>
-          </a:prstGeom>
-          <a:solidFill>
-            <a:srgbClr val="FFFFFF"/>
-          </a:solidFill>
-          <a:ln>
-            <a:noFill/>
-          </a:ln>
-        </p:spPr>
-        <p:style>
-          <a:lnRef idx="1">
-            <a:schemeClr val="accent1"/>
-          </a:lnRef>
-          <a:fillRef idx="3">
-            <a:schemeClr val="accent1"/>
-          </a:fillRef>
-          <a:effectRef idx="2">
-            <a:schemeClr val="accent1"/>
-          </a:effectRef>
-          <a:fontRef idx="minor">
-            <a:schemeClr val="lt1"/>
-          </a:fontRef>
-        </p:style>
-        <p:txBody>
-          <a:bodyPr rtlCol="0" anchor="ctr" lIns="182880" tIns="54864"/>
-          <a:lstStyle/>
-          <a:p>
-            <a:pPr algn="ctr"/>
-            <a:r>
-              <a:rPr b="1" sz="1400">
-                <a:solidFill>
-                  <a:srgbClr val="1E293B"/>
-                </a:solidFill>
-              </a:rPr>
-              <a:t>Live external data</a:t>
-            </a:r>
-            <a:r>
-              <a:rPr sz="1400">
-                <a:solidFill>
-                  <a:srgbClr val="475569"/>
-                </a:solidFill>
-              </a:rPr>
-              <a:t>   Facebook Graph API, Tavily web search</a:t>
-            </a:r>
-          </a:p>
-        </p:txBody>
-      </p:sp>
-      <p:sp>
-        <p:nvSpPr>
-          <p:cNvPr id="12" name="Rectangle 11"/>
-          <p:cNvSpPr/>
-          <p:nvPr/>
-        </p:nvSpPr>
-        <p:spPr>
-          <a:xfrm>
-            <a:off x="640080" y="5705856"/>
-            <a:ext cx="10881360" cy="530352"/>
-          </a:xfrm>
-          <a:prstGeom prst="rect">
-            <a:avLst/>
-          </a:prstGeom>
-          <a:solidFill>
-            <a:srgbClr val="F8FAFC"/>
-          </a:solidFill>
-          <a:ln>
-            <a:noFill/>
-          </a:ln>
-        </p:spPr>
-        <p:style>
-          <a:lnRef idx="1">
-            <a:schemeClr val="accent1"/>
-          </a:lnRef>
-          <a:fillRef idx="3">
-            <a:schemeClr val="accent1"/>
-          </a:fillRef>
-          <a:effectRef idx="2">
-            <a:schemeClr val="accent1"/>
-          </a:effectRef>
-          <a:fontRef idx="minor">
-            <a:schemeClr val="lt1"/>
-          </a:fontRef>
-        </p:style>
-        <p:txBody>
-          <a:bodyPr rtlCol="0" anchor="ctr" lIns="182880" tIns="54864"/>
-          <a:lstStyle/>
-          <a:p>
-            <a:pPr algn="ctr"/>
-            <a:r>
-              <a:rPr b="1" sz="1400">
-                <a:solidFill>
-                  <a:srgbClr val="1E293B"/>
-                </a:solidFill>
-              </a:rPr>
-              <a:t>Deployment</a:t>
-            </a:r>
-            <a:r>
-              <a:rPr sz="1400">
-                <a:solidFill>
-                  <a:srgbClr val="475569"/>
-                </a:solidFill>
-              </a:rPr>
-              <a:t>   Docker Compose + GitHub Actions CI</a:t>
-            </a:r>
-          </a:p>
-        </p:txBody>
-      </p:sp>
-      <p:sp>
-        <p:nvSpPr>
-          <p:cNvPr id="13" name="TextBox 12"/>
-          <p:cNvSpPr txBox="1"/>
-          <p:nvPr/>
-        </p:nvSpPr>
-        <p:spPr>
-          <a:xfrm>
-            <a:off x="457200" y="6473952"/>
-            <a:ext cx="5486400" cy="320040"/>
-          </a:xfrm>
-          <a:prstGeom prst="rect">
-            <a:avLst/>
-          </a:prstGeom>
-          <a:noFill/>
-        </p:spPr>
-        <p:txBody>
-          <a:bodyPr wrap="none">
-            <a:spAutoFit/>
-          </a:bodyPr>
-          <a:lstStyle/>
-          <a:p>
-            <a:pPr>
-              <a:defRPr sz="1000">
-                <a:solidFill>
-                  <a:srgbClr val="64748B"/>
-                </a:solidFill>
-              </a:defRPr>
-            </a:pPr>
-            <a:r>
-              <a:t>Education AI Analyst</a:t>
-            </a:r>
-          </a:p>
-        </p:txBody>
-      </p:sp>
-      <p:sp>
-        <p:nvSpPr>
-          <p:cNvPr id="14" name="TextBox 13"/>
-          <p:cNvSpPr txBox="1"/>
-          <p:nvPr/>
-        </p:nvSpPr>
-        <p:spPr>
-          <a:xfrm>
-            <a:off x="11247120" y="6473952"/>
-            <a:ext cx="640080" cy="320040"/>
-          </a:xfrm>
-          <a:prstGeom prst="rect">
-            <a:avLst/>
-          </a:prstGeom>
-          <a:noFill/>
-        </p:spPr>
-        <p:txBody>
-          <a:bodyPr wrap="none">
-            <a:spAutoFit/>
-          </a:bodyPr>
-          <a:lstStyle/>
-          <a:p>
-            <a:pPr algn="r">
-              <a:defRPr sz="1000">
-                <a:solidFill>
-                  <a:srgbClr val="64748B"/>
-                </a:solidFill>
-              </a:defRPr>
-            </a:pPr>
-            <a:r>
-              <a:t>8</a:t>
+              <a:rPr sz="1200" b="1">
+                <a:solidFill>
+                  <a:srgbClr val="FFFFFF"/>
+                </a:solidFill>
+                <a:latin typeface="Segoe UI"/>
+              </a:rPr>
+              <a:t>08</a:t>
             </a:r>
           </a:p>
         </p:txBody>
@@ -6844,11 +9017,716 @@
             <a:avLst/>
           </a:prstGeom>
           <a:solidFill>
+            <a:srgbClr val="059669"/>
+          </a:solidFill>
+          <a:ln>
+            <a:noFill/>
+          </a:ln>
+          <a:effectLst/>
+        </p:spPr>
+        <p:style>
+          <a:lnRef idx="1">
+            <a:schemeClr val="accent1"/>
+          </a:lnRef>
+          <a:fillRef idx="3">
+            <a:schemeClr val="accent1"/>
+          </a:fillRef>
+          <a:effectRef idx="2">
+            <a:schemeClr val="accent1"/>
+          </a:effectRef>
+          <a:fontRef idx="minor">
+            <a:schemeClr val="lt1"/>
+          </a:fontRef>
+        </p:style>
+        <p:txBody>
+          <a:bodyPr rtlCol="0" anchor="ctr"/>
+          <a:lstStyle/>
+          <a:p>
+            <a:pPr algn="ctr"/>
+          </a:p>
+        </p:txBody>
+      </p:sp>
+      <p:sp>
+        <p:nvSpPr>
+          <p:cNvPr id="3" name="TextBox 2"/>
+          <p:cNvSpPr txBox="1"/>
+          <p:nvPr/>
+        </p:nvSpPr>
+        <p:spPr>
+          <a:xfrm>
+            <a:off x="502920" y="292608"/>
+            <a:ext cx="9144000" cy="274320"/>
+          </a:xfrm>
+          <a:prstGeom prst="rect">
+            <a:avLst/>
+          </a:prstGeom>
+          <a:noFill/>
+        </p:spPr>
+        <p:txBody>
+          <a:bodyPr wrap="none">
+            <a:spAutoFit/>
+          </a:bodyPr>
+          <a:lstStyle/>
+          <a:p>
+            <a:pPr>
+              <a:spcAft>
+                <a:spcPts val="0"/>
+              </a:spcAft>
+            </a:pPr>
+            <a:r>
+              <a:rPr sz="1100" b="1">
+                <a:solidFill>
+                  <a:srgbClr val="4F46E5"/>
+                </a:solidFill>
+                <a:latin typeface="Segoe UI"/>
+              </a:rPr>
+              <a:t>08 · VERIFICATION</a:t>
+            </a:r>
+          </a:p>
+        </p:txBody>
+      </p:sp>
+      <p:sp>
+        <p:nvSpPr>
+          <p:cNvPr id="4" name="TextBox 3"/>
+          <p:cNvSpPr txBox="1"/>
+          <p:nvPr/>
+        </p:nvSpPr>
+        <p:spPr>
+          <a:xfrm>
+            <a:off x="502920" y="530352"/>
+            <a:ext cx="10424160" cy="822960"/>
+          </a:xfrm>
+          <a:prstGeom prst="rect">
+            <a:avLst/>
+          </a:prstGeom>
+          <a:noFill/>
+        </p:spPr>
+        <p:txBody>
+          <a:bodyPr wrap="none">
+            <a:spAutoFit/>
+          </a:bodyPr>
+          <a:lstStyle/>
+          <a:p>
+            <a:r>
+              <a:rPr sz="3000" b="1">
+                <a:solidFill>
+                  <a:srgbClr val="1E293B"/>
+                </a:solidFill>
+                <a:latin typeface="Segoe UI"/>
+              </a:rPr>
+              <a:t>Status &amp; Results</a:t>
+            </a:r>
+          </a:p>
+        </p:txBody>
+      </p:sp>
+      <p:sp>
+        <p:nvSpPr>
+          <p:cNvPr id="5" name="Rectangle 4"/>
+          <p:cNvSpPr/>
+          <p:nvPr/>
+        </p:nvSpPr>
+        <p:spPr>
+          <a:xfrm>
+            <a:off x="530352" y="1188720"/>
+            <a:ext cx="548640" cy="38100"/>
+          </a:xfrm>
+          <a:prstGeom prst="rect">
+            <a:avLst/>
+          </a:prstGeom>
+          <a:solidFill>
+            <a:srgbClr val="059669"/>
+          </a:solidFill>
+          <a:ln>
+            <a:noFill/>
+          </a:ln>
+          <a:effectLst/>
+        </p:spPr>
+        <p:style>
+          <a:lnRef idx="1">
+            <a:schemeClr val="accent1"/>
+          </a:lnRef>
+          <a:fillRef idx="3">
+            <a:schemeClr val="accent1"/>
+          </a:fillRef>
+          <a:effectRef idx="2">
+            <a:schemeClr val="accent1"/>
+          </a:effectRef>
+          <a:fontRef idx="minor">
+            <a:schemeClr val="lt1"/>
+          </a:fontRef>
+        </p:style>
+        <p:txBody>
+          <a:bodyPr rtlCol="0" anchor="ctr"/>
+          <a:lstStyle/>
+          <a:p>
+            <a:pPr algn="ctr"/>
+          </a:p>
+        </p:txBody>
+      </p:sp>
+      <p:sp>
+        <p:nvSpPr>
+          <p:cNvPr id="6" name="Oval 5"/>
+          <p:cNvSpPr/>
+          <p:nvPr/>
+        </p:nvSpPr>
+        <p:spPr>
+          <a:xfrm>
+            <a:off x="640080" y="1490472"/>
+            <a:ext cx="310896" cy="310896"/>
+          </a:xfrm>
+          <a:prstGeom prst="ellipse">
+            <a:avLst/>
+          </a:prstGeom>
+          <a:solidFill>
+            <a:srgbClr val="059669"/>
+          </a:solidFill>
+          <a:ln>
+            <a:noFill/>
+          </a:ln>
+          <a:effectLst/>
+        </p:spPr>
+        <p:style>
+          <a:lnRef idx="1">
+            <a:schemeClr val="accent1"/>
+          </a:lnRef>
+          <a:fillRef idx="3">
+            <a:schemeClr val="accent1"/>
+          </a:fillRef>
+          <a:effectRef idx="2">
+            <a:schemeClr val="accent1"/>
+          </a:effectRef>
+          <a:fontRef idx="minor">
+            <a:schemeClr val="lt1"/>
+          </a:fontRef>
+        </p:style>
+        <p:txBody>
+          <a:bodyPr rtlCol="0" anchor="ctr" lIns="0" rIns="0" tIns="0" bIns="0"/>
+          <a:lstStyle/>
+          <a:p>
+            <a:pPr algn="ctr"/>
+            <a:r>
+              <a:rPr sz="1400" b="1">
+                <a:solidFill>
+                  <a:srgbClr val="FFFFFF"/>
+                </a:solidFill>
+                <a:latin typeface="Segoe UI"/>
+              </a:rPr>
+              <a:t>✓</a:t>
+            </a:r>
+          </a:p>
+        </p:txBody>
+      </p:sp>
+      <p:sp>
+        <p:nvSpPr>
+          <p:cNvPr id="7" name="TextBox 6"/>
+          <p:cNvSpPr txBox="1"/>
+          <p:nvPr/>
+        </p:nvSpPr>
+        <p:spPr>
+          <a:xfrm>
+            <a:off x="1115568" y="1435608"/>
+            <a:ext cx="10241280" cy="777240"/>
+          </a:xfrm>
+          <a:prstGeom prst="rect">
+            <a:avLst/>
+          </a:prstGeom>
+          <a:noFill/>
+        </p:spPr>
+        <p:txBody>
+          <a:bodyPr wrap="square">
+            <a:spAutoFit/>
+          </a:bodyPr>
+          <a:lstStyle/>
+          <a:p>
+            <a:pPr>
+              <a:lnSpc>
+                <a:spcPct val="110000"/>
+              </a:lnSpc>
+            </a:pPr>
+            <a:r>
+              <a:rPr b="1" sz="1650">
+                <a:solidFill>
+                  <a:srgbClr val="1E293B"/>
+                </a:solidFill>
+                <a:latin typeface="Segoe UI"/>
+              </a:rPr>
+              <a:t>118 automated backend tests passing.  </a:t>
+            </a:r>
+            <a:r>
+              <a:rPr sz="1500">
+                <a:solidFill>
+                  <a:srgbClr val="475569"/>
+                </a:solidFill>
+                <a:latin typeface="Segoe UI"/>
+              </a:rPr>
+              <a:t>Unit + integration + end-to-end coverage per tool and agent.</a:t>
+            </a:r>
+          </a:p>
+        </p:txBody>
+      </p:sp>
+      <p:sp>
+        <p:nvSpPr>
+          <p:cNvPr id="8" name="Oval 7"/>
+          <p:cNvSpPr/>
+          <p:nvPr/>
+        </p:nvSpPr>
+        <p:spPr>
+          <a:xfrm>
+            <a:off x="640080" y="2267712"/>
+            <a:ext cx="310896" cy="310896"/>
+          </a:xfrm>
+          <a:prstGeom prst="ellipse">
+            <a:avLst/>
+          </a:prstGeom>
+          <a:solidFill>
+            <a:srgbClr val="059669"/>
+          </a:solidFill>
+          <a:ln>
+            <a:noFill/>
+          </a:ln>
+          <a:effectLst/>
+        </p:spPr>
+        <p:style>
+          <a:lnRef idx="1">
+            <a:schemeClr val="accent1"/>
+          </a:lnRef>
+          <a:fillRef idx="3">
+            <a:schemeClr val="accent1"/>
+          </a:fillRef>
+          <a:effectRef idx="2">
+            <a:schemeClr val="accent1"/>
+          </a:effectRef>
+          <a:fontRef idx="minor">
+            <a:schemeClr val="lt1"/>
+          </a:fontRef>
+        </p:style>
+        <p:txBody>
+          <a:bodyPr rtlCol="0" anchor="ctr" lIns="0" rIns="0" tIns="0" bIns="0"/>
+          <a:lstStyle/>
+          <a:p>
+            <a:pPr algn="ctr"/>
+            <a:r>
+              <a:rPr sz="1400" b="1">
+                <a:solidFill>
+                  <a:srgbClr val="FFFFFF"/>
+                </a:solidFill>
+                <a:latin typeface="Segoe UI"/>
+              </a:rPr>
+              <a:t>✓</a:t>
+            </a:r>
+          </a:p>
+        </p:txBody>
+      </p:sp>
+      <p:sp>
+        <p:nvSpPr>
+          <p:cNvPr id="9" name="TextBox 8"/>
+          <p:cNvSpPr txBox="1"/>
+          <p:nvPr/>
+        </p:nvSpPr>
+        <p:spPr>
+          <a:xfrm>
+            <a:off x="1115568" y="2212848"/>
+            <a:ext cx="10241280" cy="777240"/>
+          </a:xfrm>
+          <a:prstGeom prst="rect">
+            <a:avLst/>
+          </a:prstGeom>
+          <a:noFill/>
+        </p:spPr>
+        <p:txBody>
+          <a:bodyPr wrap="square">
+            <a:spAutoFit/>
+          </a:bodyPr>
+          <a:lstStyle/>
+          <a:p>
+            <a:pPr>
+              <a:lnSpc>
+                <a:spcPct val="110000"/>
+              </a:lnSpc>
+            </a:pPr>
+            <a:r>
+              <a:rPr b="1" sz="1650">
+                <a:solidFill>
+                  <a:srgbClr val="1E293B"/>
+                </a:solidFill>
+                <a:latin typeface="Segoe UI"/>
+              </a:rPr>
+              <a:t>Full pipeline verified live, end to end.  </a:t>
+            </a:r>
+            <a:r>
+              <a:rPr sz="1500">
+                <a:solidFill>
+                  <a:srgbClr val="475569"/>
+                </a:solidFill>
+                <a:latin typeface="Segoe UI"/>
+              </a:rPr>
+              <a:t>Upload → intake → analysis → report → QA → human approval → download, run against a real OpenRouter key.</a:t>
+            </a:r>
+          </a:p>
+        </p:txBody>
+      </p:sp>
+      <p:sp>
+        <p:nvSpPr>
+          <p:cNvPr id="10" name="Oval 9"/>
+          <p:cNvSpPr/>
+          <p:nvPr/>
+        </p:nvSpPr>
+        <p:spPr>
+          <a:xfrm>
+            <a:off x="640080" y="3044952"/>
+            <a:ext cx="310896" cy="310896"/>
+          </a:xfrm>
+          <a:prstGeom prst="ellipse">
+            <a:avLst/>
+          </a:prstGeom>
+          <a:solidFill>
+            <a:srgbClr val="059669"/>
+          </a:solidFill>
+          <a:ln>
+            <a:noFill/>
+          </a:ln>
+          <a:effectLst/>
+        </p:spPr>
+        <p:style>
+          <a:lnRef idx="1">
+            <a:schemeClr val="accent1"/>
+          </a:lnRef>
+          <a:fillRef idx="3">
+            <a:schemeClr val="accent1"/>
+          </a:fillRef>
+          <a:effectRef idx="2">
+            <a:schemeClr val="accent1"/>
+          </a:effectRef>
+          <a:fontRef idx="minor">
+            <a:schemeClr val="lt1"/>
+          </a:fontRef>
+        </p:style>
+        <p:txBody>
+          <a:bodyPr rtlCol="0" anchor="ctr" lIns="0" rIns="0" tIns="0" bIns="0"/>
+          <a:lstStyle/>
+          <a:p>
+            <a:pPr algn="ctr"/>
+            <a:r>
+              <a:rPr sz="1400" b="1">
+                <a:solidFill>
+                  <a:srgbClr val="FFFFFF"/>
+                </a:solidFill>
+                <a:latin typeface="Segoe UI"/>
+              </a:rPr>
+              <a:t>✓</a:t>
+            </a:r>
+          </a:p>
+        </p:txBody>
+      </p:sp>
+      <p:sp>
+        <p:nvSpPr>
+          <p:cNvPr id="11" name="TextBox 10"/>
+          <p:cNvSpPr txBox="1"/>
+          <p:nvPr/>
+        </p:nvSpPr>
+        <p:spPr>
+          <a:xfrm>
+            <a:off x="1115568" y="2990088"/>
+            <a:ext cx="10241280" cy="777240"/>
+          </a:xfrm>
+          <a:prstGeom prst="rect">
+            <a:avLst/>
+          </a:prstGeom>
+          <a:noFill/>
+        </p:spPr>
+        <p:txBody>
+          <a:bodyPr wrap="square">
+            <a:spAutoFit/>
+          </a:bodyPr>
+          <a:lstStyle/>
+          <a:p>
+            <a:pPr>
+              <a:lnSpc>
+                <a:spcPct val="110000"/>
+              </a:lnSpc>
+            </a:pPr>
+            <a:r>
+              <a:rPr b="1" sz="1650">
+                <a:solidFill>
+                  <a:srgbClr val="1E293B"/>
+                </a:solidFill>
+                <a:latin typeface="Segoe UI"/>
+              </a:rPr>
+              <a:t>Real LLM integration confirmed.  </a:t>
+            </a:r>
+            <a:r>
+              <a:rPr sz="1500">
+                <a:solidFill>
+                  <a:srgbClr val="475569"/>
+                </a:solidFill>
+                <a:latin typeface="Segoe UI"/>
+              </a:rPr>
+              <a:t>Actual token usage and cost tracked per call, not simulated.</a:t>
+            </a:r>
+          </a:p>
+        </p:txBody>
+      </p:sp>
+      <p:sp>
+        <p:nvSpPr>
+          <p:cNvPr id="12" name="Oval 11"/>
+          <p:cNvSpPr/>
+          <p:nvPr/>
+        </p:nvSpPr>
+        <p:spPr>
+          <a:xfrm>
+            <a:off x="640080" y="3822192"/>
+            <a:ext cx="310896" cy="310896"/>
+          </a:xfrm>
+          <a:prstGeom prst="ellipse">
+            <a:avLst/>
+          </a:prstGeom>
+          <a:solidFill>
+            <a:srgbClr val="059669"/>
+          </a:solidFill>
+          <a:ln>
+            <a:noFill/>
+          </a:ln>
+          <a:effectLst/>
+        </p:spPr>
+        <p:style>
+          <a:lnRef idx="1">
+            <a:schemeClr val="accent1"/>
+          </a:lnRef>
+          <a:fillRef idx="3">
+            <a:schemeClr val="accent1"/>
+          </a:fillRef>
+          <a:effectRef idx="2">
+            <a:schemeClr val="accent1"/>
+          </a:effectRef>
+          <a:fontRef idx="minor">
+            <a:schemeClr val="lt1"/>
+          </a:fontRef>
+        </p:style>
+        <p:txBody>
+          <a:bodyPr rtlCol="0" anchor="ctr" lIns="0" rIns="0" tIns="0" bIns="0"/>
+          <a:lstStyle/>
+          <a:p>
+            <a:pPr algn="ctr"/>
+            <a:r>
+              <a:rPr sz="1400" b="1">
+                <a:solidFill>
+                  <a:srgbClr val="FFFFFF"/>
+                </a:solidFill>
+                <a:latin typeface="Segoe UI"/>
+              </a:rPr>
+              <a:t>✓</a:t>
+            </a:r>
+          </a:p>
+        </p:txBody>
+      </p:sp>
+      <p:sp>
+        <p:nvSpPr>
+          <p:cNvPr id="13" name="TextBox 12"/>
+          <p:cNvSpPr txBox="1"/>
+          <p:nvPr/>
+        </p:nvSpPr>
+        <p:spPr>
+          <a:xfrm>
+            <a:off x="1115568" y="3767328"/>
+            <a:ext cx="10241280" cy="777240"/>
+          </a:xfrm>
+          <a:prstGeom prst="rect">
+            <a:avLst/>
+          </a:prstGeom>
+          <a:noFill/>
+        </p:spPr>
+        <p:txBody>
+          <a:bodyPr wrap="square">
+            <a:spAutoFit/>
+          </a:bodyPr>
+          <a:lstStyle/>
+          <a:p>
+            <a:pPr>
+              <a:lnSpc>
+                <a:spcPct val="110000"/>
+              </a:lnSpc>
+            </a:pPr>
+            <a:r>
+              <a:rPr b="1" sz="1650">
+                <a:solidFill>
+                  <a:srgbClr val="1E293B"/>
+                </a:solidFill>
+                <a:latin typeface="Segoe UI"/>
+              </a:rPr>
+              <a:t>All 10 required frontend panels implemented,  </a:t>
+            </a:r>
+            <a:r>
+              <a:rPr sz="1500">
+                <a:solidFill>
+                  <a:srgbClr val="475569"/>
+                </a:solidFill>
+                <a:latin typeface="Segoe UI"/>
+              </a:rPr>
+              <a:t>wired to the live backend, not mock data — Dashboard, Trace, Comm Log, Graph, Cost, Logs, Memory, HITL, Report, Home.</a:t>
+            </a:r>
+          </a:p>
+        </p:txBody>
+      </p:sp>
+      <p:sp>
+        <p:nvSpPr>
+          <p:cNvPr id="14" name="Oval 13"/>
+          <p:cNvSpPr/>
+          <p:nvPr/>
+        </p:nvSpPr>
+        <p:spPr>
+          <a:xfrm>
+            <a:off x="640080" y="4599432"/>
+            <a:ext cx="310896" cy="310896"/>
+          </a:xfrm>
+          <a:prstGeom prst="ellipse">
+            <a:avLst/>
+          </a:prstGeom>
+          <a:solidFill>
+            <a:srgbClr val="059669"/>
+          </a:solidFill>
+          <a:ln>
+            <a:noFill/>
+          </a:ln>
+          <a:effectLst/>
+        </p:spPr>
+        <p:style>
+          <a:lnRef idx="1">
+            <a:schemeClr val="accent1"/>
+          </a:lnRef>
+          <a:fillRef idx="3">
+            <a:schemeClr val="accent1"/>
+          </a:fillRef>
+          <a:effectRef idx="2">
+            <a:schemeClr val="accent1"/>
+          </a:effectRef>
+          <a:fontRef idx="minor">
+            <a:schemeClr val="lt1"/>
+          </a:fontRef>
+        </p:style>
+        <p:txBody>
+          <a:bodyPr rtlCol="0" anchor="ctr" lIns="0" rIns="0" tIns="0" bIns="0"/>
+          <a:lstStyle/>
+          <a:p>
+            <a:pPr algn="ctr"/>
+            <a:r>
+              <a:rPr sz="1400" b="1">
+                <a:solidFill>
+                  <a:srgbClr val="FFFFFF"/>
+                </a:solidFill>
+                <a:latin typeface="Segoe UI"/>
+              </a:rPr>
+              <a:t>✓</a:t>
+            </a:r>
+          </a:p>
+        </p:txBody>
+      </p:sp>
+      <p:sp>
+        <p:nvSpPr>
+          <p:cNvPr id="15" name="TextBox 14"/>
+          <p:cNvSpPr txBox="1"/>
+          <p:nvPr/>
+        </p:nvSpPr>
+        <p:spPr>
+          <a:xfrm>
+            <a:off x="1115568" y="4544568"/>
+            <a:ext cx="10241280" cy="777240"/>
+          </a:xfrm>
+          <a:prstGeom prst="rect">
+            <a:avLst/>
+          </a:prstGeom>
+          <a:noFill/>
+        </p:spPr>
+        <p:txBody>
+          <a:bodyPr wrap="square">
+            <a:spAutoFit/>
+          </a:bodyPr>
+          <a:lstStyle/>
+          <a:p>
+            <a:pPr>
+              <a:lnSpc>
+                <a:spcPct val="110000"/>
+              </a:lnSpc>
+            </a:pPr>
+            <a:r>
+              <a:rPr b="1" sz="1650">
+                <a:solidFill>
+                  <a:srgbClr val="1E293B"/>
+                </a:solidFill>
+                <a:latin typeface="Segoe UI"/>
+              </a:rPr>
+              <a:t>Deployable.  </a:t>
+            </a:r>
+            <a:r>
+              <a:rPr sz="1500">
+                <a:solidFill>
+                  <a:srgbClr val="475569"/>
+                </a:solidFill>
+                <a:latin typeface="Segoe UI"/>
+              </a:rPr>
+              <a:t>Docker Compose (backend + frontend + Postgres + Chroma) with GitHub Actions CI running tests on every push.</a:t>
+            </a:r>
+          </a:p>
+        </p:txBody>
+      </p:sp>
+      <p:sp>
+        <p:nvSpPr>
+          <p:cNvPr id="16" name="TextBox 15"/>
+          <p:cNvSpPr txBox="1"/>
+          <p:nvPr/>
+        </p:nvSpPr>
+        <p:spPr>
+          <a:xfrm>
+            <a:off x="502920" y="6492240"/>
+            <a:ext cx="5486400" cy="274320"/>
+          </a:xfrm>
+          <a:prstGeom prst="rect">
+            <a:avLst/>
+          </a:prstGeom>
+          <a:noFill/>
+        </p:spPr>
+        <p:txBody>
+          <a:bodyPr wrap="none">
+            <a:spAutoFit/>
+          </a:bodyPr>
+          <a:lstStyle/>
+          <a:p>
+            <a:pPr>
+              <a:defRPr sz="950">
+                <a:solidFill>
+                  <a:srgbClr val="64748B"/>
+                </a:solidFill>
+                <a:latin typeface="Segoe UI"/>
+              </a:defRPr>
+            </a:pPr>
+            <a:r>
+              <a:t>Education AI Analyst</a:t>
+            </a:r>
+          </a:p>
+        </p:txBody>
+      </p:sp>
+      <p:sp>
+        <p:nvSpPr>
+          <p:cNvPr id="17" name="Rounded Rectangle 16"/>
+          <p:cNvSpPr/>
+          <p:nvPr/>
+        </p:nvSpPr>
+        <p:spPr>
+          <a:xfrm>
+            <a:off x="11475720" y="320040"/>
+            <a:ext cx="457200" cy="292608"/>
+          </a:xfrm>
+          <a:prstGeom prst="roundRect">
+            <a:avLst>
+              <a:gd name="adj" fmla="val 50000"/>
+            </a:avLst>
+          </a:prstGeom>
+          <a:solidFill>
             <a:srgbClr val="4F46E5"/>
           </a:solidFill>
           <a:ln>
             <a:noFill/>
           </a:ln>
+          <a:effectLst/>
         </p:spPr>
         <p:style>
           <a:lnRef idx="1">
@@ -6865,267 +9743,18 @@
           </a:fontRef>
         </p:style>
         <p:txBody>
-          <a:bodyPr rtlCol="0" anchor="ctr"/>
+          <a:bodyPr rtlCol="0" anchor="ctr" lIns="0" rIns="0" tIns="0" bIns="0"/>
           <a:lstStyle/>
           <a:p>
             <a:pPr algn="ctr"/>
-          </a:p>
-        </p:txBody>
-      </p:sp>
-      <p:sp>
-        <p:nvSpPr>
-          <p:cNvPr id="3" name="TextBox 2"/>
-          <p:cNvSpPr txBox="1"/>
-          <p:nvPr/>
-        </p:nvSpPr>
-        <p:spPr>
-          <a:xfrm>
-            <a:off x="502920" y="365760"/>
-            <a:ext cx="10972800" cy="822960"/>
-          </a:xfrm>
-          <a:prstGeom prst="rect">
-            <a:avLst/>
-          </a:prstGeom>
-          <a:noFill/>
-        </p:spPr>
-        <p:txBody>
-          <a:bodyPr wrap="none">
-            <a:spAutoFit/>
-          </a:bodyPr>
-          <a:lstStyle/>
-          <a:p>
-            <a:pPr>
-              <a:defRPr sz="3200" b="1">
-                <a:solidFill>
-                  <a:srgbClr val="1E293B"/>
-                </a:solidFill>
-              </a:defRPr>
-            </a:pPr>
-            <a:r>
-              <a:t>Status &amp; Results</a:t>
-            </a:r>
-          </a:p>
-        </p:txBody>
-      </p:sp>
-      <p:sp>
-        <p:nvSpPr>
-          <p:cNvPr id="4" name="TextBox 3"/>
-          <p:cNvSpPr txBox="1"/>
-          <p:nvPr/>
-        </p:nvSpPr>
-        <p:spPr>
-          <a:xfrm>
-            <a:off x="640080" y="1417320"/>
-            <a:ext cx="10789920" cy="4754880"/>
-          </a:xfrm>
-          <a:prstGeom prst="rect">
-            <a:avLst/>
-          </a:prstGeom>
-          <a:noFill/>
-        </p:spPr>
-        <p:txBody>
-          <a:bodyPr wrap="square">
-            <a:spAutoFit/>
-          </a:bodyPr>
-          <a:lstStyle/>
-          <a:p>
-            <a:pPr>
-              <a:lnSpc>
-                <a:spcPct val="125000"/>
-              </a:lnSpc>
-              <a:spcAft>
-                <a:spcPts val="1400"/>
-              </a:spcAft>
-            </a:pPr>
-            <a:r>
-              <a:rPr b="1" sz="1750">
-                <a:solidFill>
-                  <a:srgbClr val="1E293B"/>
-                </a:solidFill>
-              </a:rPr>
-              <a:t>118 automated backend tests passing.  </a:t>
-            </a:r>
-            <a:r>
-              <a:rPr sz="1750">
-                <a:solidFill>
-                  <a:srgbClr val="475569"/>
-                </a:solidFill>
-              </a:rPr>
-              <a:t>Unit + integration + end-to-end coverage per tool and agent.</a:t>
-            </a:r>
-          </a:p>
-          <a:p>
-            <a:pPr>
-              <a:lnSpc>
-                <a:spcPct val="125000"/>
-              </a:lnSpc>
-              <a:spcAft>
-                <a:spcPts val="1400"/>
-              </a:spcAft>
-            </a:pPr>
-            <a:r>
-              <a:rPr b="1" sz="1750">
-                <a:solidFill>
-                  <a:srgbClr val="1E293B"/>
-                </a:solidFill>
-              </a:rPr>
-              <a:t>Full pipeline verified live, end to end.  </a:t>
-            </a:r>
-            <a:r>
-              <a:rPr sz="1750">
-                <a:solidFill>
-                  <a:srgbClr val="475569"/>
-                </a:solidFill>
-              </a:rPr>
-              <a:t>Upload → intake → analysis → report → QA → human approval → download, run against a real OpenRouter key.</a:t>
-            </a:r>
-          </a:p>
-          <a:p>
-            <a:pPr>
-              <a:lnSpc>
-                <a:spcPct val="125000"/>
-              </a:lnSpc>
-              <a:spcAft>
-                <a:spcPts val="1400"/>
-              </a:spcAft>
-            </a:pPr>
-            <a:r>
-              <a:rPr b="1" sz="1750">
-                <a:solidFill>
-                  <a:srgbClr val="1E293B"/>
-                </a:solidFill>
-              </a:rPr>
-              <a:t>Real LLM integration confirmed.  </a:t>
-            </a:r>
-            <a:r>
-              <a:rPr sz="1750">
-                <a:solidFill>
-                  <a:srgbClr val="475569"/>
-                </a:solidFill>
-              </a:rPr>
-              <a:t>Actual token usage and cost tracked per call, not simulated.</a:t>
-            </a:r>
-          </a:p>
-          <a:p>
-            <a:pPr>
-              <a:lnSpc>
-                <a:spcPct val="125000"/>
-              </a:lnSpc>
-              <a:spcAft>
-                <a:spcPts val="1400"/>
-              </a:spcAft>
-            </a:pPr>
-            <a:r>
-              <a:rPr b="1" sz="1750">
-                <a:solidFill>
-                  <a:srgbClr val="1E293B"/>
-                </a:solidFill>
-              </a:rPr>
-              <a:t>All 10 required frontend panels implemented  </a:t>
-            </a:r>
-            <a:r>
-              <a:rPr sz="1750">
-                <a:solidFill>
-                  <a:srgbClr val="475569"/>
-                </a:solidFill>
-              </a:rPr>
-              <a:t>and wired to the live backend, not mock data — Dashboard, Trace, Comm Log, Graph, Cost, Logs, Memory, HITL, Report, Home.</a:t>
-            </a:r>
-          </a:p>
-          <a:p>
-            <a:pPr>
-              <a:lnSpc>
-                <a:spcPct val="125000"/>
-              </a:lnSpc>
-              <a:spcAft>
-                <a:spcPts val="1400"/>
-              </a:spcAft>
-            </a:pPr>
-            <a:r>
-              <a:rPr b="1" sz="1750">
-                <a:solidFill>
-                  <a:srgbClr val="1E293B"/>
-                </a:solidFill>
-              </a:rPr>
-              <a:t>Deployable.  </a:t>
-            </a:r>
-            <a:r>
-              <a:rPr sz="1750">
-                <a:solidFill>
-                  <a:srgbClr val="475569"/>
-                </a:solidFill>
-              </a:rPr>
-              <a:t>Docker Compose (backend + frontend + Postgres + Chroma) with GitHub Actions CI running tests on every push.</a:t>
-            </a:r>
-          </a:p>
-        </p:txBody>
-      </p:sp>
-      <p:sp>
-        <p:nvSpPr>
-          <p:cNvPr id="5" name="TextBox 4"/>
-          <p:cNvSpPr txBox="1"/>
-          <p:nvPr/>
-        </p:nvSpPr>
-        <p:spPr>
-          <a:xfrm>
-            <a:off x="457200" y="6473952"/>
-            <a:ext cx="5486400" cy="320040"/>
-          </a:xfrm>
-          <a:prstGeom prst="rect">
-            <a:avLst/>
-          </a:prstGeom>
-          <a:noFill/>
-        </p:spPr>
-        <p:txBody>
-          <a:bodyPr wrap="none">
-            <a:spAutoFit/>
-          </a:bodyPr>
-          <a:lstStyle/>
-          <a:p>
-            <a:pPr>
-              <a:defRPr sz="1000">
-                <a:solidFill>
-                  <a:srgbClr val="64748B"/>
-                </a:solidFill>
-              </a:defRPr>
-            </a:pPr>
-            <a:r>
-              <a:t>Education AI Analyst</a:t>
-            </a:r>
-          </a:p>
-        </p:txBody>
-      </p:sp>
-      <p:sp>
-        <p:nvSpPr>
-          <p:cNvPr id="6" name="TextBox 5"/>
-          <p:cNvSpPr txBox="1"/>
-          <p:nvPr/>
-        </p:nvSpPr>
-        <p:spPr>
-          <a:xfrm>
-            <a:off x="11247120" y="6473952"/>
-            <a:ext cx="640080" cy="320040"/>
-          </a:xfrm>
-          <a:prstGeom prst="rect">
-            <a:avLst/>
-          </a:prstGeom>
-          <a:noFill/>
-        </p:spPr>
-        <p:txBody>
-          <a:bodyPr wrap="none">
-            <a:spAutoFit/>
-          </a:bodyPr>
-          <a:lstStyle/>
-          <a:p>
-            <a:pPr algn="r">
-              <a:defRPr sz="1000">
-                <a:solidFill>
-                  <a:srgbClr val="64748B"/>
-                </a:solidFill>
-              </a:defRPr>
-            </a:pPr>
-            <a:r>
-              <a:t>9</a:t>
+            <a:r>
+              <a:rPr sz="1200" b="1">
+                <a:solidFill>
+                  <a:srgbClr val="FFFFFF"/>
+                </a:solidFill>
+                <a:latin typeface="Segoe UI"/>
+              </a:rPr>
+              <a:t>09</a:t>
             </a:r>
           </a:p>
         </p:txBody>

--- a/docs/presentation-slides.pptx
+++ b/docs/presentation-slides.pptx
@@ -3107,146 +3107,14 @@
       <p:grpSpPr/>
       <p:sp>
         <p:nvSpPr>
-          <p:cNvPr id="2" name="Oval 1"/>
+          <p:cNvPr id="2" name="Rectangle 1"/>
           <p:cNvSpPr/>
           <p:nvPr/>
         </p:nvSpPr>
         <p:spPr>
           <a:xfrm>
-            <a:off x="9692640" y="-2194560"/>
-            <a:ext cx="5943600" cy="5943600"/>
-          </a:xfrm>
-          <a:prstGeom prst="ellipse">
-            <a:avLst/>
-          </a:prstGeom>
-          <a:solidFill>
-            <a:srgbClr val="243047"/>
-          </a:solidFill>
-          <a:ln>
-            <a:noFill/>
-          </a:ln>
-          <a:effectLst/>
-        </p:spPr>
-        <p:style>
-          <a:lnRef idx="1">
-            <a:schemeClr val="accent1"/>
-          </a:lnRef>
-          <a:fillRef idx="3">
-            <a:schemeClr val="accent1"/>
-          </a:fillRef>
-          <a:effectRef idx="2">
-            <a:schemeClr val="accent1"/>
-          </a:effectRef>
-          <a:fontRef idx="minor">
-            <a:schemeClr val="lt1"/>
-          </a:fontRef>
-        </p:style>
-        <p:txBody>
-          <a:bodyPr rtlCol="0" anchor="ctr"/>
-          <a:lstStyle/>
-          <a:p>
-            <a:pPr algn="ctr"/>
-          </a:p>
-        </p:txBody>
-      </p:sp>
-      <p:sp>
-        <p:nvSpPr>
-          <p:cNvPr id="3" name="Oval 2"/>
-          <p:cNvSpPr/>
-          <p:nvPr/>
-        </p:nvSpPr>
-        <p:spPr>
-          <a:xfrm>
-            <a:off x="-2560320" y="4206240"/>
-            <a:ext cx="5029200" cy="5029200"/>
-          </a:xfrm>
-          <a:prstGeom prst="ellipse">
-            <a:avLst/>
-          </a:prstGeom>
-          <a:solidFill>
-            <a:srgbClr val="243047"/>
-          </a:solidFill>
-          <a:ln>
-            <a:noFill/>
-          </a:ln>
-          <a:effectLst/>
-        </p:spPr>
-        <p:style>
-          <a:lnRef idx="1">
-            <a:schemeClr val="accent1"/>
-          </a:lnRef>
-          <a:fillRef idx="3">
-            <a:schemeClr val="accent1"/>
-          </a:fillRef>
-          <a:effectRef idx="2">
-            <a:schemeClr val="accent1"/>
-          </a:effectRef>
-          <a:fontRef idx="minor">
-            <a:schemeClr val="lt1"/>
-          </a:fontRef>
-        </p:style>
-        <p:txBody>
-          <a:bodyPr rtlCol="0" anchor="ctr"/>
-          <a:lstStyle/>
-          <a:p>
-            <a:pPr algn="ctr"/>
-          </a:p>
-        </p:txBody>
-      </p:sp>
-      <p:sp>
-        <p:nvSpPr>
-          <p:cNvPr id="4" name="Oval 3"/>
-          <p:cNvSpPr/>
-          <p:nvPr/>
-        </p:nvSpPr>
-        <p:spPr>
-          <a:xfrm>
-            <a:off x="10607040" y="-914400"/>
-            <a:ext cx="2926080" cy="2926080"/>
-          </a:xfrm>
-          <a:prstGeom prst="ellipse">
-            <a:avLst/>
-          </a:prstGeom>
-          <a:noFill/>
-          <a:ln w="19050">
-            <a:solidFill>
-              <a:srgbClr val="4F46E5"/>
-            </a:solidFill>
-          </a:ln>
-          <a:effectLst/>
-        </p:spPr>
-        <p:style>
-          <a:lnRef idx="1">
-            <a:schemeClr val="accent1"/>
-          </a:lnRef>
-          <a:fillRef idx="3">
-            <a:schemeClr val="accent1"/>
-          </a:fillRef>
-          <a:effectRef idx="2">
-            <a:schemeClr val="accent1"/>
-          </a:effectRef>
-          <a:fontRef idx="minor">
-            <a:schemeClr val="lt1"/>
-          </a:fontRef>
-        </p:style>
-        <p:txBody>
-          <a:bodyPr rtlCol="0" anchor="ctr"/>
-          <a:lstStyle/>
-          <a:p>
-            <a:pPr algn="ctr"/>
-          </a:p>
-        </p:txBody>
-      </p:sp>
-      <p:sp>
-        <p:nvSpPr>
-          <p:cNvPr id="5" name="Rectangle 4"/>
-          <p:cNvSpPr/>
-          <p:nvPr/>
-        </p:nvSpPr>
-        <p:spPr>
-          <a:xfrm>
-            <a:off x="0" y="3310128"/>
-            <a:ext cx="12191695" cy="41148"/>
+            <a:off x="0" y="3246120"/>
+            <a:ext cx="12191695" cy="36576"/>
           </a:xfrm>
           <a:prstGeom prst="rect">
             <a:avLst/>
@@ -3257,7 +3125,6 @@
           <a:ln>
             <a:noFill/>
           </a:ln>
-          <a:effectLst/>
         </p:spPr>
         <p:style>
           <a:lnRef idx="1">
@@ -3283,14 +3150,119 @@
       </p:sp>
       <p:sp>
         <p:nvSpPr>
+          <p:cNvPr id="3" name="TextBox 2"/>
+          <p:cNvSpPr txBox="1"/>
+          <p:nvPr/>
+        </p:nvSpPr>
+        <p:spPr>
+          <a:xfrm>
+            <a:off x="914400" y="2286000"/>
+            <a:ext cx="10332720" cy="1005840"/>
+          </a:xfrm>
+          <a:prstGeom prst="rect">
+            <a:avLst/>
+          </a:prstGeom>
+          <a:noFill/>
+        </p:spPr>
+        <p:txBody>
+          <a:bodyPr wrap="none">
+            <a:spAutoFit/>
+          </a:bodyPr>
+          <a:lstStyle/>
+          <a:p>
+            <a:pPr algn="ctr">
+              <a:defRPr sz="4800" b="1">
+                <a:solidFill>
+                  <a:srgbClr val="FFFFFF"/>
+                </a:solidFill>
+              </a:defRPr>
+            </a:pPr>
+            <a:r>
+              <a:t>Education AI Analyst</a:t>
+            </a:r>
+          </a:p>
+        </p:txBody>
+      </p:sp>
+      <p:sp>
+        <p:nvSpPr>
+          <p:cNvPr id="4" name="TextBox 3"/>
+          <p:cNvSpPr txBox="1"/>
+          <p:nvPr/>
+        </p:nvSpPr>
+        <p:spPr>
+          <a:xfrm>
+            <a:off x="914400" y="3383280"/>
+            <a:ext cx="10332720" cy="640080"/>
+          </a:xfrm>
+          <a:prstGeom prst="rect">
+            <a:avLst/>
+          </a:prstGeom>
+          <a:noFill/>
+        </p:spPr>
+        <p:txBody>
+          <a:bodyPr wrap="none">
+            <a:spAutoFit/>
+          </a:bodyPr>
+          <a:lstStyle/>
+          <a:p>
+            <a:pPr algn="ctr">
+              <a:defRPr sz="2000">
+                <a:solidFill>
+                  <a:srgbClr val="C7D2FE"/>
+                </a:solidFill>
+              </a:defRPr>
+            </a:pPr>
+            <a:r>
+              <a:t>A Multi-Agent System for Education Document &amp; Social-Sentiment Analysis</a:t>
+            </a:r>
+          </a:p>
+        </p:txBody>
+      </p:sp>
+      <p:sp>
+        <p:nvSpPr>
+          <p:cNvPr id="5" name="TextBox 4"/>
+          <p:cNvSpPr txBox="1"/>
+          <p:nvPr/>
+        </p:nvSpPr>
+        <p:spPr>
+          <a:xfrm>
+            <a:off x="914400" y="4206240"/>
+            <a:ext cx="10332720" cy="457200"/>
+          </a:xfrm>
+          <a:prstGeom prst="rect">
+            <a:avLst/>
+          </a:prstGeom>
+          <a:noFill/>
+        </p:spPr>
+        <p:txBody>
+          <a:bodyPr wrap="none">
+            <a:spAutoFit/>
+          </a:bodyPr>
+          <a:lstStyle/>
+          <a:p>
+            <a:pPr algn="ctr">
+              <a:defRPr sz="1500">
+                <a:solidFill>
+                  <a:srgbClr val="94A3B8"/>
+                </a:solidFill>
+              </a:defRPr>
+            </a:pPr>
+            <a:r>
+              <a:t>Computer Science Applications and Advancements — 2nd Semester, MSc</a:t>
+            </a:r>
+          </a:p>
+        </p:txBody>
+      </p:sp>
+      <p:sp>
+        <p:nvSpPr>
           <p:cNvPr id="6" name="TextBox 5"/>
           <p:cNvSpPr txBox="1"/>
           <p:nvPr/>
         </p:nvSpPr>
         <p:spPr>
           <a:xfrm>
-            <a:off x="914400" y="2331720"/>
-            <a:ext cx="10332720" cy="960120"/>
+            <a:off x="914400" y="4846320"/>
+            <a:ext cx="10332720" cy="457200"/>
           </a:xfrm>
           <a:prstGeom prst="rect">
             <a:avLst/>
@@ -3303,15 +3275,15 @@
           </a:bodyPr>
           <a:lstStyle/>
           <a:p>
-            <a:pPr algn="ctr"/>
-            <a:r>
-              <a:rPr sz="5000" b="1">
+            <a:pPr algn="ctr">
+              <a:defRPr sz="1600" b="1">
                 <a:solidFill>
                   <a:srgbClr val="FFFFFF"/>
                 </a:solidFill>
-                <a:latin typeface="Segoe UI"/>
-              </a:rPr>
-              <a:t>Education AI Analyst</a:t>
+              </a:defRPr>
+            </a:pPr>
+            <a:r>
+              <a:t>Tarin  ·  Saif  ·  Shohana  ·  Fahim</a:t>
             </a:r>
           </a:p>
         </p:txBody>
@@ -3324,8 +3296,8 @@
         </p:nvSpPr>
         <p:spPr>
           <a:xfrm>
-            <a:off x="914400" y="3456432"/>
-            <a:ext cx="10332720" cy="548640"/>
+            <a:off x="914400" y="6126480"/>
+            <a:ext cx="10332720" cy="365760"/>
           </a:xfrm>
           <a:prstGeom prst="rect">
             <a:avLst/>
@@ -3338,119 +3310,14 @@
           </a:bodyPr>
           <a:lstStyle/>
           <a:p>
-            <a:pPr algn="ctr"/>
-            <a:r>
-              <a:rPr sz="1900">
-                <a:solidFill>
-                  <a:srgbClr val="C7D2FE"/>
-                </a:solidFill>
-                <a:latin typeface="Segoe UI"/>
-              </a:rPr>
-              <a:t>A Multi-Agent System for Education Document &amp; Social-Sentiment Analysis</a:t>
-            </a:r>
-          </a:p>
-        </p:txBody>
-      </p:sp>
-      <p:sp>
-        <p:nvSpPr>
-          <p:cNvPr id="8" name="TextBox 7"/>
-          <p:cNvSpPr txBox="1"/>
-          <p:nvPr/>
-        </p:nvSpPr>
-        <p:spPr>
-          <a:xfrm>
-            <a:off x="914400" y="4251960"/>
-            <a:ext cx="10332720" cy="411480"/>
-          </a:xfrm>
-          <a:prstGeom prst="rect">
-            <a:avLst/>
-          </a:prstGeom>
-          <a:noFill/>
-        </p:spPr>
-        <p:txBody>
-          <a:bodyPr wrap="none">
-            <a:spAutoFit/>
-          </a:bodyPr>
-          <a:lstStyle/>
-          <a:p>
-            <a:pPr algn="ctr"/>
-            <a:r>
-              <a:rPr sz="1450">
-                <a:solidFill>
-                  <a:srgbClr val="94A3B8"/>
-                </a:solidFill>
-                <a:latin typeface="Segoe UI"/>
-              </a:rPr>
-              <a:t>Computer Science Applications and Advancements — 2nd Semester, MSc</a:t>
-            </a:r>
-          </a:p>
-        </p:txBody>
-      </p:sp>
-      <p:sp>
-        <p:nvSpPr>
-          <p:cNvPr id="9" name="TextBox 8"/>
-          <p:cNvSpPr txBox="1"/>
-          <p:nvPr/>
-        </p:nvSpPr>
-        <p:spPr>
-          <a:xfrm>
-            <a:off x="914400" y="4892040"/>
-            <a:ext cx="10332720" cy="457200"/>
-          </a:xfrm>
-          <a:prstGeom prst="rect">
-            <a:avLst/>
-          </a:prstGeom>
-          <a:noFill/>
-        </p:spPr>
-        <p:txBody>
-          <a:bodyPr wrap="none">
-            <a:spAutoFit/>
-          </a:bodyPr>
-          <a:lstStyle/>
-          <a:p>
-            <a:pPr algn="ctr"/>
-            <a:r>
-              <a:rPr sz="1600" b="1">
-                <a:solidFill>
-                  <a:srgbClr val="FFFFFF"/>
-                </a:solidFill>
-                <a:latin typeface="Segoe UI"/>
-              </a:rPr>
-              <a:t>Tarin  ·  Saif  ·  Shohana  ·  Fahim</a:t>
-            </a:r>
-          </a:p>
-        </p:txBody>
-      </p:sp>
-      <p:sp>
-        <p:nvSpPr>
-          <p:cNvPr id="10" name="TextBox 9"/>
-          <p:cNvSpPr txBox="1"/>
-          <p:nvPr/>
-        </p:nvSpPr>
-        <p:spPr>
-          <a:xfrm>
-            <a:off x="914400" y="6172200"/>
-            <a:ext cx="10332720" cy="365760"/>
-          </a:xfrm>
-          <a:prstGeom prst="rect">
-            <a:avLst/>
-          </a:prstGeom>
-          <a:noFill/>
-        </p:spPr>
-        <p:txBody>
-          <a:bodyPr wrap="none">
-            <a:spAutoFit/>
-          </a:bodyPr>
-          <a:lstStyle/>
-          <a:p>
-            <a:pPr algn="ctr"/>
-            <a:r>
-              <a:rPr sz="1200">
+            <a:pPr algn="ctr">
+              <a:defRPr sz="1200">
                 <a:solidFill>
                   <a:srgbClr val="64748B"/>
                 </a:solidFill>
-                <a:latin typeface="Segoe UI"/>
-              </a:rPr>
+              </a:defRPr>
+            </a:pPr>
+            <a:r>
               <a:t>30 August 2026</a:t>
             </a:r>
           </a:p>
@@ -3502,7 +3369,6 @@
           <a:ln>
             <a:noFill/>
           </a:ln>
-          <a:effectLst/>
         </p:spPr>
         <p:style>
           <a:lnRef idx="1">
@@ -3534,8 +3400,8 @@
         </p:nvSpPr>
         <p:spPr>
           <a:xfrm>
-            <a:off x="502920" y="292608"/>
-            <a:ext cx="9144000" cy="274320"/>
+            <a:off x="502920" y="365760"/>
+            <a:ext cx="10972800" cy="822960"/>
           </a:xfrm>
           <a:prstGeom prst="rect">
             <a:avLst/>
@@ -3549,77 +3415,38 @@
           <a:lstStyle/>
           <a:p>
             <a:pPr>
-              <a:spcAft>
-                <a:spcPts val="0"/>
-              </a:spcAft>
-            </a:pPr>
-            <a:r>
-              <a:rPr sz="1100" b="1">
-                <a:solidFill>
-                  <a:srgbClr val="4F46E5"/>
-                </a:solidFill>
-                <a:latin typeface="Segoe UI"/>
-              </a:rPr>
-              <a:t>09 · TEAM</a:t>
-            </a:r>
-          </a:p>
-        </p:txBody>
-      </p:sp>
-      <p:sp>
-        <p:nvSpPr>
-          <p:cNvPr id="4" name="TextBox 3"/>
-          <p:cNvSpPr txBox="1"/>
-          <p:nvPr/>
-        </p:nvSpPr>
-        <p:spPr>
-          <a:xfrm>
-            <a:off x="502920" y="530352"/>
-            <a:ext cx="10424160" cy="822960"/>
-          </a:xfrm>
-          <a:prstGeom prst="rect">
-            <a:avLst/>
-          </a:prstGeom>
-          <a:noFill/>
-        </p:spPr>
-        <p:txBody>
-          <a:bodyPr wrap="none">
-            <a:spAutoFit/>
-          </a:bodyPr>
-          <a:lstStyle/>
-          <a:p>
-            <a:r>
-              <a:rPr sz="3000" b="1">
+              <a:defRPr sz="3200" b="1">
                 <a:solidFill>
                   <a:srgbClr val="1E293B"/>
                 </a:solidFill>
-                <a:latin typeface="Segoe UI"/>
-              </a:rPr>
-              <a:t>Team &amp; Contributions</a:t>
-            </a:r>
-          </a:p>
-        </p:txBody>
-      </p:sp>
-      <p:sp>
-        <p:nvSpPr>
-          <p:cNvPr id="5" name="Rectangle 4"/>
+              </a:defRPr>
+            </a:pPr>
+            <a:r>
+              <a:t>Team &amp; What's Next</a:t>
+            </a:r>
+          </a:p>
+        </p:txBody>
+      </p:sp>
+      <p:sp>
+        <p:nvSpPr>
+          <p:cNvPr id="4" name="Rectangle 3"/>
           <p:cNvSpPr/>
           <p:nvPr/>
         </p:nvSpPr>
         <p:spPr>
           <a:xfrm>
-            <a:off x="530352" y="1188720"/>
-            <a:ext cx="548640" cy="38100"/>
+            <a:off x="640080" y="1417320"/>
+            <a:ext cx="10881360" cy="658368"/>
           </a:xfrm>
           <a:prstGeom prst="rect">
             <a:avLst/>
           </a:prstGeom>
           <a:solidFill>
-            <a:srgbClr val="4F46E5"/>
+            <a:srgbClr val="EEF2FF"/>
           </a:solidFill>
           <a:ln>
             <a:noFill/>
           </a:ln>
-          <a:effectLst/>
         </p:spPr>
         <p:style>
           <a:lnRef idx="1">
@@ -3636,548 +3463,49 @@
           </a:fontRef>
         </p:style>
         <p:txBody>
-          <a:bodyPr rtlCol="0" anchor="ctr"/>
+          <a:bodyPr rtlCol="0" anchor="ctr" lIns="182880" tIns="91440"/>
           <a:lstStyle/>
           <a:p>
             <a:pPr algn="ctr"/>
-          </a:p>
-        </p:txBody>
-      </p:sp>
-      <p:graphicFrame>
-        <p:nvGraphicFramePr>
-          <p:cNvPr id="6" name="Table 5"/>
-          <p:cNvGraphicFramePr>
-            <a:graphicFrameLocks noGrp="1"/>
-          </p:cNvGraphicFramePr>
-          <p:nvPr/>
-        </p:nvGraphicFramePr>
-        <p:xfrm>
-          <a:off x="640080" y="1490472"/>
-          <a:ext cx="5486400" cy="2514600"/>
-        </p:xfrm>
-        <a:graphic>
-          <a:graphicData uri="http://schemas.openxmlformats.org/drawingml/2006/table">
-            <a:tbl>
-              <a:tblPr firstRow="1" bandRow="1">
-                <a:tableStyleId>{5C22544A-7EE6-4342-B048-85BDC9FD1C3A}</a:tableStyleId>
-              </a:tblPr>
-              <a:tblGrid>
-                <a:gridCol w="3108960"/>
-                <a:gridCol w="2377440"/>
-              </a:tblGrid>
-              <a:tr h="502920">
-                <a:tc>
-                  <a:txBody>
-                    <a:bodyPr/>
-                    <a:lstStyle/>
-                    <a:p>
-                      <a:pPr>
-                        <a:defRPr b="1" sz="1500">
-                          <a:solidFill>
-                            <a:srgbClr val="FFFFFF"/>
-                          </a:solidFill>
-                        </a:defRPr>
-                      </a:pPr>
-                      <a:r>
-                        <a:rPr>
-                          <a:latin typeface="Segoe UI"/>
-                        </a:rPr>
-                        <a:t>Name</a:t>
-                      </a:r>
-                    </a:p>
-                  </a:txBody>
-                  <a:tcPr marL="164592" marR="109728" marT="73152" marB="73152" anchor="ctr">
-                    <a:solidFill>
-                      <a:srgbClr val="4F46E5"/>
-                    </a:solidFill>
-                  </a:tcPr>
-                </a:tc>
-                <a:tc>
-                  <a:txBody>
-                    <a:bodyPr/>
-                    <a:lstStyle/>
-                    <a:p>
-                      <a:pPr>
-                        <a:defRPr b="1" sz="1500">
-                          <a:solidFill>
-                            <a:srgbClr val="FFFFFF"/>
-                          </a:solidFill>
-                        </a:defRPr>
-                      </a:pPr>
-                      <a:r>
-                        <a:rPr>
-                          <a:latin typeface="Segoe UI"/>
-                        </a:rPr>
-                        <a:t>Student ID</a:t>
-                      </a:r>
-                    </a:p>
-                  </a:txBody>
-                  <a:tcPr marL="164592" marR="109728" marT="73152" marB="73152" anchor="ctr">
-                    <a:solidFill>
-                      <a:srgbClr val="4F46E5"/>
-                    </a:solidFill>
-                  </a:tcPr>
-                </a:tc>
-              </a:tr>
-              <a:tr h="502920">
-                <a:tc>
-                  <a:txBody>
-                    <a:bodyPr/>
-                    <a:lstStyle/>
-                    <a:p>
-                      <a:pPr>
-                        <a:defRPr sz="1500" b="1">
-                          <a:solidFill>
-                            <a:srgbClr val="4F46E5"/>
-                          </a:solidFill>
-                        </a:defRPr>
-                      </a:pPr>
-                      <a:r>
-                        <a:rPr>
-                          <a:latin typeface="Segoe UI"/>
-                        </a:rPr>
-                        <a:t>Tarin</a:t>
-                      </a:r>
-                    </a:p>
-                  </a:txBody>
-                  <a:tcPr marL="164592" marR="109728" marT="73152" marB="73152" anchor="ctr">
-                    <a:solidFill>
-                      <a:srgbClr val="FFFFFF"/>
-                    </a:solidFill>
-                  </a:tcPr>
-                </a:tc>
-                <a:tc>
-                  <a:txBody>
-                    <a:bodyPr/>
-                    <a:lstStyle/>
-                    <a:p>
-                      <a:pPr>
-                        <a:defRPr sz="1500">
-                          <a:solidFill>
-                            <a:srgbClr val="475569"/>
-                          </a:solidFill>
-                        </a:defRPr>
-                      </a:pPr>
-                    </a:p>
-                  </a:txBody>
-                  <a:tcPr marL="164592" marR="109728" marT="73152" marB="73152" anchor="ctr">
-                    <a:solidFill>
-                      <a:srgbClr val="FFFFFF"/>
-                    </a:solidFill>
-                  </a:tcPr>
-                </a:tc>
-              </a:tr>
-              <a:tr h="502920">
-                <a:tc>
-                  <a:txBody>
-                    <a:bodyPr/>
-                    <a:lstStyle/>
-                    <a:p>
-                      <a:pPr>
-                        <a:defRPr sz="1500" b="1">
-                          <a:solidFill>
-                            <a:srgbClr val="4F46E5"/>
-                          </a:solidFill>
-                        </a:defRPr>
-                      </a:pPr>
-                      <a:r>
-                        <a:rPr>
-                          <a:latin typeface="Segoe UI"/>
-                        </a:rPr>
-                        <a:t>Saif</a:t>
-                      </a:r>
-                    </a:p>
-                  </a:txBody>
-                  <a:tcPr marL="164592" marR="109728" marT="73152" marB="73152" anchor="ctr">
-                    <a:solidFill>
-                      <a:srgbClr val="F8FAFC"/>
-                    </a:solidFill>
-                  </a:tcPr>
-                </a:tc>
-                <a:tc>
-                  <a:txBody>
-                    <a:bodyPr/>
-                    <a:lstStyle/>
-                    <a:p>
-                      <a:pPr>
-                        <a:defRPr sz="1500">
-                          <a:solidFill>
-                            <a:srgbClr val="475569"/>
-                          </a:solidFill>
-                        </a:defRPr>
-                      </a:pPr>
-                    </a:p>
-                  </a:txBody>
-                  <a:tcPr marL="164592" marR="109728" marT="73152" marB="73152" anchor="ctr">
-                    <a:solidFill>
-                      <a:srgbClr val="F8FAFC"/>
-                    </a:solidFill>
-                  </a:tcPr>
-                </a:tc>
-              </a:tr>
-              <a:tr h="502920">
-                <a:tc>
-                  <a:txBody>
-                    <a:bodyPr/>
-                    <a:lstStyle/>
-                    <a:p>
-                      <a:pPr>
-                        <a:defRPr sz="1500" b="1">
-                          <a:solidFill>
-                            <a:srgbClr val="4F46E5"/>
-                          </a:solidFill>
-                        </a:defRPr>
-                      </a:pPr>
-                      <a:r>
-                        <a:rPr>
-                          <a:latin typeface="Segoe UI"/>
-                        </a:rPr>
-                        <a:t>Shohana</a:t>
-                      </a:r>
-                    </a:p>
-                  </a:txBody>
-                  <a:tcPr marL="164592" marR="109728" marT="73152" marB="73152" anchor="ctr">
-                    <a:solidFill>
-                      <a:srgbClr val="FFFFFF"/>
-                    </a:solidFill>
-                  </a:tcPr>
-                </a:tc>
-                <a:tc>
-                  <a:txBody>
-                    <a:bodyPr/>
-                    <a:lstStyle/>
-                    <a:p>
-                      <a:pPr>
-                        <a:defRPr sz="1500">
-                          <a:solidFill>
-                            <a:srgbClr val="475569"/>
-                          </a:solidFill>
-                        </a:defRPr>
-                      </a:pPr>
-                    </a:p>
-                  </a:txBody>
-                  <a:tcPr marL="164592" marR="109728" marT="73152" marB="73152" anchor="ctr">
-                    <a:solidFill>
-                      <a:srgbClr val="FFFFFF"/>
-                    </a:solidFill>
-                  </a:tcPr>
-                </a:tc>
-              </a:tr>
-              <a:tr h="502920">
-                <a:tc>
-                  <a:txBody>
-                    <a:bodyPr/>
-                    <a:lstStyle/>
-                    <a:p>
-                      <a:pPr>
-                        <a:defRPr sz="1500" b="1">
-                          <a:solidFill>
-                            <a:srgbClr val="4F46E5"/>
-                          </a:solidFill>
-                        </a:defRPr>
-                      </a:pPr>
-                      <a:r>
-                        <a:rPr>
-                          <a:latin typeface="Segoe UI"/>
-                        </a:rPr>
-                        <a:t>Fahim</a:t>
-                      </a:r>
-                    </a:p>
-                  </a:txBody>
-                  <a:tcPr marL="164592" marR="109728" marT="73152" marB="73152" anchor="ctr">
-                    <a:solidFill>
-                      <a:srgbClr val="F8FAFC"/>
-                    </a:solidFill>
-                  </a:tcPr>
-                </a:tc>
-                <a:tc>
-                  <a:txBody>
-                    <a:bodyPr/>
-                    <a:lstStyle/>
-                    <a:p>
-                      <a:pPr>
-                        <a:defRPr sz="1500">
-                          <a:solidFill>
-                            <a:srgbClr val="475569"/>
-                          </a:solidFill>
-                        </a:defRPr>
-                      </a:pPr>
-                    </a:p>
-                  </a:txBody>
-                  <a:tcPr marL="164592" marR="109728" marT="73152" marB="73152" anchor="ctr">
-                    <a:solidFill>
-                      <a:srgbClr val="F8FAFC"/>
-                    </a:solidFill>
-                  </a:tcPr>
-                </a:tc>
-              </a:tr>
-            </a:tbl>
-          </a:graphicData>
-        </a:graphic>
-      </p:graphicFrame>
-      <p:sp>
-        <p:nvSpPr>
-          <p:cNvPr id="7" name="TextBox 6"/>
-          <p:cNvSpPr txBox="1"/>
-          <p:nvPr/>
-        </p:nvSpPr>
-        <p:spPr>
-          <a:xfrm>
-            <a:off x="6446520" y="1472184"/>
-            <a:ext cx="5074920" cy="365760"/>
-          </a:xfrm>
-          <a:prstGeom prst="rect">
-            <a:avLst/>
-          </a:prstGeom>
-          <a:noFill/>
-        </p:spPr>
-        <p:txBody>
-          <a:bodyPr wrap="none">
-            <a:spAutoFit/>
-          </a:bodyPr>
-          <a:lstStyle/>
-          <a:p>
-            <a:r>
-              <a:rPr b="1" sz="1400">
-                <a:solidFill>
-                  <a:srgbClr val="64748B"/>
-                </a:solidFill>
-                <a:latin typeface="Segoe UI"/>
+            <a:r>
+              <a:rPr b="1" sz="1500">
+                <a:solidFill>
+                  <a:srgbClr val="4F46E5"/>
+                </a:solidFill>
               </a:rPr>
-              <a:t>Contributions</a:t>
-            </a:r>
-          </a:p>
-        </p:txBody>
-      </p:sp>
-      <p:sp>
-        <p:nvSpPr>
-          <p:cNvPr id="8" name="TextBox 7"/>
-          <p:cNvSpPr txBox="1"/>
-          <p:nvPr/>
-        </p:nvSpPr>
-        <p:spPr>
-          <a:xfrm>
-            <a:off x="6446520" y="1856232"/>
-            <a:ext cx="5074920" cy="2377440"/>
-          </a:xfrm>
-          <a:prstGeom prst="rect">
-            <a:avLst/>
-          </a:prstGeom>
-          <a:noFill/>
-        </p:spPr>
-        <p:txBody>
-          <a:bodyPr wrap="square">
-            <a:spAutoFit/>
-          </a:bodyPr>
-          <a:lstStyle/>
-          <a:p>
-            <a:pPr>
-              <a:lnSpc>
-                <a:spcPct val="115000"/>
-              </a:lnSpc>
-              <a:spcAft>
-                <a:spcPts val="1100"/>
-              </a:spcAft>
-            </a:pPr>
-            <a:r>
-              <a:rPr b="1" sz="1350">
-                <a:solidFill>
-                  <a:srgbClr val="1E293B"/>
-                </a:solidFill>
-                <a:latin typeface="Segoe UI"/>
+              <a:t>Tarin</a:t>
+            </a:r>
+            <a:r>
+              <a:rPr sz="1400">
+                <a:solidFill>
+                  <a:srgbClr val="475569"/>
+                </a:solidFill>
               </a:rPr>
-              <a:t>Tarin  </a:t>
-            </a:r>
-            <a:r>
-              <a:rPr sz="1300">
-                <a:solidFill>
-                  <a:srgbClr val="475569"/>
-                </a:solidFill>
-                <a:latin typeface="Segoe UI"/>
-              </a:rPr>
-              <a:t>Core backend, agent pipeline foundation, testing, deployment</a:t>
-            </a:r>
-          </a:p>
-          <a:p>
-            <a:pPr>
-              <a:lnSpc>
-                <a:spcPct val="115000"/>
-              </a:lnSpc>
-              <a:spcAft>
-                <a:spcPts val="1100"/>
-              </a:spcAft>
-            </a:pPr>
-            <a:r>
-              <a:rPr b="1" sz="1350">
-                <a:solidFill>
-                  <a:srgbClr val="1E293B"/>
-                </a:solidFill>
-                <a:latin typeface="Segoe UI"/>
-              </a:rPr>
-              <a:t>Saif  </a:t>
-            </a:r>
-            <a:r>
-              <a:rPr sz="1300">
-                <a:solidFill>
-                  <a:srgbClr val="475569"/>
-                </a:solidFill>
-                <a:latin typeface="Segoe UI"/>
-              </a:rPr>
-              <a:t>Knowledge/RAG, data analysis, frontend UI</a:t>
-            </a:r>
-          </a:p>
-          <a:p>
-            <a:pPr>
-              <a:lnSpc>
-                <a:spcPct val="115000"/>
-              </a:lnSpc>
-              <a:spcAft>
-                <a:spcPts val="1100"/>
-              </a:spcAft>
-            </a:pPr>
-            <a:r>
-              <a:rPr b="1" sz="1350">
-                <a:solidFill>
-                  <a:srgbClr val="1E293B"/>
-                </a:solidFill>
-                <a:latin typeface="Segoe UI"/>
-              </a:rPr>
-              <a:t>Shohana  </a:t>
-            </a:r>
-            <a:r>
-              <a:rPr sz="1300">
-                <a:solidFill>
-                  <a:srgbClr val="475569"/>
-                </a:solidFill>
-                <a:latin typeface="Segoe UI"/>
-              </a:rPr>
-              <a:t>Sample data, Social Intelligence agent, documentation</a:t>
-            </a:r>
-          </a:p>
-          <a:p>
-            <a:pPr>
-              <a:lnSpc>
-                <a:spcPct val="115000"/>
-              </a:lnSpc>
-              <a:spcAft>
-                <a:spcPts val="1100"/>
-              </a:spcAft>
-            </a:pPr>
-            <a:r>
-              <a:rPr b="1" sz="1350">
-                <a:solidFill>
-                  <a:srgbClr val="1E293B"/>
-                </a:solidFill>
-                <a:latin typeface="Segoe UI"/>
-              </a:rPr>
-              <a:t>Fahim  </a:t>
-            </a:r>
-            <a:r>
-              <a:rPr sz="1300">
-                <a:solidFill>
-                  <a:srgbClr val="475569"/>
-                </a:solidFill>
-                <a:latin typeface="Segoe UI"/>
-              </a:rPr>
-              <a:t>Report generation, QA/Critic, CI/CD, demo prep</a:t>
-            </a:r>
-          </a:p>
-        </p:txBody>
-      </p:sp>
-      <p:sp>
-        <p:nvSpPr>
-          <p:cNvPr id="9" name="TextBox 8"/>
-          <p:cNvSpPr txBox="1"/>
-          <p:nvPr/>
-        </p:nvSpPr>
-        <p:spPr>
-          <a:xfrm>
-            <a:off x="640080" y="5577840"/>
-            <a:ext cx="10881360" cy="731520"/>
-          </a:xfrm>
-          <a:prstGeom prst="rect">
-            <a:avLst/>
-          </a:prstGeom>
-          <a:noFill/>
-        </p:spPr>
-        <p:txBody>
-          <a:bodyPr wrap="none">
-            <a:spAutoFit/>
-          </a:bodyPr>
-          <a:lstStyle/>
-          <a:p>
-            <a:pPr algn="ctr"/>
-            <a:r>
-              <a:rPr b="1" sz="2400">
-                <a:solidFill>
-                  <a:srgbClr val="1E293B"/>
-                </a:solidFill>
-                <a:latin typeface="Segoe UI"/>
-              </a:rPr>
-              <a:t>Thank you</a:t>
-            </a:r>
-          </a:p>
-        </p:txBody>
-      </p:sp>
-      <p:sp>
-        <p:nvSpPr>
-          <p:cNvPr id="10" name="TextBox 9"/>
-          <p:cNvSpPr txBox="1"/>
-          <p:nvPr/>
-        </p:nvSpPr>
-        <p:spPr>
-          <a:xfrm>
-            <a:off x="502920" y="6492240"/>
-            <a:ext cx="5486400" cy="274320"/>
-          </a:xfrm>
-          <a:prstGeom prst="rect">
-            <a:avLst/>
-          </a:prstGeom>
-          <a:noFill/>
-        </p:spPr>
-        <p:txBody>
-          <a:bodyPr wrap="none">
-            <a:spAutoFit/>
-          </a:bodyPr>
-          <a:lstStyle/>
-          <a:p>
-            <a:pPr>
-              <a:defRPr sz="950">
-                <a:solidFill>
-                  <a:srgbClr val="64748B"/>
-                </a:solidFill>
-                <a:latin typeface="Segoe UI"/>
-              </a:defRPr>
-            </a:pPr>
-            <a:r>
-              <a:t>Education AI Analyst</a:t>
-            </a:r>
-          </a:p>
-        </p:txBody>
-      </p:sp>
-      <p:sp>
-        <p:nvSpPr>
-          <p:cNvPr id="11" name="Rounded Rectangle 10"/>
+              <a:t>   Core backend, agent pipeline foundation, testing, deployment</a:t>
+            </a:r>
+          </a:p>
+        </p:txBody>
+      </p:sp>
+      <p:sp>
+        <p:nvSpPr>
+          <p:cNvPr id="5" name="Rectangle 4"/>
           <p:cNvSpPr/>
           <p:nvPr/>
         </p:nvSpPr>
         <p:spPr>
           <a:xfrm>
-            <a:off x="11475720" y="320040"/>
-            <a:ext cx="457200" cy="292608"/>
-          </a:xfrm>
-          <a:prstGeom prst="roundRect">
-            <a:avLst>
-              <a:gd name="adj" fmla="val 50000"/>
-            </a:avLst>
+            <a:off x="640080" y="2075688"/>
+            <a:ext cx="10881360" cy="658368"/>
+          </a:xfrm>
+          <a:prstGeom prst="rect">
+            <a:avLst/>
           </a:prstGeom>
           <a:solidFill>
-            <a:srgbClr val="4F46E5"/>
+            <a:srgbClr val="FFFFFF"/>
           </a:solidFill>
           <a:ln>
             <a:noFill/>
           </a:ln>
-          <a:effectLst/>
         </p:spPr>
         <p:style>
           <a:lnRef idx="1">
@@ -4194,17 +3522,324 @@
           </a:fontRef>
         </p:style>
         <p:txBody>
-          <a:bodyPr rtlCol="0" anchor="ctr" lIns="0" rIns="0" tIns="0" bIns="0"/>
+          <a:bodyPr rtlCol="0" anchor="ctr" lIns="182880" tIns="91440"/>
           <a:lstStyle/>
           <a:p>
             <a:pPr algn="ctr"/>
             <a:r>
-              <a:rPr sz="1200" b="1">
-                <a:solidFill>
-                  <a:srgbClr val="FFFFFF"/>
-                </a:solidFill>
-                <a:latin typeface="Segoe UI"/>
+              <a:rPr b="1" sz="1500">
+                <a:solidFill>
+                  <a:srgbClr val="4F46E5"/>
+                </a:solidFill>
               </a:rPr>
+              <a:t>Saif</a:t>
+            </a:r>
+            <a:r>
+              <a:rPr sz="1400">
+                <a:solidFill>
+                  <a:srgbClr val="475569"/>
+                </a:solidFill>
+              </a:rPr>
+              <a:t>   Knowledge/RAG, data analysis, frontend UI</a:t>
+            </a:r>
+          </a:p>
+        </p:txBody>
+      </p:sp>
+      <p:sp>
+        <p:nvSpPr>
+          <p:cNvPr id="6" name="Rectangle 5"/>
+          <p:cNvSpPr/>
+          <p:nvPr/>
+        </p:nvSpPr>
+        <p:spPr>
+          <a:xfrm>
+            <a:off x="640080" y="2734056"/>
+            <a:ext cx="10881360" cy="658368"/>
+          </a:xfrm>
+          <a:prstGeom prst="rect">
+            <a:avLst/>
+          </a:prstGeom>
+          <a:solidFill>
+            <a:srgbClr val="EEF2FF"/>
+          </a:solidFill>
+          <a:ln>
+            <a:noFill/>
+          </a:ln>
+        </p:spPr>
+        <p:style>
+          <a:lnRef idx="1">
+            <a:schemeClr val="accent1"/>
+          </a:lnRef>
+          <a:fillRef idx="3">
+            <a:schemeClr val="accent1"/>
+          </a:fillRef>
+          <a:effectRef idx="2">
+            <a:schemeClr val="accent1"/>
+          </a:effectRef>
+          <a:fontRef idx="minor">
+            <a:schemeClr val="lt1"/>
+          </a:fontRef>
+        </p:style>
+        <p:txBody>
+          <a:bodyPr rtlCol="0" anchor="ctr" lIns="182880" tIns="91440"/>
+          <a:lstStyle/>
+          <a:p>
+            <a:pPr algn="ctr"/>
+            <a:r>
+              <a:rPr b="1" sz="1500">
+                <a:solidFill>
+                  <a:srgbClr val="4F46E5"/>
+                </a:solidFill>
+              </a:rPr>
+              <a:t>Shohana</a:t>
+            </a:r>
+            <a:r>
+              <a:rPr sz="1400">
+                <a:solidFill>
+                  <a:srgbClr val="475569"/>
+                </a:solidFill>
+              </a:rPr>
+              <a:t>   Sample data, Social Intelligence agent, documentation</a:t>
+            </a:r>
+          </a:p>
+        </p:txBody>
+      </p:sp>
+      <p:sp>
+        <p:nvSpPr>
+          <p:cNvPr id="7" name="Rectangle 6"/>
+          <p:cNvSpPr/>
+          <p:nvPr/>
+        </p:nvSpPr>
+        <p:spPr>
+          <a:xfrm>
+            <a:off x="640080" y="3392424"/>
+            <a:ext cx="10881360" cy="658368"/>
+          </a:xfrm>
+          <a:prstGeom prst="rect">
+            <a:avLst/>
+          </a:prstGeom>
+          <a:solidFill>
+            <a:srgbClr val="FFFFFF"/>
+          </a:solidFill>
+          <a:ln>
+            <a:noFill/>
+          </a:ln>
+        </p:spPr>
+        <p:style>
+          <a:lnRef idx="1">
+            <a:schemeClr val="accent1"/>
+          </a:lnRef>
+          <a:fillRef idx="3">
+            <a:schemeClr val="accent1"/>
+          </a:fillRef>
+          <a:effectRef idx="2">
+            <a:schemeClr val="accent1"/>
+          </a:effectRef>
+          <a:fontRef idx="minor">
+            <a:schemeClr val="lt1"/>
+          </a:fontRef>
+        </p:style>
+        <p:txBody>
+          <a:bodyPr rtlCol="0" anchor="ctr" lIns="182880" tIns="91440"/>
+          <a:lstStyle/>
+          <a:p>
+            <a:pPr algn="ctr"/>
+            <a:r>
+              <a:rPr b="1" sz="1500">
+                <a:solidFill>
+                  <a:srgbClr val="4F46E5"/>
+                </a:solidFill>
+              </a:rPr>
+              <a:t>Fahim</a:t>
+            </a:r>
+            <a:r>
+              <a:rPr sz="1400">
+                <a:solidFill>
+                  <a:srgbClr val="475569"/>
+                </a:solidFill>
+              </a:rPr>
+              <a:t>   Report generation, QA/Critic, CI/CD, demo prep</a:t>
+            </a:r>
+          </a:p>
+        </p:txBody>
+      </p:sp>
+      <p:sp>
+        <p:nvSpPr>
+          <p:cNvPr id="8" name="TextBox 7"/>
+          <p:cNvSpPr txBox="1"/>
+          <p:nvPr/>
+        </p:nvSpPr>
+        <p:spPr>
+          <a:xfrm>
+            <a:off x="640080" y="4160520"/>
+            <a:ext cx="10881360" cy="365760"/>
+          </a:xfrm>
+          <a:prstGeom prst="rect">
+            <a:avLst/>
+          </a:prstGeom>
+          <a:noFill/>
+        </p:spPr>
+        <p:txBody>
+          <a:bodyPr wrap="none">
+            <a:spAutoFit/>
+          </a:bodyPr>
+          <a:lstStyle/>
+          <a:p>
+            <a:pPr>
+              <a:defRPr b="1" sz="1600">
+                <a:solidFill>
+                  <a:srgbClr val="1E293B"/>
+                </a:solidFill>
+              </a:defRPr>
+            </a:pPr>
+            <a:r>
+              <a:t>Next</a:t>
+            </a:r>
+          </a:p>
+        </p:txBody>
+      </p:sp>
+      <p:sp>
+        <p:nvSpPr>
+          <p:cNvPr id="9" name="TextBox 8"/>
+          <p:cNvSpPr txBox="1"/>
+          <p:nvPr/>
+        </p:nvSpPr>
+        <p:spPr>
+          <a:xfrm>
+            <a:off x="640080" y="4572000"/>
+            <a:ext cx="10789920" cy="1463040"/>
+          </a:xfrm>
+          <a:prstGeom prst="rect">
+            <a:avLst/>
+          </a:prstGeom>
+          <a:noFill/>
+        </p:spPr>
+        <p:txBody>
+          <a:bodyPr wrap="square">
+            <a:spAutoFit/>
+          </a:bodyPr>
+          <a:lstStyle/>
+          <a:p>
+            <a:pPr>
+              <a:lnSpc>
+                <a:spcPct val="125000"/>
+              </a:lnSpc>
+              <a:spcAft>
+                <a:spcPts val="1400"/>
+              </a:spcAft>
+            </a:pPr>
+            <a:r>
+              <a:rPr sz="1550">
+                <a:solidFill>
+                  <a:srgbClr val="475569"/>
+                </a:solidFill>
+              </a:rPr>
+              <a:t>Full Facebook Graph API OAuth polish for production Page access</a:t>
+            </a:r>
+          </a:p>
+          <a:p>
+            <a:pPr>
+              <a:lnSpc>
+                <a:spcPct val="125000"/>
+              </a:lnSpc>
+              <a:spcAft>
+                <a:spcPts val="1400"/>
+              </a:spcAft>
+            </a:pPr>
+            <a:r>
+              <a:rPr sz="1550">
+                <a:solidFill>
+                  <a:srgbClr val="475569"/>
+                </a:solidFill>
+              </a:rPr>
+              <a:t>Postgres for production deployment (SQLite covers local dev)</a:t>
+            </a:r>
+          </a:p>
+          <a:p>
+            <a:pPr>
+              <a:lnSpc>
+                <a:spcPct val="125000"/>
+              </a:lnSpc>
+              <a:spcAft>
+                <a:spcPts val="1400"/>
+              </a:spcAft>
+            </a:pPr>
+            <a:r>
+              <a:rPr sz="1550">
+                <a:solidFill>
+                  <a:srgbClr val="475569"/>
+                </a:solidFill>
+              </a:rPr>
+              <a:t>Expanded test coverage as remaining edge cases surface</a:t>
+            </a:r>
+          </a:p>
+        </p:txBody>
+      </p:sp>
+      <p:sp>
+        <p:nvSpPr>
+          <p:cNvPr id="10" name="TextBox 9"/>
+          <p:cNvSpPr txBox="1"/>
+          <p:nvPr/>
+        </p:nvSpPr>
+        <p:spPr>
+          <a:xfrm>
+            <a:off x="457200" y="6473952"/>
+            <a:ext cx="5486400" cy="320040"/>
+          </a:xfrm>
+          <a:prstGeom prst="rect">
+            <a:avLst/>
+          </a:prstGeom>
+          <a:noFill/>
+        </p:spPr>
+        <p:txBody>
+          <a:bodyPr wrap="none">
+            <a:spAutoFit/>
+          </a:bodyPr>
+          <a:lstStyle/>
+          <a:p>
+            <a:pPr>
+              <a:defRPr sz="1000">
+                <a:solidFill>
+                  <a:srgbClr val="64748B"/>
+                </a:solidFill>
+              </a:defRPr>
+            </a:pPr>
+            <a:r>
+              <a:t>Education AI Analyst</a:t>
+            </a:r>
+          </a:p>
+        </p:txBody>
+      </p:sp>
+      <p:sp>
+        <p:nvSpPr>
+          <p:cNvPr id="11" name="TextBox 10"/>
+          <p:cNvSpPr txBox="1"/>
+          <p:nvPr/>
+        </p:nvSpPr>
+        <p:spPr>
+          <a:xfrm>
+            <a:off x="11247120" y="6473952"/>
+            <a:ext cx="640080" cy="320040"/>
+          </a:xfrm>
+          <a:prstGeom prst="rect">
+            <a:avLst/>
+          </a:prstGeom>
+          <a:noFill/>
+        </p:spPr>
+        <p:txBody>
+          <a:bodyPr wrap="none">
+            <a:spAutoFit/>
+          </a:bodyPr>
+          <a:lstStyle/>
+          <a:p>
+            <a:pPr algn="r">
+              <a:defRPr sz="1000">
+                <a:solidFill>
+                  <a:srgbClr val="64748B"/>
+                </a:solidFill>
+              </a:defRPr>
+            </a:pPr>
+            <a:r>
               <a:t>10</a:t>
             </a:r>
           </a:p>
@@ -4256,7 +3891,6 @@
           <a:ln>
             <a:noFill/>
           </a:ln>
-          <a:effectLst/>
         </p:spPr>
         <p:style>
           <a:lnRef idx="1">
@@ -4288,8 +3922,8 @@
         </p:nvSpPr>
         <p:spPr>
           <a:xfrm>
-            <a:off x="502920" y="292608"/>
-            <a:ext cx="9144000" cy="274320"/>
+            <a:off x="502920" y="365760"/>
+            <a:ext cx="10972800" cy="822960"/>
           </a:xfrm>
           <a:prstGeom prst="rect">
             <a:avLst/>
@@ -4303,18 +3937,14 @@
           <a:lstStyle/>
           <a:p>
             <a:pPr>
-              <a:spcAft>
-                <a:spcPts val="0"/>
-              </a:spcAft>
-            </a:pPr>
-            <a:r>
-              <a:rPr sz="1100" b="1">
-                <a:solidFill>
-                  <a:srgbClr val="4F46E5"/>
-                </a:solidFill>
-                <a:latin typeface="Segoe UI"/>
-              </a:rPr>
-              <a:t>01 · MOTIVATION</a:t>
+              <a:defRPr sz="3200" b="1">
+                <a:solidFill>
+                  <a:srgbClr val="1E293B"/>
+                </a:solidFill>
+              </a:defRPr>
+            </a:pPr>
+            <a:r>
+              <a:t>The Problem</a:t>
             </a:r>
           </a:p>
         </p:txBody>
@@ -4327,8 +3957,144 @@
         </p:nvSpPr>
         <p:spPr>
           <a:xfrm>
-            <a:off x="502920" y="530352"/>
-            <a:ext cx="10424160" cy="822960"/>
+            <a:off x="640080" y="1554480"/>
+            <a:ext cx="10789920" cy="4754880"/>
+          </a:xfrm>
+          <a:prstGeom prst="rect">
+            <a:avLst/>
+          </a:prstGeom>
+          <a:noFill/>
+        </p:spPr>
+        <p:txBody>
+          <a:bodyPr wrap="square">
+            <a:spAutoFit/>
+          </a:bodyPr>
+          <a:lstStyle/>
+          <a:p>
+            <a:pPr>
+              <a:lnSpc>
+                <a:spcPct val="125000"/>
+              </a:lnSpc>
+              <a:spcAft>
+                <a:spcPts val="1400"/>
+              </a:spcAft>
+            </a:pPr>
+            <a:r>
+              <a:rPr b="1" sz="1900">
+                <a:solidFill>
+                  <a:srgbClr val="1E293B"/>
+                </a:solidFill>
+              </a:rPr>
+              <a:t>Scattered evidence.  </a:t>
+            </a:r>
+            <a:r>
+              <a:rPr sz="1900">
+                <a:solidFill>
+                  <a:srgbClr val="475569"/>
+                </a:solidFill>
+              </a:rPr>
+              <a:t>Teacher-performance and enrollment signal lives across result sheets, scanned forms, spreadsheets, and Facebook comments — nowhere unified.</a:t>
+            </a:r>
+          </a:p>
+          <a:p>
+            <a:pPr>
+              <a:lnSpc>
+                <a:spcPct val="125000"/>
+              </a:lnSpc>
+              <a:spcAft>
+                <a:spcPts val="1400"/>
+              </a:spcAft>
+            </a:pPr>
+            <a:r>
+              <a:rPr b="1" sz="1900">
+                <a:solidFill>
+                  <a:srgbClr val="1E293B"/>
+                </a:solidFill>
+              </a:rPr>
+              <a:t>Slow, manual synthesis.  </a:t>
+            </a:r>
+            <a:r>
+              <a:rPr sz="1900">
+                <a:solidFill>
+                  <a:srgbClr val="475569"/>
+                </a:solidFill>
+              </a:rPr>
+              <a:t>Reading and cross-referencing all of it by hand takes days per term, for every department.</a:t>
+            </a:r>
+          </a:p>
+          <a:p>
+            <a:pPr>
+              <a:lnSpc>
+                <a:spcPct val="125000"/>
+              </a:lnSpc>
+              <a:spcAft>
+                <a:spcPts val="1400"/>
+              </a:spcAft>
+            </a:pPr>
+            <a:r>
+              <a:rPr b="1" sz="1900">
+                <a:solidFill>
+                  <a:srgbClr val="1E293B"/>
+                </a:solidFill>
+              </a:rPr>
+              <a:t>High stakes, low tolerance for error.  </a:t>
+            </a:r>
+            <a:r>
+              <a:rPr sz="1900">
+                <a:solidFill>
+                  <a:srgbClr val="475569"/>
+                </a:solidFill>
+              </a:rPr>
+              <a:t>Any AI-generated judgment about staff performance is sensitive — it must be checked by a real person before anyone acts on it.</a:t>
+            </a:r>
+          </a:p>
+        </p:txBody>
+      </p:sp>
+      <p:sp>
+        <p:nvSpPr>
+          <p:cNvPr id="5" name="TextBox 4"/>
+          <p:cNvSpPr txBox="1"/>
+          <p:nvPr/>
+        </p:nvSpPr>
+        <p:spPr>
+          <a:xfrm>
+            <a:off x="640080" y="5486400"/>
+            <a:ext cx="10789920" cy="822960"/>
+          </a:xfrm>
+          <a:prstGeom prst="rect">
+            <a:avLst/>
+          </a:prstGeom>
+          <a:noFill/>
+        </p:spPr>
+        <p:txBody>
+          <a:bodyPr wrap="square">
+            <a:spAutoFit/>
+          </a:bodyPr>
+          <a:lstStyle/>
+          <a:p>
+            <a:pPr>
+              <a:defRPr sz="1800" b="1" i="1">
+                <a:solidFill>
+                  <a:srgbClr val="4F46E5"/>
+                </a:solidFill>
+              </a:defRPr>
+            </a:pPr>
+            <a:r>
+              <a:t>Goal: automate the reading and analysis — keep a human firmly in control of what's released.</a:t>
+            </a:r>
+          </a:p>
+        </p:txBody>
+      </p:sp>
+      <p:sp>
+        <p:nvSpPr>
+          <p:cNvPr id="6" name="TextBox 5"/>
+          <p:cNvSpPr txBox="1"/>
+          <p:nvPr/>
+        </p:nvSpPr>
+        <p:spPr>
+          <a:xfrm>
+            <a:off x="457200" y="6473952"/>
+            <a:ext cx="5486400" cy="320040"/>
           </a:xfrm>
           <a:prstGeom prst="rect">
             <a:avLst/>
@@ -4341,111 +4107,15 @@
           </a:bodyPr>
           <a:lstStyle/>
           <a:p>
-            <a:r>
-              <a:rPr sz="3000" b="1">
-                <a:solidFill>
-                  <a:srgbClr val="1E293B"/>
-                </a:solidFill>
-                <a:latin typeface="Segoe UI"/>
-              </a:rPr>
-              <a:t>The Problem</a:t>
-            </a:r>
-          </a:p>
-        </p:txBody>
-      </p:sp>
-      <p:sp>
-        <p:nvSpPr>
-          <p:cNvPr id="5" name="Rectangle 4"/>
-          <p:cNvSpPr/>
-          <p:nvPr/>
-        </p:nvSpPr>
-        <p:spPr>
-          <a:xfrm>
-            <a:off x="530352" y="1188720"/>
-            <a:ext cx="548640" cy="38100"/>
-          </a:xfrm>
-          <a:prstGeom prst="rect">
-            <a:avLst/>
-          </a:prstGeom>
-          <a:solidFill>
-            <a:srgbClr val="4F46E5"/>
-          </a:solidFill>
-          <a:ln>
-            <a:noFill/>
-          </a:ln>
-          <a:effectLst/>
-        </p:spPr>
-        <p:style>
-          <a:lnRef idx="1">
-            <a:schemeClr val="accent1"/>
-          </a:lnRef>
-          <a:fillRef idx="3">
-            <a:schemeClr val="accent1"/>
-          </a:fillRef>
-          <a:effectRef idx="2">
-            <a:schemeClr val="accent1"/>
-          </a:effectRef>
-          <a:fontRef idx="minor">
-            <a:schemeClr val="lt1"/>
-          </a:fontRef>
-        </p:style>
-        <p:txBody>
-          <a:bodyPr rtlCol="0" anchor="ctr"/>
-          <a:lstStyle/>
-          <a:p>
-            <a:pPr algn="ctr"/>
-          </a:p>
-        </p:txBody>
-      </p:sp>
-      <p:sp>
-        <p:nvSpPr>
-          <p:cNvPr id="6" name="Oval 5"/>
-          <p:cNvSpPr/>
-          <p:nvPr/>
-        </p:nvSpPr>
-        <p:spPr>
-          <a:xfrm>
-            <a:off x="640080" y="1490472"/>
-            <a:ext cx="384048" cy="384048"/>
-          </a:xfrm>
-          <a:prstGeom prst="ellipse">
-            <a:avLst/>
-          </a:prstGeom>
-          <a:solidFill>
-            <a:srgbClr val="D97706"/>
-          </a:solidFill>
-          <a:ln>
-            <a:noFill/>
-          </a:ln>
-          <a:effectLst/>
-        </p:spPr>
-        <p:style>
-          <a:lnRef idx="1">
-            <a:schemeClr val="accent1"/>
-          </a:lnRef>
-          <a:fillRef idx="3">
-            <a:schemeClr val="accent1"/>
-          </a:fillRef>
-          <a:effectRef idx="2">
-            <a:schemeClr val="accent1"/>
-          </a:effectRef>
-          <a:fontRef idx="minor">
-            <a:schemeClr val="lt1"/>
-          </a:fontRef>
-        </p:style>
-        <p:txBody>
-          <a:bodyPr rtlCol="0" anchor="ctr" lIns="0" rIns="0" tIns="0" bIns="0"/>
-          <a:lstStyle/>
-          <a:p>
-            <a:pPr algn="ctr"/>
-            <a:r>
-              <a:rPr sz="1500" b="1">
-                <a:solidFill>
-                  <a:srgbClr val="FFFFFF"/>
-                </a:solidFill>
-                <a:latin typeface="Segoe UI"/>
-              </a:rPr>
-              <a:t>1</a:t>
+            <a:pPr>
+              <a:defRPr sz="1000">
+                <a:solidFill>
+                  <a:srgbClr val="64748B"/>
+                </a:solidFill>
+              </a:defRPr>
+            </a:pPr>
+            <a:r>
+              <a:t>Education AI Analyst</a:t>
             </a:r>
           </a:p>
         </p:txBody>
@@ -4458,313 +4128,8 @@
         </p:nvSpPr>
         <p:spPr>
           <a:xfrm>
-            <a:off x="1207008" y="1453896"/>
-            <a:ext cx="10149840" cy="1051560"/>
-          </a:xfrm>
-          <a:prstGeom prst="rect">
-            <a:avLst/>
-          </a:prstGeom>
-          <a:noFill/>
-        </p:spPr>
-        <p:txBody>
-          <a:bodyPr wrap="square">
-            <a:spAutoFit/>
-          </a:bodyPr>
-          <a:lstStyle/>
-          <a:p>
-            <a:pPr>
-              <a:lnSpc>
-                <a:spcPct val="115000"/>
-              </a:lnSpc>
-            </a:pPr>
-            <a:r>
-              <a:rPr b="1" sz="1550">
-                <a:solidFill>
-                  <a:srgbClr val="1E293B"/>
-                </a:solidFill>
-                <a:latin typeface="Segoe UI"/>
-              </a:rPr>
-              <a:t>Scattered evidence.  </a:t>
-            </a:r>
-            <a:r>
-              <a:rPr sz="1550">
-                <a:solidFill>
-                  <a:srgbClr val="475569"/>
-                </a:solidFill>
-                <a:latin typeface="Segoe UI"/>
-              </a:rPr>
-              <a:t>Teacher-performance and enrollment signal lives across result sheets, scanned forms, spreadsheets, and Facebook comments — nowhere unified.</a:t>
-            </a:r>
-          </a:p>
-        </p:txBody>
-      </p:sp>
-      <p:sp>
-        <p:nvSpPr>
-          <p:cNvPr id="8" name="Oval 7"/>
-          <p:cNvSpPr/>
-          <p:nvPr/>
-        </p:nvSpPr>
-        <p:spPr>
-          <a:xfrm>
-            <a:off x="640080" y="2542032"/>
-            <a:ext cx="384048" cy="384048"/>
-          </a:xfrm>
-          <a:prstGeom prst="ellipse">
-            <a:avLst/>
-          </a:prstGeom>
-          <a:solidFill>
-            <a:srgbClr val="D97706"/>
-          </a:solidFill>
-          <a:ln>
-            <a:noFill/>
-          </a:ln>
-          <a:effectLst/>
-        </p:spPr>
-        <p:style>
-          <a:lnRef idx="1">
-            <a:schemeClr val="accent1"/>
-          </a:lnRef>
-          <a:fillRef idx="3">
-            <a:schemeClr val="accent1"/>
-          </a:fillRef>
-          <a:effectRef idx="2">
-            <a:schemeClr val="accent1"/>
-          </a:effectRef>
-          <a:fontRef idx="minor">
-            <a:schemeClr val="lt1"/>
-          </a:fontRef>
-        </p:style>
-        <p:txBody>
-          <a:bodyPr rtlCol="0" anchor="ctr" lIns="0" rIns="0" tIns="0" bIns="0"/>
-          <a:lstStyle/>
-          <a:p>
-            <a:pPr algn="ctr"/>
-            <a:r>
-              <a:rPr sz="1500" b="1">
-                <a:solidFill>
-                  <a:srgbClr val="FFFFFF"/>
-                </a:solidFill>
-                <a:latin typeface="Segoe UI"/>
-              </a:rPr>
-              <a:t>2</a:t>
-            </a:r>
-          </a:p>
-        </p:txBody>
-      </p:sp>
-      <p:sp>
-        <p:nvSpPr>
-          <p:cNvPr id="9" name="TextBox 8"/>
-          <p:cNvSpPr txBox="1"/>
-          <p:nvPr/>
-        </p:nvSpPr>
-        <p:spPr>
-          <a:xfrm>
-            <a:off x="1207008" y="2505456"/>
-            <a:ext cx="10149840" cy="1051560"/>
-          </a:xfrm>
-          <a:prstGeom prst="rect">
-            <a:avLst/>
-          </a:prstGeom>
-          <a:noFill/>
-        </p:spPr>
-        <p:txBody>
-          <a:bodyPr wrap="square">
-            <a:spAutoFit/>
-          </a:bodyPr>
-          <a:lstStyle/>
-          <a:p>
-            <a:pPr>
-              <a:lnSpc>
-                <a:spcPct val="115000"/>
-              </a:lnSpc>
-            </a:pPr>
-            <a:r>
-              <a:rPr b="1" sz="1550">
-                <a:solidFill>
-                  <a:srgbClr val="1E293B"/>
-                </a:solidFill>
-                <a:latin typeface="Segoe UI"/>
-              </a:rPr>
-              <a:t>Slow, manual synthesis.  </a:t>
-            </a:r>
-            <a:r>
-              <a:rPr sz="1550">
-                <a:solidFill>
-                  <a:srgbClr val="475569"/>
-                </a:solidFill>
-                <a:latin typeface="Segoe UI"/>
-              </a:rPr>
-              <a:t>Reading and cross-referencing all of it by hand takes days per term, for every department.</a:t>
-            </a:r>
-          </a:p>
-        </p:txBody>
-      </p:sp>
-      <p:sp>
-        <p:nvSpPr>
-          <p:cNvPr id="10" name="Oval 9"/>
-          <p:cNvSpPr/>
-          <p:nvPr/>
-        </p:nvSpPr>
-        <p:spPr>
-          <a:xfrm>
-            <a:off x="640080" y="3593592"/>
-            <a:ext cx="384048" cy="384048"/>
-          </a:xfrm>
-          <a:prstGeom prst="ellipse">
-            <a:avLst/>
-          </a:prstGeom>
-          <a:solidFill>
-            <a:srgbClr val="D97706"/>
-          </a:solidFill>
-          <a:ln>
-            <a:noFill/>
-          </a:ln>
-          <a:effectLst/>
-        </p:spPr>
-        <p:style>
-          <a:lnRef idx="1">
-            <a:schemeClr val="accent1"/>
-          </a:lnRef>
-          <a:fillRef idx="3">
-            <a:schemeClr val="accent1"/>
-          </a:fillRef>
-          <a:effectRef idx="2">
-            <a:schemeClr val="accent1"/>
-          </a:effectRef>
-          <a:fontRef idx="minor">
-            <a:schemeClr val="lt1"/>
-          </a:fontRef>
-        </p:style>
-        <p:txBody>
-          <a:bodyPr rtlCol="0" anchor="ctr" lIns="0" rIns="0" tIns="0" bIns="0"/>
-          <a:lstStyle/>
-          <a:p>
-            <a:pPr algn="ctr"/>
-            <a:r>
-              <a:rPr sz="1500" b="1">
-                <a:solidFill>
-                  <a:srgbClr val="FFFFFF"/>
-                </a:solidFill>
-                <a:latin typeface="Segoe UI"/>
-              </a:rPr>
-              <a:t>3</a:t>
-            </a:r>
-          </a:p>
-        </p:txBody>
-      </p:sp>
-      <p:sp>
-        <p:nvSpPr>
-          <p:cNvPr id="11" name="TextBox 10"/>
-          <p:cNvSpPr txBox="1"/>
-          <p:nvPr/>
-        </p:nvSpPr>
-        <p:spPr>
-          <a:xfrm>
-            <a:off x="1207008" y="3557016"/>
-            <a:ext cx="10149840" cy="1051560"/>
-          </a:xfrm>
-          <a:prstGeom prst="rect">
-            <a:avLst/>
-          </a:prstGeom>
-          <a:noFill/>
-        </p:spPr>
-        <p:txBody>
-          <a:bodyPr wrap="square">
-            <a:spAutoFit/>
-          </a:bodyPr>
-          <a:lstStyle/>
-          <a:p>
-            <a:pPr>
-              <a:lnSpc>
-                <a:spcPct val="115000"/>
-              </a:lnSpc>
-            </a:pPr>
-            <a:r>
-              <a:rPr b="1" sz="1550">
-                <a:solidFill>
-                  <a:srgbClr val="1E293B"/>
-                </a:solidFill>
-                <a:latin typeface="Segoe UI"/>
-              </a:rPr>
-              <a:t>High stakes, low tolerance for error.  </a:t>
-            </a:r>
-            <a:r>
-              <a:rPr sz="1550">
-                <a:solidFill>
-                  <a:srgbClr val="475569"/>
-                </a:solidFill>
-                <a:latin typeface="Segoe UI"/>
-              </a:rPr>
-              <a:t>Any AI-generated judgment about staff performance is sensitive — it must be checked by a real person before anyone acts on it.</a:t>
-            </a:r>
-          </a:p>
-        </p:txBody>
-      </p:sp>
-      <p:sp>
-        <p:nvSpPr>
-          <p:cNvPr id="12" name="Rounded Rectangle 11"/>
-          <p:cNvSpPr/>
-          <p:nvPr/>
-        </p:nvSpPr>
-        <p:spPr>
-          <a:xfrm>
-            <a:off x="640080" y="5166360"/>
-            <a:ext cx="10881360" cy="868680"/>
-          </a:xfrm>
-          <a:prstGeom prst="roundRect">
-            <a:avLst/>
-          </a:prstGeom>
-          <a:solidFill>
-            <a:srgbClr val="EEF2FF"/>
-          </a:solidFill>
-          <a:ln w="12700">
-            <a:solidFill>
-              <a:srgbClr val="4F46E5"/>
-            </a:solidFill>
-          </a:ln>
-          <a:effectLst/>
-        </p:spPr>
-        <p:style>
-          <a:lnRef idx="1">
-            <a:schemeClr val="accent1"/>
-          </a:lnRef>
-          <a:fillRef idx="3">
-            <a:schemeClr val="accent1"/>
-          </a:fillRef>
-          <a:effectRef idx="2">
-            <a:schemeClr val="accent1"/>
-          </a:effectRef>
-          <a:fontRef idx="minor">
-            <a:schemeClr val="lt1"/>
-          </a:fontRef>
-        </p:style>
-        <p:txBody>
-          <a:bodyPr rtlCol="0" anchor="ctr" wrap="square" lIns="228600"/>
-          <a:lstStyle/>
-          <a:p>
-            <a:pPr algn="ctr"/>
-            <a:r>
-              <a:rPr sz="1550" b="1" i="1">
-                <a:solidFill>
-                  <a:srgbClr val="4338CA"/>
-                </a:solidFill>
-                <a:latin typeface="Segoe UI"/>
-              </a:rPr>
-              <a:t>Goal — automate the reading and analysis. Keep a human firmly in control of what's released.</a:t>
-            </a:r>
-          </a:p>
-        </p:txBody>
-      </p:sp>
-      <p:sp>
-        <p:nvSpPr>
-          <p:cNvPr id="13" name="TextBox 12"/>
-          <p:cNvSpPr txBox="1"/>
-          <p:nvPr/>
-        </p:nvSpPr>
-        <p:spPr>
-          <a:xfrm>
-            <a:off x="502920" y="6492240"/>
-            <a:ext cx="5486400" cy="274320"/>
+            <a:off x="11247120" y="6473952"/>
+            <a:ext cx="640080" cy="320040"/>
           </a:xfrm>
           <a:prstGeom prst="rect">
             <a:avLst/>
@@ -4777,71 +4142,15 @@
           </a:bodyPr>
           <a:lstStyle/>
           <a:p>
-            <a:pPr>
-              <a:defRPr sz="950">
+            <a:pPr algn="r">
+              <a:defRPr sz="1000">
                 <a:solidFill>
                   <a:srgbClr val="64748B"/>
                 </a:solidFill>
-                <a:latin typeface="Segoe UI"/>
-              </a:defRPr>
-            </a:pPr>
-            <a:r>
-              <a:t>Education AI Analyst</a:t>
-            </a:r>
-          </a:p>
-        </p:txBody>
-      </p:sp>
-      <p:sp>
-        <p:nvSpPr>
-          <p:cNvPr id="14" name="Rounded Rectangle 13"/>
-          <p:cNvSpPr/>
-          <p:nvPr/>
-        </p:nvSpPr>
-        <p:spPr>
-          <a:xfrm>
-            <a:off x="11475720" y="320040"/>
-            <a:ext cx="457200" cy="292608"/>
-          </a:xfrm>
-          <a:prstGeom prst="roundRect">
-            <a:avLst>
-              <a:gd name="adj" fmla="val 50000"/>
-            </a:avLst>
-          </a:prstGeom>
-          <a:solidFill>
-            <a:srgbClr val="4F46E5"/>
-          </a:solidFill>
-          <a:ln>
-            <a:noFill/>
-          </a:ln>
-          <a:effectLst/>
-        </p:spPr>
-        <p:style>
-          <a:lnRef idx="1">
-            <a:schemeClr val="accent1"/>
-          </a:lnRef>
-          <a:fillRef idx="3">
-            <a:schemeClr val="accent1"/>
-          </a:fillRef>
-          <a:effectRef idx="2">
-            <a:schemeClr val="accent1"/>
-          </a:effectRef>
-          <a:fontRef idx="minor">
-            <a:schemeClr val="lt1"/>
-          </a:fontRef>
-        </p:style>
-        <p:txBody>
-          <a:bodyPr rtlCol="0" anchor="ctr" lIns="0" rIns="0" tIns="0" bIns="0"/>
-          <a:lstStyle/>
-          <a:p>
-            <a:pPr algn="ctr"/>
-            <a:r>
-              <a:rPr sz="1200" b="1">
-                <a:solidFill>
-                  <a:srgbClr val="FFFFFF"/>
-                </a:solidFill>
-                <a:latin typeface="Segoe UI"/>
-              </a:rPr>
-              <a:t>02</a:t>
+              </a:defRPr>
+            </a:pPr>
+            <a:r>
+              <a:t>2</a:t>
             </a:r>
           </a:p>
         </p:txBody>
@@ -4892,7 +4201,6 @@
           <a:ln>
             <a:noFill/>
           </a:ln>
-          <a:effectLst/>
         </p:spPr>
         <p:style>
           <a:lnRef idx="1">
@@ -4924,8 +4232,8 @@
         </p:nvSpPr>
         <p:spPr>
           <a:xfrm>
-            <a:off x="502920" y="292608"/>
-            <a:ext cx="9144000" cy="274320"/>
+            <a:off x="502920" y="365760"/>
+            <a:ext cx="10972800" cy="822960"/>
           </a:xfrm>
           <a:prstGeom prst="rect">
             <a:avLst/>
@@ -4939,18 +4247,14 @@
           <a:lstStyle/>
           <a:p>
             <a:pPr>
-              <a:spcAft>
-                <a:spcPts val="0"/>
-              </a:spcAft>
-            </a:pPr>
-            <a:r>
-              <a:rPr sz="1100" b="1">
-                <a:solidFill>
-                  <a:srgbClr val="4F46E5"/>
-                </a:solidFill>
-                <a:latin typeface="Segoe UI"/>
-              </a:rPr>
-              <a:t>02 · APPROACH</a:t>
+              <a:defRPr sz="3200" b="1">
+                <a:solidFill>
+                  <a:srgbClr val="1E293B"/>
+                </a:solidFill>
+              </a:defRPr>
+            </a:pPr>
+            <a:r>
+              <a:t>Solution Overview</a:t>
             </a:r>
           </a:p>
         </p:txBody>
@@ -4963,8 +4267,109 @@
         </p:nvSpPr>
         <p:spPr>
           <a:xfrm>
-            <a:off x="502920" y="530352"/>
-            <a:ext cx="10424160" cy="822960"/>
+            <a:off x="640080" y="1554480"/>
+            <a:ext cx="10789920" cy="4754880"/>
+          </a:xfrm>
+          <a:prstGeom prst="rect">
+            <a:avLst/>
+          </a:prstGeom>
+          <a:noFill/>
+        </p:spPr>
+        <p:txBody>
+          <a:bodyPr wrap="square">
+            <a:spAutoFit/>
+          </a:bodyPr>
+          <a:lstStyle/>
+          <a:p>
+            <a:pPr>
+              <a:lnSpc>
+                <a:spcPct val="125000"/>
+              </a:lnSpc>
+              <a:spcAft>
+                <a:spcPts val="1400"/>
+              </a:spcAft>
+            </a:pPr>
+            <a:r>
+              <a:rPr b="1" sz="1900">
+                <a:solidFill>
+                  <a:srgbClr val="1E293B"/>
+                </a:solidFill>
+              </a:rPr>
+              <a:t>One Manager, seven Specialists.  </a:t>
+            </a:r>
+            <a:r>
+              <a:rPr sz="1900">
+                <a:solidFill>
+                  <a:srgbClr val="475569"/>
+                </a:solidFill>
+              </a:rPr>
+              <a:t>A Supervisor agent plans and routes; seven worker agents each do one job — reading documents, reading images, analyzing numbers, reading sentiment, remembering context, writing the report, fact-checking it.</a:t>
+            </a:r>
+          </a:p>
+          <a:p>
+            <a:pPr>
+              <a:lnSpc>
+                <a:spcPct val="125000"/>
+              </a:lnSpc>
+              <a:spcAft>
+                <a:spcPts val="1400"/>
+              </a:spcAft>
+            </a:pPr>
+            <a:r>
+              <a:rPr b="1" sz="1900">
+                <a:solidFill>
+                  <a:srgbClr val="1E293B"/>
+                </a:solidFill>
+              </a:rPr>
+              <a:t>End-to-end flow.  </a:t>
+            </a:r>
+            <a:r>
+              <a:rPr sz="1900">
+                <a:solidFill>
+                  <a:srgbClr val="475569"/>
+                </a:solidFill>
+              </a:rPr>
+              <a:t>Upload documents + Facebook data → agents analyze → draft report → a human approves → download the finished report.</a:t>
+            </a:r>
+          </a:p>
+          <a:p>
+            <a:pPr>
+              <a:lnSpc>
+                <a:spcPct val="125000"/>
+              </a:lnSpc>
+              <a:spcAft>
+                <a:spcPts val="1400"/>
+              </a:spcAft>
+            </a:pPr>
+            <a:r>
+              <a:rPr b="1" sz="1900">
+                <a:solidFill>
+                  <a:srgbClr val="1E293B"/>
+                </a:solidFill>
+              </a:rPr>
+              <a:t>Built to be demo-ready on a free budget.  </a:t>
+            </a:r>
+            <a:r>
+              <a:rPr sz="1900">
+                <a:solidFill>
+                  <a:srgbClr val="475569"/>
+                </a:solidFill>
+              </a:rPr>
+              <a:t>LangGraph + FastAPI + Streamlit, powered by free-tier OpenRouter models with automatic fallback, local embeddings (no extra API cost), and a CSV-import path so the demo never blocks on Facebook app review.</a:t>
+            </a:r>
+          </a:p>
+        </p:txBody>
+      </p:sp>
+      <p:sp>
+        <p:nvSpPr>
+          <p:cNvPr id="5" name="TextBox 4"/>
+          <p:cNvSpPr txBox="1"/>
+          <p:nvPr/>
+        </p:nvSpPr>
+        <p:spPr>
+          <a:xfrm>
+            <a:off x="457200" y="6473952"/>
+            <a:ext cx="5486400" cy="320040"/>
           </a:xfrm>
           <a:prstGeom prst="rect">
             <a:avLst/>
@@ -4977,59 +4382,16 @@
           </a:bodyPr>
           <a:lstStyle/>
           <a:p>
-            <a:r>
-              <a:rPr sz="3000" b="1">
-                <a:solidFill>
-                  <a:srgbClr val="1E293B"/>
-                </a:solidFill>
-                <a:latin typeface="Segoe UI"/>
-              </a:rPr>
-              <a:t>Solution Overview</a:t>
-            </a:r>
-          </a:p>
-        </p:txBody>
-      </p:sp>
-      <p:sp>
-        <p:nvSpPr>
-          <p:cNvPr id="5" name="Rectangle 4"/>
-          <p:cNvSpPr/>
-          <p:nvPr/>
-        </p:nvSpPr>
-        <p:spPr>
-          <a:xfrm>
-            <a:off x="530352" y="1188720"/>
-            <a:ext cx="548640" cy="38100"/>
-          </a:xfrm>
-          <a:prstGeom prst="rect">
-            <a:avLst/>
-          </a:prstGeom>
-          <a:solidFill>
-            <a:srgbClr val="4F46E5"/>
-          </a:solidFill>
-          <a:ln>
-            <a:noFill/>
-          </a:ln>
-          <a:effectLst/>
-        </p:spPr>
-        <p:style>
-          <a:lnRef idx="1">
-            <a:schemeClr val="accent1"/>
-          </a:lnRef>
-          <a:fillRef idx="3">
-            <a:schemeClr val="accent1"/>
-          </a:fillRef>
-          <a:effectRef idx="2">
-            <a:schemeClr val="accent1"/>
-          </a:effectRef>
-          <a:fontRef idx="minor">
-            <a:schemeClr val="lt1"/>
-          </a:fontRef>
-        </p:style>
-        <p:txBody>
-          <a:bodyPr rtlCol="0" anchor="ctr"/>
-          <a:lstStyle/>
-          <a:p>
-            <a:pPr algn="ctr"/>
+            <a:pPr>
+              <a:defRPr sz="1000">
+                <a:solidFill>
+                  <a:srgbClr val="64748B"/>
+                </a:solidFill>
+              </a:defRPr>
+            </a:pPr>
+            <a:r>
+              <a:t>Education AI Analyst</a:t>
+            </a:r>
           </a:p>
         </p:txBody>
       </p:sp>
@@ -5041,439 +4403,8 @@
         </p:nvSpPr>
         <p:spPr>
           <a:xfrm>
-            <a:off x="640080" y="1490472"/>
-            <a:ext cx="10789920" cy="4572000"/>
-          </a:xfrm>
-          <a:prstGeom prst="rect">
-            <a:avLst/>
-          </a:prstGeom>
-          <a:noFill/>
-        </p:spPr>
-        <p:txBody>
-          <a:bodyPr wrap="square">
-            <a:spAutoFit/>
-          </a:bodyPr>
-          <a:lstStyle/>
-          <a:p>
-            <a:pPr>
-              <a:lnSpc>
-                <a:spcPct val="120000"/>
-              </a:lnSpc>
-              <a:spcAft>
-                <a:spcPts val="1300"/>
-              </a:spcAft>
-            </a:pPr>
-            <a:r>
-              <a:rPr b="1" sz="1750">
-                <a:solidFill>
-                  <a:srgbClr val="1E293B"/>
-                </a:solidFill>
-                <a:latin typeface="Segoe UI"/>
-              </a:rPr>
-              <a:t>One Manager, seven Specialists.  </a:t>
-            </a:r>
-            <a:r>
-              <a:rPr sz="1750">
-                <a:solidFill>
-                  <a:srgbClr val="475569"/>
-                </a:solidFill>
-                <a:latin typeface="Segoe UI"/>
-              </a:rPr>
-              <a:t>A Supervisor agent plans and routes; seven worker agents each do one job — reading documents, reading images, analyzing numbers, reading sentiment, remembering context, writing the report, fact-checking it.</a:t>
-            </a:r>
-          </a:p>
-          <a:p>
-            <a:pPr>
-              <a:lnSpc>
-                <a:spcPct val="120000"/>
-              </a:lnSpc>
-              <a:spcAft>
-                <a:spcPts val="1300"/>
-              </a:spcAft>
-            </a:pPr>
-            <a:r>
-              <a:rPr b="1" sz="1750">
-                <a:solidFill>
-                  <a:srgbClr val="1E293B"/>
-                </a:solidFill>
-                <a:latin typeface="Segoe UI"/>
-              </a:rPr>
-              <a:t>Built to be demo-ready on a free budget.  </a:t>
-            </a:r>
-            <a:r>
-              <a:rPr sz="1750">
-                <a:solidFill>
-                  <a:srgbClr val="475569"/>
-                </a:solidFill>
-                <a:latin typeface="Segoe UI"/>
-              </a:rPr>
-              <a:t>LangGraph + FastAPI + Streamlit, powered by free-tier OpenRouter models with automatic fallback, local embeddings, and a CSV-import path so the demo never blocks on Facebook app review.</a:t>
-            </a:r>
-          </a:p>
-        </p:txBody>
-      </p:sp>
-      <p:sp>
-        <p:nvSpPr>
-          <p:cNvPr id="7" name="Rounded Rectangle 6"/>
-          <p:cNvSpPr/>
-          <p:nvPr/>
-        </p:nvSpPr>
-        <p:spPr>
-          <a:xfrm>
-            <a:off x="678027" y="5074920"/>
-            <a:ext cx="2331720" cy="777240"/>
-          </a:xfrm>
-          <a:prstGeom prst="roundRect">
-            <a:avLst/>
-          </a:prstGeom>
-          <a:solidFill>
-            <a:srgbClr val="4F46E5"/>
-          </a:solidFill>
-          <a:ln w="12700">
-            <a:solidFill>
-              <a:srgbClr val="4F46E5"/>
-            </a:solidFill>
-          </a:ln>
-          <a:effectLst/>
-        </p:spPr>
-        <p:style>
-          <a:lnRef idx="1">
-            <a:schemeClr val="accent1"/>
-          </a:lnRef>
-          <a:fillRef idx="3">
-            <a:schemeClr val="accent1"/>
-          </a:fillRef>
-          <a:effectRef idx="2">
-            <a:schemeClr val="accent1"/>
-          </a:effectRef>
-          <a:fontRef idx="minor">
-            <a:schemeClr val="lt1"/>
-          </a:fontRef>
-        </p:style>
-        <p:txBody>
-          <a:bodyPr rtlCol="0" anchor="ctr" lIns="0" rIns="0"/>
-          <a:lstStyle/>
-          <a:p>
-            <a:pPr algn="ctr"/>
-            <a:r>
-              <a:rPr sz="1500" b="1">
-                <a:solidFill>
-                  <a:srgbClr val="FFFFFF"/>
-                </a:solidFill>
-                <a:latin typeface="Segoe UI"/>
-              </a:rPr>
-              <a:t>1. Upload</a:t>
-            </a:r>
-          </a:p>
-        </p:txBody>
-      </p:sp>
-      <p:sp>
-        <p:nvSpPr>
-          <p:cNvPr id="8" name="Right Arrow 7"/>
-          <p:cNvSpPr/>
-          <p:nvPr/>
-        </p:nvSpPr>
-        <p:spPr>
-          <a:xfrm>
-            <a:off x="3037179" y="5349240"/>
-            <a:ext cx="448056" cy="228600"/>
-          </a:xfrm>
-          <a:prstGeom prst="rightArrow">
-            <a:avLst/>
-          </a:prstGeom>
-          <a:solidFill>
-            <a:srgbClr val="64748B"/>
-          </a:solidFill>
-          <a:ln>
-            <a:noFill/>
-          </a:ln>
-          <a:effectLst/>
-        </p:spPr>
-        <p:style>
-          <a:lnRef idx="1">
-            <a:schemeClr val="accent1"/>
-          </a:lnRef>
-          <a:fillRef idx="3">
-            <a:schemeClr val="accent1"/>
-          </a:fillRef>
-          <a:effectRef idx="2">
-            <a:schemeClr val="accent1"/>
-          </a:effectRef>
-          <a:fontRef idx="minor">
-            <a:schemeClr val="lt1"/>
-          </a:fontRef>
-        </p:style>
-        <p:txBody>
-          <a:bodyPr rtlCol="0" anchor="ctr"/>
-          <a:lstStyle/>
-          <a:p>
-            <a:pPr algn="ctr"/>
-          </a:p>
-        </p:txBody>
-      </p:sp>
-      <p:sp>
-        <p:nvSpPr>
-          <p:cNvPr id="9" name="Rounded Rectangle 8"/>
-          <p:cNvSpPr/>
-          <p:nvPr/>
-        </p:nvSpPr>
-        <p:spPr>
-          <a:xfrm>
-            <a:off x="3512667" y="5074920"/>
-            <a:ext cx="2331720" cy="777240"/>
-          </a:xfrm>
-          <a:prstGeom prst="roundRect">
-            <a:avLst/>
-          </a:prstGeom>
-          <a:solidFill>
-            <a:srgbClr val="EEF2FF"/>
-          </a:solidFill>
-          <a:ln w="12700">
-            <a:solidFill>
-              <a:srgbClr val="4F46E5"/>
-            </a:solidFill>
-          </a:ln>
-          <a:effectLst/>
-        </p:spPr>
-        <p:style>
-          <a:lnRef idx="1">
-            <a:schemeClr val="accent1"/>
-          </a:lnRef>
-          <a:fillRef idx="3">
-            <a:schemeClr val="accent1"/>
-          </a:fillRef>
-          <a:effectRef idx="2">
-            <a:schemeClr val="accent1"/>
-          </a:effectRef>
-          <a:fontRef idx="minor">
-            <a:schemeClr val="lt1"/>
-          </a:fontRef>
-        </p:style>
-        <p:txBody>
-          <a:bodyPr rtlCol="0" anchor="ctr" lIns="0" rIns="0"/>
-          <a:lstStyle/>
-          <a:p>
-            <a:pPr algn="ctr"/>
-            <a:r>
-              <a:rPr sz="1500" b="1">
-                <a:solidFill>
-                  <a:srgbClr val="4338CA"/>
-                </a:solidFill>
-                <a:latin typeface="Segoe UI"/>
-              </a:rPr>
-              <a:t>2. Analyze</a:t>
-            </a:r>
-          </a:p>
-        </p:txBody>
-      </p:sp>
-      <p:sp>
-        <p:nvSpPr>
-          <p:cNvPr id="10" name="Right Arrow 9"/>
-          <p:cNvSpPr/>
-          <p:nvPr/>
-        </p:nvSpPr>
-        <p:spPr>
-          <a:xfrm>
-            <a:off x="5871819" y="5349240"/>
-            <a:ext cx="448056" cy="228600"/>
-          </a:xfrm>
-          <a:prstGeom prst="rightArrow">
-            <a:avLst/>
-          </a:prstGeom>
-          <a:solidFill>
-            <a:srgbClr val="64748B"/>
-          </a:solidFill>
-          <a:ln>
-            <a:noFill/>
-          </a:ln>
-          <a:effectLst/>
-        </p:spPr>
-        <p:style>
-          <a:lnRef idx="1">
-            <a:schemeClr val="accent1"/>
-          </a:lnRef>
-          <a:fillRef idx="3">
-            <a:schemeClr val="accent1"/>
-          </a:fillRef>
-          <a:effectRef idx="2">
-            <a:schemeClr val="accent1"/>
-          </a:effectRef>
-          <a:fontRef idx="minor">
-            <a:schemeClr val="lt1"/>
-          </a:fontRef>
-        </p:style>
-        <p:txBody>
-          <a:bodyPr rtlCol="0" anchor="ctr"/>
-          <a:lstStyle/>
-          <a:p>
-            <a:pPr algn="ctr"/>
-          </a:p>
-        </p:txBody>
-      </p:sp>
-      <p:sp>
-        <p:nvSpPr>
-          <p:cNvPr id="11" name="Rounded Rectangle 10"/>
-          <p:cNvSpPr/>
-          <p:nvPr/>
-        </p:nvSpPr>
-        <p:spPr>
-          <a:xfrm>
-            <a:off x="6347307" y="5074920"/>
-            <a:ext cx="2331720" cy="777240"/>
-          </a:xfrm>
-          <a:prstGeom prst="roundRect">
-            <a:avLst/>
-          </a:prstGeom>
-          <a:solidFill>
-            <a:srgbClr val="EEF2FF"/>
-          </a:solidFill>
-          <a:ln w="12700">
-            <a:solidFill>
-              <a:srgbClr val="4F46E5"/>
-            </a:solidFill>
-          </a:ln>
-          <a:effectLst/>
-        </p:spPr>
-        <p:style>
-          <a:lnRef idx="1">
-            <a:schemeClr val="accent1"/>
-          </a:lnRef>
-          <a:fillRef idx="3">
-            <a:schemeClr val="accent1"/>
-          </a:fillRef>
-          <a:effectRef idx="2">
-            <a:schemeClr val="accent1"/>
-          </a:effectRef>
-          <a:fontRef idx="minor">
-            <a:schemeClr val="lt1"/>
-          </a:fontRef>
-        </p:style>
-        <p:txBody>
-          <a:bodyPr rtlCol="0" anchor="ctr" lIns="0" rIns="0"/>
-          <a:lstStyle/>
-          <a:p>
-            <a:pPr algn="ctr"/>
-            <a:r>
-              <a:rPr sz="1500" b="1">
-                <a:solidFill>
-                  <a:srgbClr val="4338CA"/>
-                </a:solidFill>
-                <a:latin typeface="Segoe UI"/>
-              </a:rPr>
-              <a:t>3. Approve</a:t>
-            </a:r>
-          </a:p>
-        </p:txBody>
-      </p:sp>
-      <p:sp>
-        <p:nvSpPr>
-          <p:cNvPr id="12" name="Right Arrow 11"/>
-          <p:cNvSpPr/>
-          <p:nvPr/>
-        </p:nvSpPr>
-        <p:spPr>
-          <a:xfrm>
-            <a:off x="8706459" y="5349240"/>
-            <a:ext cx="448056" cy="228600"/>
-          </a:xfrm>
-          <a:prstGeom prst="rightArrow">
-            <a:avLst/>
-          </a:prstGeom>
-          <a:solidFill>
-            <a:srgbClr val="64748B"/>
-          </a:solidFill>
-          <a:ln>
-            <a:noFill/>
-          </a:ln>
-          <a:effectLst/>
-        </p:spPr>
-        <p:style>
-          <a:lnRef idx="1">
-            <a:schemeClr val="accent1"/>
-          </a:lnRef>
-          <a:fillRef idx="3">
-            <a:schemeClr val="accent1"/>
-          </a:fillRef>
-          <a:effectRef idx="2">
-            <a:schemeClr val="accent1"/>
-          </a:effectRef>
-          <a:fontRef idx="minor">
-            <a:schemeClr val="lt1"/>
-          </a:fontRef>
-        </p:style>
-        <p:txBody>
-          <a:bodyPr rtlCol="0" anchor="ctr"/>
-          <a:lstStyle/>
-          <a:p>
-            <a:pPr algn="ctr"/>
-          </a:p>
-        </p:txBody>
-      </p:sp>
-      <p:sp>
-        <p:nvSpPr>
-          <p:cNvPr id="13" name="Rounded Rectangle 12"/>
-          <p:cNvSpPr/>
-          <p:nvPr/>
-        </p:nvSpPr>
-        <p:spPr>
-          <a:xfrm>
-            <a:off x="9181947" y="5074920"/>
-            <a:ext cx="2331720" cy="777240"/>
-          </a:xfrm>
-          <a:prstGeom prst="roundRect">
-            <a:avLst/>
-          </a:prstGeom>
-          <a:solidFill>
-            <a:srgbClr val="4F46E5"/>
-          </a:solidFill>
-          <a:ln w="12700">
-            <a:solidFill>
-              <a:srgbClr val="4F46E5"/>
-            </a:solidFill>
-          </a:ln>
-          <a:effectLst/>
-        </p:spPr>
-        <p:style>
-          <a:lnRef idx="1">
-            <a:schemeClr val="accent1"/>
-          </a:lnRef>
-          <a:fillRef idx="3">
-            <a:schemeClr val="accent1"/>
-          </a:fillRef>
-          <a:effectRef idx="2">
-            <a:schemeClr val="accent1"/>
-          </a:effectRef>
-          <a:fontRef idx="minor">
-            <a:schemeClr val="lt1"/>
-          </a:fontRef>
-        </p:style>
-        <p:txBody>
-          <a:bodyPr rtlCol="0" anchor="ctr" lIns="0" rIns="0"/>
-          <a:lstStyle/>
-          <a:p>
-            <a:pPr algn="ctr"/>
-            <a:r>
-              <a:rPr sz="1500" b="1">
-                <a:solidFill>
-                  <a:srgbClr val="FFFFFF"/>
-                </a:solidFill>
-                <a:latin typeface="Segoe UI"/>
-              </a:rPr>
-              <a:t>4. Download</a:t>
-            </a:r>
-          </a:p>
-        </p:txBody>
-      </p:sp>
-      <p:sp>
-        <p:nvSpPr>
-          <p:cNvPr id="14" name="TextBox 13"/>
-          <p:cNvSpPr txBox="1"/>
-          <p:nvPr/>
-        </p:nvSpPr>
-        <p:spPr>
-          <a:xfrm>
-            <a:off x="502920" y="6492240"/>
-            <a:ext cx="5486400" cy="274320"/>
+            <a:off x="11247120" y="6473952"/>
+            <a:ext cx="640080" cy="320040"/>
           </a:xfrm>
           <a:prstGeom prst="rect">
             <a:avLst/>
@@ -5486,71 +4417,15 @@
           </a:bodyPr>
           <a:lstStyle/>
           <a:p>
-            <a:pPr>
-              <a:defRPr sz="950">
+            <a:pPr algn="r">
+              <a:defRPr sz="1000">
                 <a:solidFill>
                   <a:srgbClr val="64748B"/>
                 </a:solidFill>
-                <a:latin typeface="Segoe UI"/>
-              </a:defRPr>
-            </a:pPr>
-            <a:r>
-              <a:t>Education AI Analyst</a:t>
-            </a:r>
-          </a:p>
-        </p:txBody>
-      </p:sp>
-      <p:sp>
-        <p:nvSpPr>
-          <p:cNvPr id="15" name="Rounded Rectangle 14"/>
-          <p:cNvSpPr/>
-          <p:nvPr/>
-        </p:nvSpPr>
-        <p:spPr>
-          <a:xfrm>
-            <a:off x="11475720" y="320040"/>
-            <a:ext cx="457200" cy="292608"/>
-          </a:xfrm>
-          <a:prstGeom prst="roundRect">
-            <a:avLst>
-              <a:gd name="adj" fmla="val 50000"/>
-            </a:avLst>
-          </a:prstGeom>
-          <a:solidFill>
-            <a:srgbClr val="4F46E5"/>
-          </a:solidFill>
-          <a:ln>
-            <a:noFill/>
-          </a:ln>
-          <a:effectLst/>
-        </p:spPr>
-        <p:style>
-          <a:lnRef idx="1">
-            <a:schemeClr val="accent1"/>
-          </a:lnRef>
-          <a:fillRef idx="3">
-            <a:schemeClr val="accent1"/>
-          </a:fillRef>
-          <a:effectRef idx="2">
-            <a:schemeClr val="accent1"/>
-          </a:effectRef>
-          <a:fontRef idx="minor">
-            <a:schemeClr val="lt1"/>
-          </a:fontRef>
-        </p:style>
-        <p:txBody>
-          <a:bodyPr rtlCol="0" anchor="ctr" lIns="0" rIns="0" tIns="0" bIns="0"/>
-          <a:lstStyle/>
-          <a:p>
-            <a:pPr algn="ctr"/>
-            <a:r>
-              <a:rPr sz="1200" b="1">
-                <a:solidFill>
-                  <a:srgbClr val="FFFFFF"/>
-                </a:solidFill>
-                <a:latin typeface="Segoe UI"/>
-              </a:rPr>
-              <a:t>03</a:t>
+              </a:defRPr>
+            </a:pPr>
+            <a:r>
+              <a:t>3</a:t>
             </a:r>
           </a:p>
         </p:txBody>
@@ -5601,7 +4476,6 @@
           <a:ln>
             <a:noFill/>
           </a:ln>
-          <a:effectLst/>
         </p:spPr>
         <p:style>
           <a:lnRef idx="1">
@@ -5633,8 +4507,8 @@
         </p:nvSpPr>
         <p:spPr>
           <a:xfrm>
-            <a:off x="502920" y="292608"/>
-            <a:ext cx="9144000" cy="274320"/>
+            <a:off x="502920" y="365760"/>
+            <a:ext cx="10972800" cy="822960"/>
           </a:xfrm>
           <a:prstGeom prst="rect">
             <a:avLst/>
@@ -5648,149 +4522,21 @@
           <a:lstStyle/>
           <a:p>
             <a:pPr>
-              <a:spcAft>
-                <a:spcPts val="0"/>
-              </a:spcAft>
-            </a:pPr>
-            <a:r>
-              <a:rPr sz="1100" b="1">
-                <a:solidFill>
-                  <a:srgbClr val="4F46E5"/>
-                </a:solidFill>
-                <a:latin typeface="Segoe UI"/>
-              </a:rPr>
-              <a:t>03 · DESIGN</a:t>
-            </a:r>
-          </a:p>
-        </p:txBody>
-      </p:sp>
-      <p:sp>
-        <p:nvSpPr>
-          <p:cNvPr id="4" name="TextBox 3"/>
-          <p:cNvSpPr txBox="1"/>
-          <p:nvPr/>
-        </p:nvSpPr>
-        <p:spPr>
-          <a:xfrm>
-            <a:off x="502920" y="530352"/>
-            <a:ext cx="10424160" cy="822960"/>
-          </a:xfrm>
-          <a:prstGeom prst="rect">
-            <a:avLst/>
-          </a:prstGeom>
-          <a:noFill/>
-        </p:spPr>
-        <p:txBody>
-          <a:bodyPr wrap="none">
-            <a:spAutoFit/>
-          </a:bodyPr>
-          <a:lstStyle/>
-          <a:p>
-            <a:r>
-              <a:rPr sz="3000" b="1">
+              <a:defRPr sz="3200" b="1">
                 <a:solidFill>
                   <a:srgbClr val="1E293B"/>
                 </a:solidFill>
-                <a:latin typeface="Segoe UI"/>
-              </a:rPr>
+              </a:defRPr>
+            </a:pPr>
+            <a:r>
               <a:t>System Architecture</a:t>
             </a:r>
-          </a:p>
-        </p:txBody>
-      </p:sp>
-      <p:sp>
-        <p:nvSpPr>
-          <p:cNvPr id="5" name="Rectangle 4"/>
-          <p:cNvSpPr/>
-          <p:nvPr/>
-        </p:nvSpPr>
-        <p:spPr>
-          <a:xfrm>
-            <a:off x="530352" y="1188720"/>
-            <a:ext cx="548640" cy="38100"/>
-          </a:xfrm>
-          <a:prstGeom prst="rect">
-            <a:avLst/>
-          </a:prstGeom>
-          <a:solidFill>
-            <a:srgbClr val="4F46E5"/>
-          </a:solidFill>
-          <a:ln>
-            <a:noFill/>
-          </a:ln>
-          <a:effectLst/>
-        </p:spPr>
-        <p:style>
-          <a:lnRef idx="1">
-            <a:schemeClr val="accent1"/>
-          </a:lnRef>
-          <a:fillRef idx="3">
-            <a:schemeClr val="accent1"/>
-          </a:fillRef>
-          <a:effectRef idx="2">
-            <a:schemeClr val="accent1"/>
-          </a:effectRef>
-          <a:fontRef idx="minor">
-            <a:schemeClr val="lt1"/>
-          </a:fontRef>
-        </p:style>
-        <p:txBody>
-          <a:bodyPr rtlCol="0" anchor="ctr"/>
-          <a:lstStyle/>
-          <a:p>
-            <a:pPr algn="ctr"/>
-          </a:p>
-        </p:txBody>
-      </p:sp>
-      <p:sp>
-        <p:nvSpPr>
-          <p:cNvPr id="6" name="Rectangle 5"/>
-          <p:cNvSpPr/>
-          <p:nvPr/>
-        </p:nvSpPr>
-        <p:spPr>
-          <a:xfrm>
-            <a:off x="3123712" y="1362456"/>
-            <a:ext cx="5944271" cy="5001768"/>
-          </a:xfrm>
-          <a:prstGeom prst="rect">
-            <a:avLst/>
-          </a:prstGeom>
-          <a:solidFill>
-            <a:srgbClr val="FFFFFF"/>
-          </a:solidFill>
-          <a:ln w="12700">
-            <a:solidFill>
-              <a:srgbClr val="CBD5E1"/>
-            </a:solidFill>
-          </a:ln>
-          <a:effectLst/>
-        </p:spPr>
-        <p:style>
-          <a:lnRef idx="1">
-            <a:schemeClr val="accent1"/>
-          </a:lnRef>
-          <a:fillRef idx="3">
-            <a:schemeClr val="accent1"/>
-          </a:fillRef>
-          <a:effectRef idx="2">
-            <a:schemeClr val="accent1"/>
-          </a:effectRef>
-          <a:fontRef idx="minor">
-            <a:schemeClr val="lt1"/>
-          </a:fontRef>
-        </p:style>
-        <p:txBody>
-          <a:bodyPr rtlCol="0" anchor="ctr"/>
-          <a:lstStyle/>
-          <a:p>
-            <a:pPr algn="ctr"/>
           </a:p>
         </p:txBody>
       </p:sp>
       <p:pic>
         <p:nvPicPr>
-          <p:cNvPr id="7" name="Picture 6" descr="arch-diagram-preview.png"/>
+          <p:cNvPr id="4" name="Picture 3" descr="arch-diagram-preview.png"/>
           <p:cNvPicPr>
             <a:picLocks noChangeAspect="1"/>
           </p:cNvPicPr>
@@ -5804,8 +4550,8 @@
         </p:blipFill>
         <p:spPr>
           <a:xfrm>
-            <a:off x="3178576" y="1417320"/>
-            <a:ext cx="5834543" cy="4892040"/>
+            <a:off x="3069519" y="1234440"/>
+            <a:ext cx="6052656" cy="5074920"/>
           </a:xfrm>
           <a:prstGeom prst="rect">
             <a:avLst/>
@@ -5814,14 +4560,14 @@
       </p:pic>
       <p:sp>
         <p:nvSpPr>
-          <p:cNvPr id="8" name="TextBox 7"/>
+          <p:cNvPr id="5" name="TextBox 4"/>
           <p:cNvSpPr txBox="1"/>
           <p:nvPr/>
         </p:nvSpPr>
         <p:spPr>
           <a:xfrm>
-            <a:off x="502920" y="6492240"/>
-            <a:ext cx="5486400" cy="274320"/>
+            <a:off x="457200" y="6473952"/>
+            <a:ext cx="5486400" cy="320040"/>
           </a:xfrm>
           <a:prstGeom prst="rect">
             <a:avLst/>
@@ -5835,11 +4581,10 @@
           <a:lstStyle/>
           <a:p>
             <a:pPr>
-              <a:defRPr sz="950">
+              <a:defRPr sz="1000">
                 <a:solidFill>
                   <a:srgbClr val="64748B"/>
                 </a:solidFill>
-                <a:latin typeface="Segoe UI"/>
               </a:defRPr>
             </a:pPr>
             <a:r>
@@ -5850,55 +4595,35 @@
       </p:sp>
       <p:sp>
         <p:nvSpPr>
-          <p:cNvPr id="9" name="Rounded Rectangle 8"/>
-          <p:cNvSpPr/>
+          <p:cNvPr id="6" name="TextBox 5"/>
+          <p:cNvSpPr txBox="1"/>
           <p:nvPr/>
         </p:nvSpPr>
         <p:spPr>
           <a:xfrm>
-            <a:off x="11475720" y="320040"/>
-            <a:ext cx="457200" cy="292608"/>
-          </a:xfrm>
-          <a:prstGeom prst="roundRect">
-            <a:avLst>
-              <a:gd name="adj" fmla="val 50000"/>
-            </a:avLst>
-          </a:prstGeom>
-          <a:solidFill>
-            <a:srgbClr val="4F46E5"/>
-          </a:solidFill>
-          <a:ln>
-            <a:noFill/>
-          </a:ln>
-          <a:effectLst/>
-        </p:spPr>
-        <p:style>
-          <a:lnRef idx="1">
-            <a:schemeClr val="accent1"/>
-          </a:lnRef>
-          <a:fillRef idx="3">
-            <a:schemeClr val="accent1"/>
-          </a:fillRef>
-          <a:effectRef idx="2">
-            <a:schemeClr val="accent1"/>
-          </a:effectRef>
-          <a:fontRef idx="minor">
-            <a:schemeClr val="lt1"/>
-          </a:fontRef>
-        </p:style>
-        <p:txBody>
-          <a:bodyPr rtlCol="0" anchor="ctr" lIns="0" rIns="0" tIns="0" bIns="0"/>
-          <a:lstStyle/>
-          <a:p>
-            <a:pPr algn="ctr"/>
-            <a:r>
-              <a:rPr sz="1200" b="1">
-                <a:solidFill>
-                  <a:srgbClr val="FFFFFF"/>
-                </a:solidFill>
-                <a:latin typeface="Segoe UI"/>
-              </a:rPr>
-              <a:t>04</a:t>
+            <a:off x="11247120" y="6473952"/>
+            <a:ext cx="640080" cy="320040"/>
+          </a:xfrm>
+          <a:prstGeom prst="rect">
+            <a:avLst/>
+          </a:prstGeom>
+          <a:noFill/>
+        </p:spPr>
+        <p:txBody>
+          <a:bodyPr wrap="none">
+            <a:spAutoFit/>
+          </a:bodyPr>
+          <a:lstStyle/>
+          <a:p>
+            <a:pPr algn="r">
+              <a:defRPr sz="1000">
+                <a:solidFill>
+                  <a:srgbClr val="64748B"/>
+                </a:solidFill>
+              </a:defRPr>
+            </a:pPr>
+            <a:r>
+              <a:t>4</a:t>
             </a:r>
           </a:p>
         </p:txBody>
@@ -5949,7 +4674,6 @@
           <a:ln>
             <a:noFill/>
           </a:ln>
-          <a:effectLst/>
         </p:spPr>
         <p:style>
           <a:lnRef idx="1">
@@ -5981,8 +4705,8 @@
         </p:nvSpPr>
         <p:spPr>
           <a:xfrm>
-            <a:off x="502920" y="292608"/>
-            <a:ext cx="9144000" cy="274320"/>
+            <a:off x="502920" y="365760"/>
+            <a:ext cx="10972800" cy="822960"/>
           </a:xfrm>
           <a:prstGeom prst="rect">
             <a:avLst/>
@@ -5996,51 +4720,13 @@
           <a:lstStyle/>
           <a:p>
             <a:pPr>
-              <a:spcAft>
-                <a:spcPts val="0"/>
-              </a:spcAft>
-            </a:pPr>
-            <a:r>
-              <a:rPr sz="1100" b="1">
-                <a:solidFill>
-                  <a:srgbClr val="4F46E5"/>
-                </a:solidFill>
-                <a:latin typeface="Segoe UI"/>
-              </a:rPr>
-              <a:t>04 · AGENTS</a:t>
-            </a:r>
-          </a:p>
-        </p:txBody>
-      </p:sp>
-      <p:sp>
-        <p:nvSpPr>
-          <p:cNvPr id="4" name="TextBox 3"/>
-          <p:cNvSpPr txBox="1"/>
-          <p:nvPr/>
-        </p:nvSpPr>
-        <p:spPr>
-          <a:xfrm>
-            <a:off x="502920" y="530352"/>
-            <a:ext cx="10424160" cy="822960"/>
-          </a:xfrm>
-          <a:prstGeom prst="rect">
-            <a:avLst/>
-          </a:prstGeom>
-          <a:noFill/>
-        </p:spPr>
-        <p:txBody>
-          <a:bodyPr wrap="none">
-            <a:spAutoFit/>
-          </a:bodyPr>
-          <a:lstStyle/>
-          <a:p>
-            <a:r>
-              <a:rPr sz="3000" b="1">
+              <a:defRPr sz="3200" b="1">
                 <a:solidFill>
                   <a:srgbClr val="1E293B"/>
                 </a:solidFill>
-                <a:latin typeface="Segoe UI"/>
-              </a:rPr>
+              </a:defRPr>
+            </a:pPr>
+            <a:r>
               <a:t>Supervisor + 7 Worker Agents</a:t>
             </a:r>
           </a:p>
@@ -6048,124 +4734,14 @@
       </p:sp>
       <p:sp>
         <p:nvSpPr>
-          <p:cNvPr id="5" name="Rectangle 4"/>
+          <p:cNvPr id="4" name="Rounded Rectangle 3"/>
           <p:cNvSpPr/>
           <p:nvPr/>
         </p:nvSpPr>
         <p:spPr>
           <a:xfrm>
-            <a:off x="530352" y="1188720"/>
-            <a:ext cx="548640" cy="38100"/>
-          </a:xfrm>
-          <a:prstGeom prst="rect">
-            <a:avLst/>
-          </a:prstGeom>
-          <a:solidFill>
-            <a:srgbClr val="4F46E5"/>
-          </a:solidFill>
-          <a:ln>
-            <a:noFill/>
-          </a:ln>
-          <a:effectLst/>
-        </p:spPr>
-        <p:style>
-          <a:lnRef idx="1">
-            <a:schemeClr val="accent1"/>
-          </a:lnRef>
-          <a:fillRef idx="3">
-            <a:schemeClr val="accent1"/>
-          </a:fillRef>
-          <a:effectRef idx="2">
-            <a:schemeClr val="accent1"/>
-          </a:effectRef>
-          <a:fontRef idx="minor">
-            <a:schemeClr val="lt1"/>
-          </a:fontRef>
-        </p:style>
-        <p:txBody>
-          <a:bodyPr rtlCol="0" anchor="ctr"/>
-          <a:lstStyle/>
-          <a:p>
-            <a:pPr algn="ctr"/>
-          </a:p>
-        </p:txBody>
-      </p:sp>
-      <p:sp>
-        <p:nvSpPr>
-          <p:cNvPr id="6" name="Rounded Rectangle 5"/>
-          <p:cNvSpPr/>
-          <p:nvPr/>
-        </p:nvSpPr>
-        <p:spPr>
-          <a:xfrm>
-            <a:off x="640080" y="1490472"/>
-            <a:ext cx="5349240" cy="914400"/>
-          </a:xfrm>
-          <a:prstGeom prst="roundRect">
-            <a:avLst/>
-          </a:prstGeom>
-          <a:solidFill>
-            <a:srgbClr val="4F46E5"/>
-          </a:solidFill>
-          <a:ln w="12700">
-            <a:solidFill>
-              <a:srgbClr val="4F46E5"/>
-            </a:solidFill>
-          </a:ln>
-          <a:effectLst/>
-        </p:spPr>
-        <p:style>
-          <a:lnRef idx="1">
-            <a:schemeClr val="accent1"/>
-          </a:lnRef>
-          <a:fillRef idx="3">
-            <a:schemeClr val="accent1"/>
-          </a:fillRef>
-          <a:effectRef idx="2">
-            <a:schemeClr val="accent1"/>
-          </a:effectRef>
-          <a:fontRef idx="minor">
-            <a:schemeClr val="lt1"/>
-          </a:fontRef>
-        </p:style>
-        <p:txBody>
-          <a:bodyPr rtlCol="0" anchor="ctr" wrap="square" lIns="182880" tIns="91440"/>
-          <a:lstStyle/>
-          <a:p>
-            <a:pPr algn="ctr"/>
-            <a:r>
-              <a:rPr b="1" sz="1450">
-                <a:solidFill>
-                  <a:srgbClr val="FFFFFF"/>
-                </a:solidFill>
-                <a:latin typeface="Segoe UI"/>
-              </a:rPr>
-              <a:t>Supervisor</a:t>
-            </a:r>
-          </a:p>
-          <a:p>
-            <a:r>
-              <a:rPr sz="1100">
-                <a:solidFill>
-                  <a:srgbClr val="E0E7FF"/>
-                </a:solidFill>
-                <a:latin typeface="Segoe UI"/>
-              </a:rPr>
-              <a:t>Plans work, routes documents, aggregates results</a:t>
-            </a:r>
-          </a:p>
-        </p:txBody>
-      </p:sp>
-      <p:sp>
-        <p:nvSpPr>
-          <p:cNvPr id="7" name="Rounded Rectangle 6"/>
-          <p:cNvSpPr/>
-          <p:nvPr/>
-        </p:nvSpPr>
-        <p:spPr>
-          <a:xfrm>
-            <a:off x="640080" y="2532887"/>
-            <a:ext cx="5349240" cy="914400"/>
+            <a:off x="640080" y="1417320"/>
+            <a:ext cx="5349240" cy="960120"/>
           </a:xfrm>
           <a:prstGeom prst="roundRect">
             <a:avLst/>
@@ -6195,43 +4771,44 @@
           </a:fontRef>
         </p:style>
         <p:txBody>
-          <a:bodyPr rtlCol="0" anchor="ctr" wrap="square" lIns="182880" tIns="91440"/>
-          <a:lstStyle/>
-          <a:p>
-            <a:pPr algn="ctr"/>
-            <a:r>
-              <a:rPr b="1" sz="1450">
+          <a:bodyPr rtlCol="0" anchor="ctr" wrap="square" lIns="164592" tIns="91440"/>
+          <a:lstStyle/>
+          <a:p>
+            <a:pPr algn="ctr">
+              <a:defRPr b="1" sz="1500">
                 <a:solidFill>
                   <a:srgbClr val="1E293B"/>
                 </a:solidFill>
-                <a:latin typeface="Segoe UI"/>
-              </a:rPr>
-              <a:t>Document Ingestion</a:t>
-            </a:r>
-          </a:p>
-          <a:p>
-            <a:r>
-              <a:rPr sz="1100">
+              </a:defRPr>
+            </a:pPr>
+            <a:r>
+              <a:t>Supervisor</a:t>
+            </a:r>
+          </a:p>
+          <a:p>
+            <a:pPr>
+              <a:defRPr sz="1150">
                 <a:solidFill>
                   <a:srgbClr val="475569"/>
                 </a:solidFill>
-                <a:latin typeface="Segoe UI"/>
-              </a:rPr>
-              <a:t>PDF / DOCX / PPTX / XLSX → structured text &amp; tables</a:t>
-            </a:r>
-          </a:p>
-        </p:txBody>
-      </p:sp>
-      <p:sp>
-        <p:nvSpPr>
-          <p:cNvPr id="8" name="Rounded Rectangle 7"/>
+              </a:defRPr>
+            </a:pPr>
+            <a:r>
+              <a:t>Plans work, routes documents, aggregates results</a:t>
+            </a:r>
+          </a:p>
+        </p:txBody>
+      </p:sp>
+      <p:sp>
+        <p:nvSpPr>
+          <p:cNvPr id="5" name="Rounded Rectangle 4"/>
           <p:cNvSpPr/>
           <p:nvPr/>
         </p:nvSpPr>
         <p:spPr>
           <a:xfrm>
-            <a:off x="640080" y="3575302"/>
-            <a:ext cx="5349240" cy="914400"/>
+            <a:off x="640080" y="2532888"/>
+            <a:ext cx="5349240" cy="960120"/>
           </a:xfrm>
           <a:prstGeom prst="roundRect">
             <a:avLst/>
@@ -6261,43 +4838,44 @@
           </a:fontRef>
         </p:style>
         <p:txBody>
-          <a:bodyPr rtlCol="0" anchor="ctr" wrap="square" lIns="182880" tIns="91440"/>
-          <a:lstStyle/>
-          <a:p>
-            <a:pPr algn="ctr"/>
-            <a:r>
-              <a:rPr b="1" sz="1450">
+          <a:bodyPr rtlCol="0" anchor="ctr" wrap="square" lIns="164592" tIns="91440"/>
+          <a:lstStyle/>
+          <a:p>
+            <a:pPr algn="ctr">
+              <a:defRPr b="1" sz="1500">
                 <a:solidFill>
                   <a:srgbClr val="1E293B"/>
                 </a:solidFill>
-                <a:latin typeface="Segoe UI"/>
-              </a:rPr>
-              <a:t>Vision / OCR</a:t>
-            </a:r>
-          </a:p>
-          <a:p>
-            <a:r>
-              <a:rPr sz="1100">
+              </a:defRPr>
+            </a:pPr>
+            <a:r>
+              <a:t>Document Ingestion</a:t>
+            </a:r>
+          </a:p>
+          <a:p>
+            <a:pPr>
+              <a:defRPr sz="1150">
                 <a:solidFill>
                   <a:srgbClr val="475569"/>
                 </a:solidFill>
-                <a:latin typeface="Segoe UI"/>
-              </a:rPr>
-              <a:t>Scanned forms, screenshots → text (vision LLM)</a:t>
-            </a:r>
-          </a:p>
-        </p:txBody>
-      </p:sp>
-      <p:sp>
-        <p:nvSpPr>
-          <p:cNvPr id="9" name="Rounded Rectangle 8"/>
+              </a:defRPr>
+            </a:pPr>
+            <a:r>
+              <a:t>PDF / DOCX / PPTX / XLSX → structured text &amp; tables</a:t>
+            </a:r>
+          </a:p>
+        </p:txBody>
+      </p:sp>
+      <p:sp>
+        <p:nvSpPr>
+          <p:cNvPr id="6" name="Rounded Rectangle 5"/>
           <p:cNvSpPr/>
           <p:nvPr/>
         </p:nvSpPr>
         <p:spPr>
           <a:xfrm>
-            <a:off x="640080" y="4617717"/>
-            <a:ext cx="5349240" cy="914400"/>
+            <a:off x="640080" y="3648456"/>
+            <a:ext cx="5349240" cy="960120"/>
           </a:xfrm>
           <a:prstGeom prst="roundRect">
             <a:avLst/>
@@ -6327,43 +4905,44 @@
           </a:fontRef>
         </p:style>
         <p:txBody>
-          <a:bodyPr rtlCol="0" anchor="ctr" wrap="square" lIns="182880" tIns="91440"/>
-          <a:lstStyle/>
-          <a:p>
-            <a:pPr algn="ctr"/>
-            <a:r>
-              <a:rPr b="1" sz="1450">
+          <a:bodyPr rtlCol="0" anchor="ctr" wrap="square" lIns="164592" tIns="91440"/>
+          <a:lstStyle/>
+          <a:p>
+            <a:pPr algn="ctr">
+              <a:defRPr b="1" sz="1500">
                 <a:solidFill>
                   <a:srgbClr val="1E293B"/>
                 </a:solidFill>
-                <a:latin typeface="Segoe UI"/>
-              </a:rPr>
-              <a:t>Data Analyst</a:t>
-            </a:r>
-          </a:p>
-          <a:p>
-            <a:r>
-              <a:rPr sz="1100">
+              </a:defRPr>
+            </a:pPr>
+            <a:r>
+              <a:t>Vision / OCR</a:t>
+            </a:r>
+          </a:p>
+          <a:p>
+            <a:pPr>
+              <a:defRPr sz="1150">
                 <a:solidFill>
                   <a:srgbClr val="475569"/>
                 </a:solidFill>
-                <a:latin typeface="Segoe UI"/>
-              </a:rPr>
-              <a:t>pandas over enrollment/results, optional web-search context</a:t>
-            </a:r>
-          </a:p>
-        </p:txBody>
-      </p:sp>
-      <p:sp>
-        <p:nvSpPr>
-          <p:cNvPr id="10" name="Rounded Rectangle 9"/>
+              </a:defRPr>
+            </a:pPr>
+            <a:r>
+              <a:t>Scanned forms, screenshots → text (vision LLM)</a:t>
+            </a:r>
+          </a:p>
+        </p:txBody>
+      </p:sp>
+      <p:sp>
+        <p:nvSpPr>
+          <p:cNvPr id="7" name="Rounded Rectangle 6"/>
           <p:cNvSpPr/>
           <p:nvPr/>
         </p:nvSpPr>
         <p:spPr>
           <a:xfrm>
-            <a:off x="6263640" y="1490472"/>
-            <a:ext cx="5349240" cy="914400"/>
+            <a:off x="640080" y="4764024"/>
+            <a:ext cx="5349240" cy="960120"/>
           </a:xfrm>
           <a:prstGeom prst="roundRect">
             <a:avLst/>
@@ -6393,43 +4972,44 @@
           </a:fontRef>
         </p:style>
         <p:txBody>
-          <a:bodyPr rtlCol="0" anchor="ctr" wrap="square" lIns="182880" tIns="91440"/>
-          <a:lstStyle/>
-          <a:p>
-            <a:pPr algn="ctr"/>
-            <a:r>
-              <a:rPr b="1" sz="1450">
+          <a:bodyPr rtlCol="0" anchor="ctr" wrap="square" lIns="164592" tIns="91440"/>
+          <a:lstStyle/>
+          <a:p>
+            <a:pPr algn="ctr">
+              <a:defRPr b="1" sz="1500">
                 <a:solidFill>
                   <a:srgbClr val="1E293B"/>
                 </a:solidFill>
-                <a:latin typeface="Segoe UI"/>
-              </a:rPr>
-              <a:t>Social Intelligence</a:t>
-            </a:r>
-          </a:p>
-          <a:p>
-            <a:r>
-              <a:rPr sz="1100">
+              </a:defRPr>
+            </a:pPr>
+            <a:r>
+              <a:t>Data Analyst</a:t>
+            </a:r>
+          </a:p>
+          <a:p>
+            <a:pPr>
+              <a:defRPr sz="1150">
                 <a:solidFill>
                   <a:srgbClr val="475569"/>
                 </a:solidFill>
-                <a:latin typeface="Segoe UI"/>
-              </a:rPr>
-              <a:t>Facebook comments → sentiment (live API or CSV import)</a:t>
-            </a:r>
-          </a:p>
-        </p:txBody>
-      </p:sp>
-      <p:sp>
-        <p:nvSpPr>
-          <p:cNvPr id="11" name="Rounded Rectangle 10"/>
+              </a:defRPr>
+            </a:pPr>
+            <a:r>
+              <a:t>pandas over enrollment/results, optional web-search context</a:t>
+            </a:r>
+          </a:p>
+        </p:txBody>
+      </p:sp>
+      <p:sp>
+        <p:nvSpPr>
+          <p:cNvPr id="8" name="Rounded Rectangle 7"/>
           <p:cNvSpPr/>
           <p:nvPr/>
         </p:nvSpPr>
         <p:spPr>
           <a:xfrm>
-            <a:off x="6263640" y="2532887"/>
-            <a:ext cx="5349240" cy="914400"/>
+            <a:off x="6263640" y="1417320"/>
+            <a:ext cx="5349240" cy="960120"/>
           </a:xfrm>
           <a:prstGeom prst="roundRect">
             <a:avLst/>
@@ -6459,43 +5039,44 @@
           </a:fontRef>
         </p:style>
         <p:txBody>
-          <a:bodyPr rtlCol="0" anchor="ctr" wrap="square" lIns="182880" tIns="91440"/>
-          <a:lstStyle/>
-          <a:p>
-            <a:pPr algn="ctr"/>
-            <a:r>
-              <a:rPr b="1" sz="1450">
+          <a:bodyPr rtlCol="0" anchor="ctr" wrap="square" lIns="164592" tIns="91440"/>
+          <a:lstStyle/>
+          <a:p>
+            <a:pPr algn="ctr">
+              <a:defRPr b="1" sz="1500">
                 <a:solidFill>
                   <a:srgbClr val="1E293B"/>
                 </a:solidFill>
-                <a:latin typeface="Segoe UI"/>
-              </a:rPr>
-              <a:t>Knowledge / RAG</a:t>
-            </a:r>
-          </a:p>
-          <a:p>
-            <a:r>
-              <a:rPr sz="1100">
+              </a:defRPr>
+            </a:pPr>
+            <a:r>
+              <a:t>Social Intelligence</a:t>
+            </a:r>
+          </a:p>
+          <a:p>
+            <a:pPr>
+              <a:defRPr sz="1150">
                 <a:solidFill>
                   <a:srgbClr val="475569"/>
                 </a:solidFill>
-                <a:latin typeface="Segoe UI"/>
-              </a:rPr>
-              <a:t>Chroma-backed semantic memory shared across the run</a:t>
-            </a:r>
-          </a:p>
-        </p:txBody>
-      </p:sp>
-      <p:sp>
-        <p:nvSpPr>
-          <p:cNvPr id="12" name="Rounded Rectangle 11"/>
+              </a:defRPr>
+            </a:pPr>
+            <a:r>
+              <a:t>Facebook comments → sentiment (live API or CSV import)</a:t>
+            </a:r>
+          </a:p>
+        </p:txBody>
+      </p:sp>
+      <p:sp>
+        <p:nvSpPr>
+          <p:cNvPr id="9" name="Rounded Rectangle 8"/>
           <p:cNvSpPr/>
           <p:nvPr/>
         </p:nvSpPr>
         <p:spPr>
           <a:xfrm>
-            <a:off x="6263640" y="3575302"/>
-            <a:ext cx="5349240" cy="914400"/>
+            <a:off x="6263640" y="2532888"/>
+            <a:ext cx="5349240" cy="960120"/>
           </a:xfrm>
           <a:prstGeom prst="roundRect">
             <a:avLst/>
@@ -6525,43 +5106,44 @@
           </a:fontRef>
         </p:style>
         <p:txBody>
-          <a:bodyPr rtlCol="0" anchor="ctr" wrap="square" lIns="182880" tIns="91440"/>
-          <a:lstStyle/>
-          <a:p>
-            <a:pPr algn="ctr"/>
-            <a:r>
-              <a:rPr b="1" sz="1450">
+          <a:bodyPr rtlCol="0" anchor="ctr" wrap="square" lIns="164592" tIns="91440"/>
+          <a:lstStyle/>
+          <a:p>
+            <a:pPr algn="ctr">
+              <a:defRPr b="1" sz="1500">
                 <a:solidFill>
                   <a:srgbClr val="1E293B"/>
                 </a:solidFill>
-                <a:latin typeface="Segoe UI"/>
-              </a:rPr>
-              <a:t>Report Generator</a:t>
-            </a:r>
-          </a:p>
-          <a:p>
-            <a:r>
-              <a:rPr sz="1100">
+              </a:defRPr>
+            </a:pPr>
+            <a:r>
+              <a:t>Knowledge / RAG</a:t>
+            </a:r>
+          </a:p>
+          <a:p>
+            <a:pPr>
+              <a:defRPr sz="1150">
                 <a:solidFill>
                   <a:srgbClr val="475569"/>
                 </a:solidFill>
-                <a:latin typeface="Segoe UI"/>
-              </a:rPr>
-              <a:t>Compiles a cited DOCX + PPTX report</a:t>
-            </a:r>
-          </a:p>
-        </p:txBody>
-      </p:sp>
-      <p:sp>
-        <p:nvSpPr>
-          <p:cNvPr id="13" name="Rounded Rectangle 12"/>
+              </a:defRPr>
+            </a:pPr>
+            <a:r>
+              <a:t>Chroma-backed semantic memory shared across the run</a:t>
+            </a:r>
+          </a:p>
+        </p:txBody>
+      </p:sp>
+      <p:sp>
+        <p:nvSpPr>
+          <p:cNvPr id="10" name="Rounded Rectangle 9"/>
           <p:cNvSpPr/>
           <p:nvPr/>
         </p:nvSpPr>
         <p:spPr>
           <a:xfrm>
-            <a:off x="6263640" y="4617717"/>
-            <a:ext cx="5349240" cy="914400"/>
+            <a:off x="6263640" y="3648456"/>
+            <a:ext cx="5349240" cy="960120"/>
           </a:xfrm>
           <a:prstGeom prst="roundRect">
             <a:avLst/>
@@ -6591,90 +5173,55 @@
           </a:fontRef>
         </p:style>
         <p:txBody>
-          <a:bodyPr rtlCol="0" anchor="ctr" wrap="square" lIns="182880" tIns="91440"/>
-          <a:lstStyle/>
-          <a:p>
-            <a:pPr algn="ctr"/>
-            <a:r>
-              <a:rPr b="1" sz="1450">
+          <a:bodyPr rtlCol="0" anchor="ctr" wrap="square" lIns="164592" tIns="91440"/>
+          <a:lstStyle/>
+          <a:p>
+            <a:pPr algn="ctr">
+              <a:defRPr b="1" sz="1500">
                 <a:solidFill>
                   <a:srgbClr val="1E293B"/>
                 </a:solidFill>
-                <a:latin typeface="Segoe UI"/>
-              </a:rPr>
-              <a:t>QA / Critic</a:t>
-            </a:r>
-          </a:p>
-          <a:p>
-            <a:r>
-              <a:rPr sz="1100">
+              </a:defRPr>
+            </a:pPr>
+            <a:r>
+              <a:t>Report Generator</a:t>
+            </a:r>
+          </a:p>
+          <a:p>
+            <a:pPr>
+              <a:defRPr sz="1150">
                 <a:solidFill>
                   <a:srgbClr val="475569"/>
                 </a:solidFill>
-                <a:latin typeface="Segoe UI"/>
-              </a:rPr>
-              <a:t>Fact-checks the draft against source data before a human sees it</a:t>
-            </a:r>
-          </a:p>
-        </p:txBody>
-      </p:sp>
-      <p:sp>
-        <p:nvSpPr>
-          <p:cNvPr id="14" name="TextBox 13"/>
-          <p:cNvSpPr txBox="1"/>
-          <p:nvPr/>
-        </p:nvSpPr>
-        <p:spPr>
-          <a:xfrm>
-            <a:off x="502920" y="6492240"/>
-            <a:ext cx="5486400" cy="274320"/>
-          </a:xfrm>
-          <a:prstGeom prst="rect">
-            <a:avLst/>
-          </a:prstGeom>
-          <a:noFill/>
-        </p:spPr>
-        <p:txBody>
-          <a:bodyPr wrap="none">
-            <a:spAutoFit/>
-          </a:bodyPr>
-          <a:lstStyle/>
-          <a:p>
-            <a:pPr>
-              <a:defRPr sz="950">
-                <a:solidFill>
-                  <a:srgbClr val="64748B"/>
-                </a:solidFill>
-                <a:latin typeface="Segoe UI"/>
-              </a:defRPr>
-            </a:pPr>
-            <a:r>
-              <a:t>Education AI Analyst</a:t>
-            </a:r>
-          </a:p>
-        </p:txBody>
-      </p:sp>
-      <p:sp>
-        <p:nvSpPr>
-          <p:cNvPr id="15" name="Rounded Rectangle 14"/>
+              </a:defRPr>
+            </a:pPr>
+            <a:r>
+              <a:t>Compiles a cited DOCX + PPTX report</a:t>
+            </a:r>
+          </a:p>
+        </p:txBody>
+      </p:sp>
+      <p:sp>
+        <p:nvSpPr>
+          <p:cNvPr id="11" name="Rounded Rectangle 10"/>
           <p:cNvSpPr/>
           <p:nvPr/>
         </p:nvSpPr>
         <p:spPr>
           <a:xfrm>
-            <a:off x="11475720" y="320040"/>
-            <a:ext cx="457200" cy="292608"/>
+            <a:off x="6263640" y="4764024"/>
+            <a:ext cx="5349240" cy="960120"/>
           </a:xfrm>
           <a:prstGeom prst="roundRect">
-            <a:avLst>
-              <a:gd name="adj" fmla="val 50000"/>
-            </a:avLst>
+            <a:avLst/>
           </a:prstGeom>
           <a:solidFill>
-            <a:srgbClr val="4F46E5"/>
+            <a:srgbClr val="EEF2FF"/>
           </a:solidFill>
-          <a:ln>
-            <a:noFill/>
+          <a:ln w="12700">
+            <a:solidFill>
+              <a:srgbClr val="4F46E5"/>
+            </a:solidFill>
           </a:ln>
           <a:effectLst/>
         </p:spPr>
@@ -6693,18 +5240,100 @@
           </a:fontRef>
         </p:style>
         <p:txBody>
-          <a:bodyPr rtlCol="0" anchor="ctr" lIns="0" rIns="0" tIns="0" bIns="0"/>
-          <a:lstStyle/>
-          <a:p>
-            <a:pPr algn="ctr"/>
-            <a:r>
-              <a:rPr sz="1200" b="1">
-                <a:solidFill>
-                  <a:srgbClr val="FFFFFF"/>
-                </a:solidFill>
-                <a:latin typeface="Segoe UI"/>
-              </a:rPr>
-              <a:t>05</a:t>
+          <a:bodyPr rtlCol="0" anchor="ctr" wrap="square" lIns="164592" tIns="91440"/>
+          <a:lstStyle/>
+          <a:p>
+            <a:pPr algn="ctr">
+              <a:defRPr b="1" sz="1500">
+                <a:solidFill>
+                  <a:srgbClr val="1E293B"/>
+                </a:solidFill>
+              </a:defRPr>
+            </a:pPr>
+            <a:r>
+              <a:t>QA / Critic</a:t>
+            </a:r>
+          </a:p>
+          <a:p>
+            <a:pPr>
+              <a:defRPr sz="1150">
+                <a:solidFill>
+                  <a:srgbClr val="475569"/>
+                </a:solidFill>
+              </a:defRPr>
+            </a:pPr>
+            <a:r>
+              <a:t>Fact-checks the draft against source data before a human sees it</a:t>
+            </a:r>
+          </a:p>
+        </p:txBody>
+      </p:sp>
+      <p:sp>
+        <p:nvSpPr>
+          <p:cNvPr id="12" name="TextBox 11"/>
+          <p:cNvSpPr txBox="1"/>
+          <p:nvPr/>
+        </p:nvSpPr>
+        <p:spPr>
+          <a:xfrm>
+            <a:off x="457200" y="6473952"/>
+            <a:ext cx="5486400" cy="320040"/>
+          </a:xfrm>
+          <a:prstGeom prst="rect">
+            <a:avLst/>
+          </a:prstGeom>
+          <a:noFill/>
+        </p:spPr>
+        <p:txBody>
+          <a:bodyPr wrap="none">
+            <a:spAutoFit/>
+          </a:bodyPr>
+          <a:lstStyle/>
+          <a:p>
+            <a:pPr>
+              <a:defRPr sz="1000">
+                <a:solidFill>
+                  <a:srgbClr val="64748B"/>
+                </a:solidFill>
+              </a:defRPr>
+            </a:pPr>
+            <a:r>
+              <a:t>Education AI Analyst</a:t>
+            </a:r>
+          </a:p>
+        </p:txBody>
+      </p:sp>
+      <p:sp>
+        <p:nvSpPr>
+          <p:cNvPr id="13" name="TextBox 12"/>
+          <p:cNvSpPr txBox="1"/>
+          <p:nvPr/>
+        </p:nvSpPr>
+        <p:spPr>
+          <a:xfrm>
+            <a:off x="11247120" y="6473952"/>
+            <a:ext cx="640080" cy="320040"/>
+          </a:xfrm>
+          <a:prstGeom prst="rect">
+            <a:avLst/>
+          </a:prstGeom>
+          <a:noFill/>
+        </p:spPr>
+        <p:txBody>
+          <a:bodyPr wrap="none">
+            <a:spAutoFit/>
+          </a:bodyPr>
+          <a:lstStyle/>
+          <a:p>
+            <a:pPr algn="r">
+              <a:defRPr sz="1000">
+                <a:solidFill>
+                  <a:srgbClr val="64748B"/>
+                </a:solidFill>
+              </a:defRPr>
+            </a:pPr>
+            <a:r>
+              <a:t>5</a:t>
             </a:r>
           </a:p>
         </p:txBody>
@@ -6755,7 +5384,6 @@
           <a:ln>
             <a:noFill/>
           </a:ln>
-          <a:effectLst/>
         </p:spPr>
         <p:style>
           <a:lnRef idx="1">
@@ -6787,8 +5415,8 @@
         </p:nvSpPr>
         <p:spPr>
           <a:xfrm>
-            <a:off x="502920" y="292608"/>
-            <a:ext cx="9144000" cy="274320"/>
+            <a:off x="502920" y="365760"/>
+            <a:ext cx="10972800" cy="822960"/>
           </a:xfrm>
           <a:prstGeom prst="rect">
             <a:avLst/>
@@ -6802,51 +5430,13 @@
           <a:lstStyle/>
           <a:p>
             <a:pPr>
-              <a:spcAft>
-                <a:spcPts val="0"/>
-              </a:spcAft>
-            </a:pPr>
-            <a:r>
-              <a:rPr sz="1100" b="1">
-                <a:solidFill>
-                  <a:srgbClr val="4F46E5"/>
-                </a:solidFill>
-                <a:latin typeface="Segoe UI"/>
-              </a:rPr>
-              <a:t>05 · DESIGN DECISION</a:t>
-            </a:r>
-          </a:p>
-        </p:txBody>
-      </p:sp>
-      <p:sp>
-        <p:nvSpPr>
-          <p:cNvPr id="4" name="TextBox 3"/>
-          <p:cNvSpPr txBox="1"/>
-          <p:nvPr/>
-        </p:nvSpPr>
-        <p:spPr>
-          <a:xfrm>
-            <a:off x="502920" y="530352"/>
-            <a:ext cx="10424160" cy="822960"/>
-          </a:xfrm>
-          <a:prstGeom prst="rect">
-            <a:avLst/>
-          </a:prstGeom>
-          <a:noFill/>
-        </p:spPr>
-        <p:txBody>
-          <a:bodyPr wrap="none">
-            <a:spAutoFit/>
-          </a:bodyPr>
-          <a:lstStyle/>
-          <a:p>
-            <a:r>
-              <a:rPr sz="3000" b="1">
+              <a:defRPr sz="3200" b="1">
                 <a:solidFill>
                   <a:srgbClr val="1E293B"/>
                 </a:solidFill>
-                <a:latin typeface="Segoe UI"/>
-              </a:rPr>
+              </a:defRPr>
+            </a:pPr>
+            <a:r>
               <a:t>Two Collaboration Patterns, Chosen Deliberately</a:t>
             </a:r>
           </a:p>
@@ -6854,25 +5444,26 @@
       </p:sp>
       <p:sp>
         <p:nvSpPr>
-          <p:cNvPr id="5" name="Rectangle 4"/>
+          <p:cNvPr id="4" name="Rounded Rectangle 3"/>
           <p:cNvSpPr/>
           <p:nvPr/>
         </p:nvSpPr>
         <p:spPr>
           <a:xfrm>
-            <a:off x="530352" y="1188720"/>
-            <a:ext cx="548640" cy="38100"/>
-          </a:xfrm>
-          <a:prstGeom prst="rect">
+            <a:off x="640080" y="1463040"/>
+            <a:ext cx="5212080" cy="4206240"/>
+          </a:xfrm>
+          <a:prstGeom prst="roundRect">
             <a:avLst/>
           </a:prstGeom>
           <a:solidFill>
-            <a:srgbClr val="4F46E5"/>
+            <a:srgbClr val="F8FAFC"/>
           </a:solidFill>
           <a:ln>
-            <a:noFill/>
+            <a:solidFill>
+              <a:srgbClr val="94A3B8"/>
+            </a:solidFill>
           </a:ln>
-          <a:effectLst/>
         </p:spPr>
         <p:style>
           <a:lnRef idx="1">
@@ -6889,23 +5480,77 @@
           </a:fontRef>
         </p:style>
         <p:txBody>
-          <a:bodyPr rtlCol="0" anchor="ctr"/>
-          <a:lstStyle/>
-          <a:p>
-            <a:pPr algn="ctr"/>
-          </a:p>
-        </p:txBody>
-      </p:sp>
-      <p:sp>
-        <p:nvSpPr>
-          <p:cNvPr id="6" name="Rounded Rectangle 5"/>
+          <a:bodyPr rtlCol="0" anchor="ctr" wrap="square" lIns="274320" tIns="228600"/>
+          <a:lstStyle/>
+          <a:p>
+            <a:pPr algn="ctr">
+              <a:defRPr b="1" sz="1900">
+                <a:solidFill>
+                  <a:srgbClr val="4F46E5"/>
+                </a:solidFill>
+              </a:defRPr>
+            </a:pPr>
+            <a:r>
+              <a:t>Intake Graph — Supervisor Hub</a:t>
+            </a:r>
+          </a:p>
+          <a:p>
+            <a:pPr>
+              <a:spcBef>
+                <a:spcPts val="1200"/>
+              </a:spcBef>
+              <a:defRPr sz="1500">
+                <a:solidFill>
+                  <a:srgbClr val="475569"/>
+                </a:solidFill>
+              </a:defRPr>
+            </a:pPr>
+            <a:r>
+              <a:t>A type-based dispatch problem.</a:t>
+            </a:r>
+          </a:p>
+          <a:p>
+            <a:pPr>
+              <a:spcBef>
+                <a:spcPts val="1000"/>
+              </a:spcBef>
+              <a:defRPr sz="1450">
+                <a:solidFill>
+                  <a:srgbClr val="475569"/>
+                </a:solidFill>
+              </a:defRPr>
+            </a:pPr>
+            <a:r>
+              <a:t>Every worker (Document Ingestion, Vision/OCR, Social Intel) returns control to the Supervisor when done — routing logic stays centralized.</a:t>
+            </a:r>
+          </a:p>
+          <a:p>
+            <a:pPr>
+              <a:spcBef>
+                <a:spcPts val="1400"/>
+              </a:spcBef>
+              <a:defRPr sz="1450" i="1">
+                <a:solidFill>
+                  <a:srgbClr val="64748B"/>
+                </a:solidFill>
+              </a:defRPr>
+            </a:pPr>
+            <a:r>
+              <a:t>Adding worker #9 doesn't require touching worker #4's code.</a:t>
+            </a:r>
+          </a:p>
+        </p:txBody>
+      </p:sp>
+      <p:sp>
+        <p:nvSpPr>
+          <p:cNvPr id="5" name="Rounded Rectangle 4"/>
           <p:cNvSpPr/>
           <p:nvPr/>
         </p:nvSpPr>
         <p:spPr>
           <a:xfrm>
-            <a:off x="640080" y="1490472"/>
-            <a:ext cx="5212080" cy="3977639"/>
+            <a:off x="6309360" y="1463040"/>
+            <a:ext cx="5212080" cy="4206240"/>
           </a:xfrm>
           <a:prstGeom prst="roundRect">
             <a:avLst/>
@@ -6915,10 +5560,9 @@
           </a:solidFill>
           <a:ln>
             <a:solidFill>
-              <a:srgbClr val="CBD5E1"/>
+              <a:srgbClr val="94A3B8"/>
             </a:solidFill>
           </a:ln>
-          <a:effectLst/>
         </p:spPr>
         <p:style>
           <a:lnRef idx="1">
@@ -6938,15 +5582,15 @@
           <a:bodyPr rtlCol="0" anchor="ctr" wrap="square" lIns="274320" tIns="228600"/>
           <a:lstStyle/>
           <a:p>
-            <a:pPr algn="ctr"/>
-            <a:r>
-              <a:rPr b="1" sz="1800">
-                <a:solidFill>
-                  <a:srgbClr val="4F46E5"/>
-                </a:solidFill>
-                <a:latin typeface="Segoe UI"/>
-              </a:rPr>
-              <a:t>Intake Graph — Supervisor Hub</a:t>
+            <a:pPr algn="ctr">
+              <a:defRPr b="1" sz="1900">
+                <a:solidFill>
+                  <a:srgbClr val="D97706"/>
+                </a:solidFill>
+              </a:defRPr>
+            </a:pPr>
+            <a:r>
+              <a:t>Report Graph — Direct Chain</a:t>
             </a:r>
           </a:p>
           <a:p>
@@ -6954,15 +5598,14 @@
               <a:spcBef>
                 <a:spcPts val="1200"/>
               </a:spcBef>
-            </a:pPr>
-            <a:r>
-              <a:rPr sz="1450">
+              <a:defRPr sz="1500">
                 <a:solidFill>
                   <a:srgbClr val="475569"/>
                 </a:solidFill>
-                <a:latin typeface="Segoe UI"/>
-              </a:rPr>
-              <a:t>A type-based dispatch problem.</a:t>
+              </a:defRPr>
+            </a:pPr>
+            <a:r>
+              <a:t>An inherently sequential problem.</a:t>
             </a:r>
           </a:p>
           <a:p>
@@ -6970,15 +5613,14 @@
               <a:spcBef>
                 <a:spcPts val="1000"/>
               </a:spcBef>
-            </a:pPr>
-            <a:r>
-              <a:rPr sz="1400">
+              <a:defRPr sz="1450">
                 <a:solidFill>
                   <a:srgbClr val="475569"/>
                 </a:solidFill>
-                <a:latin typeface="Segoe UI"/>
-              </a:rPr>
-              <a:t>Every worker (Document Ingestion, Vision/OCR, Social Intel) returns control to the Supervisor when done — routing logic stays centralized.</a:t>
+              </a:defRPr>
+            </a:pPr>
+            <a:r>
+              <a:t>Data Analyst → Knowledge/RAG → Report Generator → QA/Critic → HITL — zero Supervisor node, each agent hands off straight to the next.</a:t>
             </a:r>
           </a:p>
           <a:p>
@@ -6986,117 +5628,13 @@
               <a:spcBef>
                 <a:spcPts val="1400"/>
               </a:spcBef>
-            </a:pPr>
-            <a:r>
-              <a:rPr sz="1400" i="1">
+              <a:defRPr sz="1450" i="1">
                 <a:solidFill>
                   <a:srgbClr val="64748B"/>
                 </a:solidFill>
-                <a:latin typeface="Segoe UI"/>
-              </a:rPr>
-              <a:t>Adding worker #9 doesn't require touching worker #4's code.</a:t>
-            </a:r>
-          </a:p>
-        </p:txBody>
-      </p:sp>
-      <p:sp>
-        <p:nvSpPr>
-          <p:cNvPr id="7" name="Rounded Rectangle 6"/>
-          <p:cNvSpPr/>
-          <p:nvPr/>
-        </p:nvSpPr>
-        <p:spPr>
-          <a:xfrm>
-            <a:off x="6309360" y="1490472"/>
-            <a:ext cx="5212080" cy="3977639"/>
-          </a:xfrm>
-          <a:prstGeom prst="roundRect">
-            <a:avLst/>
-          </a:prstGeom>
-          <a:solidFill>
-            <a:srgbClr val="F8FAFC"/>
-          </a:solidFill>
-          <a:ln>
-            <a:solidFill>
-              <a:srgbClr val="CBD5E1"/>
-            </a:solidFill>
-          </a:ln>
-          <a:effectLst/>
-        </p:spPr>
-        <p:style>
-          <a:lnRef idx="1">
-            <a:schemeClr val="accent1"/>
-          </a:lnRef>
-          <a:fillRef idx="3">
-            <a:schemeClr val="accent1"/>
-          </a:fillRef>
-          <a:effectRef idx="2">
-            <a:schemeClr val="accent1"/>
-          </a:effectRef>
-          <a:fontRef idx="minor">
-            <a:schemeClr val="lt1"/>
-          </a:fontRef>
-        </p:style>
-        <p:txBody>
-          <a:bodyPr rtlCol="0" anchor="ctr" wrap="square" lIns="274320" tIns="228600"/>
-          <a:lstStyle/>
-          <a:p>
-            <a:pPr algn="ctr"/>
-            <a:r>
-              <a:rPr b="1" sz="1800">
-                <a:solidFill>
-                  <a:srgbClr val="D97706"/>
-                </a:solidFill>
-                <a:latin typeface="Segoe UI"/>
-              </a:rPr>
-              <a:t>Report Graph — Direct Chain</a:t>
-            </a:r>
-          </a:p>
-          <a:p>
-            <a:pPr>
-              <a:spcBef>
-                <a:spcPts val="1200"/>
-              </a:spcBef>
-            </a:pPr>
-            <a:r>
-              <a:rPr sz="1450">
-                <a:solidFill>
-                  <a:srgbClr val="475569"/>
-                </a:solidFill>
-                <a:latin typeface="Segoe UI"/>
-              </a:rPr>
-              <a:t>An inherently sequential problem.</a:t>
-            </a:r>
-          </a:p>
-          <a:p>
-            <a:pPr>
-              <a:spcBef>
-                <a:spcPts val="1000"/>
-              </a:spcBef>
-            </a:pPr>
-            <a:r>
-              <a:rPr sz="1400">
-                <a:solidFill>
-                  <a:srgbClr val="475569"/>
-                </a:solidFill>
-                <a:latin typeface="Segoe UI"/>
-              </a:rPr>
-              <a:t>Data Analyst → Knowledge/RAG → Report Generator → QA/Critic → HITL — zero Supervisor node, each agent hands off straight to the next.</a:t>
-            </a:r>
-          </a:p>
-          <a:p>
-            <a:pPr>
-              <a:spcBef>
-                <a:spcPts val="1400"/>
-              </a:spcBef>
-            </a:pPr>
-            <a:r>
-              <a:rPr sz="1400" i="1">
-                <a:solidFill>
-                  <a:srgbClr val="64748B"/>
-                </a:solidFill>
-                <a:latin typeface="Segoe UI"/>
-              </a:rPr>
+              </a:defRPr>
+            </a:pPr>
+            <a:r>
               <a:t>Confirmed straight from the compiled graph objects (.get_graph().draw_mermaid()), not just claimed.</a:t>
             </a:r>
           </a:p>
@@ -7104,69 +5642,14 @@
       </p:sp>
       <p:sp>
         <p:nvSpPr>
-          <p:cNvPr id="8" name="Rounded Rectangle 7"/>
-          <p:cNvSpPr/>
-          <p:nvPr/>
-        </p:nvSpPr>
-        <p:spPr>
-          <a:xfrm>
-            <a:off x="640080" y="5650991"/>
-            <a:ext cx="10881360" cy="594360"/>
-          </a:xfrm>
-          <a:prstGeom prst="roundRect">
-            <a:avLst/>
-          </a:prstGeom>
-          <a:solidFill>
-            <a:srgbClr val="EEF2FF"/>
-          </a:solidFill>
-          <a:ln w="12700">
-            <a:solidFill>
-              <a:srgbClr val="4F46E5"/>
-            </a:solidFill>
-          </a:ln>
-          <a:effectLst/>
-        </p:spPr>
-        <p:style>
-          <a:lnRef idx="1">
-            <a:schemeClr val="accent1"/>
-          </a:lnRef>
-          <a:fillRef idx="3">
-            <a:schemeClr val="accent1"/>
-          </a:fillRef>
-          <a:effectRef idx="2">
-            <a:schemeClr val="accent1"/>
-          </a:effectRef>
-          <a:fontRef idx="minor">
-            <a:schemeClr val="lt1"/>
-          </a:fontRef>
-        </p:style>
-        <p:txBody>
-          <a:bodyPr rtlCol="0" anchor="ctr" wrap="square" lIns="228600"/>
-          <a:lstStyle/>
-          <a:p>
-            <a:pPr algn="ctr"/>
-            <a:r>
-              <a:rPr sz="1350" b="1">
-                <a:solidFill>
-                  <a:srgbClr val="4338CA"/>
-                </a:solidFill>
-                <a:latin typeface="Segoe UI"/>
-              </a:rPr>
-              <a:t>The Execution Graph panel renders both live from the running code — the diagram cannot lie or go stale.</a:t>
-            </a:r>
-          </a:p>
-        </p:txBody>
-      </p:sp>
-      <p:sp>
-        <p:nvSpPr>
-          <p:cNvPr id="9" name="TextBox 8"/>
+          <p:cNvPr id="6" name="TextBox 5"/>
           <p:cNvSpPr txBox="1"/>
           <p:nvPr/>
         </p:nvSpPr>
         <p:spPr>
           <a:xfrm>
-            <a:off x="502920" y="6492240"/>
-            <a:ext cx="5486400" cy="274320"/>
+            <a:off x="640080" y="5897880"/>
+            <a:ext cx="10881360" cy="457200"/>
           </a:xfrm>
           <a:prstGeom prst="rect">
             <a:avLst/>
@@ -7180,11 +5663,45 @@
           <a:lstStyle/>
           <a:p>
             <a:pPr>
-              <a:defRPr sz="950">
+              <a:defRPr sz="1300" b="1">
+                <a:solidFill>
+                  <a:srgbClr val="4F46E5"/>
+                </a:solidFill>
+              </a:defRPr>
+            </a:pPr>
+            <a:r>
+              <a:t>The Execution Graph panel renders both live from the running code — the diagram cannot lie or go stale.</a:t>
+            </a:r>
+          </a:p>
+        </p:txBody>
+      </p:sp>
+      <p:sp>
+        <p:nvSpPr>
+          <p:cNvPr id="7" name="TextBox 6"/>
+          <p:cNvSpPr txBox="1"/>
+          <p:nvPr/>
+        </p:nvSpPr>
+        <p:spPr>
+          <a:xfrm>
+            <a:off x="457200" y="6473952"/>
+            <a:ext cx="5486400" cy="320040"/>
+          </a:xfrm>
+          <a:prstGeom prst="rect">
+            <a:avLst/>
+          </a:prstGeom>
+          <a:noFill/>
+        </p:spPr>
+        <p:txBody>
+          <a:bodyPr wrap="none">
+            <a:spAutoFit/>
+          </a:bodyPr>
+          <a:lstStyle/>
+          <a:p>
+            <a:pPr>
+              <a:defRPr sz="1000">
                 <a:solidFill>
                   <a:srgbClr val="64748B"/>
                 </a:solidFill>
-                <a:latin typeface="Segoe UI"/>
               </a:defRPr>
             </a:pPr>
             <a:r>
@@ -7195,55 +5712,35 @@
       </p:sp>
       <p:sp>
         <p:nvSpPr>
-          <p:cNvPr id="10" name="Rounded Rectangle 9"/>
-          <p:cNvSpPr/>
+          <p:cNvPr id="8" name="TextBox 7"/>
+          <p:cNvSpPr txBox="1"/>
           <p:nvPr/>
         </p:nvSpPr>
         <p:spPr>
           <a:xfrm>
-            <a:off x="11475720" y="320040"/>
-            <a:ext cx="457200" cy="292608"/>
-          </a:xfrm>
-          <a:prstGeom prst="roundRect">
-            <a:avLst>
-              <a:gd name="adj" fmla="val 50000"/>
-            </a:avLst>
-          </a:prstGeom>
-          <a:solidFill>
-            <a:srgbClr val="4F46E5"/>
-          </a:solidFill>
-          <a:ln>
-            <a:noFill/>
-          </a:ln>
-          <a:effectLst/>
-        </p:spPr>
-        <p:style>
-          <a:lnRef idx="1">
-            <a:schemeClr val="accent1"/>
-          </a:lnRef>
-          <a:fillRef idx="3">
-            <a:schemeClr val="accent1"/>
-          </a:fillRef>
-          <a:effectRef idx="2">
-            <a:schemeClr val="accent1"/>
-          </a:effectRef>
-          <a:fontRef idx="minor">
-            <a:schemeClr val="lt1"/>
-          </a:fontRef>
-        </p:style>
-        <p:txBody>
-          <a:bodyPr rtlCol="0" anchor="ctr" lIns="0" rIns="0" tIns="0" bIns="0"/>
-          <a:lstStyle/>
-          <a:p>
-            <a:pPr algn="ctr"/>
-            <a:r>
-              <a:rPr sz="1200" b="1">
-                <a:solidFill>
-                  <a:srgbClr val="FFFFFF"/>
-                </a:solidFill>
-                <a:latin typeface="Segoe UI"/>
-              </a:rPr>
-              <a:t>06</a:t>
+            <a:off x="11247120" y="6473952"/>
+            <a:ext cx="640080" cy="320040"/>
+          </a:xfrm>
+          <a:prstGeom prst="rect">
+            <a:avLst/>
+          </a:prstGeom>
+          <a:noFill/>
+        </p:spPr>
+        <p:txBody>
+          <a:bodyPr wrap="none">
+            <a:spAutoFit/>
+          </a:bodyPr>
+          <a:lstStyle/>
+          <a:p>
+            <a:pPr algn="r">
+              <a:defRPr sz="1000">
+                <a:solidFill>
+                  <a:srgbClr val="64748B"/>
+                </a:solidFill>
+              </a:defRPr>
+            </a:pPr>
+            <a:r>
+              <a:t>6</a:t>
             </a:r>
           </a:p>
         </p:txBody>
@@ -7294,7 +5791,6 @@
           <a:ln>
             <a:noFill/>
           </a:ln>
-          <a:effectLst/>
         </p:spPr>
         <p:style>
           <a:lnRef idx="1">
@@ -7326,8 +5822,8 @@
         </p:nvSpPr>
         <p:spPr>
           <a:xfrm>
-            <a:off x="502920" y="292608"/>
-            <a:ext cx="9144000" cy="274320"/>
+            <a:off x="502920" y="365760"/>
+            <a:ext cx="10972800" cy="822960"/>
           </a:xfrm>
           <a:prstGeom prst="rect">
             <a:avLst/>
@@ -7341,18 +5837,14 @@
           <a:lstStyle/>
           <a:p>
             <a:pPr>
-              <a:spcAft>
-                <a:spcPts val="0"/>
-              </a:spcAft>
-            </a:pPr>
-            <a:r>
-              <a:rPr sz="1100" b="1">
-                <a:solidFill>
-                  <a:srgbClr val="4F46E5"/>
-                </a:solidFill>
-                <a:latin typeface="Segoe UI"/>
-              </a:rPr>
-              <a:t>06 · WHAT MAKES IT WORK</a:t>
+              <a:defRPr sz="3200" b="1">
+                <a:solidFill>
+                  <a:srgbClr val="1E293B"/>
+                </a:solidFill>
+              </a:defRPr>
+            </a:pPr>
+            <a:r>
+              <a:t>Key Features</a:t>
             </a:r>
           </a:p>
         </p:txBody>
@@ -7365,139 +5857,8 @@
         </p:nvSpPr>
         <p:spPr>
           <a:xfrm>
-            <a:off x="502920" y="530352"/>
-            <a:ext cx="10424160" cy="822960"/>
-          </a:xfrm>
-          <a:prstGeom prst="rect">
-            <a:avLst/>
-          </a:prstGeom>
-          <a:noFill/>
-        </p:spPr>
-        <p:txBody>
-          <a:bodyPr wrap="none">
-            <a:spAutoFit/>
-          </a:bodyPr>
-          <a:lstStyle/>
-          <a:p>
-            <a:r>
-              <a:rPr sz="3000" b="1">
-                <a:solidFill>
-                  <a:srgbClr val="1E293B"/>
-                </a:solidFill>
-                <a:latin typeface="Segoe UI"/>
-              </a:rPr>
-              <a:t>Key Features</a:t>
-            </a:r>
-          </a:p>
-        </p:txBody>
-      </p:sp>
-      <p:sp>
-        <p:nvSpPr>
-          <p:cNvPr id="5" name="Rectangle 4"/>
-          <p:cNvSpPr/>
-          <p:nvPr/>
-        </p:nvSpPr>
-        <p:spPr>
-          <a:xfrm>
-            <a:off x="530352" y="1188720"/>
-            <a:ext cx="548640" cy="38100"/>
-          </a:xfrm>
-          <a:prstGeom prst="rect">
-            <a:avLst/>
-          </a:prstGeom>
-          <a:solidFill>
-            <a:srgbClr val="4F46E5"/>
-          </a:solidFill>
-          <a:ln>
-            <a:noFill/>
-          </a:ln>
-          <a:effectLst/>
-        </p:spPr>
-        <p:style>
-          <a:lnRef idx="1">
-            <a:schemeClr val="accent1"/>
-          </a:lnRef>
-          <a:fillRef idx="3">
-            <a:schemeClr val="accent1"/>
-          </a:fillRef>
-          <a:effectRef idx="2">
-            <a:schemeClr val="accent1"/>
-          </a:effectRef>
-          <a:fontRef idx="minor">
-            <a:schemeClr val="lt1"/>
-          </a:fontRef>
-        </p:style>
-        <p:txBody>
-          <a:bodyPr rtlCol="0" anchor="ctr"/>
-          <a:lstStyle/>
-          <a:p>
-            <a:pPr algn="ctr"/>
-          </a:p>
-        </p:txBody>
-      </p:sp>
-      <p:sp>
-        <p:nvSpPr>
-          <p:cNvPr id="6" name="Oval 5"/>
-          <p:cNvSpPr/>
-          <p:nvPr/>
-        </p:nvSpPr>
-        <p:spPr>
-          <a:xfrm>
-            <a:off x="640080" y="1490472"/>
-            <a:ext cx="384048" cy="384048"/>
-          </a:xfrm>
-          <a:prstGeom prst="ellipse">
-            <a:avLst/>
-          </a:prstGeom>
-          <a:solidFill>
-            <a:srgbClr val="4F46E5"/>
-          </a:solidFill>
-          <a:ln>
-            <a:noFill/>
-          </a:ln>
-          <a:effectLst/>
-        </p:spPr>
-        <p:style>
-          <a:lnRef idx="1">
-            <a:schemeClr val="accent1"/>
-          </a:lnRef>
-          <a:fillRef idx="3">
-            <a:schemeClr val="accent1"/>
-          </a:fillRef>
-          <a:effectRef idx="2">
-            <a:schemeClr val="accent1"/>
-          </a:effectRef>
-          <a:fontRef idx="minor">
-            <a:schemeClr val="lt1"/>
-          </a:fontRef>
-        </p:style>
-        <p:txBody>
-          <a:bodyPr rtlCol="0" anchor="ctr" lIns="0" rIns="0" tIns="0" bIns="0"/>
-          <a:lstStyle/>
-          <a:p>
-            <a:pPr algn="ctr"/>
-            <a:r>
-              <a:rPr sz="1500" b="1">
-                <a:solidFill>
-                  <a:srgbClr val="FFFFFF"/>
-                </a:solidFill>
-                <a:latin typeface="Segoe UI"/>
-              </a:rPr>
-              <a:t>1</a:t>
-            </a:r>
-          </a:p>
-        </p:txBody>
-      </p:sp>
-      <p:sp>
-        <p:nvSpPr>
-          <p:cNvPr id="7" name="TextBox 6"/>
-          <p:cNvSpPr txBox="1"/>
-          <p:nvPr/>
-        </p:nvSpPr>
-        <p:spPr>
-          <a:xfrm>
-            <a:off x="1207008" y="1453896"/>
-            <a:ext cx="10149840" cy="777240"/>
+            <a:off x="640080" y="1417320"/>
+            <a:ext cx="10789920" cy="4754880"/>
           </a:xfrm>
           <a:prstGeom prst="rect">
             <a:avLst/>
@@ -7514,543 +5875,169 @@
               <a:lnSpc>
                 <a:spcPct val="115000"/>
               </a:lnSpc>
-            </a:pPr>
-            <a:r>
-              <a:rPr b="1" sz="1550">
+              <a:spcAft>
+                <a:spcPts val="1400"/>
+              </a:spcAft>
+            </a:pPr>
+            <a:r>
+              <a:rPr b="1" sz="1650">
                 <a:solidFill>
                   <a:srgbClr val="1E293B"/>
                 </a:solidFill>
-                <a:latin typeface="Segoe UI"/>
               </a:rPr>
               <a:t>Human-in-the-loop approval.  </a:t>
             </a:r>
             <a:r>
-              <a:rPr sz="1550">
+              <a:rPr sz="1650">
                 <a:solidFill>
                   <a:srgbClr val="475569"/>
                 </a:solidFill>
-                <a:latin typeface="Segoe UI"/>
               </a:rPr>
               <a:t>interrupt() pauses before release — approve, reject with feedback, or retry.</a:t>
             </a:r>
           </a:p>
-        </p:txBody>
-      </p:sp>
-      <p:sp>
-        <p:nvSpPr>
-          <p:cNvPr id="8" name="Oval 7"/>
-          <p:cNvSpPr/>
-          <p:nvPr/>
-        </p:nvSpPr>
-        <p:spPr>
-          <a:xfrm>
-            <a:off x="640080" y="2267712"/>
-            <a:ext cx="384048" cy="384048"/>
-          </a:xfrm>
-          <a:prstGeom prst="ellipse">
-            <a:avLst/>
-          </a:prstGeom>
-          <a:solidFill>
-            <a:srgbClr val="4F46E5"/>
-          </a:solidFill>
-          <a:ln>
-            <a:noFill/>
-          </a:ln>
-          <a:effectLst/>
-        </p:spPr>
-        <p:style>
-          <a:lnRef idx="1">
-            <a:schemeClr val="accent1"/>
-          </a:lnRef>
-          <a:fillRef idx="3">
-            <a:schemeClr val="accent1"/>
-          </a:fillRef>
-          <a:effectRef idx="2">
-            <a:schemeClr val="accent1"/>
-          </a:effectRef>
-          <a:fontRef idx="minor">
-            <a:schemeClr val="lt1"/>
-          </a:fontRef>
-        </p:style>
-        <p:txBody>
-          <a:bodyPr rtlCol="0" anchor="ctr" lIns="0" rIns="0" tIns="0" bIns="0"/>
-          <a:lstStyle/>
-          <a:p>
-            <a:pPr algn="ctr"/>
-            <a:r>
-              <a:rPr sz="1500" b="1">
-                <a:solidFill>
-                  <a:srgbClr val="FFFFFF"/>
-                </a:solidFill>
-                <a:latin typeface="Segoe UI"/>
-              </a:rPr>
-              <a:t>2</a:t>
-            </a:r>
-          </a:p>
-        </p:txBody>
-      </p:sp>
-      <p:sp>
-        <p:nvSpPr>
-          <p:cNvPr id="9" name="TextBox 8"/>
-          <p:cNvSpPr txBox="1"/>
-          <p:nvPr/>
-        </p:nvSpPr>
-        <p:spPr>
-          <a:xfrm>
-            <a:off x="1207008" y="2231136"/>
-            <a:ext cx="10149840" cy="777240"/>
-          </a:xfrm>
-          <a:prstGeom prst="rect">
-            <a:avLst/>
-          </a:prstGeom>
-          <a:noFill/>
-        </p:spPr>
-        <p:txBody>
-          <a:bodyPr wrap="square">
-            <a:spAutoFit/>
-          </a:bodyPr>
-          <a:lstStyle/>
           <a:p>
             <a:pPr>
               <a:lnSpc>
                 <a:spcPct val="115000"/>
               </a:lnSpc>
-            </a:pPr>
-            <a:r>
-              <a:rPr b="1" sz="1550">
+              <a:spcAft>
+                <a:spcPts val="1400"/>
+              </a:spcAft>
+            </a:pPr>
+            <a:r>
+              <a:rPr b="1" sz="1650">
                 <a:solidFill>
                   <a:srgbClr val="1E293B"/>
                 </a:solidFill>
-                <a:latin typeface="Segoe UI"/>
               </a:rPr>
               <a:t>Live token &amp; cost tracking.  </a:t>
             </a:r>
             <a:r>
-              <a:rPr sz="1550">
+              <a:rPr sz="1650">
                 <a:solidFill>
                   <a:srgbClr val="475569"/>
                 </a:solidFill>
-                <a:latin typeface="Segoe UI"/>
               </a:rPr>
               <a:t>Every LLM call's tokens and estimated cost recorded per agent, visible in the UI.</a:t>
             </a:r>
           </a:p>
-        </p:txBody>
-      </p:sp>
-      <p:sp>
-        <p:nvSpPr>
-          <p:cNvPr id="10" name="Oval 9"/>
-          <p:cNvSpPr/>
-          <p:nvPr/>
-        </p:nvSpPr>
-        <p:spPr>
-          <a:xfrm>
-            <a:off x="640080" y="3044952"/>
-            <a:ext cx="384048" cy="384048"/>
-          </a:xfrm>
-          <a:prstGeom prst="ellipse">
-            <a:avLst/>
-          </a:prstGeom>
-          <a:solidFill>
-            <a:srgbClr val="4F46E5"/>
-          </a:solidFill>
-          <a:ln>
-            <a:noFill/>
-          </a:ln>
-          <a:effectLst/>
-        </p:spPr>
-        <p:style>
-          <a:lnRef idx="1">
-            <a:schemeClr val="accent1"/>
-          </a:lnRef>
-          <a:fillRef idx="3">
-            <a:schemeClr val="accent1"/>
-          </a:fillRef>
-          <a:effectRef idx="2">
-            <a:schemeClr val="accent1"/>
-          </a:effectRef>
-          <a:fontRef idx="minor">
-            <a:schemeClr val="lt1"/>
-          </a:fontRef>
-        </p:style>
-        <p:txBody>
-          <a:bodyPr rtlCol="0" anchor="ctr" lIns="0" rIns="0" tIns="0" bIns="0"/>
-          <a:lstStyle/>
-          <a:p>
-            <a:pPr algn="ctr"/>
-            <a:r>
-              <a:rPr sz="1500" b="1">
-                <a:solidFill>
-                  <a:srgbClr val="FFFFFF"/>
-                </a:solidFill>
-                <a:latin typeface="Segoe UI"/>
-              </a:rPr>
-              <a:t>3</a:t>
-            </a:r>
-          </a:p>
-        </p:txBody>
-      </p:sp>
-      <p:sp>
-        <p:nvSpPr>
-          <p:cNvPr id="11" name="TextBox 10"/>
-          <p:cNvSpPr txBox="1"/>
-          <p:nvPr/>
-        </p:nvSpPr>
-        <p:spPr>
-          <a:xfrm>
-            <a:off x="1207008" y="3008376"/>
-            <a:ext cx="10149840" cy="777240"/>
-          </a:xfrm>
-          <a:prstGeom prst="rect">
-            <a:avLst/>
-          </a:prstGeom>
-          <a:noFill/>
-        </p:spPr>
-        <p:txBody>
-          <a:bodyPr wrap="square">
-            <a:spAutoFit/>
-          </a:bodyPr>
-          <a:lstStyle/>
           <a:p>
             <a:pPr>
               <a:lnSpc>
                 <a:spcPct val="115000"/>
               </a:lnSpc>
-            </a:pPr>
-            <a:r>
-              <a:rPr b="1" sz="1550">
+              <a:spcAft>
+                <a:spcPts val="1400"/>
+              </a:spcAft>
+            </a:pPr>
+            <a:r>
+              <a:rPr b="1" sz="1650">
                 <a:solidFill>
                   <a:srgbClr val="1E293B"/>
                 </a:solidFill>
-                <a:latin typeface="Segoe UI"/>
               </a:rPr>
               <a:t>Dual export.  </a:t>
             </a:r>
             <a:r>
-              <a:rPr sz="1550">
+              <a:rPr sz="1650">
                 <a:solidFill>
                   <a:srgbClr val="475569"/>
                 </a:solidFill>
-                <a:latin typeface="Segoe UI"/>
               </a:rPr>
               <a:t>Every approved report is written as both DOCX and PPTX, with citations.</a:t>
             </a:r>
           </a:p>
-        </p:txBody>
-      </p:sp>
-      <p:sp>
-        <p:nvSpPr>
-          <p:cNvPr id="12" name="Oval 11"/>
-          <p:cNvSpPr/>
-          <p:nvPr/>
-        </p:nvSpPr>
-        <p:spPr>
-          <a:xfrm>
-            <a:off x="640080" y="3822192"/>
-            <a:ext cx="384048" cy="384048"/>
-          </a:xfrm>
-          <a:prstGeom prst="ellipse">
-            <a:avLst/>
-          </a:prstGeom>
-          <a:solidFill>
-            <a:srgbClr val="4F46E5"/>
-          </a:solidFill>
-          <a:ln>
-            <a:noFill/>
-          </a:ln>
-          <a:effectLst/>
-        </p:spPr>
-        <p:style>
-          <a:lnRef idx="1">
-            <a:schemeClr val="accent1"/>
-          </a:lnRef>
-          <a:fillRef idx="3">
-            <a:schemeClr val="accent1"/>
-          </a:fillRef>
-          <a:effectRef idx="2">
-            <a:schemeClr val="accent1"/>
-          </a:effectRef>
-          <a:fontRef idx="minor">
-            <a:schemeClr val="lt1"/>
-          </a:fontRef>
-        </p:style>
-        <p:txBody>
-          <a:bodyPr rtlCol="0" anchor="ctr" lIns="0" rIns="0" tIns="0" bIns="0"/>
-          <a:lstStyle/>
-          <a:p>
-            <a:pPr algn="ctr"/>
-            <a:r>
-              <a:rPr sz="1500" b="1">
-                <a:solidFill>
-                  <a:srgbClr val="FFFFFF"/>
-                </a:solidFill>
-                <a:latin typeface="Segoe UI"/>
-              </a:rPr>
-              <a:t>4</a:t>
-            </a:r>
-          </a:p>
-        </p:txBody>
-      </p:sp>
-      <p:sp>
-        <p:nvSpPr>
-          <p:cNvPr id="13" name="TextBox 12"/>
-          <p:cNvSpPr txBox="1"/>
-          <p:nvPr/>
-        </p:nvSpPr>
-        <p:spPr>
-          <a:xfrm>
-            <a:off x="1207008" y="3785616"/>
-            <a:ext cx="10149840" cy="777240"/>
-          </a:xfrm>
-          <a:prstGeom prst="rect">
-            <a:avLst/>
-          </a:prstGeom>
-          <a:noFill/>
-        </p:spPr>
-        <p:txBody>
-          <a:bodyPr wrap="square">
-            <a:spAutoFit/>
-          </a:bodyPr>
-          <a:lstStyle/>
           <a:p>
             <a:pPr>
               <a:lnSpc>
                 <a:spcPct val="115000"/>
               </a:lnSpc>
-            </a:pPr>
-            <a:r>
-              <a:rPr b="1" sz="1550">
+              <a:spcAft>
+                <a:spcPts val="1400"/>
+              </a:spcAft>
+            </a:pPr>
+            <a:r>
+              <a:rPr b="1" sz="1650">
                 <a:solidFill>
                   <a:srgbClr val="1E293B"/>
                 </a:solidFill>
-                <a:latin typeface="Segoe UI"/>
               </a:rPr>
               <a:t>Two independent Facebook input paths.  </a:t>
             </a:r>
             <a:r>
-              <a:rPr sz="1550">
+              <a:rPr sz="1650">
                 <a:solidFill>
                   <a:srgbClr val="475569"/>
                 </a:solidFill>
-                <a:latin typeface="Segoe UI"/>
               </a:rPr>
               <a:t>CSV import and the live Graph API both feed the exact same sentiment-scoring step.</a:t>
             </a:r>
           </a:p>
-        </p:txBody>
-      </p:sp>
-      <p:sp>
-        <p:nvSpPr>
-          <p:cNvPr id="14" name="Oval 13"/>
-          <p:cNvSpPr/>
-          <p:nvPr/>
-        </p:nvSpPr>
-        <p:spPr>
-          <a:xfrm>
-            <a:off x="640080" y="4599432"/>
-            <a:ext cx="384048" cy="384048"/>
-          </a:xfrm>
-          <a:prstGeom prst="ellipse">
-            <a:avLst/>
-          </a:prstGeom>
-          <a:solidFill>
-            <a:srgbClr val="4F46E5"/>
-          </a:solidFill>
-          <a:ln>
-            <a:noFill/>
-          </a:ln>
-          <a:effectLst/>
-        </p:spPr>
-        <p:style>
-          <a:lnRef idx="1">
-            <a:schemeClr val="accent1"/>
-          </a:lnRef>
-          <a:fillRef idx="3">
-            <a:schemeClr val="accent1"/>
-          </a:fillRef>
-          <a:effectRef idx="2">
-            <a:schemeClr val="accent1"/>
-          </a:effectRef>
-          <a:fontRef idx="minor">
-            <a:schemeClr val="lt1"/>
-          </a:fontRef>
-        </p:style>
-        <p:txBody>
-          <a:bodyPr rtlCol="0" anchor="ctr" lIns="0" rIns="0" tIns="0" bIns="0"/>
-          <a:lstStyle/>
-          <a:p>
-            <a:pPr algn="ctr"/>
-            <a:r>
-              <a:rPr sz="1500" b="1">
-                <a:solidFill>
-                  <a:srgbClr val="FFFFFF"/>
-                </a:solidFill>
-                <a:latin typeface="Segoe UI"/>
-              </a:rPr>
-              <a:t>5</a:t>
-            </a:r>
-          </a:p>
-        </p:txBody>
-      </p:sp>
-      <p:sp>
-        <p:nvSpPr>
-          <p:cNvPr id="15" name="TextBox 14"/>
-          <p:cNvSpPr txBox="1"/>
-          <p:nvPr/>
-        </p:nvSpPr>
-        <p:spPr>
-          <a:xfrm>
-            <a:off x="1207008" y="4562856"/>
-            <a:ext cx="10149840" cy="777240"/>
-          </a:xfrm>
-          <a:prstGeom prst="rect">
-            <a:avLst/>
-          </a:prstGeom>
-          <a:noFill/>
-        </p:spPr>
-        <p:txBody>
-          <a:bodyPr wrap="square">
-            <a:spAutoFit/>
-          </a:bodyPr>
-          <a:lstStyle/>
           <a:p>
             <a:pPr>
               <a:lnSpc>
                 <a:spcPct val="115000"/>
               </a:lnSpc>
-            </a:pPr>
-            <a:r>
-              <a:rPr b="1" sz="1550">
+              <a:spcAft>
+                <a:spcPts val="1400"/>
+              </a:spcAft>
+            </a:pPr>
+            <a:r>
+              <a:rPr b="1" sz="1650">
                 <a:solidFill>
                   <a:srgbClr val="1E293B"/>
                 </a:solidFill>
-                <a:latin typeface="Segoe UI"/>
               </a:rPr>
               <a:t>Resilient by design.  </a:t>
             </a:r>
             <a:r>
-              <a:rPr sz="1550">
+              <a:rPr sz="1650">
                 <a:solidFill>
                   <a:srgbClr val="475569"/>
                 </a:solidFill>
-                <a:latin typeface="Segoe UI"/>
               </a:rPr>
-              <a:t>Session state survives a backend restart (SQLite) and a browser refresh (URL-persisted session id).</a:t>
-            </a:r>
-          </a:p>
-        </p:txBody>
-      </p:sp>
-      <p:sp>
-        <p:nvSpPr>
-          <p:cNvPr id="16" name="Oval 15"/>
-          <p:cNvSpPr/>
-          <p:nvPr/>
-        </p:nvSpPr>
-        <p:spPr>
-          <a:xfrm>
-            <a:off x="640080" y="5376672"/>
-            <a:ext cx="384048" cy="384048"/>
-          </a:xfrm>
-          <a:prstGeom prst="ellipse">
-            <a:avLst/>
-          </a:prstGeom>
-          <a:solidFill>
-            <a:srgbClr val="4F46E5"/>
-          </a:solidFill>
-          <a:ln>
-            <a:noFill/>
-          </a:ln>
-          <a:effectLst/>
-        </p:spPr>
-        <p:style>
-          <a:lnRef idx="1">
-            <a:schemeClr val="accent1"/>
-          </a:lnRef>
-          <a:fillRef idx="3">
-            <a:schemeClr val="accent1"/>
-          </a:fillRef>
-          <a:effectRef idx="2">
-            <a:schemeClr val="accent1"/>
-          </a:effectRef>
-          <a:fontRef idx="minor">
-            <a:schemeClr val="lt1"/>
-          </a:fontRef>
-        </p:style>
-        <p:txBody>
-          <a:bodyPr rtlCol="0" anchor="ctr" lIns="0" rIns="0" tIns="0" bIns="0"/>
-          <a:lstStyle/>
-          <a:p>
-            <a:pPr algn="ctr"/>
-            <a:r>
-              <a:rPr sz="1500" b="1">
-                <a:solidFill>
-                  <a:srgbClr val="FFFFFF"/>
-                </a:solidFill>
-                <a:latin typeface="Segoe UI"/>
-              </a:rPr>
-              <a:t>6</a:t>
-            </a:r>
-          </a:p>
-        </p:txBody>
-      </p:sp>
-      <p:sp>
-        <p:nvSpPr>
-          <p:cNvPr id="17" name="TextBox 16"/>
-          <p:cNvSpPr txBox="1"/>
-          <p:nvPr/>
-        </p:nvSpPr>
-        <p:spPr>
-          <a:xfrm>
-            <a:off x="1207008" y="5340096"/>
-            <a:ext cx="10149840" cy="777240"/>
-          </a:xfrm>
-          <a:prstGeom prst="rect">
-            <a:avLst/>
-          </a:prstGeom>
-          <a:noFill/>
-        </p:spPr>
-        <p:txBody>
-          <a:bodyPr wrap="square">
-            <a:spAutoFit/>
-          </a:bodyPr>
-          <a:lstStyle/>
+              <a:t>Session state survives a backend restart (SQLite) and a browser refresh (URL-persisted session id) — found and fixed by breaking the app on purpose.</a:t>
+            </a:r>
+          </a:p>
           <a:p>
             <a:pPr>
               <a:lnSpc>
                 <a:spcPct val="115000"/>
               </a:lnSpc>
-            </a:pPr>
-            <a:r>
-              <a:rPr b="1" sz="1550">
+              <a:spcAft>
+                <a:spcPts val="1400"/>
+              </a:spcAft>
+            </a:pPr>
+            <a:r>
+              <a:rPr b="1" sz="1650">
                 <a:solidFill>
                   <a:srgbClr val="1E293B"/>
                 </a:solidFill>
-                <a:latin typeface="Segoe UI"/>
               </a:rPr>
               <a:t>Free-tier LLM resilience.  </a:t>
             </a:r>
             <a:r>
-              <a:rPr sz="1550">
+              <a:rPr sz="1650">
                 <a:solidFill>
                   <a:srgbClr val="475569"/>
                 </a:solidFill>
-                <a:latin typeface="Segoe UI"/>
               </a:rPr>
-              <a:t>An ordered OpenRouter fallback list with retry/backoff, degrading gracefully instead of crashing.</a:t>
-            </a:r>
-          </a:p>
-        </p:txBody>
-      </p:sp>
-      <p:sp>
-        <p:nvSpPr>
-          <p:cNvPr id="18" name="TextBox 17"/>
+              <a:t>An ordered OpenRouter fallback list with retry/backoff, degrading gracefully instead of crashing when a model goes unavailable.</a:t>
+            </a:r>
+          </a:p>
+        </p:txBody>
+      </p:sp>
+      <p:sp>
+        <p:nvSpPr>
+          <p:cNvPr id="5" name="TextBox 4"/>
           <p:cNvSpPr txBox="1"/>
           <p:nvPr/>
         </p:nvSpPr>
         <p:spPr>
           <a:xfrm>
-            <a:off x="502920" y="6492240"/>
-            <a:ext cx="5486400" cy="274320"/>
+            <a:off x="457200" y="6473952"/>
+            <a:ext cx="5486400" cy="320040"/>
           </a:xfrm>
           <a:prstGeom prst="rect">
             <a:avLst/>
@@ -8064,11 +6051,10 @@
           <a:lstStyle/>
           <a:p>
             <a:pPr>
-              <a:defRPr sz="950">
+              <a:defRPr sz="1000">
                 <a:solidFill>
                   <a:srgbClr val="64748B"/>
                 </a:solidFill>
-                <a:latin typeface="Segoe UI"/>
               </a:defRPr>
             </a:pPr>
             <a:r>
@@ -8079,55 +6065,35 @@
       </p:sp>
       <p:sp>
         <p:nvSpPr>
-          <p:cNvPr id="19" name="Rounded Rectangle 18"/>
-          <p:cNvSpPr/>
+          <p:cNvPr id="6" name="TextBox 5"/>
+          <p:cNvSpPr txBox="1"/>
           <p:nvPr/>
         </p:nvSpPr>
         <p:spPr>
           <a:xfrm>
-            <a:off x="11475720" y="320040"/>
-            <a:ext cx="457200" cy="292608"/>
-          </a:xfrm>
-          <a:prstGeom prst="roundRect">
-            <a:avLst>
-              <a:gd name="adj" fmla="val 50000"/>
-            </a:avLst>
-          </a:prstGeom>
-          <a:solidFill>
-            <a:srgbClr val="4F46E5"/>
-          </a:solidFill>
-          <a:ln>
-            <a:noFill/>
-          </a:ln>
-          <a:effectLst/>
-        </p:spPr>
-        <p:style>
-          <a:lnRef idx="1">
-            <a:schemeClr val="accent1"/>
-          </a:lnRef>
-          <a:fillRef idx="3">
-            <a:schemeClr val="accent1"/>
-          </a:fillRef>
-          <a:effectRef idx="2">
-            <a:schemeClr val="accent1"/>
-          </a:effectRef>
-          <a:fontRef idx="minor">
-            <a:schemeClr val="lt1"/>
-          </a:fontRef>
-        </p:style>
-        <p:txBody>
-          <a:bodyPr rtlCol="0" anchor="ctr" lIns="0" rIns="0" tIns="0" bIns="0"/>
-          <a:lstStyle/>
-          <a:p>
-            <a:pPr algn="ctr"/>
-            <a:r>
-              <a:rPr sz="1200" b="1">
-                <a:solidFill>
-                  <a:srgbClr val="FFFFFF"/>
-                </a:solidFill>
-                <a:latin typeface="Segoe UI"/>
-              </a:rPr>
-              <a:t>07</a:t>
+            <a:off x="11247120" y="6473952"/>
+            <a:ext cx="640080" cy="320040"/>
+          </a:xfrm>
+          <a:prstGeom prst="rect">
+            <a:avLst/>
+          </a:prstGeom>
+          <a:noFill/>
+        </p:spPr>
+        <p:txBody>
+          <a:bodyPr wrap="none">
+            <a:spAutoFit/>
+          </a:bodyPr>
+          <a:lstStyle/>
+          <a:p>
+            <a:pPr algn="r">
+              <a:defRPr sz="1000">
+                <a:solidFill>
+                  <a:srgbClr val="64748B"/>
+                </a:solidFill>
+              </a:defRPr>
+            </a:pPr>
+            <a:r>
+              <a:t>7</a:t>
             </a:r>
           </a:p>
         </p:txBody>
@@ -8178,7 +6144,6 @@
           <a:ln>
             <a:noFill/>
           </a:ln>
-          <a:effectLst/>
         </p:spPr>
         <p:style>
           <a:lnRef idx="1">
@@ -8210,8 +6175,8 @@
         </p:nvSpPr>
         <p:spPr>
           <a:xfrm>
-            <a:off x="502920" y="292608"/>
-            <a:ext cx="9144000" cy="274320"/>
+            <a:off x="502920" y="365760"/>
+            <a:ext cx="10972800" cy="822960"/>
           </a:xfrm>
           <a:prstGeom prst="rect">
             <a:avLst/>
@@ -8225,51 +6190,13 @@
           <a:lstStyle/>
           <a:p>
             <a:pPr>
-              <a:spcAft>
-                <a:spcPts val="0"/>
-              </a:spcAft>
-            </a:pPr>
-            <a:r>
-              <a:rPr sz="1100" b="1">
-                <a:solidFill>
-                  <a:srgbClr val="4F46E5"/>
-                </a:solidFill>
-                <a:latin typeface="Segoe UI"/>
-              </a:rPr>
-              <a:t>07 · IMPLEMENTATION</a:t>
-            </a:r>
-          </a:p>
-        </p:txBody>
-      </p:sp>
-      <p:sp>
-        <p:nvSpPr>
-          <p:cNvPr id="4" name="TextBox 3"/>
-          <p:cNvSpPr txBox="1"/>
-          <p:nvPr/>
-        </p:nvSpPr>
-        <p:spPr>
-          <a:xfrm>
-            <a:off x="502920" y="530352"/>
-            <a:ext cx="10424160" cy="822960"/>
-          </a:xfrm>
-          <a:prstGeom prst="rect">
-            <a:avLst/>
-          </a:prstGeom>
-          <a:noFill/>
-        </p:spPr>
-        <p:txBody>
-          <a:bodyPr wrap="none">
-            <a:spAutoFit/>
-          </a:bodyPr>
-          <a:lstStyle/>
-          <a:p>
-            <a:r>
-              <a:rPr sz="3000" b="1">
+              <a:defRPr sz="3200" b="1">
                 <a:solidFill>
                   <a:srgbClr val="1E293B"/>
                 </a:solidFill>
-                <a:latin typeface="Segoe UI"/>
-              </a:rPr>
+              </a:defRPr>
+            </a:pPr>
+            <a:r>
               <a:t>Tech Stack</a:t>
             </a:r>
           </a:p>
@@ -8277,25 +6204,24 @@
       </p:sp>
       <p:sp>
         <p:nvSpPr>
-          <p:cNvPr id="5" name="Rectangle 4"/>
+          <p:cNvPr id="4" name="Rectangle 3"/>
           <p:cNvSpPr/>
           <p:nvPr/>
         </p:nvSpPr>
         <p:spPr>
           <a:xfrm>
-            <a:off x="530352" y="1188720"/>
-            <a:ext cx="548640" cy="38100"/>
+            <a:off x="640080" y="1463040"/>
+            <a:ext cx="10881360" cy="530352"/>
           </a:xfrm>
           <a:prstGeom prst="rect">
             <a:avLst/>
           </a:prstGeom>
           <a:solidFill>
-            <a:srgbClr val="4F46E5"/>
+            <a:srgbClr val="F8FAFC"/>
           </a:solidFill>
           <a:ln>
             <a:noFill/>
           </a:ln>
-          <a:effectLst/>
         </p:spPr>
         <p:style>
           <a:lnRef idx="1">
@@ -8312,638 +6238,49 @@
           </a:fontRef>
         </p:style>
         <p:txBody>
-          <a:bodyPr rtlCol="0" anchor="ctr"/>
+          <a:bodyPr rtlCol="0" anchor="ctr" lIns="182880" tIns="54864"/>
           <a:lstStyle/>
           <a:p>
             <a:pPr algn="ctr"/>
-          </a:p>
-        </p:txBody>
-      </p:sp>
-      <p:graphicFrame>
-        <p:nvGraphicFramePr>
-          <p:cNvPr id="6" name="Table 5"/>
-          <p:cNvGraphicFramePr>
-            <a:graphicFrameLocks noGrp="1"/>
-          </p:cNvGraphicFramePr>
-          <p:nvPr/>
-        </p:nvGraphicFramePr>
-        <p:xfrm>
-          <a:off x="640080" y="1490472"/>
-          <a:ext cx="10881360" cy="4754880"/>
-        </p:xfrm>
-        <a:graphic>
-          <a:graphicData uri="http://schemas.openxmlformats.org/drawingml/2006/table">
-            <a:tbl>
-              <a:tblPr firstRow="1" bandRow="1">
-                <a:tableStyleId>{5C22544A-7EE6-4342-B048-85BDC9FD1C3A}</a:tableStyleId>
-              </a:tblPr>
-              <a:tblGrid>
-                <a:gridCol w="3108960"/>
-                <a:gridCol w="7772400"/>
-              </a:tblGrid>
-              <a:tr h="475488">
-                <a:tc>
-                  <a:txBody>
-                    <a:bodyPr/>
-                    <a:lstStyle/>
-                    <a:p>
-                      <a:pPr>
-                        <a:defRPr b="1" sz="1400">
-                          <a:solidFill>
-                            <a:srgbClr val="FFFFFF"/>
-                          </a:solidFill>
-                        </a:defRPr>
-                      </a:pPr>
-                      <a:r>
-                        <a:rPr>
-                          <a:latin typeface="Segoe UI"/>
-                        </a:rPr>
-                        <a:t>Component</a:t>
-                      </a:r>
-                    </a:p>
-                  </a:txBody>
-                  <a:tcPr marL="164592" marR="109728" marT="73152" marB="73152" anchor="ctr">
-                    <a:solidFill>
-                      <a:srgbClr val="4F46E5"/>
-                    </a:solidFill>
-                  </a:tcPr>
-                </a:tc>
-                <a:tc>
-                  <a:txBody>
-                    <a:bodyPr/>
-                    <a:lstStyle/>
-                    <a:p>
-                      <a:pPr>
-                        <a:defRPr b="1" sz="1400">
-                          <a:solidFill>
-                            <a:srgbClr val="FFFFFF"/>
-                          </a:solidFill>
-                        </a:defRPr>
-                      </a:pPr>
-                      <a:r>
-                        <a:rPr>
-                          <a:latin typeface="Segoe UI"/>
-                        </a:rPr>
-                        <a:t>Choice</a:t>
-                      </a:r>
-                    </a:p>
-                  </a:txBody>
-                  <a:tcPr marL="164592" marR="109728" marT="73152" marB="73152" anchor="ctr">
-                    <a:solidFill>
-                      <a:srgbClr val="4F46E5"/>
-                    </a:solidFill>
-                  </a:tcPr>
-                </a:tc>
-              </a:tr>
-              <a:tr h="475488">
-                <a:tc>
-                  <a:txBody>
-                    <a:bodyPr/>
-                    <a:lstStyle/>
-                    <a:p>
-                      <a:pPr>
-                        <a:defRPr sz="1400" b="1">
-                          <a:solidFill>
-                            <a:srgbClr val="1E293B"/>
-                          </a:solidFill>
-                        </a:defRPr>
-                      </a:pPr>
-                      <a:r>
-                        <a:rPr>
-                          <a:latin typeface="Segoe UI"/>
-                        </a:rPr>
-                        <a:t>Orchestration</a:t>
-                      </a:r>
-                    </a:p>
-                  </a:txBody>
-                  <a:tcPr marL="164592" marR="109728" marT="73152" marB="73152" anchor="ctr">
-                    <a:solidFill>
-                      <a:srgbClr val="FFFFFF"/>
-                    </a:solidFill>
-                  </a:tcPr>
-                </a:tc>
-                <a:tc>
-                  <a:txBody>
-                    <a:bodyPr/>
-                    <a:lstStyle/>
-                    <a:p>
-                      <a:pPr>
-                        <a:defRPr sz="1400">
-                          <a:solidFill>
-                            <a:srgbClr val="475569"/>
-                          </a:solidFill>
-                        </a:defRPr>
-                      </a:pPr>
-                      <a:r>
-                        <a:rPr>
-                          <a:latin typeface="Segoe UI"/>
-                        </a:rPr>
-                        <a:t>LangGraph — StateGraph, interrupt() for HITL</a:t>
-                      </a:r>
-                    </a:p>
-                  </a:txBody>
-                  <a:tcPr marL="164592" marR="109728" marT="73152" marB="73152" anchor="ctr">
-                    <a:solidFill>
-                      <a:srgbClr val="FFFFFF"/>
-                    </a:solidFill>
-                  </a:tcPr>
-                </a:tc>
-              </a:tr>
-              <a:tr h="475488">
-                <a:tc>
-                  <a:txBody>
-                    <a:bodyPr/>
-                    <a:lstStyle/>
-                    <a:p>
-                      <a:pPr>
-                        <a:defRPr sz="1400" b="1">
-                          <a:solidFill>
-                            <a:srgbClr val="1E293B"/>
-                          </a:solidFill>
-                        </a:defRPr>
-                      </a:pPr>
-                      <a:r>
-                        <a:rPr>
-                          <a:latin typeface="Segoe UI"/>
-                        </a:rPr>
-                        <a:t>Backend</a:t>
-                      </a:r>
-                    </a:p>
-                  </a:txBody>
-                  <a:tcPr marL="164592" marR="109728" marT="73152" marB="73152" anchor="ctr">
-                    <a:solidFill>
-                      <a:srgbClr val="F8FAFC"/>
-                    </a:solidFill>
-                  </a:tcPr>
-                </a:tc>
-                <a:tc>
-                  <a:txBody>
-                    <a:bodyPr/>
-                    <a:lstStyle/>
-                    <a:p>
-                      <a:pPr>
-                        <a:defRPr sz="1400">
-                          <a:solidFill>
-                            <a:srgbClr val="475569"/>
-                          </a:solidFill>
-                        </a:defRPr>
-                      </a:pPr>
-                      <a:r>
-                        <a:rPr>
-                          <a:latin typeface="Segoe UI"/>
-                        </a:rPr>
-                        <a:t>FastAPI</a:t>
-                      </a:r>
-                    </a:p>
-                  </a:txBody>
-                  <a:tcPr marL="164592" marR="109728" marT="73152" marB="73152" anchor="ctr">
-                    <a:solidFill>
-                      <a:srgbClr val="F8FAFC"/>
-                    </a:solidFill>
-                  </a:tcPr>
-                </a:tc>
-              </a:tr>
-              <a:tr h="475488">
-                <a:tc>
-                  <a:txBody>
-                    <a:bodyPr/>
-                    <a:lstStyle/>
-                    <a:p>
-                      <a:pPr>
-                        <a:defRPr sz="1400" b="1">
-                          <a:solidFill>
-                            <a:srgbClr val="1E293B"/>
-                          </a:solidFill>
-                        </a:defRPr>
-                      </a:pPr>
-                      <a:r>
-                        <a:rPr>
-                          <a:latin typeface="Segoe UI"/>
-                        </a:rPr>
-                        <a:t>Frontend</a:t>
-                      </a:r>
-                    </a:p>
-                  </a:txBody>
-                  <a:tcPr marL="164592" marR="109728" marT="73152" marB="73152" anchor="ctr">
-                    <a:solidFill>
-                      <a:srgbClr val="FFFFFF"/>
-                    </a:solidFill>
-                  </a:tcPr>
-                </a:tc>
-                <a:tc>
-                  <a:txBody>
-                    <a:bodyPr/>
-                    <a:lstStyle/>
-                    <a:p>
-                      <a:pPr>
-                        <a:defRPr sz="1400">
-                          <a:solidFill>
-                            <a:srgbClr val="475569"/>
-                          </a:solidFill>
-                        </a:defRPr>
-                      </a:pPr>
-                      <a:r>
-                        <a:rPr>
-                          <a:latin typeface="Segoe UI"/>
-                        </a:rPr>
-                        <a:t>Streamlit — 10 pages</a:t>
-                      </a:r>
-                    </a:p>
-                  </a:txBody>
-                  <a:tcPr marL="164592" marR="109728" marT="73152" marB="73152" anchor="ctr">
-                    <a:solidFill>
-                      <a:srgbClr val="FFFFFF"/>
-                    </a:solidFill>
-                  </a:tcPr>
-                </a:tc>
-              </a:tr>
-              <a:tr h="475488">
-                <a:tc>
-                  <a:txBody>
-                    <a:bodyPr/>
-                    <a:lstStyle/>
-                    <a:p>
-                      <a:pPr>
-                        <a:defRPr sz="1400" b="1">
-                          <a:solidFill>
-                            <a:srgbClr val="1E293B"/>
-                          </a:solidFill>
-                        </a:defRPr>
-                      </a:pPr>
-                      <a:r>
-                        <a:rPr>
-                          <a:latin typeface="Segoe UI"/>
-                        </a:rPr>
-                        <a:t>LLMs</a:t>
-                      </a:r>
-                    </a:p>
-                  </a:txBody>
-                  <a:tcPr marL="164592" marR="109728" marT="73152" marB="73152" anchor="ctr">
-                    <a:solidFill>
-                      <a:srgbClr val="F8FAFC"/>
-                    </a:solidFill>
-                  </a:tcPr>
-                </a:tc>
-                <a:tc>
-                  <a:txBody>
-                    <a:bodyPr/>
-                    <a:lstStyle/>
-                    <a:p>
-                      <a:pPr>
-                        <a:defRPr sz="1400">
-                          <a:solidFill>
-                            <a:srgbClr val="475569"/>
-                          </a:solidFill>
-                        </a:defRPr>
-                      </a:pPr>
-                      <a:r>
-                        <a:rPr>
-                          <a:latin typeface="Segoe UI"/>
-                        </a:rPr>
-                        <a:t>OpenRouter — free-tier models, fallback list</a:t>
-                      </a:r>
-                    </a:p>
-                  </a:txBody>
-                  <a:tcPr marL="164592" marR="109728" marT="73152" marB="73152" anchor="ctr">
-                    <a:solidFill>
-                      <a:srgbClr val="F8FAFC"/>
-                    </a:solidFill>
-                  </a:tcPr>
-                </a:tc>
-              </a:tr>
-              <a:tr h="475488">
-                <a:tc>
-                  <a:txBody>
-                    <a:bodyPr/>
-                    <a:lstStyle/>
-                    <a:p>
-                      <a:pPr>
-                        <a:defRPr sz="1400" b="1">
-                          <a:solidFill>
-                            <a:srgbClr val="1E293B"/>
-                          </a:solidFill>
-                        </a:defRPr>
-                      </a:pPr>
-                      <a:r>
-                        <a:rPr>
-                          <a:latin typeface="Segoe UI"/>
-                        </a:rPr>
-                        <a:t>Embeddings</a:t>
-                      </a:r>
-                    </a:p>
-                  </a:txBody>
-                  <a:tcPr marL="164592" marR="109728" marT="73152" marB="73152" anchor="ctr">
-                    <a:solidFill>
-                      <a:srgbClr val="FFFFFF"/>
-                    </a:solidFill>
-                  </a:tcPr>
-                </a:tc>
-                <a:tc>
-                  <a:txBody>
-                    <a:bodyPr/>
-                    <a:lstStyle/>
-                    <a:p>
-                      <a:pPr>
-                        <a:defRPr sz="1400">
-                          <a:solidFill>
-                            <a:srgbClr val="475569"/>
-                          </a:solidFill>
-                        </a:defRPr>
-                      </a:pPr>
-                      <a:r>
-                        <a:rPr>
-                          <a:latin typeface="Segoe UI"/>
-                        </a:rPr>
-                        <a:t>sentence-transformers (local, free)</a:t>
-                      </a:r>
-                    </a:p>
-                  </a:txBody>
-                  <a:tcPr marL="164592" marR="109728" marT="73152" marB="73152" anchor="ctr">
-                    <a:solidFill>
-                      <a:srgbClr val="FFFFFF"/>
-                    </a:solidFill>
-                  </a:tcPr>
-                </a:tc>
-              </a:tr>
-              <a:tr h="475488">
-                <a:tc>
-                  <a:txBody>
-                    <a:bodyPr/>
-                    <a:lstStyle/>
-                    <a:p>
-                      <a:pPr>
-                        <a:defRPr sz="1400" b="1">
-                          <a:solidFill>
-                            <a:srgbClr val="1E293B"/>
-                          </a:solidFill>
-                        </a:defRPr>
-                      </a:pPr>
-                      <a:r>
-                        <a:rPr>
-                          <a:latin typeface="Segoe UI"/>
-                        </a:rPr>
-                        <a:t>Vector memory</a:t>
-                      </a:r>
-                    </a:p>
-                  </a:txBody>
-                  <a:tcPr marL="164592" marR="109728" marT="73152" marB="73152" anchor="ctr">
-                    <a:solidFill>
-                      <a:srgbClr val="F8FAFC"/>
-                    </a:solidFill>
-                  </a:tcPr>
-                </a:tc>
-                <a:tc>
-                  <a:txBody>
-                    <a:bodyPr/>
-                    <a:lstStyle/>
-                    <a:p>
-                      <a:pPr>
-                        <a:defRPr sz="1400">
-                          <a:solidFill>
-                            <a:srgbClr val="475569"/>
-                          </a:solidFill>
-                        </a:defRPr>
-                      </a:pPr>
-                      <a:r>
-                        <a:rPr>
-                          <a:latin typeface="Segoe UI"/>
-                        </a:rPr>
-                        <a:t>Chroma — one collection per data type</a:t>
-                      </a:r>
-                    </a:p>
-                  </a:txBody>
-                  <a:tcPr marL="164592" marR="109728" marT="73152" marB="73152" anchor="ctr">
-                    <a:solidFill>
-                      <a:srgbClr val="F8FAFC"/>
-                    </a:solidFill>
-                  </a:tcPr>
-                </a:tc>
-              </a:tr>
-              <a:tr h="475488">
-                <a:tc>
-                  <a:txBody>
-                    <a:bodyPr/>
-                    <a:lstStyle/>
-                    <a:p>
-                      <a:pPr>
-                        <a:defRPr sz="1400" b="1">
-                          <a:solidFill>
-                            <a:srgbClr val="1E293B"/>
-                          </a:solidFill>
-                        </a:defRPr>
-                      </a:pPr>
-                      <a:r>
-                        <a:rPr>
-                          <a:latin typeface="Segoe UI"/>
-                        </a:rPr>
-                        <a:t>Structured data</a:t>
-                      </a:r>
-                    </a:p>
-                  </a:txBody>
-                  <a:tcPr marL="164592" marR="109728" marT="73152" marB="73152" anchor="ctr">
-                    <a:solidFill>
-                      <a:srgbClr val="FFFFFF"/>
-                    </a:solidFill>
-                  </a:tcPr>
-                </a:tc>
-                <a:tc>
-                  <a:txBody>
-                    <a:bodyPr/>
-                    <a:lstStyle/>
-                    <a:p>
-                      <a:pPr>
-                        <a:defRPr sz="1400">
-                          <a:solidFill>
-                            <a:srgbClr val="475569"/>
-                          </a:solidFill>
-                        </a:defRPr>
-                      </a:pPr>
-                      <a:r>
-                        <a:rPr>
-                          <a:latin typeface="Segoe UI"/>
-                        </a:rPr>
-                        <a:t>SQLite — sessions + HITL checkpoints</a:t>
-                      </a:r>
-                    </a:p>
-                  </a:txBody>
-                  <a:tcPr marL="164592" marR="109728" marT="73152" marB="73152" anchor="ctr">
-                    <a:solidFill>
-                      <a:srgbClr val="FFFFFF"/>
-                    </a:solidFill>
-                  </a:tcPr>
-                </a:tc>
-              </a:tr>
-              <a:tr h="475488">
-                <a:tc>
-                  <a:txBody>
-                    <a:bodyPr/>
-                    <a:lstStyle/>
-                    <a:p>
-                      <a:pPr>
-                        <a:defRPr sz="1400" b="1">
-                          <a:solidFill>
-                            <a:srgbClr val="1E293B"/>
-                          </a:solidFill>
-                        </a:defRPr>
-                      </a:pPr>
-                      <a:r>
-                        <a:rPr>
-                          <a:latin typeface="Segoe UI"/>
-                        </a:rPr>
-                        <a:t>Live external data</a:t>
-                      </a:r>
-                    </a:p>
-                  </a:txBody>
-                  <a:tcPr marL="164592" marR="109728" marT="73152" marB="73152" anchor="ctr">
-                    <a:solidFill>
-                      <a:srgbClr val="F8FAFC"/>
-                    </a:solidFill>
-                  </a:tcPr>
-                </a:tc>
-                <a:tc>
-                  <a:txBody>
-                    <a:bodyPr/>
-                    <a:lstStyle/>
-                    <a:p>
-                      <a:pPr>
-                        <a:defRPr sz="1400">
-                          <a:solidFill>
-                            <a:srgbClr val="475569"/>
-                          </a:solidFill>
-                        </a:defRPr>
-                      </a:pPr>
-                      <a:r>
-                        <a:rPr>
-                          <a:latin typeface="Segoe UI"/>
-                        </a:rPr>
-                        <a:t>Facebook Graph API, Tavily web search</a:t>
-                      </a:r>
-                    </a:p>
-                  </a:txBody>
-                  <a:tcPr marL="164592" marR="109728" marT="73152" marB="73152" anchor="ctr">
-                    <a:solidFill>
-                      <a:srgbClr val="F8FAFC"/>
-                    </a:solidFill>
-                  </a:tcPr>
-                </a:tc>
-              </a:tr>
-              <a:tr h="475488">
-                <a:tc>
-                  <a:txBody>
-                    <a:bodyPr/>
-                    <a:lstStyle/>
-                    <a:p>
-                      <a:pPr>
-                        <a:defRPr sz="1400" b="1">
-                          <a:solidFill>
-                            <a:srgbClr val="1E293B"/>
-                          </a:solidFill>
-                        </a:defRPr>
-                      </a:pPr>
-                      <a:r>
-                        <a:rPr>
-                          <a:latin typeface="Segoe UI"/>
-                        </a:rPr>
-                        <a:t>Deployment</a:t>
-                      </a:r>
-                    </a:p>
-                  </a:txBody>
-                  <a:tcPr marL="164592" marR="109728" marT="73152" marB="73152" anchor="ctr">
-                    <a:solidFill>
-                      <a:srgbClr val="FFFFFF"/>
-                    </a:solidFill>
-                  </a:tcPr>
-                </a:tc>
-                <a:tc>
-                  <a:txBody>
-                    <a:bodyPr/>
-                    <a:lstStyle/>
-                    <a:p>
-                      <a:pPr>
-                        <a:defRPr sz="1400">
-                          <a:solidFill>
-                            <a:srgbClr val="475569"/>
-                          </a:solidFill>
-                        </a:defRPr>
-                      </a:pPr>
-                      <a:r>
-                        <a:rPr>
-                          <a:latin typeface="Segoe UI"/>
-                        </a:rPr>
-                        <a:t>Docker Compose + GitHub Actions CI</a:t>
-                      </a:r>
-                    </a:p>
-                  </a:txBody>
-                  <a:tcPr marL="164592" marR="109728" marT="73152" marB="73152" anchor="ctr">
-                    <a:solidFill>
-                      <a:srgbClr val="FFFFFF"/>
-                    </a:solidFill>
-                  </a:tcPr>
-                </a:tc>
-              </a:tr>
-            </a:tbl>
-          </a:graphicData>
-        </a:graphic>
-      </p:graphicFrame>
-      <p:sp>
-        <p:nvSpPr>
-          <p:cNvPr id="7" name="TextBox 6"/>
-          <p:cNvSpPr txBox="1"/>
-          <p:nvPr/>
-        </p:nvSpPr>
-        <p:spPr>
-          <a:xfrm>
-            <a:off x="502920" y="6492240"/>
-            <a:ext cx="5486400" cy="274320"/>
-          </a:xfrm>
-          <a:prstGeom prst="rect">
-            <a:avLst/>
-          </a:prstGeom>
-          <a:noFill/>
-        </p:spPr>
-        <p:txBody>
-          <a:bodyPr wrap="none">
-            <a:spAutoFit/>
-          </a:bodyPr>
-          <a:lstStyle/>
-          <a:p>
-            <a:pPr>
-              <a:defRPr sz="950">
-                <a:solidFill>
-                  <a:srgbClr val="64748B"/>
-                </a:solidFill>
-                <a:latin typeface="Segoe UI"/>
-              </a:defRPr>
-            </a:pPr>
-            <a:r>
-              <a:t>Education AI Analyst</a:t>
-            </a:r>
-          </a:p>
-        </p:txBody>
-      </p:sp>
-      <p:sp>
-        <p:nvSpPr>
-          <p:cNvPr id="8" name="Rounded Rectangle 7"/>
+            <a:r>
+              <a:rPr b="1" sz="1400">
+                <a:solidFill>
+                  <a:srgbClr val="1E293B"/>
+                </a:solidFill>
+              </a:rPr>
+              <a:t>Orchestration</a:t>
+            </a:r>
+            <a:r>
+              <a:rPr sz="1400">
+                <a:solidFill>
+                  <a:srgbClr val="475569"/>
+                </a:solidFill>
+              </a:rPr>
+              <a:t>   LangGraph — StateGraph, interrupt() for HITL</a:t>
+            </a:r>
+          </a:p>
+        </p:txBody>
+      </p:sp>
+      <p:sp>
+        <p:nvSpPr>
+          <p:cNvPr id="5" name="Rectangle 4"/>
           <p:cNvSpPr/>
           <p:nvPr/>
         </p:nvSpPr>
         <p:spPr>
           <a:xfrm>
-            <a:off x="11475720" y="320040"/>
-            <a:ext cx="457200" cy="292608"/>
-          </a:xfrm>
-          <a:prstGeom prst="roundRect">
-            <a:avLst>
-              <a:gd name="adj" fmla="val 50000"/>
-            </a:avLst>
+            <a:off x="640080" y="1993392"/>
+            <a:ext cx="10881360" cy="530352"/>
+          </a:xfrm>
+          <a:prstGeom prst="rect">
+            <a:avLst/>
           </a:prstGeom>
           <a:solidFill>
-            <a:srgbClr val="4F46E5"/>
+            <a:srgbClr val="FFFFFF"/>
           </a:solidFill>
           <a:ln>
             <a:noFill/>
           </a:ln>
-          <a:effectLst/>
         </p:spPr>
         <p:style>
           <a:lnRef idx="1">
@@ -8960,18 +6297,508 @@
           </a:fontRef>
         </p:style>
         <p:txBody>
-          <a:bodyPr rtlCol="0" anchor="ctr" lIns="0" rIns="0" tIns="0" bIns="0"/>
+          <a:bodyPr rtlCol="0" anchor="ctr" lIns="182880" tIns="54864"/>
           <a:lstStyle/>
           <a:p>
             <a:pPr algn="ctr"/>
             <a:r>
-              <a:rPr sz="1200" b="1">
-                <a:solidFill>
-                  <a:srgbClr val="FFFFFF"/>
-                </a:solidFill>
-                <a:latin typeface="Segoe UI"/>
+              <a:rPr b="1" sz="1400">
+                <a:solidFill>
+                  <a:srgbClr val="1E293B"/>
+                </a:solidFill>
               </a:rPr>
-              <a:t>08</a:t>
+              <a:t>Backend</a:t>
+            </a:r>
+            <a:r>
+              <a:rPr sz="1400">
+                <a:solidFill>
+                  <a:srgbClr val="475569"/>
+                </a:solidFill>
+              </a:rPr>
+              <a:t>   FastAPI</a:t>
+            </a:r>
+          </a:p>
+        </p:txBody>
+      </p:sp>
+      <p:sp>
+        <p:nvSpPr>
+          <p:cNvPr id="6" name="Rectangle 5"/>
+          <p:cNvSpPr/>
+          <p:nvPr/>
+        </p:nvSpPr>
+        <p:spPr>
+          <a:xfrm>
+            <a:off x="640080" y="2523744"/>
+            <a:ext cx="10881360" cy="530352"/>
+          </a:xfrm>
+          <a:prstGeom prst="rect">
+            <a:avLst/>
+          </a:prstGeom>
+          <a:solidFill>
+            <a:srgbClr val="F8FAFC"/>
+          </a:solidFill>
+          <a:ln>
+            <a:noFill/>
+          </a:ln>
+        </p:spPr>
+        <p:style>
+          <a:lnRef idx="1">
+            <a:schemeClr val="accent1"/>
+          </a:lnRef>
+          <a:fillRef idx="3">
+            <a:schemeClr val="accent1"/>
+          </a:fillRef>
+          <a:effectRef idx="2">
+            <a:schemeClr val="accent1"/>
+          </a:effectRef>
+          <a:fontRef idx="minor">
+            <a:schemeClr val="lt1"/>
+          </a:fontRef>
+        </p:style>
+        <p:txBody>
+          <a:bodyPr rtlCol="0" anchor="ctr" lIns="182880" tIns="54864"/>
+          <a:lstStyle/>
+          <a:p>
+            <a:pPr algn="ctr"/>
+            <a:r>
+              <a:rPr b="1" sz="1400">
+                <a:solidFill>
+                  <a:srgbClr val="1E293B"/>
+                </a:solidFill>
+              </a:rPr>
+              <a:t>Frontend</a:t>
+            </a:r>
+            <a:r>
+              <a:rPr sz="1400">
+                <a:solidFill>
+                  <a:srgbClr val="475569"/>
+                </a:solidFill>
+              </a:rPr>
+              <a:t>   Streamlit — 10 pages</a:t>
+            </a:r>
+          </a:p>
+        </p:txBody>
+      </p:sp>
+      <p:sp>
+        <p:nvSpPr>
+          <p:cNvPr id="7" name="Rectangle 6"/>
+          <p:cNvSpPr/>
+          <p:nvPr/>
+        </p:nvSpPr>
+        <p:spPr>
+          <a:xfrm>
+            <a:off x="640080" y="3054096"/>
+            <a:ext cx="10881360" cy="530352"/>
+          </a:xfrm>
+          <a:prstGeom prst="rect">
+            <a:avLst/>
+          </a:prstGeom>
+          <a:solidFill>
+            <a:srgbClr val="FFFFFF"/>
+          </a:solidFill>
+          <a:ln>
+            <a:noFill/>
+          </a:ln>
+        </p:spPr>
+        <p:style>
+          <a:lnRef idx="1">
+            <a:schemeClr val="accent1"/>
+          </a:lnRef>
+          <a:fillRef idx="3">
+            <a:schemeClr val="accent1"/>
+          </a:fillRef>
+          <a:effectRef idx="2">
+            <a:schemeClr val="accent1"/>
+          </a:effectRef>
+          <a:fontRef idx="minor">
+            <a:schemeClr val="lt1"/>
+          </a:fontRef>
+        </p:style>
+        <p:txBody>
+          <a:bodyPr rtlCol="0" anchor="ctr" lIns="182880" tIns="54864"/>
+          <a:lstStyle/>
+          <a:p>
+            <a:pPr algn="ctr"/>
+            <a:r>
+              <a:rPr b="1" sz="1400">
+                <a:solidFill>
+                  <a:srgbClr val="1E293B"/>
+                </a:solidFill>
+              </a:rPr>
+              <a:t>LLMs</a:t>
+            </a:r>
+            <a:r>
+              <a:rPr sz="1400">
+                <a:solidFill>
+                  <a:srgbClr val="475569"/>
+                </a:solidFill>
+              </a:rPr>
+              <a:t>   OpenRouter — free-tier models, fallback list</a:t>
+            </a:r>
+          </a:p>
+        </p:txBody>
+      </p:sp>
+      <p:sp>
+        <p:nvSpPr>
+          <p:cNvPr id="8" name="Rectangle 7"/>
+          <p:cNvSpPr/>
+          <p:nvPr/>
+        </p:nvSpPr>
+        <p:spPr>
+          <a:xfrm>
+            <a:off x="640080" y="3584448"/>
+            <a:ext cx="10881360" cy="530352"/>
+          </a:xfrm>
+          <a:prstGeom prst="rect">
+            <a:avLst/>
+          </a:prstGeom>
+          <a:solidFill>
+            <a:srgbClr val="F8FAFC"/>
+          </a:solidFill>
+          <a:ln>
+            <a:noFill/>
+          </a:ln>
+        </p:spPr>
+        <p:style>
+          <a:lnRef idx="1">
+            <a:schemeClr val="accent1"/>
+          </a:lnRef>
+          <a:fillRef idx="3">
+            <a:schemeClr val="accent1"/>
+          </a:fillRef>
+          <a:effectRef idx="2">
+            <a:schemeClr val="accent1"/>
+          </a:effectRef>
+          <a:fontRef idx="minor">
+            <a:schemeClr val="lt1"/>
+          </a:fontRef>
+        </p:style>
+        <p:txBody>
+          <a:bodyPr rtlCol="0" anchor="ctr" lIns="182880" tIns="54864"/>
+          <a:lstStyle/>
+          <a:p>
+            <a:pPr algn="ctr"/>
+            <a:r>
+              <a:rPr b="1" sz="1400">
+                <a:solidFill>
+                  <a:srgbClr val="1E293B"/>
+                </a:solidFill>
+              </a:rPr>
+              <a:t>Embeddings</a:t>
+            </a:r>
+            <a:r>
+              <a:rPr sz="1400">
+                <a:solidFill>
+                  <a:srgbClr val="475569"/>
+                </a:solidFill>
+              </a:rPr>
+              <a:t>   sentence-transformers (local, free)</a:t>
+            </a:r>
+          </a:p>
+        </p:txBody>
+      </p:sp>
+      <p:sp>
+        <p:nvSpPr>
+          <p:cNvPr id="9" name="Rectangle 8"/>
+          <p:cNvSpPr/>
+          <p:nvPr/>
+        </p:nvSpPr>
+        <p:spPr>
+          <a:xfrm>
+            <a:off x="640080" y="4114800"/>
+            <a:ext cx="10881360" cy="530352"/>
+          </a:xfrm>
+          <a:prstGeom prst="rect">
+            <a:avLst/>
+          </a:prstGeom>
+          <a:solidFill>
+            <a:srgbClr val="FFFFFF"/>
+          </a:solidFill>
+          <a:ln>
+            <a:noFill/>
+          </a:ln>
+        </p:spPr>
+        <p:style>
+          <a:lnRef idx="1">
+            <a:schemeClr val="accent1"/>
+          </a:lnRef>
+          <a:fillRef idx="3">
+            <a:schemeClr val="accent1"/>
+          </a:fillRef>
+          <a:effectRef idx="2">
+            <a:schemeClr val="accent1"/>
+          </a:effectRef>
+          <a:fontRef idx="minor">
+            <a:schemeClr val="lt1"/>
+          </a:fontRef>
+        </p:style>
+        <p:txBody>
+          <a:bodyPr rtlCol="0" anchor="ctr" lIns="182880" tIns="54864"/>
+          <a:lstStyle/>
+          <a:p>
+            <a:pPr algn="ctr"/>
+            <a:r>
+              <a:rPr b="1" sz="1400">
+                <a:solidFill>
+                  <a:srgbClr val="1E293B"/>
+                </a:solidFill>
+              </a:rPr>
+              <a:t>Vector memory</a:t>
+            </a:r>
+            <a:r>
+              <a:rPr sz="1400">
+                <a:solidFill>
+                  <a:srgbClr val="475569"/>
+                </a:solidFill>
+              </a:rPr>
+              <a:t>   Chroma — one collection per data type</a:t>
+            </a:r>
+          </a:p>
+        </p:txBody>
+      </p:sp>
+      <p:sp>
+        <p:nvSpPr>
+          <p:cNvPr id="10" name="Rectangle 9"/>
+          <p:cNvSpPr/>
+          <p:nvPr/>
+        </p:nvSpPr>
+        <p:spPr>
+          <a:xfrm>
+            <a:off x="640080" y="4645152"/>
+            <a:ext cx="10881360" cy="530352"/>
+          </a:xfrm>
+          <a:prstGeom prst="rect">
+            <a:avLst/>
+          </a:prstGeom>
+          <a:solidFill>
+            <a:srgbClr val="F8FAFC"/>
+          </a:solidFill>
+          <a:ln>
+            <a:noFill/>
+          </a:ln>
+        </p:spPr>
+        <p:style>
+          <a:lnRef idx="1">
+            <a:schemeClr val="accent1"/>
+          </a:lnRef>
+          <a:fillRef idx="3">
+            <a:schemeClr val="accent1"/>
+          </a:fillRef>
+          <a:effectRef idx="2">
+            <a:schemeClr val="accent1"/>
+          </a:effectRef>
+          <a:fontRef idx="minor">
+            <a:schemeClr val="lt1"/>
+          </a:fontRef>
+        </p:style>
+        <p:txBody>
+          <a:bodyPr rtlCol="0" anchor="ctr" lIns="182880" tIns="54864"/>
+          <a:lstStyle/>
+          <a:p>
+            <a:pPr algn="ctr"/>
+            <a:r>
+              <a:rPr b="1" sz="1400">
+                <a:solidFill>
+                  <a:srgbClr val="1E293B"/>
+                </a:solidFill>
+              </a:rPr>
+              <a:t>Structured data</a:t>
+            </a:r>
+            <a:r>
+              <a:rPr sz="1400">
+                <a:solidFill>
+                  <a:srgbClr val="475569"/>
+                </a:solidFill>
+              </a:rPr>
+              <a:t>   SQLite — sessions + HITL checkpoints</a:t>
+            </a:r>
+          </a:p>
+        </p:txBody>
+      </p:sp>
+      <p:sp>
+        <p:nvSpPr>
+          <p:cNvPr id="11" name="Rectangle 10"/>
+          <p:cNvSpPr/>
+          <p:nvPr/>
+        </p:nvSpPr>
+        <p:spPr>
+          <a:xfrm>
+            <a:off x="640080" y="5175504"/>
+            <a:ext cx="10881360" cy="530352"/>
+          </a:xfrm>
+          <a:prstGeom prst="rect">
+            <a:avLst/>
+          </a:prstGeom>
+          <a:solidFill>
+            <a:srgbClr val="FFFFFF"/>
+          </a:solidFill>
+          <a:ln>
+            <a:noFill/>
+          </a:ln>
+        </p:spPr>
+        <p:style>
+          <a:lnRef idx="1">
+            <a:schemeClr val="accent1"/>
+          </a:lnRef>
+          <a:fillRef idx="3">
+            <a:schemeClr val="accent1"/>
+          </a:fillRef>
+          <a:effectRef idx="2">
+            <a:schemeClr val="accent1"/>
+          </a:effectRef>
+          <a:fontRef idx="minor">
+            <a:schemeClr val="lt1"/>
+          </a:fontRef>
+        </p:style>
+        <p:txBody>
+          <a:bodyPr rtlCol="0" anchor="ctr" lIns="182880" tIns="54864"/>
+          <a:lstStyle/>
+          <a:p>
+            <a:pPr algn="ctr"/>
+            <a:r>
+              <a:rPr b="1" sz="1400">
+                <a:solidFill>
+                  <a:srgbClr val="1E293B"/>
+                </a:solidFill>
+              </a:rPr>
+              <a:t>Live external data</a:t>
+            </a:r>
+            <a:r>
+              <a:rPr sz="1400">
+                <a:solidFill>
+                  <a:srgbClr val="475569"/>
+                </a:solidFill>
+              </a:rPr>
+              <a:t>   Facebook Graph API, Tavily web search</a:t>
+            </a:r>
+          </a:p>
+        </p:txBody>
+      </p:sp>
+      <p:sp>
+        <p:nvSpPr>
+          <p:cNvPr id="12" name="Rectangle 11"/>
+          <p:cNvSpPr/>
+          <p:nvPr/>
+        </p:nvSpPr>
+        <p:spPr>
+          <a:xfrm>
+            <a:off x="640080" y="5705856"/>
+            <a:ext cx="10881360" cy="530352"/>
+          </a:xfrm>
+          <a:prstGeom prst="rect">
+            <a:avLst/>
+          </a:prstGeom>
+          <a:solidFill>
+            <a:srgbClr val="F8FAFC"/>
+          </a:solidFill>
+          <a:ln>
+            <a:noFill/>
+          </a:ln>
+        </p:spPr>
+        <p:style>
+          <a:lnRef idx="1">
+            <a:schemeClr val="accent1"/>
+          </a:lnRef>
+          <a:fillRef idx="3">
+            <a:schemeClr val="accent1"/>
+          </a:fillRef>
+          <a:effectRef idx="2">
+            <a:schemeClr val="accent1"/>
+          </a:effectRef>
+          <a:fontRef idx="minor">
+            <a:schemeClr val="lt1"/>
+          </a:fontRef>
+        </p:style>
+        <p:txBody>
+          <a:bodyPr rtlCol="0" anchor="ctr" lIns="182880" tIns="54864"/>
+          <a:lstStyle/>
+          <a:p>
+            <a:pPr algn="ctr"/>
+            <a:r>
+              <a:rPr b="1" sz="1400">
+                <a:solidFill>
+                  <a:srgbClr val="1E293B"/>
+                </a:solidFill>
+              </a:rPr>
+              <a:t>Deployment</a:t>
+            </a:r>
+            <a:r>
+              <a:rPr sz="1400">
+                <a:solidFill>
+                  <a:srgbClr val="475569"/>
+                </a:solidFill>
+              </a:rPr>
+              <a:t>   Docker Compose + GitHub Actions CI</a:t>
+            </a:r>
+          </a:p>
+        </p:txBody>
+      </p:sp>
+      <p:sp>
+        <p:nvSpPr>
+          <p:cNvPr id="13" name="TextBox 12"/>
+          <p:cNvSpPr txBox="1"/>
+          <p:nvPr/>
+        </p:nvSpPr>
+        <p:spPr>
+          <a:xfrm>
+            <a:off x="457200" y="6473952"/>
+            <a:ext cx="5486400" cy="320040"/>
+          </a:xfrm>
+          <a:prstGeom prst="rect">
+            <a:avLst/>
+          </a:prstGeom>
+          <a:noFill/>
+        </p:spPr>
+        <p:txBody>
+          <a:bodyPr wrap="none">
+            <a:spAutoFit/>
+          </a:bodyPr>
+          <a:lstStyle/>
+          <a:p>
+            <a:pPr>
+              <a:defRPr sz="1000">
+                <a:solidFill>
+                  <a:srgbClr val="64748B"/>
+                </a:solidFill>
+              </a:defRPr>
+            </a:pPr>
+            <a:r>
+              <a:t>Education AI Analyst</a:t>
+            </a:r>
+          </a:p>
+        </p:txBody>
+      </p:sp>
+      <p:sp>
+        <p:nvSpPr>
+          <p:cNvPr id="14" name="TextBox 13"/>
+          <p:cNvSpPr txBox="1"/>
+          <p:nvPr/>
+        </p:nvSpPr>
+        <p:spPr>
+          <a:xfrm>
+            <a:off x="11247120" y="6473952"/>
+            <a:ext cx="640080" cy="320040"/>
+          </a:xfrm>
+          <a:prstGeom prst="rect">
+            <a:avLst/>
+          </a:prstGeom>
+          <a:noFill/>
+        </p:spPr>
+        <p:txBody>
+          <a:bodyPr wrap="none">
+            <a:spAutoFit/>
+          </a:bodyPr>
+          <a:lstStyle/>
+          <a:p>
+            <a:pPr algn="r">
+              <a:defRPr sz="1000">
+                <a:solidFill>
+                  <a:srgbClr val="64748B"/>
+                </a:solidFill>
+              </a:defRPr>
+            </a:pPr>
+            <a:r>
+              <a:t>8</a:t>
             </a:r>
           </a:p>
         </p:txBody>
@@ -9017,12 +6844,11 @@
             <a:avLst/>
           </a:prstGeom>
           <a:solidFill>
-            <a:srgbClr val="059669"/>
+            <a:srgbClr val="4F46E5"/>
           </a:solidFill>
           <a:ln>
             <a:noFill/>
           </a:ln>
-          <a:effectLst/>
         </p:spPr>
         <p:style>
           <a:lnRef idx="1">
@@ -9054,8 +6880,8 @@
         </p:nvSpPr>
         <p:spPr>
           <a:xfrm>
-            <a:off x="502920" y="292608"/>
-            <a:ext cx="9144000" cy="274320"/>
+            <a:off x="502920" y="365760"/>
+            <a:ext cx="10972800" cy="822960"/>
           </a:xfrm>
           <a:prstGeom prst="rect">
             <a:avLst/>
@@ -9069,18 +6895,14 @@
           <a:lstStyle/>
           <a:p>
             <a:pPr>
-              <a:spcAft>
-                <a:spcPts val="0"/>
-              </a:spcAft>
-            </a:pPr>
-            <a:r>
-              <a:rPr sz="1100" b="1">
-                <a:solidFill>
-                  <a:srgbClr val="4F46E5"/>
-                </a:solidFill>
-                <a:latin typeface="Segoe UI"/>
-              </a:rPr>
-              <a:t>08 · VERIFICATION</a:t>
+              <a:defRPr sz="3200" b="1">
+                <a:solidFill>
+                  <a:srgbClr val="1E293B"/>
+                </a:solidFill>
+              </a:defRPr>
+            </a:pPr>
+            <a:r>
+              <a:t>Status &amp; Results</a:t>
             </a:r>
           </a:p>
         </p:txBody>
@@ -9093,8 +6915,161 @@
         </p:nvSpPr>
         <p:spPr>
           <a:xfrm>
-            <a:off x="502920" y="530352"/>
-            <a:ext cx="10424160" cy="822960"/>
+            <a:off x="640080" y="1417320"/>
+            <a:ext cx="10789920" cy="4754880"/>
+          </a:xfrm>
+          <a:prstGeom prst="rect">
+            <a:avLst/>
+          </a:prstGeom>
+          <a:noFill/>
+        </p:spPr>
+        <p:txBody>
+          <a:bodyPr wrap="square">
+            <a:spAutoFit/>
+          </a:bodyPr>
+          <a:lstStyle/>
+          <a:p>
+            <a:pPr>
+              <a:lnSpc>
+                <a:spcPct val="125000"/>
+              </a:lnSpc>
+              <a:spcAft>
+                <a:spcPts val="1400"/>
+              </a:spcAft>
+            </a:pPr>
+            <a:r>
+              <a:rPr b="1" sz="1750">
+                <a:solidFill>
+                  <a:srgbClr val="1E293B"/>
+                </a:solidFill>
+              </a:rPr>
+              <a:t>118 automated backend tests passing.  </a:t>
+            </a:r>
+            <a:r>
+              <a:rPr sz="1750">
+                <a:solidFill>
+                  <a:srgbClr val="475569"/>
+                </a:solidFill>
+              </a:rPr>
+              <a:t>Unit + integration + end-to-end coverage per tool and agent.</a:t>
+            </a:r>
+          </a:p>
+          <a:p>
+            <a:pPr>
+              <a:lnSpc>
+                <a:spcPct val="125000"/>
+              </a:lnSpc>
+              <a:spcAft>
+                <a:spcPts val="1400"/>
+              </a:spcAft>
+            </a:pPr>
+            <a:r>
+              <a:rPr b="1" sz="1750">
+                <a:solidFill>
+                  <a:srgbClr val="1E293B"/>
+                </a:solidFill>
+              </a:rPr>
+              <a:t>Full pipeline verified live, end to end.  </a:t>
+            </a:r>
+            <a:r>
+              <a:rPr sz="1750">
+                <a:solidFill>
+                  <a:srgbClr val="475569"/>
+                </a:solidFill>
+              </a:rPr>
+              <a:t>Upload → intake → analysis → report → QA → human approval → download, run against a real OpenRouter key.</a:t>
+            </a:r>
+          </a:p>
+          <a:p>
+            <a:pPr>
+              <a:lnSpc>
+                <a:spcPct val="125000"/>
+              </a:lnSpc>
+              <a:spcAft>
+                <a:spcPts val="1400"/>
+              </a:spcAft>
+            </a:pPr>
+            <a:r>
+              <a:rPr b="1" sz="1750">
+                <a:solidFill>
+                  <a:srgbClr val="1E293B"/>
+                </a:solidFill>
+              </a:rPr>
+              <a:t>Real LLM integration confirmed.  </a:t>
+            </a:r>
+            <a:r>
+              <a:rPr sz="1750">
+                <a:solidFill>
+                  <a:srgbClr val="475569"/>
+                </a:solidFill>
+              </a:rPr>
+              <a:t>Actual token usage and cost tracked per call, not simulated.</a:t>
+            </a:r>
+          </a:p>
+          <a:p>
+            <a:pPr>
+              <a:lnSpc>
+                <a:spcPct val="125000"/>
+              </a:lnSpc>
+              <a:spcAft>
+                <a:spcPts val="1400"/>
+              </a:spcAft>
+            </a:pPr>
+            <a:r>
+              <a:rPr b="1" sz="1750">
+                <a:solidFill>
+                  <a:srgbClr val="1E293B"/>
+                </a:solidFill>
+              </a:rPr>
+              <a:t>All 10 required frontend panels implemented  </a:t>
+            </a:r>
+            <a:r>
+              <a:rPr sz="1750">
+                <a:solidFill>
+                  <a:srgbClr val="475569"/>
+                </a:solidFill>
+              </a:rPr>
+              <a:t>and wired to the live backend, not mock data — Dashboard, Trace, Comm Log, Graph, Cost, Logs, Memory, HITL, Report, Home.</a:t>
+            </a:r>
+          </a:p>
+          <a:p>
+            <a:pPr>
+              <a:lnSpc>
+                <a:spcPct val="125000"/>
+              </a:lnSpc>
+              <a:spcAft>
+                <a:spcPts val="1400"/>
+              </a:spcAft>
+            </a:pPr>
+            <a:r>
+              <a:rPr b="1" sz="1750">
+                <a:solidFill>
+                  <a:srgbClr val="1E293B"/>
+                </a:solidFill>
+              </a:rPr>
+              <a:t>Deployable.  </a:t>
+            </a:r>
+            <a:r>
+              <a:rPr sz="1750">
+                <a:solidFill>
+                  <a:srgbClr val="475569"/>
+                </a:solidFill>
+              </a:rPr>
+              <a:t>Docker Compose (backend + frontend + Postgres + Chroma) with GitHub Actions CI running tests on every push.</a:t>
+            </a:r>
+          </a:p>
+        </p:txBody>
+      </p:sp>
+      <p:sp>
+        <p:nvSpPr>
+          <p:cNvPr id="5" name="TextBox 4"/>
+          <p:cNvSpPr txBox="1"/>
+          <p:nvPr/>
+        </p:nvSpPr>
+        <p:spPr>
+          <a:xfrm>
+            <a:off x="457200" y="6473952"/>
+            <a:ext cx="5486400" cy="320040"/>
           </a:xfrm>
           <a:prstGeom prst="rect">
             <a:avLst/>
@@ -9107,577 +7082,29 @@
           </a:bodyPr>
           <a:lstStyle/>
           <a:p>
-            <a:r>
-              <a:rPr sz="3000" b="1">
-                <a:solidFill>
-                  <a:srgbClr val="1E293B"/>
-                </a:solidFill>
-                <a:latin typeface="Segoe UI"/>
-              </a:rPr>
-              <a:t>Status &amp; Results</a:t>
-            </a:r>
-          </a:p>
-        </p:txBody>
-      </p:sp>
-      <p:sp>
-        <p:nvSpPr>
-          <p:cNvPr id="5" name="Rectangle 4"/>
-          <p:cNvSpPr/>
-          <p:nvPr/>
-        </p:nvSpPr>
-        <p:spPr>
-          <a:xfrm>
-            <a:off x="530352" y="1188720"/>
-            <a:ext cx="548640" cy="38100"/>
-          </a:xfrm>
-          <a:prstGeom prst="rect">
-            <a:avLst/>
-          </a:prstGeom>
-          <a:solidFill>
-            <a:srgbClr val="059669"/>
-          </a:solidFill>
-          <a:ln>
-            <a:noFill/>
-          </a:ln>
-          <a:effectLst/>
-        </p:spPr>
-        <p:style>
-          <a:lnRef idx="1">
-            <a:schemeClr val="accent1"/>
-          </a:lnRef>
-          <a:fillRef idx="3">
-            <a:schemeClr val="accent1"/>
-          </a:fillRef>
-          <a:effectRef idx="2">
-            <a:schemeClr val="accent1"/>
-          </a:effectRef>
-          <a:fontRef idx="minor">
-            <a:schemeClr val="lt1"/>
-          </a:fontRef>
-        </p:style>
-        <p:txBody>
-          <a:bodyPr rtlCol="0" anchor="ctr"/>
-          <a:lstStyle/>
-          <a:p>
-            <a:pPr algn="ctr"/>
-          </a:p>
-        </p:txBody>
-      </p:sp>
-      <p:sp>
-        <p:nvSpPr>
-          <p:cNvPr id="6" name="Oval 5"/>
-          <p:cNvSpPr/>
-          <p:nvPr/>
-        </p:nvSpPr>
-        <p:spPr>
-          <a:xfrm>
-            <a:off x="640080" y="1490472"/>
-            <a:ext cx="310896" cy="310896"/>
-          </a:xfrm>
-          <a:prstGeom prst="ellipse">
-            <a:avLst/>
-          </a:prstGeom>
-          <a:solidFill>
-            <a:srgbClr val="059669"/>
-          </a:solidFill>
-          <a:ln>
-            <a:noFill/>
-          </a:ln>
-          <a:effectLst/>
-        </p:spPr>
-        <p:style>
-          <a:lnRef idx="1">
-            <a:schemeClr val="accent1"/>
-          </a:lnRef>
-          <a:fillRef idx="3">
-            <a:schemeClr val="accent1"/>
-          </a:fillRef>
-          <a:effectRef idx="2">
-            <a:schemeClr val="accent1"/>
-          </a:effectRef>
-          <a:fontRef idx="minor">
-            <a:schemeClr val="lt1"/>
-          </a:fontRef>
-        </p:style>
-        <p:txBody>
-          <a:bodyPr rtlCol="0" anchor="ctr" lIns="0" rIns="0" tIns="0" bIns="0"/>
-          <a:lstStyle/>
-          <a:p>
-            <a:pPr algn="ctr"/>
-            <a:r>
-              <a:rPr sz="1400" b="1">
-                <a:solidFill>
-                  <a:srgbClr val="FFFFFF"/>
-                </a:solidFill>
-                <a:latin typeface="Segoe UI"/>
-              </a:rPr>
-              <a:t>✓</a:t>
-            </a:r>
-          </a:p>
-        </p:txBody>
-      </p:sp>
-      <p:sp>
-        <p:nvSpPr>
-          <p:cNvPr id="7" name="TextBox 6"/>
+            <a:pPr>
+              <a:defRPr sz="1000">
+                <a:solidFill>
+                  <a:srgbClr val="64748B"/>
+                </a:solidFill>
+              </a:defRPr>
+            </a:pPr>
+            <a:r>
+              <a:t>Education AI Analyst</a:t>
+            </a:r>
+          </a:p>
+        </p:txBody>
+      </p:sp>
+      <p:sp>
+        <p:nvSpPr>
+          <p:cNvPr id="6" name="TextBox 5"/>
           <p:cNvSpPr txBox="1"/>
           <p:nvPr/>
         </p:nvSpPr>
         <p:spPr>
           <a:xfrm>
-            <a:off x="1115568" y="1435608"/>
-            <a:ext cx="10241280" cy="777240"/>
-          </a:xfrm>
-          <a:prstGeom prst="rect">
-            <a:avLst/>
-          </a:prstGeom>
-          <a:noFill/>
-        </p:spPr>
-        <p:txBody>
-          <a:bodyPr wrap="square">
-            <a:spAutoFit/>
-          </a:bodyPr>
-          <a:lstStyle/>
-          <a:p>
-            <a:pPr>
-              <a:lnSpc>
-                <a:spcPct val="110000"/>
-              </a:lnSpc>
-            </a:pPr>
-            <a:r>
-              <a:rPr b="1" sz="1650">
-                <a:solidFill>
-                  <a:srgbClr val="1E293B"/>
-                </a:solidFill>
-                <a:latin typeface="Segoe UI"/>
-              </a:rPr>
-              <a:t>118 automated backend tests passing.  </a:t>
-            </a:r>
-            <a:r>
-              <a:rPr sz="1500">
-                <a:solidFill>
-                  <a:srgbClr val="475569"/>
-                </a:solidFill>
-                <a:latin typeface="Segoe UI"/>
-              </a:rPr>
-              <a:t>Unit + integration + end-to-end coverage per tool and agent.</a:t>
-            </a:r>
-          </a:p>
-        </p:txBody>
-      </p:sp>
-      <p:sp>
-        <p:nvSpPr>
-          <p:cNvPr id="8" name="Oval 7"/>
-          <p:cNvSpPr/>
-          <p:nvPr/>
-        </p:nvSpPr>
-        <p:spPr>
-          <a:xfrm>
-            <a:off x="640080" y="2267712"/>
-            <a:ext cx="310896" cy="310896"/>
-          </a:xfrm>
-          <a:prstGeom prst="ellipse">
-            <a:avLst/>
-          </a:prstGeom>
-          <a:solidFill>
-            <a:srgbClr val="059669"/>
-          </a:solidFill>
-          <a:ln>
-            <a:noFill/>
-          </a:ln>
-          <a:effectLst/>
-        </p:spPr>
-        <p:style>
-          <a:lnRef idx="1">
-            <a:schemeClr val="accent1"/>
-          </a:lnRef>
-          <a:fillRef idx="3">
-            <a:schemeClr val="accent1"/>
-          </a:fillRef>
-          <a:effectRef idx="2">
-            <a:schemeClr val="accent1"/>
-          </a:effectRef>
-          <a:fontRef idx="minor">
-            <a:schemeClr val="lt1"/>
-          </a:fontRef>
-        </p:style>
-        <p:txBody>
-          <a:bodyPr rtlCol="0" anchor="ctr" lIns="0" rIns="0" tIns="0" bIns="0"/>
-          <a:lstStyle/>
-          <a:p>
-            <a:pPr algn="ctr"/>
-            <a:r>
-              <a:rPr sz="1400" b="1">
-                <a:solidFill>
-                  <a:srgbClr val="FFFFFF"/>
-                </a:solidFill>
-                <a:latin typeface="Segoe UI"/>
-              </a:rPr>
-              <a:t>✓</a:t>
-            </a:r>
-          </a:p>
-        </p:txBody>
-      </p:sp>
-      <p:sp>
-        <p:nvSpPr>
-          <p:cNvPr id="9" name="TextBox 8"/>
-          <p:cNvSpPr txBox="1"/>
-          <p:nvPr/>
-        </p:nvSpPr>
-        <p:spPr>
-          <a:xfrm>
-            <a:off x="1115568" y="2212848"/>
-            <a:ext cx="10241280" cy="777240"/>
-          </a:xfrm>
-          <a:prstGeom prst="rect">
-            <a:avLst/>
-          </a:prstGeom>
-          <a:noFill/>
-        </p:spPr>
-        <p:txBody>
-          <a:bodyPr wrap="square">
-            <a:spAutoFit/>
-          </a:bodyPr>
-          <a:lstStyle/>
-          <a:p>
-            <a:pPr>
-              <a:lnSpc>
-                <a:spcPct val="110000"/>
-              </a:lnSpc>
-            </a:pPr>
-            <a:r>
-              <a:rPr b="1" sz="1650">
-                <a:solidFill>
-                  <a:srgbClr val="1E293B"/>
-                </a:solidFill>
-                <a:latin typeface="Segoe UI"/>
-              </a:rPr>
-              <a:t>Full pipeline verified live, end to end.  </a:t>
-            </a:r>
-            <a:r>
-              <a:rPr sz="1500">
-                <a:solidFill>
-                  <a:srgbClr val="475569"/>
-                </a:solidFill>
-                <a:latin typeface="Segoe UI"/>
-              </a:rPr>
-              <a:t>Upload → intake → analysis → report → QA → human approval → download, run against a real OpenRouter key.</a:t>
-            </a:r>
-          </a:p>
-        </p:txBody>
-      </p:sp>
-      <p:sp>
-        <p:nvSpPr>
-          <p:cNvPr id="10" name="Oval 9"/>
-          <p:cNvSpPr/>
-          <p:nvPr/>
-        </p:nvSpPr>
-        <p:spPr>
-          <a:xfrm>
-            <a:off x="640080" y="3044952"/>
-            <a:ext cx="310896" cy="310896"/>
-          </a:xfrm>
-          <a:prstGeom prst="ellipse">
-            <a:avLst/>
-          </a:prstGeom>
-          <a:solidFill>
-            <a:srgbClr val="059669"/>
-          </a:solidFill>
-          <a:ln>
-            <a:noFill/>
-          </a:ln>
-          <a:effectLst/>
-        </p:spPr>
-        <p:style>
-          <a:lnRef idx="1">
-            <a:schemeClr val="accent1"/>
-          </a:lnRef>
-          <a:fillRef idx="3">
-            <a:schemeClr val="accent1"/>
-          </a:fillRef>
-          <a:effectRef idx="2">
-            <a:schemeClr val="accent1"/>
-          </a:effectRef>
-          <a:fontRef idx="minor">
-            <a:schemeClr val="lt1"/>
-          </a:fontRef>
-        </p:style>
-        <p:txBody>
-          <a:bodyPr rtlCol="0" anchor="ctr" lIns="0" rIns="0" tIns="0" bIns="0"/>
-          <a:lstStyle/>
-          <a:p>
-            <a:pPr algn="ctr"/>
-            <a:r>
-              <a:rPr sz="1400" b="1">
-                <a:solidFill>
-                  <a:srgbClr val="FFFFFF"/>
-                </a:solidFill>
-                <a:latin typeface="Segoe UI"/>
-              </a:rPr>
-              <a:t>✓</a:t>
-            </a:r>
-          </a:p>
-        </p:txBody>
-      </p:sp>
-      <p:sp>
-        <p:nvSpPr>
-          <p:cNvPr id="11" name="TextBox 10"/>
-          <p:cNvSpPr txBox="1"/>
-          <p:nvPr/>
-        </p:nvSpPr>
-        <p:spPr>
-          <a:xfrm>
-            <a:off x="1115568" y="2990088"/>
-            <a:ext cx="10241280" cy="777240"/>
-          </a:xfrm>
-          <a:prstGeom prst="rect">
-            <a:avLst/>
-          </a:prstGeom>
-          <a:noFill/>
-        </p:spPr>
-        <p:txBody>
-          <a:bodyPr wrap="square">
-            <a:spAutoFit/>
-          </a:bodyPr>
-          <a:lstStyle/>
-          <a:p>
-            <a:pPr>
-              <a:lnSpc>
-                <a:spcPct val="110000"/>
-              </a:lnSpc>
-            </a:pPr>
-            <a:r>
-              <a:rPr b="1" sz="1650">
-                <a:solidFill>
-                  <a:srgbClr val="1E293B"/>
-                </a:solidFill>
-                <a:latin typeface="Segoe UI"/>
-              </a:rPr>
-              <a:t>Real LLM integration confirmed.  </a:t>
-            </a:r>
-            <a:r>
-              <a:rPr sz="1500">
-                <a:solidFill>
-                  <a:srgbClr val="475569"/>
-                </a:solidFill>
-                <a:latin typeface="Segoe UI"/>
-              </a:rPr>
-              <a:t>Actual token usage and cost tracked per call, not simulated.</a:t>
-            </a:r>
-          </a:p>
-        </p:txBody>
-      </p:sp>
-      <p:sp>
-        <p:nvSpPr>
-          <p:cNvPr id="12" name="Oval 11"/>
-          <p:cNvSpPr/>
-          <p:nvPr/>
-        </p:nvSpPr>
-        <p:spPr>
-          <a:xfrm>
-            <a:off x="640080" y="3822192"/>
-            <a:ext cx="310896" cy="310896"/>
-          </a:xfrm>
-          <a:prstGeom prst="ellipse">
-            <a:avLst/>
-          </a:prstGeom>
-          <a:solidFill>
-            <a:srgbClr val="059669"/>
-          </a:solidFill>
-          <a:ln>
-            <a:noFill/>
-          </a:ln>
-          <a:effectLst/>
-        </p:spPr>
-        <p:style>
-          <a:lnRef idx="1">
-            <a:schemeClr val="accent1"/>
-          </a:lnRef>
-          <a:fillRef idx="3">
-            <a:schemeClr val="accent1"/>
-          </a:fillRef>
-          <a:effectRef idx="2">
-            <a:schemeClr val="accent1"/>
-          </a:effectRef>
-          <a:fontRef idx="minor">
-            <a:schemeClr val="lt1"/>
-          </a:fontRef>
-        </p:style>
-        <p:txBody>
-          <a:bodyPr rtlCol="0" anchor="ctr" lIns="0" rIns="0" tIns="0" bIns="0"/>
-          <a:lstStyle/>
-          <a:p>
-            <a:pPr algn="ctr"/>
-            <a:r>
-              <a:rPr sz="1400" b="1">
-                <a:solidFill>
-                  <a:srgbClr val="FFFFFF"/>
-                </a:solidFill>
-                <a:latin typeface="Segoe UI"/>
-              </a:rPr>
-              <a:t>✓</a:t>
-            </a:r>
-          </a:p>
-        </p:txBody>
-      </p:sp>
-      <p:sp>
-        <p:nvSpPr>
-          <p:cNvPr id="13" name="TextBox 12"/>
-          <p:cNvSpPr txBox="1"/>
-          <p:nvPr/>
-        </p:nvSpPr>
-        <p:spPr>
-          <a:xfrm>
-            <a:off x="1115568" y="3767328"/>
-            <a:ext cx="10241280" cy="777240"/>
-          </a:xfrm>
-          <a:prstGeom prst="rect">
-            <a:avLst/>
-          </a:prstGeom>
-          <a:noFill/>
-        </p:spPr>
-        <p:txBody>
-          <a:bodyPr wrap="square">
-            <a:spAutoFit/>
-          </a:bodyPr>
-          <a:lstStyle/>
-          <a:p>
-            <a:pPr>
-              <a:lnSpc>
-                <a:spcPct val="110000"/>
-              </a:lnSpc>
-            </a:pPr>
-            <a:r>
-              <a:rPr b="1" sz="1650">
-                <a:solidFill>
-                  <a:srgbClr val="1E293B"/>
-                </a:solidFill>
-                <a:latin typeface="Segoe UI"/>
-              </a:rPr>
-              <a:t>All 10 required frontend panels implemented,  </a:t>
-            </a:r>
-            <a:r>
-              <a:rPr sz="1500">
-                <a:solidFill>
-                  <a:srgbClr val="475569"/>
-                </a:solidFill>
-                <a:latin typeface="Segoe UI"/>
-              </a:rPr>
-              <a:t>wired to the live backend, not mock data — Dashboard, Trace, Comm Log, Graph, Cost, Logs, Memory, HITL, Report, Home.</a:t>
-            </a:r>
-          </a:p>
-        </p:txBody>
-      </p:sp>
-      <p:sp>
-        <p:nvSpPr>
-          <p:cNvPr id="14" name="Oval 13"/>
-          <p:cNvSpPr/>
-          <p:nvPr/>
-        </p:nvSpPr>
-        <p:spPr>
-          <a:xfrm>
-            <a:off x="640080" y="4599432"/>
-            <a:ext cx="310896" cy="310896"/>
-          </a:xfrm>
-          <a:prstGeom prst="ellipse">
-            <a:avLst/>
-          </a:prstGeom>
-          <a:solidFill>
-            <a:srgbClr val="059669"/>
-          </a:solidFill>
-          <a:ln>
-            <a:noFill/>
-          </a:ln>
-          <a:effectLst/>
-        </p:spPr>
-        <p:style>
-          <a:lnRef idx="1">
-            <a:schemeClr val="accent1"/>
-          </a:lnRef>
-          <a:fillRef idx="3">
-            <a:schemeClr val="accent1"/>
-          </a:fillRef>
-          <a:effectRef idx="2">
-            <a:schemeClr val="accent1"/>
-          </a:effectRef>
-          <a:fontRef idx="minor">
-            <a:schemeClr val="lt1"/>
-          </a:fontRef>
-        </p:style>
-        <p:txBody>
-          <a:bodyPr rtlCol="0" anchor="ctr" lIns="0" rIns="0" tIns="0" bIns="0"/>
-          <a:lstStyle/>
-          <a:p>
-            <a:pPr algn="ctr"/>
-            <a:r>
-              <a:rPr sz="1400" b="1">
-                <a:solidFill>
-                  <a:srgbClr val="FFFFFF"/>
-                </a:solidFill>
-                <a:latin typeface="Segoe UI"/>
-              </a:rPr>
-              <a:t>✓</a:t>
-            </a:r>
-          </a:p>
-        </p:txBody>
-      </p:sp>
-      <p:sp>
-        <p:nvSpPr>
-          <p:cNvPr id="15" name="TextBox 14"/>
-          <p:cNvSpPr txBox="1"/>
-          <p:nvPr/>
-        </p:nvSpPr>
-        <p:spPr>
-          <a:xfrm>
-            <a:off x="1115568" y="4544568"/>
-            <a:ext cx="10241280" cy="777240"/>
-          </a:xfrm>
-          <a:prstGeom prst="rect">
-            <a:avLst/>
-          </a:prstGeom>
-          <a:noFill/>
-        </p:spPr>
-        <p:txBody>
-          <a:bodyPr wrap="square">
-            <a:spAutoFit/>
-          </a:bodyPr>
-          <a:lstStyle/>
-          <a:p>
-            <a:pPr>
-              <a:lnSpc>
-                <a:spcPct val="110000"/>
-              </a:lnSpc>
-            </a:pPr>
-            <a:r>
-              <a:rPr b="1" sz="1650">
-                <a:solidFill>
-                  <a:srgbClr val="1E293B"/>
-                </a:solidFill>
-                <a:latin typeface="Segoe UI"/>
-              </a:rPr>
-              <a:t>Deployable.  </a:t>
-            </a:r>
-            <a:r>
-              <a:rPr sz="1500">
-                <a:solidFill>
-                  <a:srgbClr val="475569"/>
-                </a:solidFill>
-                <a:latin typeface="Segoe UI"/>
-              </a:rPr>
-              <a:t>Docker Compose (backend + frontend + Postgres + Chroma) with GitHub Actions CI running tests on every push.</a:t>
-            </a:r>
-          </a:p>
-        </p:txBody>
-      </p:sp>
-      <p:sp>
-        <p:nvSpPr>
-          <p:cNvPr id="16" name="TextBox 15"/>
-          <p:cNvSpPr txBox="1"/>
-          <p:nvPr/>
-        </p:nvSpPr>
-        <p:spPr>
-          <a:xfrm>
-            <a:off x="502920" y="6492240"/>
-            <a:ext cx="5486400" cy="274320"/>
+            <a:off x="11247120" y="6473952"/>
+            <a:ext cx="640080" cy="320040"/>
           </a:xfrm>
           <a:prstGeom prst="rect">
             <a:avLst/>
@@ -9690,71 +7117,15 @@
           </a:bodyPr>
           <a:lstStyle/>
           <a:p>
-            <a:pPr>
-              <a:defRPr sz="950">
+            <a:pPr algn="r">
+              <a:defRPr sz="1000">
                 <a:solidFill>
                   <a:srgbClr val="64748B"/>
                 </a:solidFill>
-                <a:latin typeface="Segoe UI"/>
-              </a:defRPr>
-            </a:pPr>
-            <a:r>
-              <a:t>Education AI Analyst</a:t>
-            </a:r>
-          </a:p>
-        </p:txBody>
-      </p:sp>
-      <p:sp>
-        <p:nvSpPr>
-          <p:cNvPr id="17" name="Rounded Rectangle 16"/>
-          <p:cNvSpPr/>
-          <p:nvPr/>
-        </p:nvSpPr>
-        <p:spPr>
-          <a:xfrm>
-            <a:off x="11475720" y="320040"/>
-            <a:ext cx="457200" cy="292608"/>
-          </a:xfrm>
-          <a:prstGeom prst="roundRect">
-            <a:avLst>
-              <a:gd name="adj" fmla="val 50000"/>
-            </a:avLst>
-          </a:prstGeom>
-          <a:solidFill>
-            <a:srgbClr val="4F46E5"/>
-          </a:solidFill>
-          <a:ln>
-            <a:noFill/>
-          </a:ln>
-          <a:effectLst/>
-        </p:spPr>
-        <p:style>
-          <a:lnRef idx="1">
-            <a:schemeClr val="accent1"/>
-          </a:lnRef>
-          <a:fillRef idx="3">
-            <a:schemeClr val="accent1"/>
-          </a:fillRef>
-          <a:effectRef idx="2">
-            <a:schemeClr val="accent1"/>
-          </a:effectRef>
-          <a:fontRef idx="minor">
-            <a:schemeClr val="lt1"/>
-          </a:fontRef>
-        </p:style>
-        <p:txBody>
-          <a:bodyPr rtlCol="0" anchor="ctr" lIns="0" rIns="0" tIns="0" bIns="0"/>
-          <a:lstStyle/>
-          <a:p>
-            <a:pPr algn="ctr"/>
-            <a:r>
-              <a:rPr sz="1200" b="1">
-                <a:solidFill>
-                  <a:srgbClr val="FFFFFF"/>
-                </a:solidFill>
-                <a:latin typeface="Segoe UI"/>
-              </a:rPr>
-              <a:t>09</a:t>
+              </a:defRPr>
+            </a:pPr>
+            <a:r>
+              <a:t>9</a:t>
             </a:r>
           </a:p>
         </p:txBody>
